--- a/docs/结构件自动核价平台-产品介绍.pptx
+++ b/docs/结构件自动核价平台-产品介绍.pptx
@@ -3285,7 +3285,7 @@
                 <a:ea typeface="微软雅黑"/>
                 <a:latin typeface="微软雅黑"/>
               </a:rPr>
-              <a:t>从靠人做表，到公司能力</a:t>
+              <a:t>客户买的是价值</a:t>
             </a:r>
           </a:p>
         </p:txBody>
@@ -3333,8 +3333,8 @@
         </p:nvSpPr>
         <p:spPr>
           <a:xfrm>
-            <a:off x="640080" y="2926080"/>
-            <a:ext cx="10424160" cy="1371600"/>
+            <a:off x="640080" y="2971800"/>
+            <a:ext cx="10424160" cy="1463040"/>
           </a:xfrm>
           <a:prstGeom prst="rect">
             <a:avLst/>
@@ -3359,7 +3359,7 @@
                 <a:ea typeface="微软雅黑"/>
                 <a:latin typeface="微软雅黑"/>
               </a:rPr>
-              <a:t>管理人员是公司的建设者。</a:t>
+              <a:t>比继续用 Excel 手工：</a:t>
             </a:r>
           </a:p>
           <a:p>
@@ -3377,7 +3377,7 @@
                 <a:ea typeface="微软雅黑"/>
                 <a:latin typeface="微软雅黑"/>
               </a:rPr>
-              <a:t>核价，是数字化建设、AI 落地最好的抓手。</a:t>
+              <a:t>少耗人，两本价各算清，对账有据。</a:t>
             </a:r>
           </a:p>
         </p:txBody>
@@ -3629,7 +3629,7 @@
                 <a:ea typeface="微软雅黑"/>
                 <a:latin typeface="Arial"/>
               </a:rPr>
-              <a:t>09   FLOW</a:t>
+              <a:t>09   ASK</a:t>
             </a:r>
           </a:p>
         </p:txBody>
@@ -3664,7 +3664,7 @@
                 <a:ea typeface="微软雅黑"/>
                 <a:latin typeface="微软雅黑"/>
               </a:rPr>
-              <a:t>从找表，到直接问</a:t>
+              <a:t>问一句为什么涨，人只负责开口</a:t>
             </a:r>
           </a:p>
         </p:txBody>
@@ -3699,7 +3699,7 @@
                 <a:ea typeface="微软雅黑"/>
                 <a:latin typeface="微软雅黑"/>
               </a:rPr>
-              <a:t>过去</a:t>
+              <a:t>Excel 手工</a:t>
             </a:r>
           </a:p>
         </p:txBody>
@@ -3734,7 +3734,7 @@
                 <a:ea typeface="微软雅黑"/>
                 <a:latin typeface="微软雅黑"/>
               </a:rPr>
-              <a:t>现在</a:t>
+              <a:t>现网</a:t>
             </a:r>
           </a:p>
         </p:txBody>
@@ -4134,7 +4134,7 @@
                 <a:ea typeface="微软雅黑"/>
                 <a:latin typeface="微软雅黑"/>
               </a:rPr>
-              <a:t>05    得出结论</a:t>
+              <a:t>05    等人下结论</a:t>
             </a:r>
           </a:p>
         </p:txBody>
@@ -4380,7 +4380,7 @@
                 <a:ea typeface="微软雅黑"/>
                 <a:latin typeface="微软雅黑"/>
               </a:rPr>
-              <a:t>02    系统取数</a:t>
+              <a:t>02    系统取当月数</a:t>
             </a:r>
           </a:p>
         </p:txBody>
@@ -4503,7 +4503,7 @@
                 <a:ea typeface="微软雅黑"/>
                 <a:latin typeface="微软雅黑"/>
               </a:rPr>
-              <a:t>03    核价引擎计算</a:t>
+              <a:t>03    引擎计算</a:t>
             </a:r>
           </a:p>
         </p:txBody>
@@ -4626,7 +4626,7 @@
                 <a:ea typeface="微软雅黑"/>
                 <a:latin typeface="微软雅黑"/>
               </a:rPr>
-              <a:t>04    AI 解释</a:t>
+              <a:t>04    AI 讲原因</a:t>
             </a:r>
           </a:p>
         </p:txBody>
@@ -4913,7 +4913,7 @@
                 <a:ea typeface="微软雅黑"/>
                 <a:latin typeface="Arial"/>
               </a:rPr>
-              <a:t>10   ONE LEDGER</a:t>
+              <a:t>10   WHO</a:t>
             </a:r>
           </a:p>
         </p:txBody>
@@ -4948,7 +4948,7 @@
                 <a:ea typeface="微软雅黑"/>
                 <a:latin typeface="微软雅黑"/>
               </a:rPr>
-              <a:t>采购、财务、管理人员，看见同一本账</a:t>
+              <a:t>价值交到三个岗位上</a:t>
             </a:r>
           </a:p>
         </p:txBody>
@@ -5049,8 +5049,8 @@
         </p:nvSpPr>
         <p:spPr>
           <a:xfrm>
-            <a:off x="932688" y="1920240"/>
-            <a:ext cx="3017520" cy="329184"/>
+            <a:off x="896112" y="1965960"/>
+            <a:ext cx="3108960" cy="329184"/>
           </a:xfrm>
           <a:prstGeom prst="rect">
             <a:avLst/>
@@ -5071,7 +5071,7 @@
                 <a:ea typeface="微软雅黑"/>
                 <a:latin typeface="Arial"/>
               </a:rPr>
-              <a:t>Data</a:t>
+              <a:t>01</a:t>
             </a:r>
           </a:p>
         </p:txBody>
@@ -5084,8 +5084,8 @@
         </p:nvSpPr>
         <p:spPr>
           <a:xfrm>
-            <a:off x="932688" y="2468880"/>
-            <a:ext cx="3017520" cy="1280160"/>
+            <a:off x="896112" y="2468880"/>
+            <a:ext cx="3108960" cy="640080"/>
           </a:xfrm>
           <a:prstGeom prst="rect">
             <a:avLst/>
@@ -5106,7 +5106,7 @@
                 <a:ea typeface="微软雅黑"/>
                 <a:latin typeface="微软雅黑"/>
               </a:rPr>
-              <a:t>同一套数据</a:t>
+              <a:t>采购</a:t>
             </a:r>
           </a:p>
         </p:txBody>
@@ -5119,8 +5119,8 @@
         </p:nvSpPr>
         <p:spPr>
           <a:xfrm>
-            <a:off x="932688" y="4023360"/>
-            <a:ext cx="3017520" cy="1463040"/>
+            <a:off x="896112" y="3383280"/>
+            <a:ext cx="3108960" cy="2011680"/>
           </a:xfrm>
           <a:prstGeom prst="rect">
             <a:avLst/>
@@ -5137,7 +5137,7 @@
               </a:lnSpc>
             </a:pPr>
             <a:r>
-              <a:rPr sz="1500" b="0">
+              <a:rPr sz="1600" b="0">
                 <a:solidFill>
                   <a:srgbClr val="6B6B6B"/>
                 </a:solidFill>
@@ -5145,7 +5145,25 @@
                 <a:ea typeface="微软雅黑"/>
                 <a:latin typeface="微软雅黑"/>
               </a:rPr>
-              <a:t>文件可溯，不是私人拷贝。</a:t>
+              <a:t>该付的是分总成，看这一本。</a:t>
+            </a:r>
+          </a:p>
+          <a:p>
+            <a:pPr algn="l">
+              <a:lnSpc>
+                <a:spcPts val="2600"/>
+              </a:lnSpc>
+            </a:pPr>
+            <a:r>
+              <a:rPr sz="1600" b="0">
+                <a:solidFill>
+                  <a:srgbClr val="6B6B6B"/>
+                </a:solidFill>
+                <a:latin typeface="微软雅黑"/>
+                <a:ea typeface="微软雅黑"/>
+                <a:latin typeface="微软雅黑"/>
+              </a:rPr>
+              <a:t>协议按结果出，不必再抄表。</a:t>
             </a:r>
           </a:p>
         </p:txBody>
@@ -5246,8 +5264,8 @@
         </p:nvSpPr>
         <p:spPr>
           <a:xfrm>
-            <a:off x="4727448" y="1920240"/>
-            <a:ext cx="3017520" cy="329184"/>
+            <a:off x="4690872" y="1965960"/>
+            <a:ext cx="3108960" cy="329184"/>
           </a:xfrm>
           <a:prstGeom prst="rect">
             <a:avLst/>
@@ -5268,7 +5286,7 @@
                 <a:ea typeface="微软雅黑"/>
                 <a:latin typeface="Arial"/>
               </a:rPr>
-              <a:t>Rule</a:t>
+              <a:t>02</a:t>
             </a:r>
           </a:p>
         </p:txBody>
@@ -5281,8 +5299,8 @@
         </p:nvSpPr>
         <p:spPr>
           <a:xfrm>
-            <a:off x="4727448" y="2468880"/>
-            <a:ext cx="3017520" cy="1280160"/>
+            <a:off x="4690872" y="2468880"/>
+            <a:ext cx="3108960" cy="640080"/>
           </a:xfrm>
           <a:prstGeom prst="rect">
             <a:avLst/>
@@ -5303,7 +5321,7 @@
                 <a:ea typeface="微软雅黑"/>
                 <a:latin typeface="微软雅黑"/>
               </a:rPr>
-              <a:t>同一套规则</a:t>
+              <a:t>财务</a:t>
             </a:r>
           </a:p>
         </p:txBody>
@@ -5316,8 +5334,8 @@
         </p:nvSpPr>
         <p:spPr>
           <a:xfrm>
-            <a:off x="4727448" y="4023360"/>
-            <a:ext cx="3017520" cy="1463040"/>
+            <a:off x="4690872" y="3383280"/>
+            <a:ext cx="3108960" cy="2011680"/>
           </a:xfrm>
           <a:prstGeom prst="rect">
             <a:avLst/>
@@ -5334,7 +5352,7 @@
               </a:lnSpc>
             </a:pPr>
             <a:r>
-              <a:rPr sz="1500" b="0">
+              <a:rPr sz="1600" b="0">
                 <a:solidFill>
                   <a:srgbClr val="6B6B6B"/>
                 </a:solidFill>
@@ -5342,7 +5360,25 @@
                 <a:ea typeface="微软雅黑"/>
                 <a:latin typeface="微软雅黑"/>
               </a:rPr>
-              <a:t>开给奇瑞、付给二级商，同一引擎。</a:t>
+              <a:t>总成开票、分总成应付，</a:t>
+            </a:r>
+          </a:p>
+          <a:p>
+            <a:pPr algn="l">
+              <a:lnSpc>
+                <a:spcPts val="2600"/>
+              </a:lnSpc>
+            </a:pPr>
+            <a:r>
+              <a:rPr sz="1600" b="0">
+                <a:solidFill>
+                  <a:srgbClr val="6B6B6B"/>
+                </a:solidFill>
+                <a:latin typeface="微软雅黑"/>
+                <a:ea typeface="微软雅黑"/>
+                <a:latin typeface="微软雅黑"/>
+              </a:rPr>
+              <a:t>各有一本。焊费不重复计。</a:t>
             </a:r>
           </a:p>
         </p:txBody>
@@ -5443,8 +5479,8 @@
         </p:nvSpPr>
         <p:spPr>
           <a:xfrm>
-            <a:off x="8522208" y="1920240"/>
-            <a:ext cx="3017520" cy="329184"/>
+            <a:off x="8485632" y="1965960"/>
+            <a:ext cx="3108960" cy="329184"/>
           </a:xfrm>
           <a:prstGeom prst="rect">
             <a:avLst/>
@@ -5465,7 +5501,7 @@
                 <a:ea typeface="微软雅黑"/>
                 <a:latin typeface="Arial"/>
               </a:rPr>
-              <a:t>Result</a:t>
+              <a:t>03</a:t>
             </a:r>
           </a:p>
         </p:txBody>
@@ -5478,8 +5514,8 @@
         </p:nvSpPr>
         <p:spPr>
           <a:xfrm>
-            <a:off x="8522208" y="2468880"/>
-            <a:ext cx="3017520" cy="1280160"/>
+            <a:off x="8485632" y="2468880"/>
+            <a:ext cx="3108960" cy="640080"/>
           </a:xfrm>
           <a:prstGeom prst="rect">
             <a:avLst/>
@@ -5500,7 +5536,7 @@
                 <a:ea typeface="微软雅黑"/>
                 <a:latin typeface="微软雅黑"/>
               </a:rPr>
-              <a:t>同一套结果</a:t>
+              <a:t>管理人员</a:t>
             </a:r>
           </a:p>
         </p:txBody>
@@ -5513,8 +5549,8 @@
         </p:nvSpPr>
         <p:spPr>
           <a:xfrm>
-            <a:off x="8522208" y="4023360"/>
-            <a:ext cx="3017520" cy="1463040"/>
+            <a:off x="8485632" y="3383280"/>
+            <a:ext cx="3108960" cy="2011680"/>
           </a:xfrm>
           <a:prstGeom prst="rect">
             <a:avLst/>
@@ -5531,7 +5567,7 @@
               </a:lnSpc>
             </a:pPr>
             <a:r>
-              <a:rPr sz="1500" b="0">
+              <a:rPr sz="1600" b="0">
                 <a:solidFill>
                   <a:srgbClr val="6B6B6B"/>
                 </a:solidFill>
@@ -5539,7 +5575,25 @@
                 <a:ea typeface="微软雅黑"/>
                 <a:latin typeface="微软雅黑"/>
               </a:rPr>
-              <a:t>当月依据，当月结果。对账不必扯皮。</a:t>
+              <a:t>涨了为什么、差在哪里，</a:t>
+            </a:r>
+          </a:p>
+          <a:p>
+            <a:pPr algn="l">
+              <a:lnSpc>
+                <a:spcPts val="2600"/>
+              </a:lnSpc>
+            </a:pPr>
+            <a:r>
+              <a:rPr sz="1600" b="0">
+                <a:solidFill>
+                  <a:srgbClr val="6B6B6B"/>
+                </a:solidFill>
+                <a:latin typeface="微软雅黑"/>
+                <a:ea typeface="微软雅黑"/>
+                <a:latin typeface="微软雅黑"/>
+              </a:rPr>
+              <a:t>直接问，不必等骨干。</a:t>
             </a:r>
           </a:p>
         </p:txBody>
@@ -5761,7 +5815,7 @@
         </p:nvCxnSpPr>
         <p:spPr>
           <a:xfrm>
-            <a:off x="640080" y="1280160"/>
+            <a:off x="640080" y="1234440"/>
             <a:ext cx="1463040" cy="0"/>
           </a:xfrm>
           <a:prstGeom prst="line">
@@ -5796,7 +5850,7 @@
         </p:nvSpPr>
         <p:spPr>
           <a:xfrm>
-            <a:off x="640080" y="1508760"/>
+            <a:off x="640080" y="1444752"/>
             <a:ext cx="10972800" cy="292608"/>
           </a:xfrm>
           <a:prstGeom prst="rect">
@@ -5818,7 +5872,7 @@
                 <a:ea typeface="微软雅黑"/>
                 <a:latin typeface="Arial"/>
               </a:rPr>
-              <a:t>ONE LINE</a:t>
+              <a:t>WHAT THEY BUY</a:t>
             </a:r>
           </a:p>
         </p:txBody>
@@ -5831,8 +5885,8 @@
         </p:nvSpPr>
         <p:spPr>
           <a:xfrm>
-            <a:off x="640080" y="1965960"/>
-            <a:ext cx="10972800" cy="1691640"/>
+            <a:off x="640080" y="1920240"/>
+            <a:ext cx="10972800" cy="2103120"/>
           </a:xfrm>
           <a:prstGeom prst="rect">
             <a:avLst/>
@@ -5845,11 +5899,11 @@
           <a:p>
             <a:pPr algn="l">
               <a:lnSpc>
-                <a:spcPts val="4400"/>
+                <a:spcPts val="4800"/>
               </a:lnSpc>
             </a:pPr>
             <a:r>
-              <a:rPr sz="2800" b="1">
+              <a:rPr sz="3200" b="1">
                 <a:solidFill>
                   <a:srgbClr val="FFFFFF"/>
                 </a:solidFill>
@@ -5857,17 +5911,17 @@
                 <a:ea typeface="微软雅黑"/>
                 <a:latin typeface="微软雅黑"/>
               </a:rPr>
-              <a:t>先把核价做成公司能力。</a:t>
+              <a:t>人可以交接。焊费只计一次。</a:t>
             </a:r>
           </a:p>
           <a:p>
             <a:pPr algn="l">
               <a:lnSpc>
-                <a:spcPts val="4400"/>
+                <a:spcPts val="4800"/>
               </a:lnSpc>
             </a:pPr>
             <a:r>
-              <a:rPr sz="2800" b="1">
+              <a:rPr sz="3200" b="1">
                 <a:solidFill>
                   <a:srgbClr val="FFFFFF"/>
                 </a:solidFill>
@@ -5875,7 +5929,7 @@
                 <a:ea typeface="微软雅黑"/>
                 <a:latin typeface="微软雅黑"/>
               </a:rPr>
-              <a:t>数字化建设和 AI 落地，就有了抓手。</a:t>
+              <a:t>当月价当月算。对账有据。</a:t>
             </a:r>
           </a:p>
         </p:txBody>
@@ -5888,8 +5942,8 @@
         </p:nvSpPr>
         <p:spPr>
           <a:xfrm>
-            <a:off x="640080" y="3886200"/>
-            <a:ext cx="10972800" cy="1097280"/>
+            <a:off x="640080" y="4297680"/>
+            <a:ext cx="10972800" cy="1051560"/>
           </a:xfrm>
           <a:prstGeom prst="rect">
             <a:avLst/>
@@ -5900,7 +5954,11 @@
           <a:bodyPr wrap="square" anchor="t"/>
           <a:lstStyle/>
           <a:p>
-            <a:pPr algn="l"/>
+            <a:pPr algn="l">
+              <a:lnSpc>
+                <a:spcPts val="3000"/>
+              </a:lnSpc>
+            </a:pPr>
             <a:r>
               <a:rPr sz="1800" b="0">
                 <a:solidFill>
@@ -5910,7 +5968,25 @@
                 <a:ea typeface="微软雅黑"/>
                 <a:latin typeface="微软雅黑"/>
               </a:rPr>
-              <a:t>少绑人、少扯皮。开给奇瑞多少、付给二级商多少，约 20 秒能算清。</a:t>
+              <a:t>这是相对 Excel 手工，客户买走的价值。</a:t>
+            </a:r>
+          </a:p>
+          <a:p>
+            <a:pPr algn="l">
+              <a:lnSpc>
+                <a:spcPts val="3000"/>
+              </a:lnSpc>
+            </a:pPr>
+            <a:r>
+              <a:rPr sz="1800" b="0">
+                <a:solidFill>
+                  <a:srgbClr val="C8C8C8"/>
+                </a:solidFill>
+                <a:latin typeface="微软雅黑"/>
+                <a:ea typeface="微软雅黑"/>
+                <a:latin typeface="微软雅黑"/>
+              </a:rPr>
+              <a:t>熟练人员好几天的计算，上传依据后约 20 秒。</a:t>
             </a:r>
           </a:p>
         </p:txBody>
@@ -6162,7 +6238,7 @@
                 <a:ea typeface="微软雅黑"/>
                 <a:latin typeface="Arial"/>
               </a:rPr>
-              <a:t>01   THE LEVER</a:t>
+              <a:t>01   VALUE</a:t>
             </a:r>
           </a:p>
         </p:txBody>
@@ -6197,7 +6273,7 @@
                 <a:ea typeface="微软雅黑"/>
                 <a:latin typeface="微软雅黑"/>
               </a:rPr>
-              <a:t>数字化、AI 要落地，核价是最好的抓手</a:t>
+              <a:t>价值，是比 Excel 多保住的结果</a:t>
             </a:r>
           </a:p>
         </p:txBody>
@@ -6211,7 +6287,7 @@
         <p:spPr>
           <a:xfrm>
             <a:off x="640080" y="1371600"/>
-            <a:ext cx="10972800" cy="502920"/>
+            <a:ext cx="10972800" cy="457200"/>
           </a:xfrm>
           <a:prstGeom prst="rect">
             <a:avLst/>
@@ -6232,7 +6308,7 @@
                 <a:ea typeface="微软雅黑"/>
                 <a:latin typeface="微软雅黑"/>
               </a:rPr>
-              <a:t>建设不是再上一个系统。是把公司最痛、最有规则、立刻能见效的事做成能力。</a:t>
+              <a:t>每月只认三样：少耗的人、两本价各算清、少打的架。</a:t>
             </a:r>
           </a:p>
         </p:txBody>
@@ -6245,8 +6321,8 @@
         </p:nvSpPr>
         <p:spPr>
           <a:xfrm>
-            <a:off x="640080" y="2057400"/>
-            <a:ext cx="3611880" cy="3931920"/>
+            <a:off x="640080" y="2011680"/>
+            <a:ext cx="3611880" cy="3977639"/>
           </a:xfrm>
           <a:prstGeom prst="rect">
             <a:avLst/>
@@ -6290,7 +6366,7 @@
         </p:nvSpPr>
         <p:spPr>
           <a:xfrm>
-            <a:off x="640080" y="2057400"/>
+            <a:off x="640080" y="2011680"/>
             <a:ext cx="3611880" cy="41148"/>
           </a:xfrm>
           <a:prstGeom prst="rect">
@@ -6333,8 +6409,8 @@
         </p:nvSpPr>
         <p:spPr>
           <a:xfrm>
-            <a:off x="896112" y="2331720"/>
-            <a:ext cx="3108960" cy="457200"/>
+            <a:off x="896112" y="2286000"/>
+            <a:ext cx="3108960" cy="640080"/>
           </a:xfrm>
           <a:prstGeom prst="rect">
             <a:avLst/>
@@ -6355,7 +6431,7 @@
                 <a:ea typeface="微软雅黑"/>
                 <a:latin typeface="微软雅黑"/>
               </a:rPr>
-              <a:t>有规则</a:t>
+              <a:t>人的时间</a:t>
             </a:r>
           </a:p>
         </p:txBody>
@@ -6368,8 +6444,8 @@
         </p:nvSpPr>
         <p:spPr>
           <a:xfrm>
-            <a:off x="896112" y="2971800"/>
-            <a:ext cx="3108960" cy="2560320"/>
+            <a:off x="896112" y="3108960"/>
+            <a:ext cx="3108960" cy="2468880"/>
           </a:xfrm>
           <a:prstGeom prst="rect">
             <a:avLst/>
@@ -6394,7 +6470,7 @@
                 <a:ea typeface="微软雅黑"/>
                 <a:latin typeface="微软雅黑"/>
               </a:rPr>
-              <a:t>钢价政策、工艺、BOM、设变，本来就有企业口径。</a:t>
+              <a:t>少占熟练人员好几天。</a:t>
             </a:r>
           </a:p>
           <a:p>
@@ -6412,7 +6488,25 @@
                 <a:ea typeface="微软雅黑"/>
                 <a:latin typeface="微软雅黑"/>
               </a:rPr>
-              <a:t>适合写成引擎，而不是口头 AI。</a:t>
+              <a:t>人请假，两本账照样出。</a:t>
+            </a:r>
+          </a:p>
+          <a:p>
+            <a:pPr algn="l">
+              <a:lnSpc>
+                <a:spcPts val="2600"/>
+              </a:lnSpc>
+            </a:pPr>
+            <a:r>
+              <a:rPr sz="1500" b="0">
+                <a:solidFill>
+                  <a:srgbClr val="6B6B6B"/>
+                </a:solidFill>
+                <a:latin typeface="微软雅黑"/>
+                <a:ea typeface="微软雅黑"/>
+                <a:latin typeface="微软雅黑"/>
+              </a:rPr>
+              <a:t>省下的是最缺的人。</a:t>
             </a:r>
           </a:p>
         </p:txBody>
@@ -6425,8 +6519,8 @@
         </p:nvSpPr>
         <p:spPr>
           <a:xfrm>
-            <a:off x="4434840" y="2057400"/>
-            <a:ext cx="3611880" cy="3931920"/>
+            <a:off x="4434840" y="2011680"/>
+            <a:ext cx="3611880" cy="3977639"/>
           </a:xfrm>
           <a:prstGeom prst="rect">
             <a:avLst/>
@@ -6470,7 +6564,7 @@
         </p:nvSpPr>
         <p:spPr>
           <a:xfrm>
-            <a:off x="4434840" y="2057400"/>
+            <a:off x="4434840" y="2011680"/>
             <a:ext cx="3611880" cy="41148"/>
           </a:xfrm>
           <a:prstGeom prst="rect">
@@ -6513,8 +6607,8 @@
         </p:nvSpPr>
         <p:spPr>
           <a:xfrm>
-            <a:off x="4690872" y="2331720"/>
-            <a:ext cx="3108960" cy="457200"/>
+            <a:off x="4690872" y="2286000"/>
+            <a:ext cx="3108960" cy="640080"/>
           </a:xfrm>
           <a:prstGeom prst="rect">
             <a:avLst/>
@@ -6535,7 +6629,7 @@
                 <a:ea typeface="微软雅黑"/>
                 <a:latin typeface="微软雅黑"/>
               </a:rPr>
-              <a:t>有真账</a:t>
+              <a:t>两本价</a:t>
             </a:r>
           </a:p>
         </p:txBody>
@@ -6548,8 +6642,8 @@
         </p:nvSpPr>
         <p:spPr>
           <a:xfrm>
-            <a:off x="4690872" y="2971800"/>
-            <a:ext cx="3108960" cy="2560320"/>
+            <a:off x="4690872" y="3108960"/>
+            <a:ext cx="3108960" cy="2468880"/>
           </a:xfrm>
           <a:prstGeom prst="rect">
             <a:avLst/>
@@ -6574,7 +6668,7 @@
                 <a:ea typeface="微软雅黑"/>
                 <a:latin typeface="微软雅黑"/>
               </a:rPr>
-              <a:t>开给奇瑞的总成价、付给二级商的采购价，每月都要对账。</a:t>
+              <a:t>开给奇瑞的是焊完的总成。</a:t>
             </a:r>
           </a:p>
           <a:p>
@@ -6592,7 +6686,25 @@
                 <a:ea typeface="微软雅黑"/>
                 <a:latin typeface="微软雅黑"/>
               </a:rPr>
-              <a:t>建设立刻碰到钱。</a:t>
+              <a:t>付给二级商的是分总成。</a:t>
+            </a:r>
+          </a:p>
+          <a:p>
+            <a:pPr algn="l">
+              <a:lnSpc>
+                <a:spcPts val="2600"/>
+              </a:lnSpc>
+            </a:pPr>
+            <a:r>
+              <a:rPr sz="1500" b="0">
+                <a:solidFill>
+                  <a:srgbClr val="6B6B6B"/>
+                </a:solidFill>
+                <a:latin typeface="微软雅黑"/>
+                <a:ea typeface="微软雅黑"/>
+                <a:latin typeface="微软雅黑"/>
+              </a:rPr>
+              <a:t>中间是公司自己的焊接。</a:t>
             </a:r>
           </a:p>
         </p:txBody>
@@ -6605,8 +6717,8 @@
         </p:nvSpPr>
         <p:spPr>
           <a:xfrm>
-            <a:off x="8229600" y="2057400"/>
-            <a:ext cx="3611880" cy="3931920"/>
+            <a:off x="8229600" y="2011680"/>
+            <a:ext cx="3611880" cy="3977639"/>
           </a:xfrm>
           <a:prstGeom prst="rect">
             <a:avLst/>
@@ -6650,7 +6762,7 @@
         </p:nvSpPr>
         <p:spPr>
           <a:xfrm>
-            <a:off x="8229600" y="2057400"/>
+            <a:off x="8229600" y="2011680"/>
             <a:ext cx="3611880" cy="41148"/>
           </a:xfrm>
           <a:prstGeom prst="rect">
@@ -6693,8 +6805,8 @@
         </p:nvSpPr>
         <p:spPr>
           <a:xfrm>
-            <a:off x="8485632" y="2331720"/>
-            <a:ext cx="3108960" cy="457200"/>
+            <a:off x="8485632" y="2286000"/>
+            <a:ext cx="3108960" cy="640080"/>
           </a:xfrm>
           <a:prstGeom prst="rect">
             <a:avLst/>
@@ -6715,7 +6827,7 @@
                 <a:ea typeface="微软雅黑"/>
                 <a:latin typeface="微软雅黑"/>
               </a:rPr>
-              <a:t>立刻见效</a:t>
+              <a:t>对账的工夫</a:t>
             </a:r>
           </a:p>
         </p:txBody>
@@ -6728,8 +6840,8 @@
         </p:nvSpPr>
         <p:spPr>
           <a:xfrm>
-            <a:off x="8485632" y="2971800"/>
-            <a:ext cx="3108960" cy="2560320"/>
+            <a:off x="8485632" y="3108960"/>
+            <a:ext cx="3108960" cy="2468880"/>
           </a:xfrm>
           <a:prstGeom prst="rect">
             <a:avLst/>
@@ -6754,7 +6866,7 @@
                 <a:ea typeface="微软雅黑"/>
                 <a:latin typeface="微软雅黑"/>
               </a:rPr>
-              <a:t>一事一议以前要熟练人员做好几天。</a:t>
+              <a:t>文件、人和版本留在平台。</a:t>
             </a:r>
           </a:p>
           <a:p>
@@ -6772,7 +6884,25 @@
                 <a:ea typeface="微软雅黑"/>
                 <a:latin typeface="微软雅黑"/>
               </a:rPr>
-              <a:t>上传后引擎约 20 秒。AI 问的是这本真账。</a:t>
+              <a:t>对奇瑞、二级商和财务，</a:t>
+            </a:r>
+          </a:p>
+          <a:p>
+            <a:pPr algn="l">
+              <a:lnSpc>
+                <a:spcPts val="2600"/>
+              </a:lnSpc>
+            </a:pPr>
+            <a:r>
+              <a:rPr sz="1500" b="0">
+                <a:solidFill>
+                  <a:srgbClr val="6B6B6B"/>
+                </a:solidFill>
+                <a:latin typeface="微软雅黑"/>
+                <a:ea typeface="微软雅黑"/>
+                <a:latin typeface="微软雅黑"/>
+              </a:rPr>
+              <a:t>不必再开会统一口径。</a:t>
             </a:r>
           </a:p>
         </p:txBody>
@@ -7059,7 +7189,7 @@
                 <a:ea typeface="微软雅黑"/>
                 <a:latin typeface="Arial"/>
               </a:rPr>
-              <a:t>02   WHAT IT IS</a:t>
+              <a:t>02   VERSUS</a:t>
             </a:r>
           </a:p>
         </p:txBody>
@@ -7094,7 +7224,7 @@
                 <a:ea typeface="微软雅黑"/>
                 <a:latin typeface="微软雅黑"/>
               </a:rPr>
-              <a:t>结构件自动核价平台</a:t>
+              <a:t>同样核价，Excel 和现网差在哪</a:t>
             </a:r>
           </a:p>
         </p:txBody>
@@ -7107,8 +7237,8 @@
         </p:nvSpPr>
         <p:spPr>
           <a:xfrm>
-            <a:off x="640080" y="1389888"/>
-            <a:ext cx="10972800" cy="640080"/>
+            <a:off x="1737360" y="1353312"/>
+            <a:ext cx="3017520" cy="256032"/>
           </a:xfrm>
           <a:prstGeom prst="rect">
             <a:avLst/>
@@ -7119,35 +7249,101 @@
           <a:bodyPr wrap="square" anchor="t"/>
           <a:lstStyle/>
           <a:p>
-            <a:pPr algn="l">
-              <a:lnSpc>
-                <a:spcPts val="2600"/>
-              </a:lnSpc>
-            </a:pPr>
-            <a:r>
-              <a:rPr sz="1600" b="0">
-                <a:solidFill>
-                  <a:srgbClr val="6B6B6B"/>
-                </a:solidFill>
-                <a:latin typeface="微软雅黑"/>
-                <a:ea typeface="微软雅黑"/>
-                <a:latin typeface="微软雅黑"/>
-              </a:rPr>
-              <a:t>政策、BOM、工艺、变更纳入同一套规则。算出总成与采购对象价格，直接出协议；AI 解读动因。</a:t>
-            </a:r>
-          </a:p>
-        </p:txBody>
-      </p:sp>
-      <p:sp>
-        <p:nvSpPr>
-          <p:cNvPr id="8" name="Rectangle 7"/>
+            <a:pPr algn="l"/>
+            <a:r>
+              <a:rPr sz="1200" b="0" spc="60">
+                <a:solidFill>
+                  <a:srgbClr val="D04A02"/>
+                </a:solidFill>
+                <a:latin typeface="微软雅黑"/>
+                <a:ea typeface="微软雅黑"/>
+                <a:latin typeface="微软雅黑"/>
+              </a:rPr>
+              <a:t>Excel 手工</a:t>
+            </a:r>
+          </a:p>
+        </p:txBody>
+      </p:sp>
+      <p:sp>
+        <p:nvSpPr>
+          <p:cNvPr id="8" name="TextBox 7"/>
+          <p:cNvSpPr txBox="1"/>
+          <p:nvPr/>
+        </p:nvSpPr>
+        <p:spPr>
+          <a:xfrm>
+            <a:off x="4892040" y="1353312"/>
+            <a:ext cx="3017520" cy="256032"/>
+          </a:xfrm>
+          <a:prstGeom prst="rect">
+            <a:avLst/>
+          </a:prstGeom>
+          <a:noFill/>
+        </p:spPr>
+        <p:txBody>
+          <a:bodyPr wrap="square" anchor="t"/>
+          <a:lstStyle/>
+          <a:p>
+            <a:pPr algn="l"/>
+            <a:r>
+              <a:rPr sz="1200" b="0" spc="60">
+                <a:solidFill>
+                  <a:srgbClr val="D04A02"/>
+                </a:solidFill>
+                <a:latin typeface="微软雅黑"/>
+                <a:ea typeface="微软雅黑"/>
+                <a:latin typeface="微软雅黑"/>
+              </a:rPr>
+              <a:t>现网</a:t>
+            </a:r>
+          </a:p>
+        </p:txBody>
+      </p:sp>
+      <p:sp>
+        <p:nvSpPr>
+          <p:cNvPr id="9" name="TextBox 8"/>
+          <p:cNvSpPr txBox="1"/>
+          <p:nvPr/>
+        </p:nvSpPr>
+        <p:spPr>
+          <a:xfrm>
+            <a:off x="8046720" y="1353312"/>
+            <a:ext cx="3017520" cy="256032"/>
+          </a:xfrm>
+          <a:prstGeom prst="rect">
+            <a:avLst/>
+          </a:prstGeom>
+          <a:noFill/>
+        </p:spPr>
+        <p:txBody>
+          <a:bodyPr wrap="square" anchor="t"/>
+          <a:lstStyle/>
+          <a:p>
+            <a:pPr algn="l"/>
+            <a:r>
+              <a:rPr sz="1200" b="0" spc="60">
+                <a:solidFill>
+                  <a:srgbClr val="D04A02"/>
+                </a:solidFill>
+                <a:latin typeface="微软雅黑"/>
+                <a:ea typeface="微软雅黑"/>
+                <a:latin typeface="微软雅黑"/>
+              </a:rPr>
+              <a:t>公司得到</a:t>
+            </a:r>
+          </a:p>
+        </p:txBody>
+      </p:sp>
+      <p:sp>
+        <p:nvSpPr>
+          <p:cNvPr id="10" name="Rectangle 9"/>
           <p:cNvSpPr/>
           <p:nvPr/>
         </p:nvSpPr>
         <p:spPr>
           <a:xfrm>
-            <a:off x="640080" y="2194560"/>
-            <a:ext cx="3611880" cy="1783080"/>
+            <a:off x="640080" y="1700784"/>
+            <a:ext cx="10908792" cy="1024128"/>
           </a:xfrm>
           <a:prstGeom prst="rect">
             <a:avLst/>
@@ -7185,14 +7381,14 @@
       </p:sp>
       <p:sp>
         <p:nvSpPr>
-          <p:cNvPr id="9" name="Rectangle 8"/>
+          <p:cNvPr id="11" name="Rectangle 10"/>
           <p:cNvSpPr/>
           <p:nvPr/>
         </p:nvSpPr>
         <p:spPr>
           <a:xfrm>
-            <a:off x="640080" y="2194560"/>
-            <a:ext cx="3611880" cy="41148"/>
+            <a:off x="640080" y="1700784"/>
+            <a:ext cx="50292" cy="1024128"/>
           </a:xfrm>
           <a:prstGeom prst="rect">
             <a:avLst/>
@@ -7228,14 +7424,14 @@
       </p:sp>
       <p:sp>
         <p:nvSpPr>
-          <p:cNvPr id="10" name="TextBox 9"/>
+          <p:cNvPr id="12" name="TextBox 11"/>
           <p:cNvSpPr txBox="1"/>
           <p:nvPr/>
         </p:nvSpPr>
         <p:spPr>
           <a:xfrm>
-            <a:off x="896112" y="2487168"/>
-            <a:ext cx="3108960" cy="292608"/>
+            <a:off x="822960" y="1956816"/>
+            <a:ext cx="777240" cy="502920"/>
           </a:xfrm>
           <a:prstGeom prst="rect">
             <a:avLst/>
@@ -7243,34 +7439,91 @@
           <a:noFill/>
         </p:spPr>
         <p:txBody>
+          <a:bodyPr wrap="square" anchor="ctr"/>
+          <a:lstStyle/>
+          <a:p>
+            <a:pPr algn="l"/>
+            <a:r>
+              <a:rPr sz="2000" b="1">
+                <a:solidFill>
+                  <a:srgbClr val="2D2D2D"/>
+                </a:solidFill>
+                <a:latin typeface="微软雅黑"/>
+                <a:ea typeface="微软雅黑"/>
+                <a:latin typeface="微软雅黑"/>
+              </a:rPr>
+              <a:t>人</a:t>
+            </a:r>
+          </a:p>
+        </p:txBody>
+      </p:sp>
+      <p:sp>
+        <p:nvSpPr>
+          <p:cNvPr id="13" name="TextBox 12"/>
+          <p:cNvSpPr txBox="1"/>
+          <p:nvPr/>
+        </p:nvSpPr>
+        <p:spPr>
+          <a:xfrm>
+            <a:off x="1737360" y="1847088"/>
+            <a:ext cx="2971800" cy="749808"/>
+          </a:xfrm>
+          <a:prstGeom prst="rect">
+            <a:avLst/>
+          </a:prstGeom>
+          <a:noFill/>
+        </p:spPr>
+        <p:txBody>
           <a:bodyPr wrap="square" anchor="t"/>
           <a:lstStyle/>
           <a:p>
-            <a:pPr algn="l"/>
-            <a:r>
-              <a:rPr sz="1200" b="0" spc="80">
-                <a:solidFill>
-                  <a:srgbClr val="D04A02"/>
-                </a:solidFill>
-                <a:latin typeface="Arial"/>
-                <a:ea typeface="微软雅黑"/>
-                <a:latin typeface="Arial"/>
-              </a:rPr>
-              <a:t>Policy</a:t>
-            </a:r>
-          </a:p>
-        </p:txBody>
-      </p:sp>
-      <p:sp>
-        <p:nvSpPr>
-          <p:cNvPr id="11" name="TextBox 10"/>
+            <a:pPr algn="l">
+              <a:lnSpc>
+                <a:spcPts val="2200"/>
+              </a:lnSpc>
+            </a:pPr>
+            <a:r>
+              <a:rPr sz="1400" b="0">
+                <a:solidFill>
+                  <a:srgbClr val="6B6B6B"/>
+                </a:solidFill>
+                <a:latin typeface="微软雅黑"/>
+                <a:ea typeface="微软雅黑"/>
+                <a:latin typeface="微软雅黑"/>
+              </a:rPr>
+              <a:t>熟练人员做好几天。</a:t>
+            </a:r>
+          </a:p>
+          <a:p>
+            <a:pPr algn="l">
+              <a:lnSpc>
+                <a:spcPts val="2200"/>
+              </a:lnSpc>
+            </a:pPr>
+            <a:r>
+              <a:rPr sz="1400" b="0">
+                <a:solidFill>
+                  <a:srgbClr val="6B6B6B"/>
+                </a:solidFill>
+                <a:latin typeface="微软雅黑"/>
+                <a:ea typeface="微软雅黑"/>
+                <a:latin typeface="微软雅黑"/>
+              </a:rPr>
+              <a:t>人走，账就停。</a:t>
+            </a:r>
+          </a:p>
+        </p:txBody>
+      </p:sp>
+      <p:sp>
+        <p:nvSpPr>
+          <p:cNvPr id="14" name="TextBox 13"/>
           <p:cNvSpPr txBox="1"/>
           <p:nvPr/>
         </p:nvSpPr>
         <p:spPr>
           <a:xfrm>
-            <a:off x="896112" y="2926080"/>
-            <a:ext cx="3108960" cy="640080"/>
+            <a:off x="4892040" y="1847088"/>
+            <a:ext cx="2971800" cy="749808"/>
           </a:xfrm>
           <a:prstGeom prst="rect">
             <a:avLst/>
@@ -7281,9 +7534,13 @@
           <a:bodyPr wrap="square" anchor="t"/>
           <a:lstStyle/>
           <a:p>
-            <a:pPr algn="l"/>
-            <a:r>
-              <a:rPr sz="2000" b="1">
+            <a:pPr algn="l">
+              <a:lnSpc>
+                <a:spcPts val="2200"/>
+              </a:lnSpc>
+            </a:pPr>
+            <a:r>
+              <a:rPr sz="1400" b="0">
                 <a:solidFill>
                   <a:srgbClr val="2D2D2D"/>
                 </a:solidFill>
@@ -7291,21 +7548,96 @@
                 <a:ea typeface="微软雅黑"/>
                 <a:latin typeface="微软雅黑"/>
               </a:rPr>
-              <a:t>钢价一事一议</a:t>
-            </a:r>
-          </a:p>
-        </p:txBody>
-      </p:sp>
-      <p:sp>
-        <p:nvSpPr>
-          <p:cNvPr id="12" name="Rectangle 11"/>
+              <a:t>上传之后，引擎约 20 秒。</a:t>
+            </a:r>
+          </a:p>
+          <a:p>
+            <a:pPr algn="l">
+              <a:lnSpc>
+                <a:spcPts val="2200"/>
+              </a:lnSpc>
+            </a:pPr>
+            <a:r>
+              <a:rPr sz="1400" b="0">
+                <a:solidFill>
+                  <a:srgbClr val="2D2D2D"/>
+                </a:solidFill>
+                <a:latin typeface="微软雅黑"/>
+                <a:ea typeface="微软雅黑"/>
+                <a:latin typeface="微软雅黑"/>
+              </a:rPr>
+              <a:t>规则留在平台。</a:t>
+            </a:r>
+          </a:p>
+        </p:txBody>
+      </p:sp>
+      <p:sp>
+        <p:nvSpPr>
+          <p:cNvPr id="15" name="TextBox 14"/>
+          <p:cNvSpPr txBox="1"/>
+          <p:nvPr/>
+        </p:nvSpPr>
+        <p:spPr>
+          <a:xfrm>
+            <a:off x="8046720" y="1847088"/>
+            <a:ext cx="3246120" cy="749808"/>
+          </a:xfrm>
+          <a:prstGeom prst="rect">
+            <a:avLst/>
+          </a:prstGeom>
+          <a:noFill/>
+        </p:spPr>
+        <p:txBody>
+          <a:bodyPr wrap="square" anchor="t"/>
+          <a:lstStyle/>
+          <a:p>
+            <a:pPr algn="l">
+              <a:lnSpc>
+                <a:spcPts val="2200"/>
+              </a:lnSpc>
+            </a:pPr>
+            <a:r>
+              <a:rPr sz="1400" b="1">
+                <a:solidFill>
+                  <a:srgbClr val="2D2D2D"/>
+                </a:solidFill>
+                <a:latin typeface="微软雅黑"/>
+                <a:ea typeface="微软雅黑"/>
+                <a:latin typeface="微软雅黑"/>
+              </a:rPr>
+              <a:t>人转去谈价和异常。</a:t>
+            </a:r>
+          </a:p>
+          <a:p>
+            <a:pPr algn="l">
+              <a:lnSpc>
+                <a:spcPts val="2200"/>
+              </a:lnSpc>
+            </a:pPr>
+            <a:r>
+              <a:rPr sz="1400" b="1">
+                <a:solidFill>
+                  <a:srgbClr val="2D2D2D"/>
+                </a:solidFill>
+                <a:latin typeface="微软雅黑"/>
+                <a:ea typeface="微软雅黑"/>
+                <a:latin typeface="微软雅黑"/>
+              </a:rPr>
+              <a:t>请假也不停账。</a:t>
+            </a:r>
+          </a:p>
+        </p:txBody>
+      </p:sp>
+      <p:sp>
+        <p:nvSpPr>
+          <p:cNvPr id="16" name="Rectangle 15"/>
           <p:cNvSpPr/>
           <p:nvPr/>
         </p:nvSpPr>
         <p:spPr>
           <a:xfrm>
-            <a:off x="4434840" y="2194560"/>
-            <a:ext cx="3611880" cy="1783080"/>
+            <a:off x="640080" y="2816352"/>
+            <a:ext cx="10908792" cy="1024128"/>
           </a:xfrm>
           <a:prstGeom prst="rect">
             <a:avLst/>
@@ -7343,14 +7675,14 @@
       </p:sp>
       <p:sp>
         <p:nvSpPr>
-          <p:cNvPr id="13" name="Rectangle 12"/>
+          <p:cNvPr id="17" name="Rectangle 16"/>
           <p:cNvSpPr/>
           <p:nvPr/>
         </p:nvSpPr>
         <p:spPr>
           <a:xfrm>
-            <a:off x="4434840" y="2194560"/>
-            <a:ext cx="3611880" cy="41148"/>
+            <a:off x="640080" y="2816352"/>
+            <a:ext cx="50292" cy="1024128"/>
           </a:xfrm>
           <a:prstGeom prst="rect">
             <a:avLst/>
@@ -7386,14 +7718,14 @@
       </p:sp>
       <p:sp>
         <p:nvSpPr>
-          <p:cNvPr id="14" name="TextBox 13"/>
+          <p:cNvPr id="18" name="TextBox 17"/>
           <p:cNvSpPr txBox="1"/>
           <p:nvPr/>
         </p:nvSpPr>
         <p:spPr>
           <a:xfrm>
-            <a:off x="4690872" y="2487168"/>
-            <a:ext cx="3108960" cy="292608"/>
+            <a:off x="822960" y="3072384"/>
+            <a:ext cx="777240" cy="502920"/>
           </a:xfrm>
           <a:prstGeom prst="rect">
             <a:avLst/>
@@ -7401,34 +7733,91 @@
           <a:noFill/>
         </p:spPr>
         <p:txBody>
+          <a:bodyPr wrap="square" anchor="ctr"/>
+          <a:lstStyle/>
+          <a:p>
+            <a:pPr algn="l"/>
+            <a:r>
+              <a:rPr sz="2000" b="1">
+                <a:solidFill>
+                  <a:srgbClr val="2D2D2D"/>
+                </a:solidFill>
+                <a:latin typeface="微软雅黑"/>
+                <a:ea typeface="微软雅黑"/>
+                <a:latin typeface="微软雅黑"/>
+              </a:rPr>
+              <a:t>价</a:t>
+            </a:r>
+          </a:p>
+        </p:txBody>
+      </p:sp>
+      <p:sp>
+        <p:nvSpPr>
+          <p:cNvPr id="19" name="TextBox 18"/>
+          <p:cNvSpPr txBox="1"/>
+          <p:nvPr/>
+        </p:nvSpPr>
+        <p:spPr>
+          <a:xfrm>
+            <a:off x="1737360" y="2962656"/>
+            <a:ext cx="2971800" cy="749808"/>
+          </a:xfrm>
+          <a:prstGeom prst="rect">
+            <a:avLst/>
+          </a:prstGeom>
+          <a:noFill/>
+        </p:spPr>
+        <p:txBody>
           <a:bodyPr wrap="square" anchor="t"/>
           <a:lstStyle/>
           <a:p>
-            <a:pPr algn="l"/>
-            <a:r>
-              <a:rPr sz="1200" b="0" spc="80">
-                <a:solidFill>
-                  <a:srgbClr val="D04A02"/>
-                </a:solidFill>
-                <a:latin typeface="Arial"/>
-                <a:ea typeface="微软雅黑"/>
-                <a:latin typeface="Arial"/>
-              </a:rPr>
-              <a:t>BOM</a:t>
-            </a:r>
-          </a:p>
-        </p:txBody>
-      </p:sp>
-      <p:sp>
-        <p:nvSpPr>
-          <p:cNvPr id="15" name="TextBox 14"/>
+            <a:pPr algn="l">
+              <a:lnSpc>
+                <a:spcPts val="2200"/>
+              </a:lnSpc>
+            </a:pPr>
+            <a:r>
+              <a:rPr sz="1400" b="0">
+                <a:solidFill>
+                  <a:srgbClr val="6B6B6B"/>
+                </a:solidFill>
+                <a:latin typeface="微软雅黑"/>
+                <a:ea typeface="微软雅黑"/>
+                <a:latin typeface="微软雅黑"/>
+              </a:rPr>
+              <a:t>总成、分总成各一张表。</a:t>
+            </a:r>
+          </a:p>
+          <a:p>
+            <a:pPr algn="l">
+              <a:lnSpc>
+                <a:spcPts val="2200"/>
+              </a:lnSpc>
+            </a:pPr>
+            <a:r>
+              <a:rPr sz="1400" b="0">
+                <a:solidFill>
+                  <a:srgbClr val="6B6B6B"/>
+                </a:solidFill>
+                <a:latin typeface="微软雅黑"/>
+                <a:ea typeface="微软雅黑"/>
+                <a:latin typeface="微软雅黑"/>
+              </a:rPr>
+              <a:t>两本对不到一起。</a:t>
+            </a:r>
+          </a:p>
+        </p:txBody>
+      </p:sp>
+      <p:sp>
+        <p:nvSpPr>
+          <p:cNvPr id="20" name="TextBox 19"/>
           <p:cNvSpPr txBox="1"/>
           <p:nvPr/>
         </p:nvSpPr>
         <p:spPr>
           <a:xfrm>
-            <a:off x="4690872" y="2926080"/>
-            <a:ext cx="3108960" cy="640080"/>
+            <a:off x="4892040" y="2962656"/>
+            <a:ext cx="2971800" cy="749808"/>
           </a:xfrm>
           <a:prstGeom prst="rect">
             <a:avLst/>
@@ -7439,9 +7828,13 @@
           <a:bodyPr wrap="square" anchor="t"/>
           <a:lstStyle/>
           <a:p>
-            <a:pPr algn="l"/>
-            <a:r>
-              <a:rPr sz="2000" b="1">
+            <a:pPr algn="l">
+              <a:lnSpc>
+                <a:spcPts val="2200"/>
+              </a:lnSpc>
+            </a:pPr>
+            <a:r>
+              <a:rPr sz="1400" b="0">
                 <a:solidFill>
                   <a:srgbClr val="2D2D2D"/>
                 </a:solidFill>
@@ -7449,21 +7842,96 @@
                 <a:ea typeface="微软雅黑"/>
                 <a:latin typeface="微软雅黑"/>
               </a:rPr>
-              <a:t>结构与外购</a:t>
-            </a:r>
-          </a:p>
-        </p:txBody>
-      </p:sp>
-      <p:sp>
-        <p:nvSpPr>
-          <p:cNvPr id="16" name="Rectangle 15"/>
+              <a:t>总成价、分总成价</a:t>
+            </a:r>
+          </a:p>
+          <a:p>
+            <a:pPr algn="l">
+              <a:lnSpc>
+                <a:spcPts val="2200"/>
+              </a:lnSpc>
+            </a:pPr>
+            <a:r>
+              <a:rPr sz="1400" b="0">
+                <a:solidFill>
+                  <a:srgbClr val="2D2D2D"/>
+                </a:solidFill>
+                <a:latin typeface="微软雅黑"/>
+                <a:ea typeface="微软雅黑"/>
+                <a:latin typeface="微软雅黑"/>
+              </a:rPr>
+              <a:t>同一引擎，各算各的。</a:t>
+            </a:r>
+          </a:p>
+        </p:txBody>
+      </p:sp>
+      <p:sp>
+        <p:nvSpPr>
+          <p:cNvPr id="21" name="TextBox 20"/>
+          <p:cNvSpPr txBox="1"/>
+          <p:nvPr/>
+        </p:nvSpPr>
+        <p:spPr>
+          <a:xfrm>
+            <a:off x="8046720" y="2962656"/>
+            <a:ext cx="3246120" cy="749808"/>
+          </a:xfrm>
+          <a:prstGeom prst="rect">
+            <a:avLst/>
+          </a:prstGeom>
+          <a:noFill/>
+        </p:spPr>
+        <p:txBody>
+          <a:bodyPr wrap="square" anchor="t"/>
+          <a:lstStyle/>
+          <a:p>
+            <a:pPr algn="l">
+              <a:lnSpc>
+                <a:spcPts val="2200"/>
+              </a:lnSpc>
+            </a:pPr>
+            <a:r>
+              <a:rPr sz="1400" b="1">
+                <a:solidFill>
+                  <a:srgbClr val="2D2D2D"/>
+                </a:solidFill>
+                <a:latin typeface="微软雅黑"/>
+                <a:ea typeface="微软雅黑"/>
+                <a:latin typeface="微软雅黑"/>
+              </a:rPr>
+              <a:t>焊费只计一次。</a:t>
+            </a:r>
+          </a:p>
+          <a:p>
+            <a:pPr algn="l">
+              <a:lnSpc>
+                <a:spcPts val="2200"/>
+              </a:lnSpc>
+            </a:pPr>
+            <a:r>
+              <a:rPr sz="1400" b="1">
+                <a:solidFill>
+                  <a:srgbClr val="2D2D2D"/>
+                </a:solidFill>
+                <a:latin typeface="微软雅黑"/>
+                <a:ea typeface="微软雅黑"/>
+                <a:latin typeface="微软雅黑"/>
+              </a:rPr>
+              <a:t>协议按分总成签。</a:t>
+            </a:r>
+          </a:p>
+        </p:txBody>
+      </p:sp>
+      <p:sp>
+        <p:nvSpPr>
+          <p:cNvPr id="22" name="Rectangle 21"/>
           <p:cNvSpPr/>
           <p:nvPr/>
         </p:nvSpPr>
         <p:spPr>
           <a:xfrm>
-            <a:off x="8229600" y="2194560"/>
-            <a:ext cx="3611880" cy="1783080"/>
+            <a:off x="640080" y="3931920"/>
+            <a:ext cx="10908792" cy="1024128"/>
           </a:xfrm>
           <a:prstGeom prst="rect">
             <a:avLst/>
@@ -7501,14 +7969,14 @@
       </p:sp>
       <p:sp>
         <p:nvSpPr>
-          <p:cNvPr id="17" name="Rectangle 16"/>
+          <p:cNvPr id="23" name="Rectangle 22"/>
           <p:cNvSpPr/>
           <p:nvPr/>
         </p:nvSpPr>
         <p:spPr>
           <a:xfrm>
-            <a:off x="8229600" y="2194560"/>
-            <a:ext cx="3611880" cy="41148"/>
+            <a:off x="640080" y="3931920"/>
+            <a:ext cx="50292" cy="1024128"/>
           </a:xfrm>
           <a:prstGeom prst="rect">
             <a:avLst/>
@@ -7544,14 +8012,14 @@
       </p:sp>
       <p:sp>
         <p:nvSpPr>
-          <p:cNvPr id="18" name="TextBox 17"/>
+          <p:cNvPr id="24" name="TextBox 23"/>
           <p:cNvSpPr txBox="1"/>
           <p:nvPr/>
         </p:nvSpPr>
         <p:spPr>
           <a:xfrm>
-            <a:off x="8485632" y="2487168"/>
-            <a:ext cx="3108960" cy="292608"/>
+            <a:off x="822960" y="4187952"/>
+            <a:ext cx="777240" cy="502920"/>
           </a:xfrm>
           <a:prstGeom prst="rect">
             <a:avLst/>
@@ -7559,34 +8027,91 @@
           <a:noFill/>
         </p:spPr>
         <p:txBody>
+          <a:bodyPr wrap="square" anchor="ctr"/>
+          <a:lstStyle/>
+          <a:p>
+            <a:pPr algn="l"/>
+            <a:r>
+              <a:rPr sz="2000" b="1">
+                <a:solidFill>
+                  <a:srgbClr val="2D2D2D"/>
+                </a:solidFill>
+                <a:latin typeface="微软雅黑"/>
+                <a:ea typeface="微软雅黑"/>
+                <a:latin typeface="微软雅黑"/>
+              </a:rPr>
+              <a:t>月</a:t>
+            </a:r>
+          </a:p>
+        </p:txBody>
+      </p:sp>
+      <p:sp>
+        <p:nvSpPr>
+          <p:cNvPr id="25" name="TextBox 24"/>
+          <p:cNvSpPr txBox="1"/>
+          <p:nvPr/>
+        </p:nvSpPr>
+        <p:spPr>
+          <a:xfrm>
+            <a:off x="1737360" y="4078224"/>
+            <a:ext cx="2971800" cy="749808"/>
+          </a:xfrm>
+          <a:prstGeom prst="rect">
+            <a:avLst/>
+          </a:prstGeom>
+          <a:noFill/>
+        </p:spPr>
+        <p:txBody>
           <a:bodyPr wrap="square" anchor="t"/>
           <a:lstStyle/>
           <a:p>
-            <a:pPr algn="l"/>
-            <a:r>
-              <a:rPr sz="1200" b="0" spc="80">
-                <a:solidFill>
-                  <a:srgbClr val="D04A02"/>
-                </a:solidFill>
-                <a:latin typeface="Arial"/>
-                <a:ea typeface="微软雅黑"/>
-                <a:latin typeface="Arial"/>
-              </a:rPr>
-              <a:t>Process</a:t>
-            </a:r>
-          </a:p>
-        </p:txBody>
-      </p:sp>
-      <p:sp>
-        <p:nvSpPr>
-          <p:cNvPr id="19" name="TextBox 18"/>
+            <a:pPr algn="l">
+              <a:lnSpc>
+                <a:spcPts val="2200"/>
+              </a:lnSpc>
+            </a:pPr>
+            <a:r>
+              <a:rPr sz="1400" b="0">
+                <a:solidFill>
+                  <a:srgbClr val="6B6B6B"/>
+                </a:solidFill>
+                <a:latin typeface="微软雅黑"/>
+                <a:ea typeface="微软雅黑"/>
+                <a:latin typeface="微软雅黑"/>
+              </a:rPr>
+              <a:t>钢价、BOM、工艺、设变</a:t>
+            </a:r>
+          </a:p>
+          <a:p>
+            <a:pPr algn="l">
+              <a:lnSpc>
+                <a:spcPts val="2200"/>
+              </a:lnSpc>
+            </a:pPr>
+            <a:r>
+              <a:rPr sz="1400" b="0">
+                <a:solidFill>
+                  <a:srgbClr val="6B6B6B"/>
+                </a:solidFill>
+                <a:latin typeface="微软雅黑"/>
+                <a:ea typeface="微软雅黑"/>
+                <a:latin typeface="微软雅黑"/>
+              </a:rPr>
+              <a:t>散在文件夹。</a:t>
+            </a:r>
+          </a:p>
+        </p:txBody>
+      </p:sp>
+      <p:sp>
+        <p:nvSpPr>
+          <p:cNvPr id="26" name="TextBox 25"/>
           <p:cNvSpPr txBox="1"/>
           <p:nvPr/>
         </p:nvSpPr>
         <p:spPr>
           <a:xfrm>
-            <a:off x="8485632" y="2926080"/>
-            <a:ext cx="3108960" cy="640080"/>
+            <a:off x="4892040" y="4078224"/>
+            <a:ext cx="2971800" cy="749808"/>
           </a:xfrm>
           <a:prstGeom prst="rect">
             <a:avLst/>
@@ -7597,9 +8122,13 @@
           <a:bodyPr wrap="square" anchor="t"/>
           <a:lstStyle/>
           <a:p>
-            <a:pPr algn="l"/>
-            <a:r>
-              <a:rPr sz="2000" b="1">
+            <a:pPr algn="l">
+              <a:lnSpc>
+                <a:spcPts val="2200"/>
+              </a:lnSpc>
+            </a:pPr>
+            <a:r>
+              <a:rPr sz="1400" b="0">
                 <a:solidFill>
                   <a:srgbClr val="2D2D2D"/>
                 </a:solidFill>
@@ -7607,21 +8136,96 @@
                 <a:ea typeface="微软雅黑"/>
                 <a:latin typeface="微软雅黑"/>
               </a:rPr>
-              <a:t>工艺与模具</a:t>
-            </a:r>
-          </a:p>
-        </p:txBody>
-      </p:sp>
-      <p:sp>
-        <p:nvSpPr>
-          <p:cNvPr id="20" name="Rectangle 19"/>
+              <a:t>当月依据，</a:t>
+            </a:r>
+          </a:p>
+          <a:p>
+            <a:pPr algn="l">
+              <a:lnSpc>
+                <a:spcPts val="2200"/>
+              </a:lnSpc>
+            </a:pPr>
+            <a:r>
+              <a:rPr sz="1400" b="0">
+                <a:solidFill>
+                  <a:srgbClr val="2D2D2D"/>
+                </a:solidFill>
+                <a:latin typeface="微软雅黑"/>
+                <a:ea typeface="微软雅黑"/>
+                <a:latin typeface="微软雅黑"/>
+              </a:rPr>
+              <a:t>当月一起计算。</a:t>
+            </a:r>
+          </a:p>
+        </p:txBody>
+      </p:sp>
+      <p:sp>
+        <p:nvSpPr>
+          <p:cNvPr id="27" name="TextBox 26"/>
+          <p:cNvSpPr txBox="1"/>
+          <p:nvPr/>
+        </p:nvSpPr>
+        <p:spPr>
+          <a:xfrm>
+            <a:off x="8046720" y="4078224"/>
+            <a:ext cx="3246120" cy="749808"/>
+          </a:xfrm>
+          <a:prstGeom prst="rect">
+            <a:avLst/>
+          </a:prstGeom>
+          <a:noFill/>
+        </p:spPr>
+        <p:txBody>
+          <a:bodyPr wrap="square" anchor="t"/>
+          <a:lstStyle/>
+          <a:p>
+            <a:pPr algn="l">
+              <a:lnSpc>
+                <a:spcPts val="2200"/>
+              </a:lnSpc>
+            </a:pPr>
+            <a:r>
+              <a:rPr sz="1400" b="1">
+                <a:solidFill>
+                  <a:srgbClr val="2D2D2D"/>
+                </a:solidFill>
+                <a:latin typeface="微软雅黑"/>
+                <a:ea typeface="微软雅黑"/>
+                <a:latin typeface="微软雅黑"/>
+              </a:rPr>
+              <a:t>该调的开票价和采购价，</a:t>
+            </a:r>
+          </a:p>
+          <a:p>
+            <a:pPr algn="l">
+              <a:lnSpc>
+                <a:spcPts val="2200"/>
+              </a:lnSpc>
+            </a:pPr>
+            <a:r>
+              <a:rPr sz="1400" b="1">
+                <a:solidFill>
+                  <a:srgbClr val="2D2D2D"/>
+                </a:solidFill>
+                <a:latin typeface="微软雅黑"/>
+                <a:ea typeface="微软雅黑"/>
+                <a:latin typeface="微软雅黑"/>
+              </a:rPr>
+              <a:t>当月跟上。</a:t>
+            </a:r>
+          </a:p>
+        </p:txBody>
+      </p:sp>
+      <p:sp>
+        <p:nvSpPr>
+          <p:cNvPr id="28" name="Rectangle 27"/>
           <p:cNvSpPr/>
           <p:nvPr/>
         </p:nvSpPr>
         <p:spPr>
           <a:xfrm>
-            <a:off x="640080" y="4160520"/>
-            <a:ext cx="3611880" cy="1783080"/>
+            <a:off x="640080" y="5047488"/>
+            <a:ext cx="10908792" cy="1024128"/>
           </a:xfrm>
           <a:prstGeom prst="rect">
             <a:avLst/>
@@ -7659,14 +8263,14 @@
       </p:sp>
       <p:sp>
         <p:nvSpPr>
-          <p:cNvPr id="21" name="Rectangle 20"/>
+          <p:cNvPr id="29" name="Rectangle 28"/>
           <p:cNvSpPr/>
           <p:nvPr/>
         </p:nvSpPr>
         <p:spPr>
           <a:xfrm>
-            <a:off x="640080" y="4160520"/>
-            <a:ext cx="3611880" cy="41148"/>
+            <a:off x="640080" y="5047488"/>
+            <a:ext cx="50292" cy="1024128"/>
           </a:xfrm>
           <a:prstGeom prst="rect">
             <a:avLst/>
@@ -7702,330 +8306,14 @@
       </p:sp>
       <p:sp>
         <p:nvSpPr>
-          <p:cNvPr id="22" name="TextBox 21"/>
-          <p:cNvSpPr txBox="1"/>
-          <p:nvPr/>
-        </p:nvSpPr>
-        <p:spPr>
-          <a:xfrm>
-            <a:off x="896112" y="4453128"/>
-            <a:ext cx="3108960" cy="292608"/>
-          </a:xfrm>
-          <a:prstGeom prst="rect">
-            <a:avLst/>
-          </a:prstGeom>
-          <a:noFill/>
-        </p:spPr>
-        <p:txBody>
-          <a:bodyPr wrap="square" anchor="t"/>
-          <a:lstStyle/>
-          <a:p>
-            <a:pPr algn="l"/>
-            <a:r>
-              <a:rPr sz="1200" b="0" spc="80">
-                <a:solidFill>
-                  <a:srgbClr val="D04A02"/>
-                </a:solidFill>
-                <a:latin typeface="Arial"/>
-                <a:ea typeface="微软雅黑"/>
-                <a:latin typeface="Arial"/>
-              </a:rPr>
-              <a:t>Change</a:t>
-            </a:r>
-          </a:p>
-        </p:txBody>
-      </p:sp>
-      <p:sp>
-        <p:nvSpPr>
-          <p:cNvPr id="23" name="TextBox 22"/>
-          <p:cNvSpPr txBox="1"/>
-          <p:nvPr/>
-        </p:nvSpPr>
-        <p:spPr>
-          <a:xfrm>
-            <a:off x="896112" y="4892040"/>
-            <a:ext cx="3108960" cy="640080"/>
-          </a:xfrm>
-          <a:prstGeom prst="rect">
-            <a:avLst/>
-          </a:prstGeom>
-          <a:noFill/>
-        </p:spPr>
-        <p:txBody>
-          <a:bodyPr wrap="square" anchor="t"/>
-          <a:lstStyle/>
-          <a:p>
-            <a:pPr algn="l"/>
-            <a:r>
-              <a:rPr sz="2000" b="1">
-                <a:solidFill>
-                  <a:srgbClr val="2D2D2D"/>
-                </a:solidFill>
-                <a:latin typeface="微软雅黑"/>
-                <a:ea typeface="微软雅黑"/>
-                <a:latin typeface="微软雅黑"/>
-              </a:rPr>
-              <a:t>工程变更</a:t>
-            </a:r>
-          </a:p>
-        </p:txBody>
-      </p:sp>
-      <p:sp>
-        <p:nvSpPr>
-          <p:cNvPr id="24" name="Rectangle 23"/>
-          <p:cNvSpPr/>
-          <p:nvPr/>
-        </p:nvSpPr>
-        <p:spPr>
-          <a:xfrm>
-            <a:off x="4434840" y="4160520"/>
-            <a:ext cx="3611880" cy="1783080"/>
-          </a:xfrm>
-          <a:prstGeom prst="rect">
-            <a:avLst/>
-          </a:prstGeom>
-          <a:solidFill>
-            <a:srgbClr val="FFFFFF"/>
-          </a:solidFill>
-          <a:ln w="9525">
-            <a:solidFill>
-              <a:srgbClr val="E6E0D6"/>
-            </a:solidFill>
-          </a:ln>
-        </p:spPr>
-        <p:style>
-          <a:lnRef idx="1">
-            <a:schemeClr val="accent1"/>
-          </a:lnRef>
-          <a:fillRef idx="3">
-            <a:schemeClr val="accent1"/>
-          </a:fillRef>
-          <a:effectRef idx="2">
-            <a:schemeClr val="accent1"/>
-          </a:effectRef>
-          <a:fontRef idx="minor">
-            <a:schemeClr val="lt1"/>
-          </a:fontRef>
-        </p:style>
-        <p:txBody>
-          <a:bodyPr rtlCol="0" anchor="ctr"/>
-          <a:lstStyle/>
-          <a:p>
-            <a:pPr algn="ctr"/>
-          </a:p>
-        </p:txBody>
-      </p:sp>
-      <p:sp>
-        <p:nvSpPr>
-          <p:cNvPr id="25" name="Rectangle 24"/>
-          <p:cNvSpPr/>
-          <p:nvPr/>
-        </p:nvSpPr>
-        <p:spPr>
-          <a:xfrm>
-            <a:off x="4434840" y="4160520"/>
-            <a:ext cx="3611880" cy="41148"/>
-          </a:xfrm>
-          <a:prstGeom prst="rect">
-            <a:avLst/>
-          </a:prstGeom>
-          <a:solidFill>
-            <a:srgbClr val="D04A02"/>
-          </a:solidFill>
-          <a:ln>
-            <a:noFill/>
-          </a:ln>
-        </p:spPr>
-        <p:style>
-          <a:lnRef idx="1">
-            <a:schemeClr val="accent1"/>
-          </a:lnRef>
-          <a:fillRef idx="3">
-            <a:schemeClr val="accent1"/>
-          </a:fillRef>
-          <a:effectRef idx="2">
-            <a:schemeClr val="accent1"/>
-          </a:effectRef>
-          <a:fontRef idx="minor">
-            <a:schemeClr val="lt1"/>
-          </a:fontRef>
-        </p:style>
-        <p:txBody>
-          <a:bodyPr rtlCol="0" anchor="ctr"/>
-          <a:lstStyle/>
-          <a:p>
-            <a:pPr algn="ctr"/>
-          </a:p>
-        </p:txBody>
-      </p:sp>
-      <p:sp>
-        <p:nvSpPr>
-          <p:cNvPr id="26" name="TextBox 25"/>
-          <p:cNvSpPr txBox="1"/>
-          <p:nvPr/>
-        </p:nvSpPr>
-        <p:spPr>
-          <a:xfrm>
-            <a:off x="4690872" y="4453128"/>
-            <a:ext cx="3108960" cy="292608"/>
-          </a:xfrm>
-          <a:prstGeom prst="rect">
-            <a:avLst/>
-          </a:prstGeom>
-          <a:noFill/>
-        </p:spPr>
-        <p:txBody>
-          <a:bodyPr wrap="square" anchor="t"/>
-          <a:lstStyle/>
-          <a:p>
-            <a:pPr algn="l"/>
-            <a:r>
-              <a:rPr sz="1200" b="0" spc="80">
-                <a:solidFill>
-                  <a:srgbClr val="D04A02"/>
-                </a:solidFill>
-                <a:latin typeface="Arial"/>
-                <a:ea typeface="微软雅黑"/>
-                <a:latin typeface="Arial"/>
-              </a:rPr>
-              <a:t>Costing</a:t>
-            </a:r>
-          </a:p>
-        </p:txBody>
-      </p:sp>
-      <p:sp>
-        <p:nvSpPr>
-          <p:cNvPr id="27" name="TextBox 26"/>
-          <p:cNvSpPr txBox="1"/>
-          <p:nvPr/>
-        </p:nvSpPr>
-        <p:spPr>
-          <a:xfrm>
-            <a:off x="4690872" y="4892040"/>
-            <a:ext cx="3108960" cy="640080"/>
-          </a:xfrm>
-          <a:prstGeom prst="rect">
-            <a:avLst/>
-          </a:prstGeom>
-          <a:noFill/>
-        </p:spPr>
-        <p:txBody>
-          <a:bodyPr wrap="square" anchor="t"/>
-          <a:lstStyle/>
-          <a:p>
-            <a:pPr algn="l"/>
-            <a:r>
-              <a:rPr sz="2000" b="1">
-                <a:solidFill>
-                  <a:srgbClr val="2D2D2D"/>
-                </a:solidFill>
-                <a:latin typeface="微软雅黑"/>
-                <a:ea typeface="微软雅黑"/>
-                <a:latin typeface="微软雅黑"/>
-              </a:rPr>
-              <a:t>件价与总成</a:t>
-            </a:r>
-          </a:p>
-        </p:txBody>
-      </p:sp>
-      <p:sp>
-        <p:nvSpPr>
-          <p:cNvPr id="28" name="Rectangle 27"/>
-          <p:cNvSpPr/>
-          <p:nvPr/>
-        </p:nvSpPr>
-        <p:spPr>
-          <a:xfrm>
-            <a:off x="8229600" y="4160520"/>
-            <a:ext cx="3611880" cy="1783080"/>
-          </a:xfrm>
-          <a:prstGeom prst="rect">
-            <a:avLst/>
-          </a:prstGeom>
-          <a:solidFill>
-            <a:srgbClr val="FFFFFF"/>
-          </a:solidFill>
-          <a:ln w="9525">
-            <a:solidFill>
-              <a:srgbClr val="E6E0D6"/>
-            </a:solidFill>
-          </a:ln>
-        </p:spPr>
-        <p:style>
-          <a:lnRef idx="1">
-            <a:schemeClr val="accent1"/>
-          </a:lnRef>
-          <a:fillRef idx="3">
-            <a:schemeClr val="accent1"/>
-          </a:fillRef>
-          <a:effectRef idx="2">
-            <a:schemeClr val="accent1"/>
-          </a:effectRef>
-          <a:fontRef idx="minor">
-            <a:schemeClr val="lt1"/>
-          </a:fontRef>
-        </p:style>
-        <p:txBody>
-          <a:bodyPr rtlCol="0" anchor="ctr"/>
-          <a:lstStyle/>
-          <a:p>
-            <a:pPr algn="ctr"/>
-          </a:p>
-        </p:txBody>
-      </p:sp>
-      <p:sp>
-        <p:nvSpPr>
-          <p:cNvPr id="29" name="Rectangle 28"/>
-          <p:cNvSpPr/>
-          <p:nvPr/>
-        </p:nvSpPr>
-        <p:spPr>
-          <a:xfrm>
-            <a:off x="8229600" y="4160520"/>
-            <a:ext cx="3611880" cy="41148"/>
-          </a:xfrm>
-          <a:prstGeom prst="rect">
-            <a:avLst/>
-          </a:prstGeom>
-          <a:solidFill>
-            <a:srgbClr val="D04A02"/>
-          </a:solidFill>
-          <a:ln>
-            <a:noFill/>
-          </a:ln>
-        </p:spPr>
-        <p:style>
-          <a:lnRef idx="1">
-            <a:schemeClr val="accent1"/>
-          </a:lnRef>
-          <a:fillRef idx="3">
-            <a:schemeClr val="accent1"/>
-          </a:fillRef>
-          <a:effectRef idx="2">
-            <a:schemeClr val="accent1"/>
-          </a:effectRef>
-          <a:fontRef idx="minor">
-            <a:schemeClr val="lt1"/>
-          </a:fontRef>
-        </p:style>
-        <p:txBody>
-          <a:bodyPr rtlCol="0" anchor="ctr"/>
-          <a:lstStyle/>
-          <a:p>
-            <a:pPr algn="ctr"/>
-          </a:p>
-        </p:txBody>
-      </p:sp>
-      <p:sp>
-        <p:nvSpPr>
           <p:cNvPr id="30" name="TextBox 29"/>
           <p:cNvSpPr txBox="1"/>
           <p:nvPr/>
         </p:nvSpPr>
         <p:spPr>
           <a:xfrm>
-            <a:off x="8485632" y="4453128"/>
-            <a:ext cx="3108960" cy="292608"/>
+            <a:off x="822960" y="5303520"/>
+            <a:ext cx="777240" cy="502920"/>
           </a:xfrm>
           <a:prstGeom prst="rect">
             <a:avLst/>
@@ -8033,20 +8321,20 @@
           <a:noFill/>
         </p:spPr>
         <p:txBody>
-          <a:bodyPr wrap="square" anchor="t"/>
+          <a:bodyPr wrap="square" anchor="ctr"/>
           <a:lstStyle/>
           <a:p>
             <a:pPr algn="l"/>
             <a:r>
-              <a:rPr sz="1200" b="0" spc="80">
-                <a:solidFill>
-                  <a:srgbClr val="D04A02"/>
-                </a:solidFill>
-                <a:latin typeface="Arial"/>
-                <a:ea typeface="微软雅黑"/>
-                <a:latin typeface="Arial"/>
-              </a:rPr>
-              <a:t>Contract</a:t>
+              <a:rPr sz="2000" b="1">
+                <a:solidFill>
+                  <a:srgbClr val="2D2D2D"/>
+                </a:solidFill>
+                <a:latin typeface="微软雅黑"/>
+                <a:ea typeface="微软雅黑"/>
+                <a:latin typeface="微软雅黑"/>
+              </a:rPr>
+              <a:t>对</a:t>
             </a:r>
           </a:p>
         </p:txBody>
@@ -8059,8 +8347,8 @@
         </p:nvSpPr>
         <p:spPr>
           <a:xfrm>
-            <a:off x="8485632" y="4892040"/>
-            <a:ext cx="3108960" cy="640080"/>
+            <a:off x="1737360" y="5193792"/>
+            <a:ext cx="2971800" cy="749808"/>
           </a:xfrm>
           <a:prstGeom prst="rect">
             <a:avLst/>
@@ -8071,9 +8359,70 @@
           <a:bodyPr wrap="square" anchor="t"/>
           <a:lstStyle/>
           <a:p>
-            <a:pPr algn="l"/>
-            <a:r>
-              <a:rPr sz="2000" b="1">
+            <a:pPr algn="l">
+              <a:lnSpc>
+                <a:spcPts val="2200"/>
+              </a:lnSpc>
+            </a:pPr>
+            <a:r>
+              <a:rPr sz="1400" b="0">
+                <a:solidFill>
+                  <a:srgbClr val="6B6B6B"/>
+                </a:solidFill>
+                <a:latin typeface="微软雅黑"/>
+                <a:ea typeface="微软雅黑"/>
+                <a:latin typeface="微软雅黑"/>
+              </a:rPr>
+              <a:t>私人拷贝。</a:t>
+            </a:r>
+          </a:p>
+          <a:p>
+            <a:pPr algn="l">
+              <a:lnSpc>
+                <a:spcPts val="2200"/>
+              </a:lnSpc>
+            </a:pPr>
+            <a:r>
+              <a:rPr sz="1400" b="0">
+                <a:solidFill>
+                  <a:srgbClr val="6B6B6B"/>
+                </a:solidFill>
+                <a:latin typeface="微软雅黑"/>
+                <a:ea typeface="微软雅黑"/>
+                <a:latin typeface="微软雅黑"/>
+              </a:rPr>
+              <a:t>口径靠骨干记忆。</a:t>
+            </a:r>
+          </a:p>
+        </p:txBody>
+      </p:sp>
+      <p:sp>
+        <p:nvSpPr>
+          <p:cNvPr id="32" name="TextBox 31"/>
+          <p:cNvSpPr txBox="1"/>
+          <p:nvPr/>
+        </p:nvSpPr>
+        <p:spPr>
+          <a:xfrm>
+            <a:off x="4892040" y="5193792"/>
+            <a:ext cx="2971800" cy="749808"/>
+          </a:xfrm>
+          <a:prstGeom prst="rect">
+            <a:avLst/>
+          </a:prstGeom>
+          <a:noFill/>
+        </p:spPr>
+        <p:txBody>
+          <a:bodyPr wrap="square" anchor="t"/>
+          <a:lstStyle/>
+          <a:p>
+            <a:pPr algn="l">
+              <a:lnSpc>
+                <a:spcPts val="2200"/>
+              </a:lnSpc>
+            </a:pPr>
+            <a:r>
+              <a:rPr sz="1400" b="0">
                 <a:solidFill>
                   <a:srgbClr val="2D2D2D"/>
                 </a:solidFill>
@@ -8081,14 +8430,89 @@
                 <a:ea typeface="微软雅黑"/>
                 <a:latin typeface="微软雅黑"/>
               </a:rPr>
-              <a:t>采购协议</a:t>
+              <a:t>文件、操作、当期版本</a:t>
+            </a:r>
+          </a:p>
+          <a:p>
+            <a:pPr algn="l">
+              <a:lnSpc>
+                <a:spcPts val="2200"/>
+              </a:lnSpc>
+            </a:pPr>
+            <a:r>
+              <a:rPr sz="1400" b="0">
+                <a:solidFill>
+                  <a:srgbClr val="2D2D2D"/>
+                </a:solidFill>
+                <a:latin typeface="微软雅黑"/>
+                <a:ea typeface="微软雅黑"/>
+                <a:latin typeface="微软雅黑"/>
+              </a:rPr>
+              <a:t>都留着。</a:t>
+            </a:r>
+          </a:p>
+        </p:txBody>
+      </p:sp>
+      <p:sp>
+        <p:nvSpPr>
+          <p:cNvPr id="33" name="TextBox 32"/>
+          <p:cNvSpPr txBox="1"/>
+          <p:nvPr/>
+        </p:nvSpPr>
+        <p:spPr>
+          <a:xfrm>
+            <a:off x="8046720" y="5193792"/>
+            <a:ext cx="3246120" cy="749808"/>
+          </a:xfrm>
+          <a:prstGeom prst="rect">
+            <a:avLst/>
+          </a:prstGeom>
+          <a:noFill/>
+        </p:spPr>
+        <p:txBody>
+          <a:bodyPr wrap="square" anchor="t"/>
+          <a:lstStyle/>
+          <a:p>
+            <a:pPr algn="l">
+              <a:lnSpc>
+                <a:spcPts val="2200"/>
+              </a:lnSpc>
+            </a:pPr>
+            <a:r>
+              <a:rPr sz="1400" b="1">
+                <a:solidFill>
+                  <a:srgbClr val="2D2D2D"/>
+                </a:solidFill>
+                <a:latin typeface="微软雅黑"/>
+                <a:ea typeface="微软雅黑"/>
+                <a:latin typeface="微软雅黑"/>
+              </a:rPr>
+              <a:t>对奇瑞、二级商、财务，</a:t>
+            </a:r>
+          </a:p>
+          <a:p>
+            <a:pPr algn="l">
+              <a:lnSpc>
+                <a:spcPts val="2200"/>
+              </a:lnSpc>
+            </a:pPr>
+            <a:r>
+              <a:rPr sz="1400" b="1">
+                <a:solidFill>
+                  <a:srgbClr val="2D2D2D"/>
+                </a:solidFill>
+                <a:latin typeface="微软雅黑"/>
+                <a:ea typeface="微软雅黑"/>
+                <a:latin typeface="微软雅黑"/>
+              </a:rPr>
+              <a:t>拿记录对。</a:t>
             </a:r>
           </a:p>
         </p:txBody>
       </p:sp>
       <p:cxnSp>
         <p:nvCxnSpPr>
-          <p:cNvPr id="32" name="Connector 31"/>
+          <p:cNvPr id="34" name="Connector 33"/>
           <p:cNvCxnSpPr/>
           <p:nvPr/>
         </p:nvCxnSpPr>
@@ -8123,7 +8547,7 @@
       </p:cxnSp>
       <p:sp>
         <p:nvSpPr>
-          <p:cNvPr id="33" name="TextBox 32"/>
+          <p:cNvPr id="35" name="TextBox 34"/>
           <p:cNvSpPr txBox="1"/>
           <p:nvPr/>
         </p:nvSpPr>
@@ -8158,7 +8582,7 @@
       </p:sp>
       <p:sp>
         <p:nvSpPr>
-          <p:cNvPr id="34" name="TextBox 33"/>
+          <p:cNvPr id="36" name="TextBox 35"/>
           <p:cNvSpPr txBox="1"/>
           <p:nvPr/>
         </p:nvSpPr>
@@ -8368,7 +8792,7 @@
                 <a:ea typeface="微软雅黑"/>
                 <a:latin typeface="Arial"/>
               </a:rPr>
-              <a:t>03   SHIFT</a:t>
+              <a:t>03   WHERE</a:t>
             </a:r>
           </a:p>
         </p:txBody>
@@ -8403,21 +8827,56 @@
                 <a:ea typeface="微软雅黑"/>
                 <a:latin typeface="微软雅黑"/>
               </a:rPr>
-              <a:t>不是把 Excel 做得更复杂</a:t>
-            </a:r>
-          </a:p>
-        </p:txBody>
-      </p:sp>
-      <p:sp>
-        <p:nvSpPr>
-          <p:cNvPr id="7" name="Rectangle 6"/>
+              <a:t>这四项结果，从同一套规则里来</a:t>
+            </a:r>
+          </a:p>
+        </p:txBody>
+      </p:sp>
+      <p:sp>
+        <p:nvSpPr>
+          <p:cNvPr id="7" name="TextBox 6"/>
+          <p:cNvSpPr txBox="1"/>
+          <p:nvPr/>
+        </p:nvSpPr>
+        <p:spPr>
+          <a:xfrm>
+            <a:off x="640080" y="1371600"/>
+            <a:ext cx="10972800" cy="411480"/>
+          </a:xfrm>
+          <a:prstGeom prst="rect">
+            <a:avLst/>
+          </a:prstGeom>
+          <a:noFill/>
+        </p:spPr>
+        <p:txBody>
+          <a:bodyPr wrap="square" anchor="t"/>
+          <a:lstStyle/>
+          <a:p>
+            <a:pPr algn="l"/>
+            <a:r>
+              <a:rPr sz="1600" b="0">
+                <a:solidFill>
+                  <a:srgbClr val="6B6B6B"/>
+                </a:solidFill>
+                <a:latin typeface="微软雅黑"/>
+                <a:ea typeface="微软雅黑"/>
+                <a:latin typeface="微软雅黑"/>
+              </a:rPr>
+              <a:t>依据仍由人上传。耗掉好几天的，是其后的计算、对表和解释。</a:t>
+            </a:r>
+          </a:p>
+        </p:txBody>
+      </p:sp>
+      <p:sp>
+        <p:nvSpPr>
+          <p:cNvPr id="8" name="Rectangle 7"/>
           <p:cNvSpPr/>
           <p:nvPr/>
         </p:nvSpPr>
         <p:spPr>
           <a:xfrm>
-            <a:off x="640080" y="1554480"/>
-            <a:ext cx="5212080" cy="4434840"/>
+            <a:off x="640080" y="2011680"/>
+            <a:ext cx="2743200" cy="3977639"/>
           </a:xfrm>
           <a:prstGeom prst="rect">
             <a:avLst/>
@@ -8455,14 +8914,14 @@
       </p:sp>
       <p:sp>
         <p:nvSpPr>
-          <p:cNvPr id="8" name="Rectangle 7"/>
+          <p:cNvPr id="9" name="Rectangle 8"/>
           <p:cNvSpPr/>
           <p:nvPr/>
         </p:nvSpPr>
         <p:spPr>
           <a:xfrm>
-            <a:off x="640080" y="1554480"/>
-            <a:ext cx="5212080" cy="41148"/>
+            <a:off x="640080" y="2011680"/>
+            <a:ext cx="2743200" cy="41148"/>
           </a:xfrm>
           <a:prstGeom prst="rect">
             <a:avLst/>
@@ -8498,49 +8957,14 @@
       </p:sp>
       <p:sp>
         <p:nvSpPr>
-          <p:cNvPr id="9" name="TextBox 8"/>
-          <p:cNvSpPr txBox="1"/>
-          <p:nvPr/>
-        </p:nvSpPr>
-        <p:spPr>
-          <a:xfrm>
-            <a:off x="960120" y="1874519"/>
-            <a:ext cx="4572000" cy="274320"/>
-          </a:xfrm>
-          <a:prstGeom prst="rect">
-            <a:avLst/>
-          </a:prstGeom>
-          <a:noFill/>
-        </p:spPr>
-        <p:txBody>
-          <a:bodyPr wrap="square" anchor="t"/>
-          <a:lstStyle/>
-          <a:p>
-            <a:pPr algn="l"/>
-            <a:r>
-              <a:rPr sz="1300" b="0">
-                <a:solidFill>
-                  <a:srgbClr val="8A8A8A"/>
-                </a:solidFill>
-                <a:latin typeface="微软雅黑"/>
-                <a:ea typeface="微软雅黑"/>
-                <a:latin typeface="微软雅黑"/>
-              </a:rPr>
-              <a:t>不是</a:t>
-            </a:r>
-          </a:p>
-        </p:txBody>
-      </p:sp>
-      <p:sp>
-        <p:nvSpPr>
           <p:cNvPr id="10" name="TextBox 9"/>
           <p:cNvSpPr txBox="1"/>
           <p:nvPr/>
         </p:nvSpPr>
         <p:spPr>
           <a:xfrm>
-            <a:off x="960120" y="2286000"/>
-            <a:ext cx="4663440" cy="914400"/>
+            <a:off x="859536" y="2267712"/>
+            <a:ext cx="2286000" cy="292608"/>
           </a:xfrm>
           <a:prstGeom prst="rect">
             <a:avLst/>
@@ -8553,15 +8977,15 @@
           <a:p>
             <a:pPr algn="l"/>
             <a:r>
-              <a:rPr sz="2400" b="1">
-                <a:solidFill>
-                  <a:srgbClr val="2D2D2D"/>
-                </a:solidFill>
-                <a:latin typeface="微软雅黑"/>
-                <a:ea typeface="微软雅黑"/>
-                <a:latin typeface="微软雅黑"/>
-              </a:rPr>
-              <a:t>再做一张更大的表</a:t>
+              <a:rPr sz="1300" b="0" spc="80">
+                <a:solidFill>
+                  <a:srgbClr val="D04A02"/>
+                </a:solidFill>
+                <a:latin typeface="Arial"/>
+                <a:ea typeface="微软雅黑"/>
+                <a:latin typeface="Arial"/>
+              </a:rPr>
+              <a:t>01</a:t>
             </a:r>
           </a:p>
         </p:txBody>
@@ -8574,8 +8998,43 @@
         </p:nvSpPr>
         <p:spPr>
           <a:xfrm>
-            <a:off x="960120" y="3474720"/>
-            <a:ext cx="4526280" cy="2011680"/>
+            <a:off x="859536" y="2743200"/>
+            <a:ext cx="2286000" cy="822960"/>
+          </a:xfrm>
+          <a:prstGeom prst="rect">
+            <a:avLst/>
+          </a:prstGeom>
+          <a:noFill/>
+        </p:spPr>
+        <p:txBody>
+          <a:bodyPr wrap="square" anchor="t"/>
+          <a:lstStyle/>
+          <a:p>
+            <a:pPr algn="l"/>
+            <a:r>
+              <a:rPr sz="2200" b="1">
+                <a:solidFill>
+                  <a:srgbClr val="2D2D2D"/>
+                </a:solidFill>
+                <a:latin typeface="微软雅黑"/>
+                <a:ea typeface="微软雅黑"/>
+                <a:latin typeface="微软雅黑"/>
+              </a:rPr>
+              <a:t>依据进入</a:t>
+            </a:r>
+          </a:p>
+        </p:txBody>
+      </p:sp>
+      <p:sp>
+        <p:nvSpPr>
+          <p:cNvPr id="12" name="TextBox 11"/>
+          <p:cNvSpPr txBox="1"/>
+          <p:nvPr/>
+        </p:nvSpPr>
+        <p:spPr>
+          <a:xfrm>
+            <a:off x="859536" y="3749039"/>
+            <a:ext cx="2286000" cy="1828800"/>
           </a:xfrm>
           <a:prstGeom prst="rect">
             <a:avLst/>
@@ -8600,21 +9059,57 @@
                 <a:ea typeface="微软雅黑"/>
                 <a:latin typeface="微软雅黑"/>
               </a:rPr>
-              <a:t>公式在私人文件夹。口径靠骨干记忆。对奇瑞、对二级商，各执一份表，只能扯皮。</a:t>
-            </a:r>
-          </a:p>
-        </p:txBody>
-      </p:sp>
-      <p:sp>
-        <p:nvSpPr>
-          <p:cNvPr id="12" name="Rectangle 11"/>
+              <a:t>钢价政策、BOM、</a:t>
+            </a:r>
+          </a:p>
+          <a:p>
+            <a:pPr algn="l">
+              <a:lnSpc>
+                <a:spcPts val="2600"/>
+              </a:lnSpc>
+            </a:pPr>
+            <a:r>
+              <a:rPr sz="1500" b="0">
+                <a:solidFill>
+                  <a:srgbClr val="6B6B6B"/>
+                </a:solidFill>
+                <a:latin typeface="微软雅黑"/>
+                <a:ea typeface="微软雅黑"/>
+                <a:latin typeface="微软雅黑"/>
+              </a:rPr>
+              <a:t>工艺和工程变更，</a:t>
+            </a:r>
+          </a:p>
+          <a:p>
+            <a:pPr algn="l">
+              <a:lnSpc>
+                <a:spcPts val="2600"/>
+              </a:lnSpc>
+            </a:pPr>
+            <a:r>
+              <a:rPr sz="1500" b="0">
+                <a:solidFill>
+                  <a:srgbClr val="6B6B6B"/>
+                </a:solidFill>
+                <a:latin typeface="微软雅黑"/>
+                <a:ea typeface="微软雅黑"/>
+                <a:latin typeface="微软雅黑"/>
+              </a:rPr>
+              <a:t>按月纳入。</a:t>
+            </a:r>
+          </a:p>
+        </p:txBody>
+      </p:sp>
+      <p:sp>
+        <p:nvSpPr>
+          <p:cNvPr id="13" name="Rectangle 12"/>
           <p:cNvSpPr/>
           <p:nvPr/>
         </p:nvSpPr>
         <p:spPr>
           <a:xfrm>
-            <a:off x="6309360" y="1554480"/>
-            <a:ext cx="5212080" cy="4434840"/>
+            <a:off x="3520439" y="2011680"/>
+            <a:ext cx="2743200" cy="3977639"/>
           </a:xfrm>
           <a:prstGeom prst="rect">
             <a:avLst/>
@@ -8652,14 +9147,14 @@
       </p:sp>
       <p:sp>
         <p:nvSpPr>
-          <p:cNvPr id="13" name="Rectangle 12"/>
+          <p:cNvPr id="14" name="Rectangle 13"/>
           <p:cNvSpPr/>
           <p:nvPr/>
         </p:nvSpPr>
         <p:spPr>
           <a:xfrm>
-            <a:off x="6309360" y="1554480"/>
-            <a:ext cx="5212080" cy="41148"/>
+            <a:off x="3520439" y="2011680"/>
+            <a:ext cx="2743200" cy="41148"/>
           </a:xfrm>
           <a:prstGeom prst="rect">
             <a:avLst/>
@@ -8695,49 +9190,14 @@
       </p:sp>
       <p:sp>
         <p:nvSpPr>
-          <p:cNvPr id="14" name="TextBox 13"/>
-          <p:cNvSpPr txBox="1"/>
-          <p:nvPr/>
-        </p:nvSpPr>
-        <p:spPr>
-          <a:xfrm>
-            <a:off x="6629400" y="1874519"/>
-            <a:ext cx="4572000" cy="274320"/>
-          </a:xfrm>
-          <a:prstGeom prst="rect">
-            <a:avLst/>
-          </a:prstGeom>
-          <a:noFill/>
-        </p:spPr>
-        <p:txBody>
-          <a:bodyPr wrap="square" anchor="t"/>
-          <a:lstStyle/>
-          <a:p>
-            <a:pPr algn="l"/>
-            <a:r>
-              <a:rPr sz="1300" b="0">
-                <a:solidFill>
-                  <a:srgbClr val="D04A02"/>
-                </a:solidFill>
-                <a:latin typeface="微软雅黑"/>
-                <a:ea typeface="微软雅黑"/>
-                <a:latin typeface="微软雅黑"/>
-              </a:rPr>
-              <a:t>而是</a:t>
-            </a:r>
-          </a:p>
-        </p:txBody>
-      </p:sp>
-      <p:sp>
-        <p:nvSpPr>
           <p:cNvPr id="15" name="TextBox 14"/>
           <p:cNvSpPr txBox="1"/>
           <p:nvPr/>
         </p:nvSpPr>
         <p:spPr>
           <a:xfrm>
-            <a:off x="6629400" y="2286000"/>
-            <a:ext cx="4663440" cy="914400"/>
+            <a:off x="3739895" y="2267712"/>
+            <a:ext cx="2286000" cy="292608"/>
           </a:xfrm>
           <a:prstGeom prst="rect">
             <a:avLst/>
@@ -8750,15 +9210,15 @@
           <a:p>
             <a:pPr algn="l"/>
             <a:r>
-              <a:rPr sz="2400" b="1">
-                <a:solidFill>
-                  <a:srgbClr val="2D2D2D"/>
-                </a:solidFill>
-                <a:latin typeface="微软雅黑"/>
-                <a:ea typeface="微软雅黑"/>
-                <a:latin typeface="微软雅黑"/>
-              </a:rPr>
-              <a:t>把核价变成公司能力</a:t>
+              <a:rPr sz="1300" b="0" spc="80">
+                <a:solidFill>
+                  <a:srgbClr val="D04A02"/>
+                </a:solidFill>
+                <a:latin typeface="Arial"/>
+                <a:ea typeface="微软雅黑"/>
+                <a:latin typeface="Arial"/>
+              </a:rPr>
+              <a:t>02</a:t>
             </a:r>
           </a:p>
         </p:txBody>
@@ -8771,8 +9231,43 @@
         </p:nvSpPr>
         <p:spPr>
           <a:xfrm>
-            <a:off x="6629400" y="3474720"/>
-            <a:ext cx="4572000" cy="2011680"/>
+            <a:off x="3739895" y="2743200"/>
+            <a:ext cx="2286000" cy="822960"/>
+          </a:xfrm>
+          <a:prstGeom prst="rect">
+            <a:avLst/>
+          </a:prstGeom>
+          <a:noFill/>
+        </p:spPr>
+        <p:txBody>
+          <a:bodyPr wrap="square" anchor="t"/>
+          <a:lstStyle/>
+          <a:p>
+            <a:pPr algn="l"/>
+            <a:r>
+              <a:rPr sz="2200" b="1">
+                <a:solidFill>
+                  <a:srgbClr val="2D2D2D"/>
+                </a:solidFill>
+                <a:latin typeface="微软雅黑"/>
+                <a:ea typeface="微软雅黑"/>
+                <a:latin typeface="微软雅黑"/>
+              </a:rPr>
+              <a:t>引擎计算</a:t>
+            </a:r>
+          </a:p>
+        </p:txBody>
+      </p:sp>
+      <p:sp>
+        <p:nvSpPr>
+          <p:cNvPr id="17" name="TextBox 16"/>
+          <p:cNvSpPr txBox="1"/>
+          <p:nvPr/>
+        </p:nvSpPr>
+        <p:spPr>
+          <a:xfrm>
+            <a:off x="3739895" y="3749039"/>
+            <a:ext cx="2286000" cy="1828800"/>
           </a:xfrm>
           <a:prstGeom prst="rect">
             <a:avLst/>
@@ -8797,14 +9292,480 @@
                 <a:ea typeface="微软雅黑"/>
                 <a:latin typeface="微软雅黑"/>
               </a:rPr>
-              <a:t>规则、依据、结果留在平台。人可以交接。这是数字化建设真正落地的那一步。</a:t>
+              <a:t>总成价与采购价，</a:t>
+            </a:r>
+          </a:p>
+          <a:p>
+            <a:pPr algn="l">
+              <a:lnSpc>
+                <a:spcPts val="2600"/>
+              </a:lnSpc>
+            </a:pPr>
+            <a:r>
+              <a:rPr sz="1500" b="0">
+                <a:solidFill>
+                  <a:srgbClr val="6B6B6B"/>
+                </a:solidFill>
+                <a:latin typeface="微软雅黑"/>
+                <a:ea typeface="微软雅黑"/>
+                <a:latin typeface="微软雅黑"/>
+              </a:rPr>
+              <a:t>同一套规则。</a:t>
+            </a:r>
+          </a:p>
+          <a:p>
+            <a:pPr algn="l">
+              <a:lnSpc>
+                <a:spcPts val="2600"/>
+              </a:lnSpc>
+            </a:pPr>
+            <a:r>
+              <a:rPr sz="1500" b="0">
+                <a:solidFill>
+                  <a:srgbClr val="6B6B6B"/>
+                </a:solidFill>
+                <a:latin typeface="微软雅黑"/>
+                <a:ea typeface="微软雅黑"/>
+                <a:latin typeface="微软雅黑"/>
+              </a:rPr>
+              <a:t>约 20 秒。</a:t>
+            </a:r>
+          </a:p>
+        </p:txBody>
+      </p:sp>
+      <p:sp>
+        <p:nvSpPr>
+          <p:cNvPr id="18" name="Rectangle 17"/>
+          <p:cNvSpPr/>
+          <p:nvPr/>
+        </p:nvSpPr>
+        <p:spPr>
+          <a:xfrm>
+            <a:off x="6400800" y="2011680"/>
+            <a:ext cx="2743200" cy="3977639"/>
+          </a:xfrm>
+          <a:prstGeom prst="rect">
+            <a:avLst/>
+          </a:prstGeom>
+          <a:solidFill>
+            <a:srgbClr val="FFFFFF"/>
+          </a:solidFill>
+          <a:ln w="9525">
+            <a:solidFill>
+              <a:srgbClr val="E6E0D6"/>
+            </a:solidFill>
+          </a:ln>
+        </p:spPr>
+        <p:style>
+          <a:lnRef idx="1">
+            <a:schemeClr val="accent1"/>
+          </a:lnRef>
+          <a:fillRef idx="3">
+            <a:schemeClr val="accent1"/>
+          </a:fillRef>
+          <a:effectRef idx="2">
+            <a:schemeClr val="accent1"/>
+          </a:effectRef>
+          <a:fontRef idx="minor">
+            <a:schemeClr val="lt1"/>
+          </a:fontRef>
+        </p:style>
+        <p:txBody>
+          <a:bodyPr rtlCol="0" anchor="ctr"/>
+          <a:lstStyle/>
+          <a:p>
+            <a:pPr algn="ctr"/>
+          </a:p>
+        </p:txBody>
+      </p:sp>
+      <p:sp>
+        <p:nvSpPr>
+          <p:cNvPr id="19" name="Rectangle 18"/>
+          <p:cNvSpPr/>
+          <p:nvPr/>
+        </p:nvSpPr>
+        <p:spPr>
+          <a:xfrm>
+            <a:off x="6400800" y="2011680"/>
+            <a:ext cx="2743200" cy="41148"/>
+          </a:xfrm>
+          <a:prstGeom prst="rect">
+            <a:avLst/>
+          </a:prstGeom>
+          <a:solidFill>
+            <a:srgbClr val="D04A02"/>
+          </a:solidFill>
+          <a:ln>
+            <a:noFill/>
+          </a:ln>
+        </p:spPr>
+        <p:style>
+          <a:lnRef idx="1">
+            <a:schemeClr val="accent1"/>
+          </a:lnRef>
+          <a:fillRef idx="3">
+            <a:schemeClr val="accent1"/>
+          </a:fillRef>
+          <a:effectRef idx="2">
+            <a:schemeClr val="accent1"/>
+          </a:effectRef>
+          <a:fontRef idx="minor">
+            <a:schemeClr val="lt1"/>
+          </a:fontRef>
+        </p:style>
+        <p:txBody>
+          <a:bodyPr rtlCol="0" anchor="ctr"/>
+          <a:lstStyle/>
+          <a:p>
+            <a:pPr algn="ctr"/>
+          </a:p>
+        </p:txBody>
+      </p:sp>
+      <p:sp>
+        <p:nvSpPr>
+          <p:cNvPr id="20" name="TextBox 19"/>
+          <p:cNvSpPr txBox="1"/>
+          <p:nvPr/>
+        </p:nvSpPr>
+        <p:spPr>
+          <a:xfrm>
+            <a:off x="6620256" y="2267712"/>
+            <a:ext cx="2286000" cy="292608"/>
+          </a:xfrm>
+          <a:prstGeom prst="rect">
+            <a:avLst/>
+          </a:prstGeom>
+          <a:noFill/>
+        </p:spPr>
+        <p:txBody>
+          <a:bodyPr wrap="square" anchor="t"/>
+          <a:lstStyle/>
+          <a:p>
+            <a:pPr algn="l"/>
+            <a:r>
+              <a:rPr sz="1300" b="0" spc="80">
+                <a:solidFill>
+                  <a:srgbClr val="D04A02"/>
+                </a:solidFill>
+                <a:latin typeface="Arial"/>
+                <a:ea typeface="微软雅黑"/>
+                <a:latin typeface="Arial"/>
+              </a:rPr>
+              <a:t>03</a:t>
+            </a:r>
+          </a:p>
+        </p:txBody>
+      </p:sp>
+      <p:sp>
+        <p:nvSpPr>
+          <p:cNvPr id="21" name="TextBox 20"/>
+          <p:cNvSpPr txBox="1"/>
+          <p:nvPr/>
+        </p:nvSpPr>
+        <p:spPr>
+          <a:xfrm>
+            <a:off x="6620256" y="2743200"/>
+            <a:ext cx="2286000" cy="822960"/>
+          </a:xfrm>
+          <a:prstGeom prst="rect">
+            <a:avLst/>
+          </a:prstGeom>
+          <a:noFill/>
+        </p:spPr>
+        <p:txBody>
+          <a:bodyPr wrap="square" anchor="t"/>
+          <a:lstStyle/>
+          <a:p>
+            <a:pPr algn="l"/>
+            <a:r>
+              <a:rPr sz="2200" b="1">
+                <a:solidFill>
+                  <a:srgbClr val="2D2D2D"/>
+                </a:solidFill>
+                <a:latin typeface="微软雅黑"/>
+                <a:ea typeface="微软雅黑"/>
+                <a:latin typeface="微软雅黑"/>
+              </a:rPr>
+              <a:t>协议落地</a:t>
+            </a:r>
+          </a:p>
+        </p:txBody>
+      </p:sp>
+      <p:sp>
+        <p:nvSpPr>
+          <p:cNvPr id="22" name="TextBox 21"/>
+          <p:cNvSpPr txBox="1"/>
+          <p:nvPr/>
+        </p:nvSpPr>
+        <p:spPr>
+          <a:xfrm>
+            <a:off x="6620256" y="3749039"/>
+            <a:ext cx="2286000" cy="1828800"/>
+          </a:xfrm>
+          <a:prstGeom prst="rect">
+            <a:avLst/>
+          </a:prstGeom>
+          <a:noFill/>
+        </p:spPr>
+        <p:txBody>
+          <a:bodyPr wrap="square" anchor="t"/>
+          <a:lstStyle/>
+          <a:p>
+            <a:pPr algn="l">
+              <a:lnSpc>
+                <a:spcPts val="2600"/>
+              </a:lnSpc>
+            </a:pPr>
+            <a:r>
+              <a:rPr sz="1500" b="0">
+                <a:solidFill>
+                  <a:srgbClr val="6B6B6B"/>
+                </a:solidFill>
+                <a:latin typeface="微软雅黑"/>
+                <a:ea typeface="微软雅黑"/>
+                <a:latin typeface="微软雅黑"/>
+              </a:rPr>
+              <a:t>采购协议按结果出。</a:t>
+            </a:r>
+          </a:p>
+          <a:p>
+            <a:pPr algn="l">
+              <a:lnSpc>
+                <a:spcPts val="2600"/>
+              </a:lnSpc>
+            </a:pPr>
+            <a:r>
+              <a:rPr sz="1500" b="0">
+                <a:solidFill>
+                  <a:srgbClr val="6B6B6B"/>
+                </a:solidFill>
+                <a:latin typeface="微软雅黑"/>
+                <a:ea typeface="微软雅黑"/>
+                <a:latin typeface="微软雅黑"/>
+              </a:rPr>
+              <a:t>不必再抄一版表。</a:t>
+            </a:r>
+          </a:p>
+        </p:txBody>
+      </p:sp>
+      <p:sp>
+        <p:nvSpPr>
+          <p:cNvPr id="23" name="Rectangle 22"/>
+          <p:cNvSpPr/>
+          <p:nvPr/>
+        </p:nvSpPr>
+        <p:spPr>
+          <a:xfrm>
+            <a:off x="9281159" y="2011680"/>
+            <a:ext cx="2743200" cy="3977639"/>
+          </a:xfrm>
+          <a:prstGeom prst="rect">
+            <a:avLst/>
+          </a:prstGeom>
+          <a:solidFill>
+            <a:srgbClr val="FFFFFF"/>
+          </a:solidFill>
+          <a:ln w="9525">
+            <a:solidFill>
+              <a:srgbClr val="E6E0D6"/>
+            </a:solidFill>
+          </a:ln>
+        </p:spPr>
+        <p:style>
+          <a:lnRef idx="1">
+            <a:schemeClr val="accent1"/>
+          </a:lnRef>
+          <a:fillRef idx="3">
+            <a:schemeClr val="accent1"/>
+          </a:fillRef>
+          <a:effectRef idx="2">
+            <a:schemeClr val="accent1"/>
+          </a:effectRef>
+          <a:fontRef idx="minor">
+            <a:schemeClr val="lt1"/>
+          </a:fontRef>
+        </p:style>
+        <p:txBody>
+          <a:bodyPr rtlCol="0" anchor="ctr"/>
+          <a:lstStyle/>
+          <a:p>
+            <a:pPr algn="ctr"/>
+          </a:p>
+        </p:txBody>
+      </p:sp>
+      <p:sp>
+        <p:nvSpPr>
+          <p:cNvPr id="24" name="Rectangle 23"/>
+          <p:cNvSpPr/>
+          <p:nvPr/>
+        </p:nvSpPr>
+        <p:spPr>
+          <a:xfrm>
+            <a:off x="9281159" y="2011680"/>
+            <a:ext cx="2743200" cy="41148"/>
+          </a:xfrm>
+          <a:prstGeom prst="rect">
+            <a:avLst/>
+          </a:prstGeom>
+          <a:solidFill>
+            <a:srgbClr val="D04A02"/>
+          </a:solidFill>
+          <a:ln>
+            <a:noFill/>
+          </a:ln>
+        </p:spPr>
+        <p:style>
+          <a:lnRef idx="1">
+            <a:schemeClr val="accent1"/>
+          </a:lnRef>
+          <a:fillRef idx="3">
+            <a:schemeClr val="accent1"/>
+          </a:fillRef>
+          <a:effectRef idx="2">
+            <a:schemeClr val="accent1"/>
+          </a:effectRef>
+          <a:fontRef idx="minor">
+            <a:schemeClr val="lt1"/>
+          </a:fontRef>
+        </p:style>
+        <p:txBody>
+          <a:bodyPr rtlCol="0" anchor="ctr"/>
+          <a:lstStyle/>
+          <a:p>
+            <a:pPr algn="ctr"/>
+          </a:p>
+        </p:txBody>
+      </p:sp>
+      <p:sp>
+        <p:nvSpPr>
+          <p:cNvPr id="25" name="TextBox 24"/>
+          <p:cNvSpPr txBox="1"/>
+          <p:nvPr/>
+        </p:nvSpPr>
+        <p:spPr>
+          <a:xfrm>
+            <a:off x="9500615" y="2267712"/>
+            <a:ext cx="2286000" cy="292608"/>
+          </a:xfrm>
+          <a:prstGeom prst="rect">
+            <a:avLst/>
+          </a:prstGeom>
+          <a:noFill/>
+        </p:spPr>
+        <p:txBody>
+          <a:bodyPr wrap="square" anchor="t"/>
+          <a:lstStyle/>
+          <a:p>
+            <a:pPr algn="l"/>
+            <a:r>
+              <a:rPr sz="1300" b="0" spc="80">
+                <a:solidFill>
+                  <a:srgbClr val="D04A02"/>
+                </a:solidFill>
+                <a:latin typeface="Arial"/>
+                <a:ea typeface="微软雅黑"/>
+                <a:latin typeface="Arial"/>
+              </a:rPr>
+              <a:t>04</a:t>
+            </a:r>
+          </a:p>
+        </p:txBody>
+      </p:sp>
+      <p:sp>
+        <p:nvSpPr>
+          <p:cNvPr id="26" name="TextBox 25"/>
+          <p:cNvSpPr txBox="1"/>
+          <p:nvPr/>
+        </p:nvSpPr>
+        <p:spPr>
+          <a:xfrm>
+            <a:off x="9500615" y="2743200"/>
+            <a:ext cx="2286000" cy="822960"/>
+          </a:xfrm>
+          <a:prstGeom prst="rect">
+            <a:avLst/>
+          </a:prstGeom>
+          <a:noFill/>
+        </p:spPr>
+        <p:txBody>
+          <a:bodyPr wrap="square" anchor="t"/>
+          <a:lstStyle/>
+          <a:p>
+            <a:pPr algn="l"/>
+            <a:r>
+              <a:rPr sz="2200" b="1">
+                <a:solidFill>
+                  <a:srgbClr val="2D2D2D"/>
+                </a:solidFill>
+                <a:latin typeface="微软雅黑"/>
+                <a:ea typeface="微软雅黑"/>
+                <a:latin typeface="微软雅黑"/>
+              </a:rPr>
+              <a:t>只解释</a:t>
+            </a:r>
+          </a:p>
+        </p:txBody>
+      </p:sp>
+      <p:sp>
+        <p:nvSpPr>
+          <p:cNvPr id="27" name="TextBox 26"/>
+          <p:cNvSpPr txBox="1"/>
+          <p:nvPr/>
+        </p:nvSpPr>
+        <p:spPr>
+          <a:xfrm>
+            <a:off x="9500615" y="3749039"/>
+            <a:ext cx="2286000" cy="1828800"/>
+          </a:xfrm>
+          <a:prstGeom prst="rect">
+            <a:avLst/>
+          </a:prstGeom>
+          <a:noFill/>
+        </p:spPr>
+        <p:txBody>
+          <a:bodyPr wrap="square" anchor="t"/>
+          <a:lstStyle/>
+          <a:p>
+            <a:pPr algn="l">
+              <a:lnSpc>
+                <a:spcPts val="2600"/>
+              </a:lnSpc>
+            </a:pPr>
+            <a:r>
+              <a:rPr sz="1500" b="0">
+                <a:solidFill>
+                  <a:srgbClr val="6B6B6B"/>
+                </a:solidFill>
+                <a:latin typeface="微软雅黑"/>
+                <a:ea typeface="微软雅黑"/>
+                <a:latin typeface="微软雅黑"/>
+              </a:rPr>
+              <a:t>AI 讲涨跌原因。</a:t>
+            </a:r>
+          </a:p>
+          <a:p>
+            <a:pPr algn="l">
+              <a:lnSpc>
+                <a:spcPts val="2600"/>
+              </a:lnSpc>
+            </a:pPr>
+            <a:r>
+              <a:rPr sz="1500" b="0">
+                <a:solidFill>
+                  <a:srgbClr val="6B6B6B"/>
+                </a:solidFill>
+                <a:latin typeface="微软雅黑"/>
+                <a:ea typeface="微软雅黑"/>
+                <a:latin typeface="微软雅黑"/>
+              </a:rPr>
+              <a:t>价格只认引擎。</a:t>
             </a:r>
           </a:p>
         </p:txBody>
       </p:sp>
       <p:cxnSp>
         <p:nvCxnSpPr>
-          <p:cNvPr id="17" name="Connector 16"/>
+          <p:cNvPr id="28" name="Connector 27"/>
           <p:cNvCxnSpPr/>
           <p:nvPr/>
         </p:nvCxnSpPr>
@@ -8839,7 +9800,7 @@
       </p:cxnSp>
       <p:sp>
         <p:nvSpPr>
-          <p:cNvPr id="18" name="TextBox 17"/>
+          <p:cNvPr id="29" name="TextBox 28"/>
           <p:cNvSpPr txBox="1"/>
           <p:nvPr/>
         </p:nvSpPr>
@@ -8874,7 +9835,7 @@
       </p:sp>
       <p:sp>
         <p:nvSpPr>
-          <p:cNvPr id="19" name="TextBox 18"/>
+          <p:cNvPr id="30" name="TextBox 29"/>
           <p:cNvSpPr txBox="1"/>
           <p:nvPr/>
         </p:nvSpPr>
@@ -9084,7 +10045,7 @@
                 <a:ea typeface="微软雅黑"/>
                 <a:latin typeface="Arial"/>
               </a:rPr>
-              <a:t>04   TWO BOOKS</a:t>
+              <a:t>04   PEOPLE</a:t>
             </a:r>
           </a:p>
         </p:txBody>
@@ -9119,7 +10080,7 @@
                 <a:ea typeface="微软雅黑"/>
                 <a:latin typeface="微软雅黑"/>
               </a:rPr>
-              <a:t>两本钱要对齐，设变不能再是糊涂账</a:t>
+              <a:t>熟练人员不必再耗在做表上</a:t>
             </a:r>
           </a:p>
         </p:txBody>
@@ -9133,7 +10094,7 @@
         <p:spPr>
           <a:xfrm>
             <a:off x="640080" y="1554480"/>
-            <a:ext cx="3611880" cy="4434840"/>
+            <a:ext cx="5212080" cy="4434840"/>
           </a:xfrm>
           <a:prstGeom prst="rect">
             <a:avLst/>
@@ -9178,7 +10139,7 @@
         <p:spPr>
           <a:xfrm>
             <a:off x="640080" y="1554480"/>
-            <a:ext cx="3611880" cy="41148"/>
+            <a:ext cx="5212080" cy="41148"/>
           </a:xfrm>
           <a:prstGeom prst="rect">
             <a:avLst/>
@@ -9220,8 +10181,8 @@
         </p:nvSpPr>
         <p:spPr>
           <a:xfrm>
-            <a:off x="896112" y="1874519"/>
-            <a:ext cx="3108960" cy="292608"/>
+            <a:off x="960120" y="1828800"/>
+            <a:ext cx="4572000" cy="274320"/>
           </a:xfrm>
           <a:prstGeom prst="rect">
             <a:avLst/>
@@ -9236,13 +10197,13 @@
             <a:r>
               <a:rPr sz="1300" b="0">
                 <a:solidFill>
-                  <a:srgbClr val="D04A02"/>
-                </a:solidFill>
-                <a:latin typeface="微软雅黑"/>
-                <a:ea typeface="微软雅黑"/>
-                <a:latin typeface="微软雅黑"/>
-              </a:rPr>
-              <a:t>商务</a:t>
+                  <a:srgbClr val="8A8A8A"/>
+                </a:solidFill>
+                <a:latin typeface="微软雅黑"/>
+                <a:ea typeface="微软雅黑"/>
+                <a:latin typeface="微软雅黑"/>
+              </a:rPr>
+              <a:t>Excel 手工</a:t>
             </a:r>
           </a:p>
         </p:txBody>
@@ -9255,8 +10216,8 @@
         </p:nvSpPr>
         <p:spPr>
           <a:xfrm>
-            <a:off x="896112" y="2286000"/>
-            <a:ext cx="3108960" cy="777240"/>
+            <a:off x="960120" y="2286000"/>
+            <a:ext cx="4663440" cy="1051560"/>
           </a:xfrm>
           <a:prstGeom prst="rect">
             <a:avLst/>
@@ -9267,9 +10228,13 @@
           <a:bodyPr wrap="square" anchor="t"/>
           <a:lstStyle/>
           <a:p>
-            <a:pPr algn="l"/>
-            <a:r>
-              <a:rPr sz="2200" b="1">
+            <a:pPr algn="l">
+              <a:lnSpc>
+                <a:spcPts val="4200"/>
+              </a:lnSpc>
+            </a:pPr>
+            <a:r>
+              <a:rPr sz="3200" b="1">
                 <a:solidFill>
                   <a:srgbClr val="2D2D2D"/>
                 </a:solidFill>
@@ -9277,7 +10242,25 @@
                 <a:ea typeface="微软雅黑"/>
                 <a:latin typeface="微软雅黑"/>
               </a:rPr>
-              <a:t>总成价</a:t>
+              <a:t>熟练人员</a:t>
+            </a:r>
+          </a:p>
+          <a:p>
+            <a:pPr algn="l">
+              <a:lnSpc>
+                <a:spcPts val="4200"/>
+              </a:lnSpc>
+            </a:pPr>
+            <a:r>
+              <a:rPr sz="3200" b="1">
+                <a:solidFill>
+                  <a:srgbClr val="2D2D2D"/>
+                </a:solidFill>
+                <a:latin typeface="微软雅黑"/>
+                <a:ea typeface="微软雅黑"/>
+                <a:latin typeface="微软雅黑"/>
+              </a:rPr>
+              <a:t>好几天</a:t>
             </a:r>
           </a:p>
         </p:txBody>
@@ -9290,8 +10273,8 @@
         </p:nvSpPr>
         <p:spPr>
           <a:xfrm>
-            <a:off x="896112" y="3246120"/>
-            <a:ext cx="3108960" cy="2286000"/>
+            <a:off x="960120" y="3977639"/>
+            <a:ext cx="4526280" cy="1645920"/>
           </a:xfrm>
           <a:prstGeom prst="rect">
             <a:avLst/>
@@ -9316,7 +10299,43 @@
                 <a:ea typeface="微软雅黑"/>
                 <a:latin typeface="微软雅黑"/>
               </a:rPr>
-              <a:t>开票给奇瑞的售价。谈价、开票、对账看这一本。</a:t>
+              <a:t>一事一议、总成、采购对象，</a:t>
+            </a:r>
+          </a:p>
+          <a:p>
+            <a:pPr algn="l">
+              <a:lnSpc>
+                <a:spcPts val="2600"/>
+              </a:lnSpc>
+            </a:pPr>
+            <a:r>
+              <a:rPr sz="1500" b="0">
+                <a:solidFill>
+                  <a:srgbClr val="6B6B6B"/>
+                </a:solidFill>
+                <a:latin typeface="微软雅黑"/>
+                <a:ea typeface="微软雅黑"/>
+                <a:latin typeface="微软雅黑"/>
+              </a:rPr>
+              <a:t>都压在这几天里。</a:t>
+            </a:r>
+          </a:p>
+          <a:p>
+            <a:pPr algn="l">
+              <a:lnSpc>
+                <a:spcPts val="2600"/>
+              </a:lnSpc>
+            </a:pPr>
+            <a:r>
+              <a:rPr sz="1500" b="0">
+                <a:solidFill>
+                  <a:srgbClr val="6B6B6B"/>
+                </a:solidFill>
+                <a:latin typeface="微软雅黑"/>
+                <a:ea typeface="微软雅黑"/>
+                <a:latin typeface="微软雅黑"/>
+              </a:rPr>
+              <a:t>人一走，账就停。</a:t>
             </a:r>
           </a:p>
         </p:txBody>
@@ -9329,8 +10348,8 @@
         </p:nvSpPr>
         <p:spPr>
           <a:xfrm>
-            <a:off x="4434840" y="1554480"/>
-            <a:ext cx="3611880" cy="4434840"/>
+            <a:off x="6309360" y="1554480"/>
+            <a:ext cx="5212080" cy="4434840"/>
           </a:xfrm>
           <a:prstGeom prst="rect">
             <a:avLst/>
@@ -9374,8 +10393,8 @@
         </p:nvSpPr>
         <p:spPr>
           <a:xfrm>
-            <a:off x="4434840" y="1554480"/>
-            <a:ext cx="3611880" cy="41148"/>
+            <a:off x="6309360" y="1554480"/>
+            <a:ext cx="5212080" cy="41148"/>
           </a:xfrm>
           <a:prstGeom prst="rect">
             <a:avLst/>
@@ -9417,8 +10436,8 @@
         </p:nvSpPr>
         <p:spPr>
           <a:xfrm>
-            <a:off x="4690872" y="1874519"/>
-            <a:ext cx="3108960" cy="292608"/>
+            <a:off x="6629400" y="1828800"/>
+            <a:ext cx="4572000" cy="274320"/>
           </a:xfrm>
           <a:prstGeom prst="rect">
             <a:avLst/>
@@ -9439,7 +10458,7 @@
                 <a:ea typeface="微软雅黑"/>
                 <a:latin typeface="微软雅黑"/>
               </a:rPr>
-              <a:t>采购</a:t>
+              <a:t>现网</a:t>
             </a:r>
           </a:p>
         </p:txBody>
@@ -9452,8 +10471,8 @@
         </p:nvSpPr>
         <p:spPr>
           <a:xfrm>
-            <a:off x="4690872" y="2286000"/>
-            <a:ext cx="3108960" cy="777240"/>
+            <a:off x="6629400" y="2286000"/>
+            <a:ext cx="4663440" cy="1051560"/>
           </a:xfrm>
           <a:prstGeom prst="rect">
             <a:avLst/>
@@ -9464,9 +10483,13 @@
           <a:bodyPr wrap="square" anchor="t"/>
           <a:lstStyle/>
           <a:p>
-            <a:pPr algn="l"/>
-            <a:r>
-              <a:rPr sz="2200" b="1">
+            <a:pPr algn="l">
+              <a:lnSpc>
+                <a:spcPts val="4200"/>
+              </a:lnSpc>
+            </a:pPr>
+            <a:r>
+              <a:rPr sz="3200" b="1">
                 <a:solidFill>
                   <a:srgbClr val="2D2D2D"/>
                 </a:solidFill>
@@ -9474,7 +10497,25 @@
                 <a:ea typeface="微软雅黑"/>
                 <a:latin typeface="微软雅黑"/>
               </a:rPr>
-              <a:t>采购对象</a:t>
+              <a:t>上传之后</a:t>
+            </a:r>
+          </a:p>
+          <a:p>
+            <a:pPr algn="l">
+              <a:lnSpc>
+                <a:spcPts val="4200"/>
+              </a:lnSpc>
+            </a:pPr>
+            <a:r>
+              <a:rPr sz="3200" b="1">
+                <a:solidFill>
+                  <a:srgbClr val="2D2D2D"/>
+                </a:solidFill>
+                <a:latin typeface="微软雅黑"/>
+                <a:ea typeface="微软雅黑"/>
+                <a:latin typeface="微软雅黑"/>
+              </a:rPr>
+              <a:t>约 20 秒</a:t>
             </a:r>
           </a:p>
         </p:txBody>
@@ -9487,8 +10528,8 @@
         </p:nvSpPr>
         <p:spPr>
           <a:xfrm>
-            <a:off x="4690872" y="3246120"/>
-            <a:ext cx="3108960" cy="2286000"/>
+            <a:off x="6629400" y="3977639"/>
+            <a:ext cx="4572000" cy="1645920"/>
           </a:xfrm>
           <a:prstGeom prst="rect">
             <a:avLst/>
@@ -9513,188 +10554,9 @@
                 <a:ea typeface="微软雅黑"/>
                 <a:latin typeface="微软雅黑"/>
               </a:rPr>
-              <a:t>向二级商采购的价。该付多少、协议怎么签看这一本。</a:t>
-            </a:r>
-          </a:p>
-        </p:txBody>
-      </p:sp>
-      <p:sp>
-        <p:nvSpPr>
-          <p:cNvPr id="17" name="Rectangle 16"/>
-          <p:cNvSpPr/>
-          <p:nvPr/>
-        </p:nvSpPr>
-        <p:spPr>
-          <a:xfrm>
-            <a:off x="8229600" y="1554480"/>
-            <a:ext cx="3611880" cy="4434840"/>
-          </a:xfrm>
-          <a:prstGeom prst="rect">
-            <a:avLst/>
-          </a:prstGeom>
-          <a:solidFill>
-            <a:srgbClr val="FFFFFF"/>
-          </a:solidFill>
-          <a:ln w="9525">
-            <a:solidFill>
-              <a:srgbClr val="E6E0D6"/>
-            </a:solidFill>
-          </a:ln>
-        </p:spPr>
-        <p:style>
-          <a:lnRef idx="1">
-            <a:schemeClr val="accent1"/>
-          </a:lnRef>
-          <a:fillRef idx="3">
-            <a:schemeClr val="accent1"/>
-          </a:fillRef>
-          <a:effectRef idx="2">
-            <a:schemeClr val="accent1"/>
-          </a:effectRef>
-          <a:fontRef idx="minor">
-            <a:schemeClr val="lt1"/>
-          </a:fontRef>
-        </p:style>
-        <p:txBody>
-          <a:bodyPr rtlCol="0" anchor="ctr"/>
-          <a:lstStyle/>
-          <a:p>
-            <a:pPr algn="ctr"/>
-          </a:p>
-        </p:txBody>
-      </p:sp>
-      <p:sp>
-        <p:nvSpPr>
-          <p:cNvPr id="18" name="Rectangle 17"/>
-          <p:cNvSpPr/>
-          <p:nvPr/>
-        </p:nvSpPr>
-        <p:spPr>
-          <a:xfrm>
-            <a:off x="8229600" y="1554480"/>
-            <a:ext cx="3611880" cy="41148"/>
-          </a:xfrm>
-          <a:prstGeom prst="rect">
-            <a:avLst/>
-          </a:prstGeom>
-          <a:solidFill>
-            <a:srgbClr val="D04A02"/>
-          </a:solidFill>
-          <a:ln>
-            <a:noFill/>
-          </a:ln>
-        </p:spPr>
-        <p:style>
-          <a:lnRef idx="1">
-            <a:schemeClr val="accent1"/>
-          </a:lnRef>
-          <a:fillRef idx="3">
-            <a:schemeClr val="accent1"/>
-          </a:fillRef>
-          <a:effectRef idx="2">
-            <a:schemeClr val="accent1"/>
-          </a:effectRef>
-          <a:fontRef idx="minor">
-            <a:schemeClr val="lt1"/>
-          </a:fontRef>
-        </p:style>
-        <p:txBody>
-          <a:bodyPr rtlCol="0" anchor="ctr"/>
-          <a:lstStyle/>
-          <a:p>
-            <a:pPr algn="ctr"/>
-          </a:p>
-        </p:txBody>
-      </p:sp>
-      <p:sp>
-        <p:nvSpPr>
-          <p:cNvPr id="19" name="TextBox 18"/>
-          <p:cNvSpPr txBox="1"/>
-          <p:nvPr/>
-        </p:nvSpPr>
-        <p:spPr>
-          <a:xfrm>
-            <a:off x="8485632" y="1874519"/>
-            <a:ext cx="3108960" cy="292608"/>
-          </a:xfrm>
-          <a:prstGeom prst="rect">
-            <a:avLst/>
-          </a:prstGeom>
-          <a:noFill/>
-        </p:spPr>
-        <p:txBody>
-          <a:bodyPr wrap="square" anchor="t"/>
-          <a:lstStyle/>
-          <a:p>
-            <a:pPr algn="l"/>
-            <a:r>
-              <a:rPr sz="1300" b="0">
-                <a:solidFill>
-                  <a:srgbClr val="D04A02"/>
-                </a:solidFill>
-                <a:latin typeface="微软雅黑"/>
-                <a:ea typeface="微软雅黑"/>
-                <a:latin typeface="微软雅黑"/>
-              </a:rPr>
-              <a:t>工程</a:t>
-            </a:r>
-          </a:p>
-        </p:txBody>
-      </p:sp>
-      <p:sp>
-        <p:nvSpPr>
-          <p:cNvPr id="20" name="TextBox 19"/>
-          <p:cNvSpPr txBox="1"/>
-          <p:nvPr/>
-        </p:nvSpPr>
-        <p:spPr>
-          <a:xfrm>
-            <a:off x="8485632" y="2286000"/>
-            <a:ext cx="3108960" cy="777240"/>
-          </a:xfrm>
-          <a:prstGeom prst="rect">
-            <a:avLst/>
-          </a:prstGeom>
-          <a:noFill/>
-        </p:spPr>
-        <p:txBody>
-          <a:bodyPr wrap="square" anchor="t"/>
-          <a:lstStyle/>
-          <a:p>
-            <a:pPr algn="l"/>
-            <a:r>
-              <a:rPr sz="2200" b="1">
-                <a:solidFill>
-                  <a:srgbClr val="2D2D2D"/>
-                </a:solidFill>
-                <a:latin typeface="微软雅黑"/>
-                <a:ea typeface="微软雅黑"/>
-                <a:latin typeface="微软雅黑"/>
-              </a:rPr>
-              <a:t>当期用当期</a:t>
-            </a:r>
-          </a:p>
-        </p:txBody>
-      </p:sp>
-      <p:sp>
-        <p:nvSpPr>
-          <p:cNvPr id="21" name="TextBox 20"/>
-          <p:cNvSpPr txBox="1"/>
-          <p:nvPr/>
-        </p:nvSpPr>
-        <p:spPr>
-          <a:xfrm>
-            <a:off x="8485632" y="3246120"/>
-            <a:ext cx="3108960" cy="2286000"/>
-          </a:xfrm>
-          <a:prstGeom prst="rect">
-            <a:avLst/>
-          </a:prstGeom>
-          <a:noFill/>
-        </p:spPr>
-        <p:txBody>
-          <a:bodyPr wrap="square" anchor="t"/>
-          <a:lstStyle/>
+              <a:t>规则在引擎里。</a:t>
+            </a:r>
+          </a:p>
           <a:p>
             <a:pPr algn="l">
               <a:lnSpc>
@@ -9710,14 +10572,32 @@
                 <a:ea typeface="微软雅黑"/>
                 <a:latin typeface="微软雅黑"/>
               </a:rPr>
-              <a:t>Excel 里设变是糊涂账。变更进系统，开票和应付一起跟上。</a:t>
+              <a:t>同样的人去谈价、看异常。</a:t>
+            </a:r>
+          </a:p>
+          <a:p>
+            <a:pPr algn="l">
+              <a:lnSpc>
+                <a:spcPts val="2600"/>
+              </a:lnSpc>
+            </a:pPr>
+            <a:r>
+              <a:rPr sz="1500" b="0">
+                <a:solidFill>
+                  <a:srgbClr val="6B6B6B"/>
+                </a:solidFill>
+                <a:latin typeface="微软雅黑"/>
+                <a:ea typeface="微软雅黑"/>
+                <a:latin typeface="微软雅黑"/>
+              </a:rPr>
+              <a:t>能力留在公司，不在个人身上。</a:t>
             </a:r>
           </a:p>
         </p:txBody>
       </p:sp>
       <p:cxnSp>
         <p:nvCxnSpPr>
-          <p:cNvPr id="22" name="Connector 21"/>
+          <p:cNvPr id="17" name="Connector 16"/>
           <p:cNvCxnSpPr/>
           <p:nvPr/>
         </p:nvCxnSpPr>
@@ -9752,7 +10632,7 @@
       </p:cxnSp>
       <p:sp>
         <p:nvSpPr>
-          <p:cNvPr id="23" name="TextBox 22"/>
+          <p:cNvPr id="18" name="TextBox 17"/>
           <p:cNvSpPr txBox="1"/>
           <p:nvPr/>
         </p:nvSpPr>
@@ -9787,7 +10667,7 @@
       </p:sp>
       <p:sp>
         <p:nvSpPr>
-          <p:cNvPr id="24" name="TextBox 23"/>
+          <p:cNvPr id="19" name="TextBox 18"/>
           <p:cNvSpPr txBox="1"/>
           <p:nvPr/>
         </p:nvSpPr>
@@ -9997,7 +10877,7 @@
                 <a:ea typeface="微软雅黑"/>
                 <a:latin typeface="Arial"/>
               </a:rPr>
-              <a:t>05   FIRST VALUE</a:t>
+              <a:t>05   WELD</a:t>
             </a:r>
           </a:p>
         </p:txBody>
@@ -10032,7 +10912,7 @@
                 <a:ea typeface="微软雅黑"/>
                 <a:latin typeface="微软雅黑"/>
               </a:rPr>
-              <a:t>第一价值：降低对人的依赖</a:t>
+              <a:t>买的是分总成，卖的是焊完的总成</a:t>
             </a:r>
           </a:p>
         </p:txBody>
@@ -10046,7 +10926,7 @@
         <p:spPr>
           <a:xfrm>
             <a:off x="640080" y="1554480"/>
-            <a:ext cx="5212080" cy="4434840"/>
+            <a:ext cx="3611880" cy="4434840"/>
           </a:xfrm>
           <a:prstGeom prst="rect">
             <a:avLst/>
@@ -10091,7 +10971,7 @@
         <p:spPr>
           <a:xfrm>
             <a:off x="640080" y="1554480"/>
-            <a:ext cx="5212080" cy="41148"/>
+            <a:ext cx="3611880" cy="41148"/>
           </a:xfrm>
           <a:prstGeom prst="rect">
             <a:avLst/>
@@ -10133,8 +11013,8 @@
         </p:nvSpPr>
         <p:spPr>
           <a:xfrm>
-            <a:off x="960120" y="1874519"/>
-            <a:ext cx="4572000" cy="274320"/>
+            <a:off x="896112" y="1874519"/>
+            <a:ext cx="3108960" cy="292608"/>
           </a:xfrm>
           <a:prstGeom prst="rect">
             <a:avLst/>
@@ -10149,13 +11029,13 @@
             <a:r>
               <a:rPr sz="1300" b="0">
                 <a:solidFill>
-                  <a:srgbClr val="8A8A8A"/>
-                </a:solidFill>
-                <a:latin typeface="微软雅黑"/>
-                <a:ea typeface="微软雅黑"/>
-                <a:latin typeface="微软雅黑"/>
-              </a:rPr>
-              <a:t>以前</a:t>
+                  <a:srgbClr val="D04A02"/>
+                </a:solidFill>
+                <a:latin typeface="微软雅黑"/>
+                <a:ea typeface="微软雅黑"/>
+                <a:latin typeface="微软雅黑"/>
+              </a:rPr>
+              <a:t>卖出</a:t>
             </a:r>
           </a:p>
         </p:txBody>
@@ -10168,8 +11048,8 @@
         </p:nvSpPr>
         <p:spPr>
           <a:xfrm>
-            <a:off x="960120" y="2286000"/>
-            <a:ext cx="4663440" cy="1051560"/>
+            <a:off x="896112" y="2331720"/>
+            <a:ext cx="3108960" cy="1005840"/>
           </a:xfrm>
           <a:prstGeom prst="rect">
             <a:avLst/>
@@ -10180,13 +11060,9 @@
           <a:bodyPr wrap="square" anchor="t"/>
           <a:lstStyle/>
           <a:p>
-            <a:pPr algn="l">
-              <a:lnSpc>
-                <a:spcPts val="4200"/>
-              </a:lnSpc>
-            </a:pPr>
-            <a:r>
-              <a:rPr sz="3200" b="1">
+            <a:pPr algn="l"/>
+            <a:r>
+              <a:rPr sz="2600" b="1">
                 <a:solidFill>
                   <a:srgbClr val="2D2D2D"/>
                 </a:solidFill>
@@ -10194,25 +11070,7 @@
                 <a:ea typeface="微软雅黑"/>
                 <a:latin typeface="微软雅黑"/>
               </a:rPr>
-              <a:t>熟练人员</a:t>
-            </a:r>
-          </a:p>
-          <a:p>
-            <a:pPr algn="l">
-              <a:lnSpc>
-                <a:spcPts val="4200"/>
-              </a:lnSpc>
-            </a:pPr>
-            <a:r>
-              <a:rPr sz="3200" b="1">
-                <a:solidFill>
-                  <a:srgbClr val="2D2D2D"/>
-                </a:solidFill>
-                <a:latin typeface="微软雅黑"/>
-                <a:ea typeface="微软雅黑"/>
-                <a:latin typeface="微软雅黑"/>
-              </a:rPr>
-              <a:t>好几天</a:t>
+              <a:t>焊完的总成</a:t>
             </a:r>
           </a:p>
         </p:txBody>
@@ -10225,8 +11083,8 @@
         </p:nvSpPr>
         <p:spPr>
           <a:xfrm>
-            <a:off x="960120" y="4023360"/>
-            <a:ext cx="4526280" cy="1554480"/>
+            <a:off x="896112" y="3566160"/>
+            <a:ext cx="3108960" cy="1920240"/>
           </a:xfrm>
           <a:prstGeom prst="rect">
             <a:avLst/>
@@ -10243,7 +11101,7 @@
               </a:lnSpc>
             </a:pPr>
             <a:r>
-              <a:rPr sz="1500" b="0">
+              <a:rPr sz="1600" b="0">
                 <a:solidFill>
                   <a:srgbClr val="6B6B6B"/>
                 </a:solidFill>
@@ -10251,7 +11109,7 @@
                 <a:ea typeface="微软雅黑"/>
                 <a:latin typeface="微软雅黑"/>
               </a:rPr>
-              <a:t>一事一议、总成、采购对象靠骨干手感。</a:t>
+              <a:t>开给奇瑞的是总成。</a:t>
             </a:r>
           </a:p>
           <a:p>
@@ -10261,7 +11119,7 @@
               </a:lnSpc>
             </a:pPr>
             <a:r>
-              <a:rPr sz="1500" b="0">
+              <a:rPr sz="1600" b="0">
                 <a:solidFill>
                   <a:srgbClr val="6B6B6B"/>
                 </a:solidFill>
@@ -10269,7 +11127,7 @@
                 <a:ea typeface="微软雅黑"/>
                 <a:latin typeface="微软雅黑"/>
               </a:rPr>
-              <a:t>人一走，账就停。</a:t>
+              <a:t>谈价、开票看这一本。</a:t>
             </a:r>
           </a:p>
         </p:txBody>
@@ -10282,8 +11140,8 @@
         </p:nvSpPr>
         <p:spPr>
           <a:xfrm>
-            <a:off x="6309360" y="1554480"/>
-            <a:ext cx="5212080" cy="4434840"/>
+            <a:off x="4434840" y="1554480"/>
+            <a:ext cx="3611880" cy="4434840"/>
           </a:xfrm>
           <a:prstGeom prst="rect">
             <a:avLst/>
@@ -10327,8 +11185,8 @@
         </p:nvSpPr>
         <p:spPr>
           <a:xfrm>
-            <a:off x="6309360" y="1554480"/>
-            <a:ext cx="5212080" cy="41148"/>
+            <a:off x="4434840" y="1554480"/>
+            <a:ext cx="3611880" cy="41148"/>
           </a:xfrm>
           <a:prstGeom prst="rect">
             <a:avLst/>
@@ -10370,8 +11228,8 @@
         </p:nvSpPr>
         <p:spPr>
           <a:xfrm>
-            <a:off x="6629400" y="1874519"/>
-            <a:ext cx="4572000" cy="274320"/>
+            <a:off x="4690872" y="1874519"/>
+            <a:ext cx="3108960" cy="292608"/>
           </a:xfrm>
           <a:prstGeom prst="rect">
             <a:avLst/>
@@ -10392,7 +11250,7 @@
                 <a:ea typeface="微软雅黑"/>
                 <a:latin typeface="微软雅黑"/>
               </a:rPr>
-              <a:t>现在</a:t>
+              <a:t>买入</a:t>
             </a:r>
           </a:p>
         </p:txBody>
@@ -10405,8 +11263,8 @@
         </p:nvSpPr>
         <p:spPr>
           <a:xfrm>
-            <a:off x="6629400" y="2286000"/>
-            <a:ext cx="4663440" cy="1051560"/>
+            <a:off x="4690872" y="2331720"/>
+            <a:ext cx="3108960" cy="1005840"/>
           </a:xfrm>
           <a:prstGeom prst="rect">
             <a:avLst/>
@@ -10417,13 +11275,9 @@
           <a:bodyPr wrap="square" anchor="t"/>
           <a:lstStyle/>
           <a:p>
-            <a:pPr algn="l">
-              <a:lnSpc>
-                <a:spcPts val="4200"/>
-              </a:lnSpc>
-            </a:pPr>
-            <a:r>
-              <a:rPr sz="3200" b="1">
+            <a:pPr algn="l"/>
+            <a:r>
+              <a:rPr sz="2600" b="1">
                 <a:solidFill>
                   <a:srgbClr val="2D2D2D"/>
                 </a:solidFill>
@@ -10431,25 +11285,7 @@
                 <a:ea typeface="微软雅黑"/>
                 <a:latin typeface="微软雅黑"/>
               </a:rPr>
-              <a:t>上传依据</a:t>
-            </a:r>
-          </a:p>
-          <a:p>
-            <a:pPr algn="l">
-              <a:lnSpc>
-                <a:spcPts val="4200"/>
-              </a:lnSpc>
-            </a:pPr>
-            <a:r>
-              <a:rPr sz="3200" b="1">
-                <a:solidFill>
-                  <a:srgbClr val="2D2D2D"/>
-                </a:solidFill>
-                <a:latin typeface="微软雅黑"/>
-                <a:ea typeface="微软雅黑"/>
-                <a:latin typeface="微软雅黑"/>
-              </a:rPr>
-              <a:t>约 20 秒</a:t>
+              <a:t>分总成</a:t>
             </a:r>
           </a:p>
         </p:txBody>
@@ -10462,8 +11298,8 @@
         </p:nvSpPr>
         <p:spPr>
           <a:xfrm>
-            <a:off x="6629400" y="4023360"/>
-            <a:ext cx="4572000" cy="1554480"/>
+            <a:off x="4690872" y="3566160"/>
+            <a:ext cx="3108960" cy="1920240"/>
           </a:xfrm>
           <a:prstGeom prst="rect">
             <a:avLst/>
@@ -10480,7 +11316,7 @@
               </a:lnSpc>
             </a:pPr>
             <a:r>
-              <a:rPr sz="1500" b="0">
+              <a:rPr sz="1600" b="0">
                 <a:solidFill>
                   <a:srgbClr val="6B6B6B"/>
                 </a:solidFill>
@@ -10488,7 +11324,7 @@
                 <a:ea typeface="微软雅黑"/>
                 <a:latin typeface="微软雅黑"/>
               </a:rPr>
-              <a:t>规则在引擎里。人请假，总成账和采购账照样能出。</a:t>
+              <a:t>付给二级商的是分总成。</a:t>
             </a:r>
           </a:p>
           <a:p>
@@ -10498,7 +11334,7 @@
               </a:lnSpc>
             </a:pPr>
             <a:r>
-              <a:rPr sz="1500" b="0">
+              <a:rPr sz="1600" b="0">
                 <a:solidFill>
                   <a:srgbClr val="6B6B6B"/>
                 </a:solidFill>
@@ -10506,14 +11342,229 @@
                 <a:ea typeface="微软雅黑"/>
                 <a:latin typeface="微软雅黑"/>
               </a:rPr>
-              <a:t>能力属于公司。</a:t>
+              <a:t>买回来还要再焊。</a:t>
+            </a:r>
+          </a:p>
+        </p:txBody>
+      </p:sp>
+      <p:sp>
+        <p:nvSpPr>
+          <p:cNvPr id="17" name="Rectangle 16"/>
+          <p:cNvSpPr/>
+          <p:nvPr/>
+        </p:nvSpPr>
+        <p:spPr>
+          <a:xfrm>
+            <a:off x="8229600" y="1554480"/>
+            <a:ext cx="3611880" cy="4434840"/>
+          </a:xfrm>
+          <a:prstGeom prst="rect">
+            <a:avLst/>
+          </a:prstGeom>
+          <a:solidFill>
+            <a:srgbClr val="FFFFFF"/>
+          </a:solidFill>
+          <a:ln w="9525">
+            <a:solidFill>
+              <a:srgbClr val="E6E0D6"/>
+            </a:solidFill>
+          </a:ln>
+        </p:spPr>
+        <p:style>
+          <a:lnRef idx="1">
+            <a:schemeClr val="accent1"/>
+          </a:lnRef>
+          <a:fillRef idx="3">
+            <a:schemeClr val="accent1"/>
+          </a:fillRef>
+          <a:effectRef idx="2">
+            <a:schemeClr val="accent1"/>
+          </a:effectRef>
+          <a:fontRef idx="minor">
+            <a:schemeClr val="lt1"/>
+          </a:fontRef>
+        </p:style>
+        <p:txBody>
+          <a:bodyPr rtlCol="0" anchor="ctr"/>
+          <a:lstStyle/>
+          <a:p>
+            <a:pPr algn="ctr"/>
+          </a:p>
+        </p:txBody>
+      </p:sp>
+      <p:sp>
+        <p:nvSpPr>
+          <p:cNvPr id="18" name="Rectangle 17"/>
+          <p:cNvSpPr/>
+          <p:nvPr/>
+        </p:nvSpPr>
+        <p:spPr>
+          <a:xfrm>
+            <a:off x="8229600" y="1554480"/>
+            <a:ext cx="3611880" cy="41148"/>
+          </a:xfrm>
+          <a:prstGeom prst="rect">
+            <a:avLst/>
+          </a:prstGeom>
+          <a:solidFill>
+            <a:srgbClr val="D04A02"/>
+          </a:solidFill>
+          <a:ln>
+            <a:noFill/>
+          </a:ln>
+        </p:spPr>
+        <p:style>
+          <a:lnRef idx="1">
+            <a:schemeClr val="accent1"/>
+          </a:lnRef>
+          <a:fillRef idx="3">
+            <a:schemeClr val="accent1"/>
+          </a:fillRef>
+          <a:effectRef idx="2">
+            <a:schemeClr val="accent1"/>
+          </a:effectRef>
+          <a:fontRef idx="minor">
+            <a:schemeClr val="lt1"/>
+          </a:fontRef>
+        </p:style>
+        <p:txBody>
+          <a:bodyPr rtlCol="0" anchor="ctr"/>
+          <a:lstStyle/>
+          <a:p>
+            <a:pPr algn="ctr"/>
+          </a:p>
+        </p:txBody>
+      </p:sp>
+      <p:sp>
+        <p:nvSpPr>
+          <p:cNvPr id="19" name="TextBox 18"/>
+          <p:cNvSpPr txBox="1"/>
+          <p:nvPr/>
+        </p:nvSpPr>
+        <p:spPr>
+          <a:xfrm>
+            <a:off x="8485632" y="1874519"/>
+            <a:ext cx="3108960" cy="292608"/>
+          </a:xfrm>
+          <a:prstGeom prst="rect">
+            <a:avLst/>
+          </a:prstGeom>
+          <a:noFill/>
+        </p:spPr>
+        <p:txBody>
+          <a:bodyPr wrap="square" anchor="t"/>
+          <a:lstStyle/>
+          <a:p>
+            <a:pPr algn="l"/>
+            <a:r>
+              <a:rPr sz="1300" b="0">
+                <a:solidFill>
+                  <a:srgbClr val="D04A02"/>
+                </a:solidFill>
+                <a:latin typeface="微软雅黑"/>
+                <a:ea typeface="微软雅黑"/>
+                <a:latin typeface="微软雅黑"/>
+              </a:rPr>
+              <a:t>中间</a:t>
+            </a:r>
+          </a:p>
+        </p:txBody>
+      </p:sp>
+      <p:sp>
+        <p:nvSpPr>
+          <p:cNvPr id="20" name="TextBox 19"/>
+          <p:cNvSpPr txBox="1"/>
+          <p:nvPr/>
+        </p:nvSpPr>
+        <p:spPr>
+          <a:xfrm>
+            <a:off x="8485632" y="2331720"/>
+            <a:ext cx="3108960" cy="1005840"/>
+          </a:xfrm>
+          <a:prstGeom prst="rect">
+            <a:avLst/>
+          </a:prstGeom>
+          <a:noFill/>
+        </p:spPr>
+        <p:txBody>
+          <a:bodyPr wrap="square" anchor="t"/>
+          <a:lstStyle/>
+          <a:p>
+            <a:pPr algn="l"/>
+            <a:r>
+              <a:rPr sz="2600" b="1">
+                <a:solidFill>
+                  <a:srgbClr val="2D2D2D"/>
+                </a:solidFill>
+                <a:latin typeface="微软雅黑"/>
+                <a:ea typeface="微软雅黑"/>
+                <a:latin typeface="微软雅黑"/>
+              </a:rPr>
+              <a:t>公司焊接</a:t>
+            </a:r>
+          </a:p>
+        </p:txBody>
+      </p:sp>
+      <p:sp>
+        <p:nvSpPr>
+          <p:cNvPr id="21" name="TextBox 20"/>
+          <p:cNvSpPr txBox="1"/>
+          <p:nvPr/>
+        </p:nvSpPr>
+        <p:spPr>
+          <a:xfrm>
+            <a:off x="8485632" y="3566160"/>
+            <a:ext cx="3108960" cy="1920240"/>
+          </a:xfrm>
+          <a:prstGeom prst="rect">
+            <a:avLst/>
+          </a:prstGeom>
+          <a:noFill/>
+        </p:spPr>
+        <p:txBody>
+          <a:bodyPr wrap="square" anchor="t"/>
+          <a:lstStyle/>
+          <a:p>
+            <a:pPr algn="l">
+              <a:lnSpc>
+                <a:spcPts val="2600"/>
+              </a:lnSpc>
+            </a:pPr>
+            <a:r>
+              <a:rPr sz="1600" b="0">
+                <a:solidFill>
+                  <a:srgbClr val="6B6B6B"/>
+                </a:solidFill>
+                <a:latin typeface="微软雅黑"/>
+                <a:ea typeface="微软雅黑"/>
+                <a:latin typeface="微软雅黑"/>
+              </a:rPr>
+              <a:t>分总成要焊成总成。</a:t>
+            </a:r>
+          </a:p>
+          <a:p>
+            <a:pPr algn="l">
+              <a:lnSpc>
+                <a:spcPts val="2600"/>
+              </a:lnSpc>
+            </a:pPr>
+            <a:r>
+              <a:rPr sz="1600" b="0">
+                <a:solidFill>
+                  <a:srgbClr val="6B6B6B"/>
+                </a:solidFill>
+                <a:latin typeface="微软雅黑"/>
+                <a:ea typeface="微软雅黑"/>
+                <a:latin typeface="微软雅黑"/>
+              </a:rPr>
+              <a:t>这一截是焊接，不是毛利。</a:t>
             </a:r>
           </a:p>
         </p:txBody>
       </p:sp>
       <p:cxnSp>
         <p:nvCxnSpPr>
-          <p:cNvPr id="17" name="Connector 16"/>
+          <p:cNvPr id="22" name="Connector 21"/>
           <p:cNvCxnSpPr/>
           <p:nvPr/>
         </p:nvCxnSpPr>
@@ -10548,7 +11599,7 @@
       </p:cxnSp>
       <p:sp>
         <p:nvSpPr>
-          <p:cNvPr id="18" name="TextBox 17"/>
+          <p:cNvPr id="23" name="TextBox 22"/>
           <p:cNvSpPr txBox="1"/>
           <p:nvPr/>
         </p:nvSpPr>
@@ -10583,7 +11634,7 @@
       </p:sp>
       <p:sp>
         <p:nvSpPr>
-          <p:cNvPr id="19" name="TextBox 18"/>
+          <p:cNvPr id="24" name="TextBox 23"/>
           <p:cNvSpPr txBox="1"/>
           <p:nvPr/>
         </p:nvSpPr>
@@ -10793,7 +11844,7 @@
                 <a:ea typeface="微软雅黑"/>
                 <a:latin typeface="Arial"/>
               </a:rPr>
-              <a:t>06   SECOND VALUE</a:t>
+              <a:t>06   MONTH</a:t>
             </a:r>
           </a:p>
         </p:txBody>
@@ -10828,7 +11879,7 @@
                 <a:ea typeface="微软雅黑"/>
                 <a:latin typeface="微软雅黑"/>
               </a:rPr>
-              <a:t>第二价值：溯源清楚，不必再扯皮</a:t>
+              <a:t>价跟着当月的事实走</a:t>
             </a:r>
           </a:p>
         </p:txBody>
@@ -10841,8 +11892,8 @@
         </p:nvSpPr>
         <p:spPr>
           <a:xfrm>
-            <a:off x="640080" y="1508760"/>
-            <a:ext cx="5532120" cy="2084831"/>
+            <a:off x="640080" y="1554480"/>
+            <a:ext cx="5212080" cy="4434840"/>
           </a:xfrm>
           <a:prstGeom prst="rect">
             <a:avLst/>
@@ -10886,8 +11937,8 @@
         </p:nvSpPr>
         <p:spPr>
           <a:xfrm>
-            <a:off x="640080" y="1508760"/>
-            <a:ext cx="5532120" cy="41148"/>
+            <a:off x="640080" y="1554480"/>
+            <a:ext cx="5212080" cy="41148"/>
           </a:xfrm>
           <a:prstGeom prst="rect">
             <a:avLst/>
@@ -10929,8 +11980,8 @@
         </p:nvSpPr>
         <p:spPr>
           <a:xfrm>
-            <a:off x="932688" y="1828800"/>
-            <a:ext cx="4937760" cy="457200"/>
+            <a:off x="960120" y="1874519"/>
+            <a:ext cx="4572000" cy="274320"/>
           </a:xfrm>
           <a:prstGeom prst="rect">
             <a:avLst/>
@@ -10943,15 +11994,15 @@
           <a:p>
             <a:pPr algn="l"/>
             <a:r>
-              <a:rPr sz="2200" b="1">
-                <a:solidFill>
-                  <a:srgbClr val="2D2D2D"/>
-                </a:solidFill>
-                <a:latin typeface="微软雅黑"/>
-                <a:ea typeface="微软雅黑"/>
-                <a:latin typeface="微软雅黑"/>
-              </a:rPr>
-              <a:t>哪份文件</a:t>
+              <a:rPr sz="1300" b="0">
+                <a:solidFill>
+                  <a:srgbClr val="8A8A8A"/>
+                </a:solidFill>
+                <a:latin typeface="微软雅黑"/>
+                <a:ea typeface="微软雅黑"/>
+                <a:latin typeface="微软雅黑"/>
+              </a:rPr>
+              <a:t>Excel 手工</a:t>
             </a:r>
           </a:p>
         </p:txBody>
@@ -10964,8 +12015,43 @@
         </p:nvSpPr>
         <p:spPr>
           <a:xfrm>
-            <a:off x="932688" y="2468880"/>
-            <a:ext cx="4937760" cy="777240"/>
+            <a:off x="960120" y="2331720"/>
+            <a:ext cx="4663440" cy="1097280"/>
+          </a:xfrm>
+          <a:prstGeom prst="rect">
+            <a:avLst/>
+          </a:prstGeom>
+          <a:noFill/>
+        </p:spPr>
+        <p:txBody>
+          <a:bodyPr wrap="square" anchor="t"/>
+          <a:lstStyle/>
+          <a:p>
+            <a:pPr algn="l"/>
+            <a:r>
+              <a:rPr sz="3200" b="1">
+                <a:solidFill>
+                  <a:srgbClr val="2D2D2D"/>
+                </a:solidFill>
+                <a:latin typeface="微软雅黑"/>
+                <a:ea typeface="微软雅黑"/>
+                <a:latin typeface="微软雅黑"/>
+              </a:rPr>
+              <a:t>价晚一步</a:t>
+            </a:r>
+          </a:p>
+        </p:txBody>
+      </p:sp>
+      <p:sp>
+        <p:nvSpPr>
+          <p:cNvPr id="11" name="TextBox 10"/>
+          <p:cNvSpPr txBox="1"/>
+          <p:nvPr/>
+        </p:nvSpPr>
+        <p:spPr>
+          <a:xfrm>
+            <a:off x="960120" y="3657600"/>
+            <a:ext cx="4526280" cy="1920240"/>
           </a:xfrm>
           <a:prstGeom prst="rect">
             <a:avLst/>
@@ -10982,7 +12068,7 @@
               </a:lnSpc>
             </a:pPr>
             <a:r>
-              <a:rPr sz="1600" b="0">
+              <a:rPr sz="1500" b="0">
                 <a:solidFill>
                   <a:srgbClr val="6B6B6B"/>
                 </a:solidFill>
@@ -10990,21 +12076,75 @@
                 <a:ea typeface="微软雅黑"/>
                 <a:latin typeface="微软雅黑"/>
               </a:rPr>
-              <a:t>当时用的 Excel 能找回，不是私人拷贝。</a:t>
-            </a:r>
-          </a:p>
-        </p:txBody>
-      </p:sp>
-      <p:sp>
-        <p:nvSpPr>
-          <p:cNvPr id="11" name="Rectangle 10"/>
+              <a:t>钢价变了，设变来了。</a:t>
+            </a:r>
+          </a:p>
+          <a:p>
+            <a:pPr algn="l">
+              <a:lnSpc>
+                <a:spcPts val="2600"/>
+              </a:lnSpc>
+            </a:pPr>
+            <a:r>
+              <a:rPr sz="1500" b="0">
+                <a:solidFill>
+                  <a:srgbClr val="6B6B6B"/>
+                </a:solidFill>
+                <a:latin typeface="微软雅黑"/>
+                <a:ea typeface="微软雅黑"/>
+                <a:latin typeface="微软雅黑"/>
+              </a:rPr>
+              <a:t>表还停在文件夹里。</a:t>
+            </a:r>
+          </a:p>
+          <a:p>
+            <a:pPr algn="l">
+              <a:lnSpc>
+                <a:spcPts val="2600"/>
+              </a:lnSpc>
+            </a:pPr>
+            <a:r>
+              <a:rPr sz="1500" b="0">
+                <a:solidFill>
+                  <a:srgbClr val="6B6B6B"/>
+                </a:solidFill>
+                <a:latin typeface="微软雅黑"/>
+                <a:ea typeface="微软雅黑"/>
+                <a:latin typeface="微软雅黑"/>
+              </a:rPr>
+              <a:t>该向奇瑞调的，晚了一个月。</a:t>
+            </a:r>
+          </a:p>
+          <a:p>
+            <a:pPr algn="l">
+              <a:lnSpc>
+                <a:spcPts val="2600"/>
+              </a:lnSpc>
+            </a:pPr>
+            <a:r>
+              <a:rPr sz="1500" b="0">
+                <a:solidFill>
+                  <a:srgbClr val="6B6B6B"/>
+                </a:solidFill>
+                <a:latin typeface="微软雅黑"/>
+                <a:ea typeface="微软雅黑"/>
+                <a:latin typeface="微软雅黑"/>
+              </a:rPr>
+              <a:t>该向二级商调的，也晚了。</a:t>
+            </a:r>
+          </a:p>
+        </p:txBody>
+      </p:sp>
+      <p:sp>
+        <p:nvSpPr>
+          <p:cNvPr id="12" name="Rectangle 11"/>
           <p:cNvSpPr/>
           <p:nvPr/>
         </p:nvSpPr>
         <p:spPr>
           <a:xfrm>
-            <a:off x="6400800" y="1508760"/>
-            <a:ext cx="5532120" cy="2084831"/>
+            <a:off x="6309360" y="1554480"/>
+            <a:ext cx="5212080" cy="4434840"/>
           </a:xfrm>
           <a:prstGeom prst="rect">
             <a:avLst/>
@@ -11042,14 +12182,14 @@
       </p:sp>
       <p:sp>
         <p:nvSpPr>
-          <p:cNvPr id="12" name="Rectangle 11"/>
+          <p:cNvPr id="13" name="Rectangle 12"/>
           <p:cNvSpPr/>
           <p:nvPr/>
         </p:nvSpPr>
         <p:spPr>
           <a:xfrm>
-            <a:off x="6400800" y="1508760"/>
-            <a:ext cx="5532120" cy="41148"/>
+            <a:off x="6309360" y="1554480"/>
+            <a:ext cx="5212080" cy="41148"/>
           </a:xfrm>
           <a:prstGeom prst="rect">
             <a:avLst/>
@@ -11085,49 +12225,84 @@
       </p:sp>
       <p:sp>
         <p:nvSpPr>
-          <p:cNvPr id="13" name="TextBox 12"/>
-          <p:cNvSpPr txBox="1"/>
-          <p:nvPr/>
-        </p:nvSpPr>
-        <p:spPr>
-          <a:xfrm>
-            <a:off x="6693408" y="1828800"/>
-            <a:ext cx="4937760" cy="457200"/>
-          </a:xfrm>
-          <a:prstGeom prst="rect">
-            <a:avLst/>
-          </a:prstGeom>
-          <a:noFill/>
-        </p:spPr>
-        <p:txBody>
-          <a:bodyPr wrap="square" anchor="t"/>
-          <a:lstStyle/>
-          <a:p>
-            <a:pPr algn="l"/>
-            <a:r>
-              <a:rPr sz="2200" b="1">
-                <a:solidFill>
-                  <a:srgbClr val="2D2D2D"/>
-                </a:solidFill>
-                <a:latin typeface="微软雅黑"/>
-                <a:ea typeface="微软雅黑"/>
-                <a:latin typeface="微软雅黑"/>
-              </a:rPr>
-              <a:t>谁操作的</a:t>
-            </a:r>
-          </a:p>
-        </p:txBody>
-      </p:sp>
-      <p:sp>
-        <p:nvSpPr>
           <p:cNvPr id="14" name="TextBox 13"/>
           <p:cNvSpPr txBox="1"/>
           <p:nvPr/>
         </p:nvSpPr>
         <p:spPr>
           <a:xfrm>
-            <a:off x="6693408" y="2468880"/>
-            <a:ext cx="4937760" cy="777240"/>
+            <a:off x="6629400" y="1874519"/>
+            <a:ext cx="4572000" cy="274320"/>
+          </a:xfrm>
+          <a:prstGeom prst="rect">
+            <a:avLst/>
+          </a:prstGeom>
+          <a:noFill/>
+        </p:spPr>
+        <p:txBody>
+          <a:bodyPr wrap="square" anchor="t"/>
+          <a:lstStyle/>
+          <a:p>
+            <a:pPr algn="l"/>
+            <a:r>
+              <a:rPr sz="1300" b="0">
+                <a:solidFill>
+                  <a:srgbClr val="D04A02"/>
+                </a:solidFill>
+                <a:latin typeface="微软雅黑"/>
+                <a:ea typeface="微软雅黑"/>
+                <a:latin typeface="微软雅黑"/>
+              </a:rPr>
+              <a:t>现网</a:t>
+            </a:r>
+          </a:p>
+        </p:txBody>
+      </p:sp>
+      <p:sp>
+        <p:nvSpPr>
+          <p:cNvPr id="15" name="TextBox 14"/>
+          <p:cNvSpPr txBox="1"/>
+          <p:nvPr/>
+        </p:nvSpPr>
+        <p:spPr>
+          <a:xfrm>
+            <a:off x="6629400" y="2331720"/>
+            <a:ext cx="4663440" cy="1097280"/>
+          </a:xfrm>
+          <a:prstGeom prst="rect">
+            <a:avLst/>
+          </a:prstGeom>
+          <a:noFill/>
+        </p:spPr>
+        <p:txBody>
+          <a:bodyPr wrap="square" anchor="t"/>
+          <a:lstStyle/>
+          <a:p>
+            <a:pPr algn="l"/>
+            <a:r>
+              <a:rPr sz="3200" b="1">
+                <a:solidFill>
+                  <a:srgbClr val="2D2D2D"/>
+                </a:solidFill>
+                <a:latin typeface="微软雅黑"/>
+                <a:ea typeface="微软雅黑"/>
+                <a:latin typeface="微软雅黑"/>
+              </a:rPr>
+              <a:t>当月算当月</a:t>
+            </a:r>
+          </a:p>
+        </p:txBody>
+      </p:sp>
+      <p:sp>
+        <p:nvSpPr>
+          <p:cNvPr id="16" name="TextBox 15"/>
+          <p:cNvSpPr txBox="1"/>
+          <p:nvPr/>
+        </p:nvSpPr>
+        <p:spPr>
+          <a:xfrm>
+            <a:off x="6629400" y="3657600"/>
+            <a:ext cx="4572000" cy="1920240"/>
           </a:xfrm>
           <a:prstGeom prst="rect">
             <a:avLst/>
@@ -11144,7 +12319,7 @@
               </a:lnSpc>
             </a:pPr>
             <a:r>
-              <a:rPr sz="1600" b="0">
+              <a:rPr sz="1500" b="0">
                 <a:solidFill>
                   <a:srgbClr val="6B6B6B"/>
                 </a:solidFill>
@@ -11152,153 +12327,9 @@
                 <a:ea typeface="微软雅黑"/>
                 <a:latin typeface="微软雅黑"/>
               </a:rPr>
-              <a:t>上传、计算、变更有日志。对账问记录。</a:t>
-            </a:r>
-          </a:p>
-        </p:txBody>
-      </p:sp>
-      <p:sp>
-        <p:nvSpPr>
-          <p:cNvPr id="15" name="Rectangle 14"/>
-          <p:cNvSpPr/>
-          <p:nvPr/>
-        </p:nvSpPr>
-        <p:spPr>
-          <a:xfrm>
-            <a:off x="640080" y="3794760"/>
-            <a:ext cx="5532120" cy="2084831"/>
-          </a:xfrm>
-          <a:prstGeom prst="rect">
-            <a:avLst/>
-          </a:prstGeom>
-          <a:solidFill>
-            <a:srgbClr val="FFFFFF"/>
-          </a:solidFill>
-          <a:ln w="9525">
-            <a:solidFill>
-              <a:srgbClr val="E6E0D6"/>
-            </a:solidFill>
-          </a:ln>
-        </p:spPr>
-        <p:style>
-          <a:lnRef idx="1">
-            <a:schemeClr val="accent1"/>
-          </a:lnRef>
-          <a:fillRef idx="3">
-            <a:schemeClr val="accent1"/>
-          </a:fillRef>
-          <a:effectRef idx="2">
-            <a:schemeClr val="accent1"/>
-          </a:effectRef>
-          <a:fontRef idx="minor">
-            <a:schemeClr val="lt1"/>
-          </a:fontRef>
-        </p:style>
-        <p:txBody>
-          <a:bodyPr rtlCol="0" anchor="ctr"/>
-          <a:lstStyle/>
-          <a:p>
-            <a:pPr algn="ctr"/>
-          </a:p>
-        </p:txBody>
-      </p:sp>
-      <p:sp>
-        <p:nvSpPr>
-          <p:cNvPr id="16" name="Rectangle 15"/>
-          <p:cNvSpPr/>
-          <p:nvPr/>
-        </p:nvSpPr>
-        <p:spPr>
-          <a:xfrm>
-            <a:off x="640080" y="3794760"/>
-            <a:ext cx="5532120" cy="41148"/>
-          </a:xfrm>
-          <a:prstGeom prst="rect">
-            <a:avLst/>
-          </a:prstGeom>
-          <a:solidFill>
-            <a:srgbClr val="D04A02"/>
-          </a:solidFill>
-          <a:ln>
-            <a:noFill/>
-          </a:ln>
-        </p:spPr>
-        <p:style>
-          <a:lnRef idx="1">
-            <a:schemeClr val="accent1"/>
-          </a:lnRef>
-          <a:fillRef idx="3">
-            <a:schemeClr val="accent1"/>
-          </a:fillRef>
-          <a:effectRef idx="2">
-            <a:schemeClr val="accent1"/>
-          </a:effectRef>
-          <a:fontRef idx="minor">
-            <a:schemeClr val="lt1"/>
-          </a:fontRef>
-        </p:style>
-        <p:txBody>
-          <a:bodyPr rtlCol="0" anchor="ctr"/>
-          <a:lstStyle/>
-          <a:p>
-            <a:pPr algn="ctr"/>
-          </a:p>
-        </p:txBody>
-      </p:sp>
-      <p:sp>
-        <p:nvSpPr>
-          <p:cNvPr id="17" name="TextBox 16"/>
-          <p:cNvSpPr txBox="1"/>
-          <p:nvPr/>
-        </p:nvSpPr>
-        <p:spPr>
-          <a:xfrm>
-            <a:off x="932688" y="4114800"/>
-            <a:ext cx="4937760" cy="457200"/>
-          </a:xfrm>
-          <a:prstGeom prst="rect">
-            <a:avLst/>
-          </a:prstGeom>
-          <a:noFill/>
-        </p:spPr>
-        <p:txBody>
-          <a:bodyPr wrap="square" anchor="t"/>
-          <a:lstStyle/>
-          <a:p>
-            <a:pPr algn="l"/>
-            <a:r>
-              <a:rPr sz="2200" b="1">
-                <a:solidFill>
-                  <a:srgbClr val="2D2D2D"/>
-                </a:solidFill>
-                <a:latin typeface="微软雅黑"/>
-                <a:ea typeface="微软雅黑"/>
-                <a:latin typeface="微软雅黑"/>
-              </a:rPr>
-              <a:t>当期哪版</a:t>
-            </a:r>
-          </a:p>
-        </p:txBody>
-      </p:sp>
-      <p:sp>
-        <p:nvSpPr>
-          <p:cNvPr id="18" name="TextBox 17"/>
-          <p:cNvSpPr txBox="1"/>
-          <p:nvPr/>
-        </p:nvSpPr>
-        <p:spPr>
-          <a:xfrm>
-            <a:off x="932688" y="4754880"/>
-            <a:ext cx="4937760" cy="777240"/>
-          </a:xfrm>
-          <a:prstGeom prst="rect">
-            <a:avLst/>
-          </a:prstGeom>
-          <a:noFill/>
-        </p:spPr>
-        <p:txBody>
-          <a:bodyPr wrap="square" anchor="t"/>
-          <a:lstStyle/>
+              <a:t>钢价、BOM、工艺、设变，</a:t>
+            </a:r>
+          </a:p>
           <a:p>
             <a:pPr algn="l">
               <a:lnSpc>
@@ -11306,7 +12337,7 @@
               </a:lnSpc>
             </a:pPr>
             <a:r>
-              <a:rPr sz="1600" b="0">
+              <a:rPr sz="1500" b="0">
                 <a:solidFill>
                   <a:srgbClr val="6B6B6B"/>
                 </a:solidFill>
@@ -11314,153 +12345,9 @@
                 <a:ea typeface="微软雅黑"/>
                 <a:latin typeface="微软雅黑"/>
               </a:rPr>
-              <a:t>钢价、BOM、工艺、设变按月对齐。</a:t>
-            </a:r>
-          </a:p>
-        </p:txBody>
-      </p:sp>
-      <p:sp>
-        <p:nvSpPr>
-          <p:cNvPr id="19" name="Rectangle 18"/>
-          <p:cNvSpPr/>
-          <p:nvPr/>
-        </p:nvSpPr>
-        <p:spPr>
-          <a:xfrm>
-            <a:off x="6400800" y="3794760"/>
-            <a:ext cx="5532120" cy="2084831"/>
-          </a:xfrm>
-          <a:prstGeom prst="rect">
-            <a:avLst/>
-          </a:prstGeom>
-          <a:solidFill>
-            <a:srgbClr val="FFFFFF"/>
-          </a:solidFill>
-          <a:ln w="9525">
-            <a:solidFill>
-              <a:srgbClr val="E6E0D6"/>
-            </a:solidFill>
-          </a:ln>
-        </p:spPr>
-        <p:style>
-          <a:lnRef idx="1">
-            <a:schemeClr val="accent1"/>
-          </a:lnRef>
-          <a:fillRef idx="3">
-            <a:schemeClr val="accent1"/>
-          </a:fillRef>
-          <a:effectRef idx="2">
-            <a:schemeClr val="accent1"/>
-          </a:effectRef>
-          <a:fontRef idx="minor">
-            <a:schemeClr val="lt1"/>
-          </a:fontRef>
-        </p:style>
-        <p:txBody>
-          <a:bodyPr rtlCol="0" anchor="ctr"/>
-          <a:lstStyle/>
-          <a:p>
-            <a:pPr algn="ctr"/>
-          </a:p>
-        </p:txBody>
-      </p:sp>
-      <p:sp>
-        <p:nvSpPr>
-          <p:cNvPr id="20" name="Rectangle 19"/>
-          <p:cNvSpPr/>
-          <p:nvPr/>
-        </p:nvSpPr>
-        <p:spPr>
-          <a:xfrm>
-            <a:off x="6400800" y="3794760"/>
-            <a:ext cx="5532120" cy="41148"/>
-          </a:xfrm>
-          <a:prstGeom prst="rect">
-            <a:avLst/>
-          </a:prstGeom>
-          <a:solidFill>
-            <a:srgbClr val="D04A02"/>
-          </a:solidFill>
-          <a:ln>
-            <a:noFill/>
-          </a:ln>
-        </p:spPr>
-        <p:style>
-          <a:lnRef idx="1">
-            <a:schemeClr val="accent1"/>
-          </a:lnRef>
-          <a:fillRef idx="3">
-            <a:schemeClr val="accent1"/>
-          </a:fillRef>
-          <a:effectRef idx="2">
-            <a:schemeClr val="accent1"/>
-          </a:effectRef>
-          <a:fontRef idx="minor">
-            <a:schemeClr val="lt1"/>
-          </a:fontRef>
-        </p:style>
-        <p:txBody>
-          <a:bodyPr rtlCol="0" anchor="ctr"/>
-          <a:lstStyle/>
-          <a:p>
-            <a:pPr algn="ctr"/>
-          </a:p>
-        </p:txBody>
-      </p:sp>
-      <p:sp>
-        <p:nvSpPr>
-          <p:cNvPr id="21" name="TextBox 20"/>
-          <p:cNvSpPr txBox="1"/>
-          <p:nvPr/>
-        </p:nvSpPr>
-        <p:spPr>
-          <a:xfrm>
-            <a:off x="6693408" y="4114800"/>
-            <a:ext cx="4937760" cy="457200"/>
-          </a:xfrm>
-          <a:prstGeom prst="rect">
-            <a:avLst/>
-          </a:prstGeom>
-          <a:noFill/>
-        </p:spPr>
-        <p:txBody>
-          <a:bodyPr wrap="square" anchor="t"/>
-          <a:lstStyle/>
-          <a:p>
-            <a:pPr algn="l"/>
-            <a:r>
-              <a:rPr sz="2200" b="1">
-                <a:solidFill>
-                  <a:srgbClr val="2D2D2D"/>
-                </a:solidFill>
-                <a:latin typeface="微软雅黑"/>
-                <a:ea typeface="微软雅黑"/>
-                <a:latin typeface="微软雅黑"/>
-              </a:rPr>
-              <a:t>同一套规则</a:t>
-            </a:r>
-          </a:p>
-        </p:txBody>
-      </p:sp>
-      <p:sp>
-        <p:nvSpPr>
-          <p:cNvPr id="22" name="TextBox 21"/>
-          <p:cNvSpPr txBox="1"/>
-          <p:nvPr/>
-        </p:nvSpPr>
-        <p:spPr>
-          <a:xfrm>
-            <a:off x="6693408" y="4754880"/>
-            <a:ext cx="4937760" cy="777240"/>
-          </a:xfrm>
-          <a:prstGeom prst="rect">
-            <a:avLst/>
-          </a:prstGeom>
-          <a:noFill/>
-        </p:spPr>
-        <p:txBody>
-          <a:bodyPr wrap="square" anchor="t"/>
-          <a:lstStyle/>
+              <a:t>进入当月一起算。</a:t>
+            </a:r>
+          </a:p>
           <a:p>
             <a:pPr algn="l">
               <a:lnSpc>
@@ -11468,7 +12355,7 @@
               </a:lnSpc>
             </a:pPr>
             <a:r>
-              <a:rPr sz="1600" b="0">
+              <a:rPr sz="1500" b="0">
                 <a:solidFill>
                   <a:srgbClr val="6B6B6B"/>
                 </a:solidFill>
@@ -11476,14 +12363,14 @@
                 <a:ea typeface="微软雅黑"/>
                 <a:latin typeface="微软雅黑"/>
               </a:rPr>
-              <a:t>开给奇瑞和付给二级商，同一引擎。</a:t>
+              <a:t>开票价和采购价一起跟上。</a:t>
             </a:r>
           </a:p>
         </p:txBody>
       </p:sp>
       <p:cxnSp>
         <p:nvCxnSpPr>
-          <p:cNvPr id="23" name="Connector 22"/>
+          <p:cNvPr id="17" name="Connector 16"/>
           <p:cNvCxnSpPr/>
           <p:nvPr/>
         </p:nvCxnSpPr>
@@ -11518,7 +12405,7 @@
       </p:cxnSp>
       <p:sp>
         <p:nvSpPr>
-          <p:cNvPr id="24" name="TextBox 23"/>
+          <p:cNvPr id="18" name="TextBox 17"/>
           <p:cNvSpPr txBox="1"/>
           <p:nvPr/>
         </p:nvSpPr>
@@ -11553,7 +12440,7 @@
       </p:sp>
       <p:sp>
         <p:nvSpPr>
-          <p:cNvPr id="25" name="TextBox 24"/>
+          <p:cNvPr id="19" name="TextBox 18"/>
           <p:cNvSpPr txBox="1"/>
           <p:nvPr/>
         </p:nvSpPr>
@@ -11763,7 +12650,7 @@
                 <a:ea typeface="微软雅黑"/>
                 <a:latin typeface="Arial"/>
               </a:rPr>
-              <a:t>07   VALUE</a:t>
+              <a:t>07   TRACE</a:t>
             </a:r>
           </a:p>
         </p:txBody>
@@ -11798,7 +12685,7 @@
                 <a:ea typeface="微软雅黑"/>
                 <a:latin typeface="微软雅黑"/>
               </a:rPr>
-              <a:t>四项价值，进的是公司而不是个人</a:t>
+              <a:t>对得上，就不必再开会扯皮</a:t>
             </a:r>
           </a:p>
         </p:txBody>
@@ -11899,8 +12786,8 @@
         </p:nvSpPr>
         <p:spPr>
           <a:xfrm>
-            <a:off x="932688" y="1764792"/>
-            <a:ext cx="1097280" cy="292608"/>
+            <a:off x="932688" y="1856232"/>
+            <a:ext cx="4937760" cy="457200"/>
           </a:xfrm>
           <a:prstGeom prst="rect">
             <a:avLst/>
@@ -11913,15 +12800,15 @@
           <a:p>
             <a:pPr algn="l"/>
             <a:r>
-              <a:rPr sz="1300" b="0">
-                <a:solidFill>
-                  <a:srgbClr val="D04A02"/>
-                </a:solidFill>
-                <a:latin typeface="Arial"/>
-                <a:ea typeface="微软雅黑"/>
-                <a:latin typeface="Arial"/>
-              </a:rPr>
-              <a:t>01</a:t>
+              <a:rPr sz="2200" b="1">
+                <a:solidFill>
+                  <a:srgbClr val="2D2D2D"/>
+                </a:solidFill>
+                <a:latin typeface="微软雅黑"/>
+                <a:ea typeface="微软雅黑"/>
+                <a:latin typeface="微软雅黑"/>
+              </a:rPr>
+              <a:t>哪份文件</a:t>
             </a:r>
           </a:p>
         </p:txBody>
@@ -11934,43 +12821,8 @@
         </p:nvSpPr>
         <p:spPr>
           <a:xfrm>
-            <a:off x="932688" y="2103120"/>
-            <a:ext cx="4937760" cy="411480"/>
-          </a:xfrm>
-          <a:prstGeom prst="rect">
-            <a:avLst/>
-          </a:prstGeom>
-          <a:noFill/>
-        </p:spPr>
-        <p:txBody>
-          <a:bodyPr wrap="square" anchor="t"/>
-          <a:lstStyle/>
-          <a:p>
-            <a:pPr algn="l"/>
-            <a:r>
-              <a:rPr sz="2200" b="1">
-                <a:solidFill>
-                  <a:srgbClr val="2D2D2D"/>
-                </a:solidFill>
-                <a:latin typeface="微软雅黑"/>
-                <a:ea typeface="微软雅黑"/>
-                <a:latin typeface="微软雅黑"/>
-              </a:rPr>
-              <a:t>少绑人</a:t>
-            </a:r>
-          </a:p>
-        </p:txBody>
-      </p:sp>
-      <p:sp>
-        <p:nvSpPr>
-          <p:cNvPr id="11" name="TextBox 10"/>
-          <p:cNvSpPr txBox="1"/>
-          <p:nvPr/>
-        </p:nvSpPr>
-        <p:spPr>
-          <a:xfrm>
-            <a:off x="932688" y="2606040"/>
-            <a:ext cx="4937760" cy="731520"/>
+            <a:off x="932688" y="2514600"/>
+            <a:ext cx="4937760" cy="777240"/>
           </a:xfrm>
           <a:prstGeom prst="rect">
             <a:avLst/>
@@ -11983,11 +12835,11 @@
           <a:p>
             <a:pPr algn="l">
               <a:lnSpc>
-                <a:spcPts val="2200"/>
+                <a:spcPts val="2600"/>
               </a:lnSpc>
             </a:pPr>
             <a:r>
-              <a:rPr sz="1400" b="0">
+              <a:rPr sz="1600" b="0">
                 <a:solidFill>
                   <a:srgbClr val="6B6B6B"/>
                 </a:solidFill>
@@ -11995,14 +12847,14 @@
                 <a:ea typeface="微软雅黑"/>
                 <a:latin typeface="微软雅黑"/>
               </a:rPr>
-              <a:t>核价能力属于公司。熟练骨干好几天，变成约 20 秒。</a:t>
-            </a:r>
-          </a:p>
-        </p:txBody>
-      </p:sp>
-      <p:sp>
-        <p:nvSpPr>
-          <p:cNvPr id="12" name="Rectangle 11"/>
+              <a:t>当时用的 Excel 能找回。省下的是翻私人拷贝。</a:t>
+            </a:r>
+          </a:p>
+        </p:txBody>
+      </p:sp>
+      <p:sp>
+        <p:nvSpPr>
+          <p:cNvPr id="11" name="Rectangle 10"/>
           <p:cNvSpPr/>
           <p:nvPr/>
         </p:nvSpPr>
@@ -12047,7 +12899,7 @@
       </p:sp>
       <p:sp>
         <p:nvSpPr>
-          <p:cNvPr id="13" name="Rectangle 12"/>
+          <p:cNvPr id="12" name="Rectangle 11"/>
           <p:cNvSpPr/>
           <p:nvPr/>
         </p:nvSpPr>
@@ -12090,84 +12942,49 @@
       </p:sp>
       <p:sp>
         <p:nvSpPr>
+          <p:cNvPr id="13" name="TextBox 12"/>
+          <p:cNvSpPr txBox="1"/>
+          <p:nvPr/>
+        </p:nvSpPr>
+        <p:spPr>
+          <a:xfrm>
+            <a:off x="6693408" y="1856232"/>
+            <a:ext cx="4937760" cy="457200"/>
+          </a:xfrm>
+          <a:prstGeom prst="rect">
+            <a:avLst/>
+          </a:prstGeom>
+          <a:noFill/>
+        </p:spPr>
+        <p:txBody>
+          <a:bodyPr wrap="square" anchor="t"/>
+          <a:lstStyle/>
+          <a:p>
+            <a:pPr algn="l"/>
+            <a:r>
+              <a:rPr sz="2200" b="1">
+                <a:solidFill>
+                  <a:srgbClr val="2D2D2D"/>
+                </a:solidFill>
+                <a:latin typeface="微软雅黑"/>
+                <a:ea typeface="微软雅黑"/>
+                <a:latin typeface="微软雅黑"/>
+              </a:rPr>
+              <a:t>谁操作的</a:t>
+            </a:r>
+          </a:p>
+        </p:txBody>
+      </p:sp>
+      <p:sp>
+        <p:nvSpPr>
           <p:cNvPr id="14" name="TextBox 13"/>
           <p:cNvSpPr txBox="1"/>
           <p:nvPr/>
         </p:nvSpPr>
         <p:spPr>
           <a:xfrm>
-            <a:off x="6693408" y="1764792"/>
-            <a:ext cx="1097280" cy="292608"/>
-          </a:xfrm>
-          <a:prstGeom prst="rect">
-            <a:avLst/>
-          </a:prstGeom>
-          <a:noFill/>
-        </p:spPr>
-        <p:txBody>
-          <a:bodyPr wrap="square" anchor="t"/>
-          <a:lstStyle/>
-          <a:p>
-            <a:pPr algn="l"/>
-            <a:r>
-              <a:rPr sz="1300" b="0">
-                <a:solidFill>
-                  <a:srgbClr val="D04A02"/>
-                </a:solidFill>
-                <a:latin typeface="Arial"/>
-                <a:ea typeface="微软雅黑"/>
-                <a:latin typeface="Arial"/>
-              </a:rPr>
-              <a:t>02</a:t>
-            </a:r>
-          </a:p>
-        </p:txBody>
-      </p:sp>
-      <p:sp>
-        <p:nvSpPr>
-          <p:cNvPr id="15" name="TextBox 14"/>
-          <p:cNvSpPr txBox="1"/>
-          <p:nvPr/>
-        </p:nvSpPr>
-        <p:spPr>
-          <a:xfrm>
-            <a:off x="6693408" y="2103120"/>
-            <a:ext cx="4937760" cy="411480"/>
-          </a:xfrm>
-          <a:prstGeom prst="rect">
-            <a:avLst/>
-          </a:prstGeom>
-          <a:noFill/>
-        </p:spPr>
-        <p:txBody>
-          <a:bodyPr wrap="square" anchor="t"/>
-          <a:lstStyle/>
-          <a:p>
-            <a:pPr algn="l"/>
-            <a:r>
-              <a:rPr sz="2200" b="1">
-                <a:solidFill>
-                  <a:srgbClr val="2D2D2D"/>
-                </a:solidFill>
-                <a:latin typeface="微软雅黑"/>
-                <a:ea typeface="微软雅黑"/>
-                <a:latin typeface="微软雅黑"/>
-              </a:rPr>
-              <a:t>少扯皮</a:t>
-            </a:r>
-          </a:p>
-        </p:txBody>
-      </p:sp>
-      <p:sp>
-        <p:nvSpPr>
-          <p:cNvPr id="16" name="TextBox 15"/>
-          <p:cNvSpPr txBox="1"/>
-          <p:nvPr/>
-        </p:nvSpPr>
-        <p:spPr>
-          <a:xfrm>
-            <a:off x="6693408" y="2606040"/>
-            <a:ext cx="4937760" cy="731520"/>
+            <a:off x="6693408" y="2514600"/>
+            <a:ext cx="4937760" cy="777240"/>
           </a:xfrm>
           <a:prstGeom prst="rect">
             <a:avLst/>
@@ -12180,11 +12997,11 @@
           <a:p>
             <a:pPr algn="l">
               <a:lnSpc>
-                <a:spcPts val="2200"/>
+                <a:spcPts val="2600"/>
               </a:lnSpc>
             </a:pPr>
             <a:r>
-              <a:rPr sz="1400" b="0">
+              <a:rPr sz="1600" b="0">
                 <a:solidFill>
                   <a:srgbClr val="6B6B6B"/>
                 </a:solidFill>
@@ -12192,14 +13009,14 @@
                 <a:ea typeface="微软雅黑"/>
                 <a:latin typeface="微软雅黑"/>
               </a:rPr>
-              <a:t>文件、操作、当期依据可对。对奇瑞、对二级商、对财务同一本账。</a:t>
-            </a:r>
-          </a:p>
-        </p:txBody>
-      </p:sp>
-      <p:sp>
-        <p:nvSpPr>
-          <p:cNvPr id="17" name="Rectangle 16"/>
+              <a:t>上传、计算、变更有日志。责任落得到人。</a:t>
+            </a:r>
+          </a:p>
+        </p:txBody>
+      </p:sp>
+      <p:sp>
+        <p:nvSpPr>
+          <p:cNvPr id="15" name="Rectangle 14"/>
           <p:cNvSpPr/>
           <p:nvPr/>
         </p:nvSpPr>
@@ -12244,7 +13061,7 @@
       </p:sp>
       <p:sp>
         <p:nvSpPr>
-          <p:cNvPr id="18" name="Rectangle 17"/>
+          <p:cNvPr id="16" name="Rectangle 15"/>
           <p:cNvSpPr/>
           <p:nvPr/>
         </p:nvSpPr>
@@ -12287,14 +13104,14 @@
       </p:sp>
       <p:sp>
         <p:nvSpPr>
-          <p:cNvPr id="19" name="TextBox 18"/>
+          <p:cNvPr id="17" name="TextBox 16"/>
           <p:cNvSpPr txBox="1"/>
           <p:nvPr/>
         </p:nvSpPr>
         <p:spPr>
           <a:xfrm>
-            <a:off x="932688" y="4050792"/>
-            <a:ext cx="1097280" cy="292608"/>
+            <a:off x="932688" y="4142232"/>
+            <a:ext cx="4937760" cy="457200"/>
           </a:xfrm>
           <a:prstGeom prst="rect">
             <a:avLst/>
@@ -12307,64 +13124,29 @@
           <a:p>
             <a:pPr algn="l"/>
             <a:r>
-              <a:rPr sz="1300" b="0">
-                <a:solidFill>
-                  <a:srgbClr val="D04A02"/>
-                </a:solidFill>
-                <a:latin typeface="Arial"/>
-                <a:ea typeface="微软雅黑"/>
-                <a:latin typeface="Arial"/>
-              </a:rPr>
-              <a:t>03</a:t>
-            </a:r>
-          </a:p>
-        </p:txBody>
-      </p:sp>
-      <p:sp>
-        <p:nvSpPr>
-          <p:cNvPr id="20" name="TextBox 19"/>
+              <a:rPr sz="2200" b="1">
+                <a:solidFill>
+                  <a:srgbClr val="2D2D2D"/>
+                </a:solidFill>
+                <a:latin typeface="微软雅黑"/>
+                <a:ea typeface="微软雅黑"/>
+                <a:latin typeface="微软雅黑"/>
+              </a:rPr>
+              <a:t>当期哪版</a:t>
+            </a:r>
+          </a:p>
+        </p:txBody>
+      </p:sp>
+      <p:sp>
+        <p:nvSpPr>
+          <p:cNvPr id="18" name="TextBox 17"/>
           <p:cNvSpPr txBox="1"/>
           <p:nvPr/>
         </p:nvSpPr>
         <p:spPr>
           <a:xfrm>
-            <a:off x="932688" y="4389120"/>
-            <a:ext cx="4937760" cy="411480"/>
-          </a:xfrm>
-          <a:prstGeom prst="rect">
-            <a:avLst/>
-          </a:prstGeom>
-          <a:noFill/>
-        </p:spPr>
-        <p:txBody>
-          <a:bodyPr wrap="square" anchor="t"/>
-          <a:lstStyle/>
-          <a:p>
-            <a:pPr algn="l"/>
-            <a:r>
-              <a:rPr sz="2200" b="1">
-                <a:solidFill>
-                  <a:srgbClr val="2D2D2D"/>
-                </a:solidFill>
-                <a:latin typeface="微软雅黑"/>
-                <a:ea typeface="微软雅黑"/>
-                <a:latin typeface="微软雅黑"/>
-              </a:rPr>
-              <a:t>算得一致</a:t>
-            </a:r>
-          </a:p>
-        </p:txBody>
-      </p:sp>
-      <p:sp>
-        <p:nvSpPr>
-          <p:cNvPr id="21" name="TextBox 20"/>
-          <p:cNvSpPr txBox="1"/>
-          <p:nvPr/>
-        </p:nvSpPr>
-        <p:spPr>
-          <a:xfrm>
-            <a:off x="932688" y="4892040"/>
-            <a:ext cx="4937760" cy="731520"/>
+            <a:off x="932688" y="4800600"/>
+            <a:ext cx="4937760" cy="777240"/>
           </a:xfrm>
           <a:prstGeom prst="rect">
             <a:avLst/>
@@ -12377,11 +13159,11 @@
           <a:p>
             <a:pPr algn="l">
               <a:lnSpc>
-                <a:spcPts val="2200"/>
+                <a:spcPts val="2600"/>
               </a:lnSpc>
             </a:pPr>
             <a:r>
-              <a:rPr sz="1400" b="0">
+              <a:rPr sz="1600" b="0">
                 <a:solidFill>
                   <a:srgbClr val="6B6B6B"/>
                 </a:solidFill>
@@ -12389,32 +13171,14 @@
                 <a:ea typeface="微软雅黑"/>
                 <a:latin typeface="微软雅黑"/>
               </a:rPr>
-              <a:t>同一套规则、同一套口径。</a:t>
-            </a:r>
-          </a:p>
-          <a:p>
-            <a:pPr algn="l">
-              <a:lnSpc>
-                <a:spcPts val="2200"/>
-              </a:lnSpc>
-            </a:pPr>
-            <a:r>
-              <a:rPr sz="1400" b="0">
-                <a:solidFill>
-                  <a:srgbClr val="6B6B6B"/>
-                </a:solidFill>
-                <a:latin typeface="微软雅黑"/>
-                <a:ea typeface="微软雅黑"/>
-                <a:latin typeface="微软雅黑"/>
-              </a:rPr>
-              <a:t>总成售价和采购应付不再各算各的。</a:t>
-            </a:r>
-          </a:p>
-        </p:txBody>
-      </p:sp>
-      <p:sp>
-        <p:nvSpPr>
-          <p:cNvPr id="22" name="Rectangle 21"/>
+              <a:t>钢价、BOM、工艺、设变按月对齐。不会用错月。</a:t>
+            </a:r>
+          </a:p>
+        </p:txBody>
+      </p:sp>
+      <p:sp>
+        <p:nvSpPr>
+          <p:cNvPr id="19" name="Rectangle 18"/>
           <p:cNvSpPr/>
           <p:nvPr/>
         </p:nvSpPr>
@@ -12459,7 +13223,7 @@
       </p:sp>
       <p:sp>
         <p:nvSpPr>
-          <p:cNvPr id="23" name="Rectangle 22"/>
+          <p:cNvPr id="20" name="Rectangle 19"/>
           <p:cNvSpPr/>
           <p:nvPr/>
         </p:nvSpPr>
@@ -12502,14 +13266,14 @@
       </p:sp>
       <p:sp>
         <p:nvSpPr>
-          <p:cNvPr id="24" name="TextBox 23"/>
+          <p:cNvPr id="21" name="TextBox 20"/>
           <p:cNvSpPr txBox="1"/>
           <p:nvPr/>
         </p:nvSpPr>
         <p:spPr>
           <a:xfrm>
-            <a:off x="6693408" y="4050792"/>
-            <a:ext cx="1097280" cy="292608"/>
+            <a:off x="6693408" y="4142232"/>
+            <a:ext cx="4937760" cy="457200"/>
           </a:xfrm>
           <a:prstGeom prst="rect">
             <a:avLst/>
@@ -12522,64 +13286,29 @@
           <a:p>
             <a:pPr algn="l"/>
             <a:r>
-              <a:rPr sz="1300" b="0">
-                <a:solidFill>
-                  <a:srgbClr val="D04A02"/>
-                </a:solidFill>
-                <a:latin typeface="Arial"/>
-                <a:ea typeface="微软雅黑"/>
-                <a:latin typeface="Arial"/>
-              </a:rPr>
-              <a:t>04</a:t>
-            </a:r>
-          </a:p>
-        </p:txBody>
-      </p:sp>
-      <p:sp>
-        <p:nvSpPr>
-          <p:cNvPr id="25" name="TextBox 24"/>
+              <a:rPr sz="2200" b="1">
+                <a:solidFill>
+                  <a:srgbClr val="2D2D2D"/>
+                </a:solidFill>
+                <a:latin typeface="微软雅黑"/>
+                <a:ea typeface="微软雅黑"/>
+                <a:latin typeface="微软雅黑"/>
+              </a:rPr>
+              <a:t>同一套规则</a:t>
+            </a:r>
+          </a:p>
+        </p:txBody>
+      </p:sp>
+      <p:sp>
+        <p:nvSpPr>
+          <p:cNvPr id="22" name="TextBox 21"/>
           <p:cNvSpPr txBox="1"/>
           <p:nvPr/>
         </p:nvSpPr>
         <p:spPr>
           <a:xfrm>
-            <a:off x="6693408" y="4389120"/>
-            <a:ext cx="4937760" cy="411480"/>
-          </a:xfrm>
-          <a:prstGeom prst="rect">
-            <a:avLst/>
-          </a:prstGeom>
-          <a:noFill/>
-        </p:spPr>
-        <p:txBody>
-          <a:bodyPr wrap="square" anchor="t"/>
-          <a:lstStyle/>
-          <a:p>
-            <a:pPr algn="l"/>
-            <a:r>
-              <a:rPr sz="2200" b="1">
-                <a:solidFill>
-                  <a:srgbClr val="2D2D2D"/>
-                </a:solidFill>
-                <a:latin typeface="微软雅黑"/>
-                <a:ea typeface="微软雅黑"/>
-                <a:latin typeface="微软雅黑"/>
-              </a:rPr>
-              <a:t>每月跟得上</a:t>
-            </a:r>
-          </a:p>
-        </p:txBody>
-      </p:sp>
-      <p:sp>
-        <p:nvSpPr>
-          <p:cNvPr id="26" name="TextBox 25"/>
-          <p:cNvSpPr txBox="1"/>
-          <p:nvPr/>
-        </p:nvSpPr>
-        <p:spPr>
-          <a:xfrm>
-            <a:off x="6693408" y="4892040"/>
-            <a:ext cx="4937760" cy="731520"/>
+            <a:off x="6693408" y="4800600"/>
+            <a:ext cx="4937760" cy="777240"/>
           </a:xfrm>
           <a:prstGeom prst="rect">
             <a:avLst/>
@@ -12592,11 +13321,11 @@
           <a:p>
             <a:pPr algn="l">
               <a:lnSpc>
-                <a:spcPts val="2200"/>
+                <a:spcPts val="2600"/>
               </a:lnSpc>
             </a:pPr>
             <a:r>
-              <a:rPr sz="1400" b="0">
+              <a:rPr sz="1600" b="0">
                 <a:solidFill>
                   <a:srgbClr val="6B6B6B"/>
                 </a:solidFill>
@@ -12604,17 +13333,17 @@
                 <a:ea typeface="微软雅黑"/>
                 <a:latin typeface="微软雅黑"/>
               </a:rPr>
-              <a:t>钢价、BOM、工艺、工程变更进入系统。</a:t>
+              <a:t>总成价、分总成价同一引擎，各算各的。</a:t>
             </a:r>
           </a:p>
           <a:p>
             <a:pPr algn="l">
               <a:lnSpc>
-                <a:spcPts val="2200"/>
+                <a:spcPts val="2600"/>
               </a:lnSpc>
             </a:pPr>
             <a:r>
-              <a:rPr sz="1400" b="0">
+              <a:rPr sz="1600" b="0">
                 <a:solidFill>
                   <a:srgbClr val="6B6B6B"/>
                 </a:solidFill>
@@ -12622,14 +13351,14 @@
                 <a:ea typeface="微软雅黑"/>
                 <a:latin typeface="微软雅黑"/>
               </a:rPr>
-              <a:t>当月依据，当月计算。</a:t>
+              <a:t>焊费计在总成上，不重复计。</a:t>
             </a:r>
           </a:p>
         </p:txBody>
       </p:sp>
       <p:cxnSp>
         <p:nvCxnSpPr>
-          <p:cNvPr id="27" name="Connector 26"/>
+          <p:cNvPr id="23" name="Connector 22"/>
           <p:cNvCxnSpPr/>
           <p:nvPr/>
         </p:nvCxnSpPr>
@@ -12664,7 +13393,7 @@
       </p:cxnSp>
       <p:sp>
         <p:nvSpPr>
-          <p:cNvPr id="28" name="TextBox 27"/>
+          <p:cNvPr id="24" name="TextBox 23"/>
           <p:cNvSpPr txBox="1"/>
           <p:nvPr/>
         </p:nvSpPr>
@@ -12699,7 +13428,7 @@
       </p:sp>
       <p:sp>
         <p:nvSpPr>
-          <p:cNvPr id="29" name="TextBox 28"/>
+          <p:cNvPr id="25" name="TextBox 24"/>
           <p:cNvSpPr txBox="1"/>
           <p:nvPr/>
         </p:nvSpPr>
@@ -12909,7 +13638,7 @@
                 <a:ea typeface="微软雅黑"/>
                 <a:latin typeface="Arial"/>
               </a:rPr>
-              <a:t>08   AI</a:t>
+              <a:t>08   ANSWER</a:t>
             </a:r>
           </a:p>
         </p:txBody>
@@ -12944,7 +13673,7 @@
                 <a:ea typeface="微软雅黑"/>
                 <a:latin typeface="微软雅黑"/>
               </a:rPr>
-              <a:t>引擎把账算准，AI 把账讲明白</a:t>
+              <a:t>看懂涨跌，不用再等做表的人</a:t>
             </a:r>
           </a:p>
         </p:txBody>
@@ -12979,7 +13708,7 @@
                 <a:ea typeface="微软雅黑"/>
                 <a:latin typeface="微软雅黑"/>
               </a:rPr>
-              <a:t>这才是 AI 落地：不是让模型编价格，是让管理人员直接问公司的账。</a:t>
+              <a:t>数字由引擎计算。AI 只讲原因。约 30 秒抓住问题、关键数字和核对线索。</a:t>
             </a:r>
           </a:p>
         </p:txBody>

--- a/docs/结构件自动核价平台-产品介绍.pptx
+++ b/docs/结构件自动核价平台-产品介绍.pptx
@@ -3285,7 +3285,7 @@
                 <a:ea typeface="微软雅黑"/>
                 <a:latin typeface="微软雅黑"/>
               </a:rPr>
-              <a:t>客户买的是价值</a:t>
+              <a:t>从靠人做表，到公司能力</a:t>
             </a:r>
           </a:p>
         </p:txBody>
@@ -3333,8 +3333,8 @@
         </p:nvSpPr>
         <p:spPr>
           <a:xfrm>
-            <a:off x="640080" y="2971800"/>
-            <a:ext cx="10424160" cy="1463040"/>
+            <a:off x="640080" y="2926080"/>
+            <a:ext cx="10424160" cy="1371600"/>
           </a:xfrm>
           <a:prstGeom prst="rect">
             <a:avLst/>
@@ -3359,7 +3359,7 @@
                 <a:ea typeface="微软雅黑"/>
                 <a:latin typeface="微软雅黑"/>
               </a:rPr>
-              <a:t>比继续用 Excel 手工：</a:t>
+              <a:t>管理人员是公司的建设者。</a:t>
             </a:r>
           </a:p>
           <a:p>
@@ -3377,7 +3377,7 @@
                 <a:ea typeface="微软雅黑"/>
                 <a:latin typeface="微软雅黑"/>
               </a:rPr>
-              <a:t>少耗人，两本价各算清，对账有据。</a:t>
+              <a:t>核价，是数字化建设、AI 落地最好的抓手。</a:t>
             </a:r>
           </a:p>
         </p:txBody>
@@ -3629,7 +3629,7 @@
                 <a:ea typeface="微软雅黑"/>
                 <a:latin typeface="Arial"/>
               </a:rPr>
-              <a:t>09   ASK</a:t>
+              <a:t>09   FLOW</a:t>
             </a:r>
           </a:p>
         </p:txBody>
@@ -3664,7 +3664,7 @@
                 <a:ea typeface="微软雅黑"/>
                 <a:latin typeface="微软雅黑"/>
               </a:rPr>
-              <a:t>问一句为什么涨，人只负责开口</a:t>
+              <a:t>从找表，到直接问</a:t>
             </a:r>
           </a:p>
         </p:txBody>
@@ -3699,7 +3699,7 @@
                 <a:ea typeface="微软雅黑"/>
                 <a:latin typeface="微软雅黑"/>
               </a:rPr>
-              <a:t>Excel 手工</a:t>
+              <a:t>过去</a:t>
             </a:r>
           </a:p>
         </p:txBody>
@@ -3734,7 +3734,7 @@
                 <a:ea typeface="微软雅黑"/>
                 <a:latin typeface="微软雅黑"/>
               </a:rPr>
-              <a:t>现网</a:t>
+              <a:t>现在</a:t>
             </a:r>
           </a:p>
         </p:txBody>
@@ -4134,7 +4134,7 @@
                 <a:ea typeface="微软雅黑"/>
                 <a:latin typeface="微软雅黑"/>
               </a:rPr>
-              <a:t>05    等人下结论</a:t>
+              <a:t>05    得出结论</a:t>
             </a:r>
           </a:p>
         </p:txBody>
@@ -4380,7 +4380,7 @@
                 <a:ea typeface="微软雅黑"/>
                 <a:latin typeface="微软雅黑"/>
               </a:rPr>
-              <a:t>02    系统取当月数</a:t>
+              <a:t>02    系统取数</a:t>
             </a:r>
           </a:p>
         </p:txBody>
@@ -4503,7 +4503,7 @@
                 <a:ea typeface="微软雅黑"/>
                 <a:latin typeface="微软雅黑"/>
               </a:rPr>
-              <a:t>03    引擎计算</a:t>
+              <a:t>03    核价引擎计算</a:t>
             </a:r>
           </a:p>
         </p:txBody>
@@ -4626,7 +4626,7 @@
                 <a:ea typeface="微软雅黑"/>
                 <a:latin typeface="微软雅黑"/>
               </a:rPr>
-              <a:t>04    AI 讲原因</a:t>
+              <a:t>04    AI 解释</a:t>
             </a:r>
           </a:p>
         </p:txBody>
@@ -4913,7 +4913,7 @@
                 <a:ea typeface="微软雅黑"/>
                 <a:latin typeface="Arial"/>
               </a:rPr>
-              <a:t>10   WHO</a:t>
+              <a:t>10   ONE LEDGER</a:t>
             </a:r>
           </a:p>
         </p:txBody>
@@ -4948,7 +4948,7 @@
                 <a:ea typeface="微软雅黑"/>
                 <a:latin typeface="微软雅黑"/>
               </a:rPr>
-              <a:t>价值交到三个岗位上</a:t>
+              <a:t>采购、财务、管理人员，看见同一本账</a:t>
             </a:r>
           </a:p>
         </p:txBody>
@@ -5049,8 +5049,8 @@
         </p:nvSpPr>
         <p:spPr>
           <a:xfrm>
-            <a:off x="896112" y="1965960"/>
-            <a:ext cx="3108960" cy="329184"/>
+            <a:off x="932688" y="1920240"/>
+            <a:ext cx="3017520" cy="329184"/>
           </a:xfrm>
           <a:prstGeom prst="rect">
             <a:avLst/>
@@ -5071,7 +5071,7 @@
                 <a:ea typeface="微软雅黑"/>
                 <a:latin typeface="Arial"/>
               </a:rPr>
-              <a:t>01</a:t>
+              <a:t>Data</a:t>
             </a:r>
           </a:p>
         </p:txBody>
@@ -5084,8 +5084,8 @@
         </p:nvSpPr>
         <p:spPr>
           <a:xfrm>
-            <a:off x="896112" y="2468880"/>
-            <a:ext cx="3108960" cy="640080"/>
+            <a:off x="932688" y="2468880"/>
+            <a:ext cx="3017520" cy="1280160"/>
           </a:xfrm>
           <a:prstGeom prst="rect">
             <a:avLst/>
@@ -5106,7 +5106,7 @@
                 <a:ea typeface="微软雅黑"/>
                 <a:latin typeface="微软雅黑"/>
               </a:rPr>
-              <a:t>采购</a:t>
+              <a:t>同一套数据</a:t>
             </a:r>
           </a:p>
         </p:txBody>
@@ -5119,8 +5119,8 @@
         </p:nvSpPr>
         <p:spPr>
           <a:xfrm>
-            <a:off x="896112" y="3383280"/>
-            <a:ext cx="3108960" cy="2011680"/>
+            <a:off x="932688" y="4023360"/>
+            <a:ext cx="3017520" cy="1463040"/>
           </a:xfrm>
           <a:prstGeom prst="rect">
             <a:avLst/>
@@ -5137,7 +5137,7 @@
               </a:lnSpc>
             </a:pPr>
             <a:r>
-              <a:rPr sz="1600" b="0">
+              <a:rPr sz="1500" b="0">
                 <a:solidFill>
                   <a:srgbClr val="6B6B6B"/>
                 </a:solidFill>
@@ -5145,25 +5145,7 @@
                 <a:ea typeface="微软雅黑"/>
                 <a:latin typeface="微软雅黑"/>
               </a:rPr>
-              <a:t>该付的是分总成，看这一本。</a:t>
-            </a:r>
-          </a:p>
-          <a:p>
-            <a:pPr algn="l">
-              <a:lnSpc>
-                <a:spcPts val="2600"/>
-              </a:lnSpc>
-            </a:pPr>
-            <a:r>
-              <a:rPr sz="1600" b="0">
-                <a:solidFill>
-                  <a:srgbClr val="6B6B6B"/>
-                </a:solidFill>
-                <a:latin typeface="微软雅黑"/>
-                <a:ea typeface="微软雅黑"/>
-                <a:latin typeface="微软雅黑"/>
-              </a:rPr>
-              <a:t>协议按结果出，不必再抄表。</a:t>
+              <a:t>文件可溯，不是私人拷贝。</a:t>
             </a:r>
           </a:p>
         </p:txBody>
@@ -5264,8 +5246,8 @@
         </p:nvSpPr>
         <p:spPr>
           <a:xfrm>
-            <a:off x="4690872" y="1965960"/>
-            <a:ext cx="3108960" cy="329184"/>
+            <a:off x="4727448" y="1920240"/>
+            <a:ext cx="3017520" cy="329184"/>
           </a:xfrm>
           <a:prstGeom prst="rect">
             <a:avLst/>
@@ -5286,7 +5268,7 @@
                 <a:ea typeface="微软雅黑"/>
                 <a:latin typeface="Arial"/>
               </a:rPr>
-              <a:t>02</a:t>
+              <a:t>Rule</a:t>
             </a:r>
           </a:p>
         </p:txBody>
@@ -5299,8 +5281,8 @@
         </p:nvSpPr>
         <p:spPr>
           <a:xfrm>
-            <a:off x="4690872" y="2468880"/>
-            <a:ext cx="3108960" cy="640080"/>
+            <a:off x="4727448" y="2468880"/>
+            <a:ext cx="3017520" cy="1280160"/>
           </a:xfrm>
           <a:prstGeom prst="rect">
             <a:avLst/>
@@ -5321,7 +5303,7 @@
                 <a:ea typeface="微软雅黑"/>
                 <a:latin typeface="微软雅黑"/>
               </a:rPr>
-              <a:t>财务</a:t>
+              <a:t>同一套规则</a:t>
             </a:r>
           </a:p>
         </p:txBody>
@@ -5334,8 +5316,8 @@
         </p:nvSpPr>
         <p:spPr>
           <a:xfrm>
-            <a:off x="4690872" y="3383280"/>
-            <a:ext cx="3108960" cy="2011680"/>
+            <a:off x="4727448" y="4023360"/>
+            <a:ext cx="3017520" cy="1463040"/>
           </a:xfrm>
           <a:prstGeom prst="rect">
             <a:avLst/>
@@ -5352,7 +5334,7 @@
               </a:lnSpc>
             </a:pPr>
             <a:r>
-              <a:rPr sz="1600" b="0">
+              <a:rPr sz="1500" b="0">
                 <a:solidFill>
                   <a:srgbClr val="6B6B6B"/>
                 </a:solidFill>
@@ -5360,25 +5342,7 @@
                 <a:ea typeface="微软雅黑"/>
                 <a:latin typeface="微软雅黑"/>
               </a:rPr>
-              <a:t>总成开票、分总成应付，</a:t>
-            </a:r>
-          </a:p>
-          <a:p>
-            <a:pPr algn="l">
-              <a:lnSpc>
-                <a:spcPts val="2600"/>
-              </a:lnSpc>
-            </a:pPr>
-            <a:r>
-              <a:rPr sz="1600" b="0">
-                <a:solidFill>
-                  <a:srgbClr val="6B6B6B"/>
-                </a:solidFill>
-                <a:latin typeface="微软雅黑"/>
-                <a:ea typeface="微软雅黑"/>
-                <a:latin typeface="微软雅黑"/>
-              </a:rPr>
-              <a:t>各有一本。焊费不重复计。</a:t>
+              <a:t>开给奇瑞、付给二级商，同一引擎。</a:t>
             </a:r>
           </a:p>
         </p:txBody>
@@ -5479,8 +5443,8 @@
         </p:nvSpPr>
         <p:spPr>
           <a:xfrm>
-            <a:off x="8485632" y="1965960"/>
-            <a:ext cx="3108960" cy="329184"/>
+            <a:off x="8522208" y="1920240"/>
+            <a:ext cx="3017520" cy="329184"/>
           </a:xfrm>
           <a:prstGeom prst="rect">
             <a:avLst/>
@@ -5501,7 +5465,7 @@
                 <a:ea typeface="微软雅黑"/>
                 <a:latin typeface="Arial"/>
               </a:rPr>
-              <a:t>03</a:t>
+              <a:t>Result</a:t>
             </a:r>
           </a:p>
         </p:txBody>
@@ -5514,8 +5478,8 @@
         </p:nvSpPr>
         <p:spPr>
           <a:xfrm>
-            <a:off x="8485632" y="2468880"/>
-            <a:ext cx="3108960" cy="640080"/>
+            <a:off x="8522208" y="2468880"/>
+            <a:ext cx="3017520" cy="1280160"/>
           </a:xfrm>
           <a:prstGeom prst="rect">
             <a:avLst/>
@@ -5536,7 +5500,7 @@
                 <a:ea typeface="微软雅黑"/>
                 <a:latin typeface="微软雅黑"/>
               </a:rPr>
-              <a:t>管理人员</a:t>
+              <a:t>同一套结果</a:t>
             </a:r>
           </a:p>
         </p:txBody>
@@ -5549,8 +5513,8 @@
         </p:nvSpPr>
         <p:spPr>
           <a:xfrm>
-            <a:off x="8485632" y="3383280"/>
-            <a:ext cx="3108960" cy="2011680"/>
+            <a:off x="8522208" y="4023360"/>
+            <a:ext cx="3017520" cy="1463040"/>
           </a:xfrm>
           <a:prstGeom prst="rect">
             <a:avLst/>
@@ -5567,7 +5531,7 @@
               </a:lnSpc>
             </a:pPr>
             <a:r>
-              <a:rPr sz="1600" b="0">
+              <a:rPr sz="1500" b="0">
                 <a:solidFill>
                   <a:srgbClr val="6B6B6B"/>
                 </a:solidFill>
@@ -5575,25 +5539,7 @@
                 <a:ea typeface="微软雅黑"/>
                 <a:latin typeface="微软雅黑"/>
               </a:rPr>
-              <a:t>涨了为什么、差在哪里，</a:t>
-            </a:r>
-          </a:p>
-          <a:p>
-            <a:pPr algn="l">
-              <a:lnSpc>
-                <a:spcPts val="2600"/>
-              </a:lnSpc>
-            </a:pPr>
-            <a:r>
-              <a:rPr sz="1600" b="0">
-                <a:solidFill>
-                  <a:srgbClr val="6B6B6B"/>
-                </a:solidFill>
-                <a:latin typeface="微软雅黑"/>
-                <a:ea typeface="微软雅黑"/>
-                <a:latin typeface="微软雅黑"/>
-              </a:rPr>
-              <a:t>直接问，不必等骨干。</a:t>
+              <a:t>当月依据，当月结果。对账不必扯皮。</a:t>
             </a:r>
           </a:p>
         </p:txBody>
@@ -5815,7 +5761,7 @@
         </p:nvCxnSpPr>
         <p:spPr>
           <a:xfrm>
-            <a:off x="640080" y="1234440"/>
+            <a:off x="640080" y="1280160"/>
             <a:ext cx="1463040" cy="0"/>
           </a:xfrm>
           <a:prstGeom prst="line">
@@ -5850,7 +5796,7 @@
         </p:nvSpPr>
         <p:spPr>
           <a:xfrm>
-            <a:off x="640080" y="1444752"/>
+            <a:off x="640080" y="1508760"/>
             <a:ext cx="10972800" cy="292608"/>
           </a:xfrm>
           <a:prstGeom prst="rect">
@@ -5872,7 +5818,7 @@
                 <a:ea typeface="微软雅黑"/>
                 <a:latin typeface="Arial"/>
               </a:rPr>
-              <a:t>WHAT THEY BUY</a:t>
+              <a:t>ONE LINE</a:t>
             </a:r>
           </a:p>
         </p:txBody>
@@ -5885,8 +5831,8 @@
         </p:nvSpPr>
         <p:spPr>
           <a:xfrm>
-            <a:off x="640080" y="1920240"/>
-            <a:ext cx="10972800" cy="2103120"/>
+            <a:off x="640080" y="1965960"/>
+            <a:ext cx="10972800" cy="1691640"/>
           </a:xfrm>
           <a:prstGeom prst="rect">
             <a:avLst/>
@@ -5899,11 +5845,11 @@
           <a:p>
             <a:pPr algn="l">
               <a:lnSpc>
-                <a:spcPts val="4800"/>
+                <a:spcPts val="4400"/>
               </a:lnSpc>
             </a:pPr>
             <a:r>
-              <a:rPr sz="3200" b="1">
+              <a:rPr sz="2800" b="1">
                 <a:solidFill>
                   <a:srgbClr val="FFFFFF"/>
                 </a:solidFill>
@@ -5911,17 +5857,17 @@
                 <a:ea typeface="微软雅黑"/>
                 <a:latin typeface="微软雅黑"/>
               </a:rPr>
-              <a:t>人可以交接。焊费只计一次。</a:t>
+              <a:t>先把核价做成公司能力。</a:t>
             </a:r>
           </a:p>
           <a:p>
             <a:pPr algn="l">
               <a:lnSpc>
-                <a:spcPts val="4800"/>
+                <a:spcPts val="4400"/>
               </a:lnSpc>
             </a:pPr>
             <a:r>
-              <a:rPr sz="3200" b="1">
+              <a:rPr sz="2800" b="1">
                 <a:solidFill>
                   <a:srgbClr val="FFFFFF"/>
                 </a:solidFill>
@@ -5929,7 +5875,7 @@
                 <a:ea typeface="微软雅黑"/>
                 <a:latin typeface="微软雅黑"/>
               </a:rPr>
-              <a:t>当月价当月算。对账有据。</a:t>
+              <a:t>数字化建设和 AI 落地，就有了抓手。</a:t>
             </a:r>
           </a:p>
         </p:txBody>
@@ -5942,8 +5888,8 @@
         </p:nvSpPr>
         <p:spPr>
           <a:xfrm>
-            <a:off x="640080" y="4297680"/>
-            <a:ext cx="10972800" cy="1051560"/>
+            <a:off x="640080" y="3886200"/>
+            <a:ext cx="10972800" cy="1097280"/>
           </a:xfrm>
           <a:prstGeom prst="rect">
             <a:avLst/>
@@ -5954,11 +5900,7 @@
           <a:bodyPr wrap="square" anchor="t"/>
           <a:lstStyle/>
           <a:p>
-            <a:pPr algn="l">
-              <a:lnSpc>
-                <a:spcPts val="3000"/>
-              </a:lnSpc>
-            </a:pPr>
+            <a:pPr algn="l"/>
             <a:r>
               <a:rPr sz="1800" b="0">
                 <a:solidFill>
@@ -5968,25 +5910,7 @@
                 <a:ea typeface="微软雅黑"/>
                 <a:latin typeface="微软雅黑"/>
               </a:rPr>
-              <a:t>这是相对 Excel 手工，客户买走的价值。</a:t>
-            </a:r>
-          </a:p>
-          <a:p>
-            <a:pPr algn="l">
-              <a:lnSpc>
-                <a:spcPts val="3000"/>
-              </a:lnSpc>
-            </a:pPr>
-            <a:r>
-              <a:rPr sz="1800" b="0">
-                <a:solidFill>
-                  <a:srgbClr val="C8C8C8"/>
-                </a:solidFill>
-                <a:latin typeface="微软雅黑"/>
-                <a:ea typeface="微软雅黑"/>
-                <a:latin typeface="微软雅黑"/>
-              </a:rPr>
-              <a:t>熟练人员好几天的计算，上传依据后约 20 秒。</a:t>
+              <a:t>少绑人、少扯皮。开给奇瑞多少、付给二级商多少，约 20 秒能算清。</a:t>
             </a:r>
           </a:p>
         </p:txBody>
@@ -6238,7 +6162,7 @@
                 <a:ea typeface="微软雅黑"/>
                 <a:latin typeface="Arial"/>
               </a:rPr>
-              <a:t>01   VALUE</a:t>
+              <a:t>01   THE LEVER</a:t>
             </a:r>
           </a:p>
         </p:txBody>
@@ -6273,7 +6197,7 @@
                 <a:ea typeface="微软雅黑"/>
                 <a:latin typeface="微软雅黑"/>
               </a:rPr>
-              <a:t>价值，是比 Excel 多保住的结果</a:t>
+              <a:t>数字化、AI 要落地，核价是最好的抓手</a:t>
             </a:r>
           </a:p>
         </p:txBody>
@@ -6287,7 +6211,7 @@
         <p:spPr>
           <a:xfrm>
             <a:off x="640080" y="1371600"/>
-            <a:ext cx="10972800" cy="457200"/>
+            <a:ext cx="10972800" cy="502920"/>
           </a:xfrm>
           <a:prstGeom prst="rect">
             <a:avLst/>
@@ -6308,7 +6232,7 @@
                 <a:ea typeface="微软雅黑"/>
                 <a:latin typeface="微软雅黑"/>
               </a:rPr>
-              <a:t>每月只认三样：少耗的人、两本价各算清、少打的架。</a:t>
+              <a:t>建设不是再上一个系统。是把公司最痛、最有规则、立刻能见效的事做成能力。</a:t>
             </a:r>
           </a:p>
         </p:txBody>
@@ -6321,8 +6245,8 @@
         </p:nvSpPr>
         <p:spPr>
           <a:xfrm>
-            <a:off x="640080" y="2011680"/>
-            <a:ext cx="3611880" cy="3977639"/>
+            <a:off x="640080" y="2057400"/>
+            <a:ext cx="3611880" cy="3931920"/>
           </a:xfrm>
           <a:prstGeom prst="rect">
             <a:avLst/>
@@ -6366,7 +6290,7 @@
         </p:nvSpPr>
         <p:spPr>
           <a:xfrm>
-            <a:off x="640080" y="2011680"/>
+            <a:off x="640080" y="2057400"/>
             <a:ext cx="3611880" cy="41148"/>
           </a:xfrm>
           <a:prstGeom prst="rect">
@@ -6409,8 +6333,8 @@
         </p:nvSpPr>
         <p:spPr>
           <a:xfrm>
-            <a:off x="896112" y="2286000"/>
-            <a:ext cx="3108960" cy="640080"/>
+            <a:off x="896112" y="2331720"/>
+            <a:ext cx="3108960" cy="457200"/>
           </a:xfrm>
           <a:prstGeom prst="rect">
             <a:avLst/>
@@ -6431,7 +6355,7 @@
                 <a:ea typeface="微软雅黑"/>
                 <a:latin typeface="微软雅黑"/>
               </a:rPr>
-              <a:t>人的时间</a:t>
+              <a:t>有规则</a:t>
             </a:r>
           </a:p>
         </p:txBody>
@@ -6444,8 +6368,8 @@
         </p:nvSpPr>
         <p:spPr>
           <a:xfrm>
-            <a:off x="896112" y="3108960"/>
-            <a:ext cx="3108960" cy="2468880"/>
+            <a:off x="896112" y="2971800"/>
+            <a:ext cx="3108960" cy="2560320"/>
           </a:xfrm>
           <a:prstGeom prst="rect">
             <a:avLst/>
@@ -6470,7 +6394,7 @@
                 <a:ea typeface="微软雅黑"/>
                 <a:latin typeface="微软雅黑"/>
               </a:rPr>
-              <a:t>少占熟练人员好几天。</a:t>
+              <a:t>钢价政策、工艺、BOM、设变，本来就有企业口径。</a:t>
             </a:r>
           </a:p>
           <a:p>
@@ -6488,25 +6412,7 @@
                 <a:ea typeface="微软雅黑"/>
                 <a:latin typeface="微软雅黑"/>
               </a:rPr>
-              <a:t>人请假，两本账照样出。</a:t>
-            </a:r>
-          </a:p>
-          <a:p>
-            <a:pPr algn="l">
-              <a:lnSpc>
-                <a:spcPts val="2600"/>
-              </a:lnSpc>
-            </a:pPr>
-            <a:r>
-              <a:rPr sz="1500" b="0">
-                <a:solidFill>
-                  <a:srgbClr val="6B6B6B"/>
-                </a:solidFill>
-                <a:latin typeface="微软雅黑"/>
-                <a:ea typeface="微软雅黑"/>
-                <a:latin typeface="微软雅黑"/>
-              </a:rPr>
-              <a:t>省下的是最缺的人。</a:t>
+              <a:t>适合写成引擎，而不是口头 AI。</a:t>
             </a:r>
           </a:p>
         </p:txBody>
@@ -6519,8 +6425,8 @@
         </p:nvSpPr>
         <p:spPr>
           <a:xfrm>
-            <a:off x="4434840" y="2011680"/>
-            <a:ext cx="3611880" cy="3977639"/>
+            <a:off x="4434840" y="2057400"/>
+            <a:ext cx="3611880" cy="3931920"/>
           </a:xfrm>
           <a:prstGeom prst="rect">
             <a:avLst/>
@@ -6564,7 +6470,7 @@
         </p:nvSpPr>
         <p:spPr>
           <a:xfrm>
-            <a:off x="4434840" y="2011680"/>
+            <a:off x="4434840" y="2057400"/>
             <a:ext cx="3611880" cy="41148"/>
           </a:xfrm>
           <a:prstGeom prst="rect">
@@ -6607,8 +6513,8 @@
         </p:nvSpPr>
         <p:spPr>
           <a:xfrm>
-            <a:off x="4690872" y="2286000"/>
-            <a:ext cx="3108960" cy="640080"/>
+            <a:off x="4690872" y="2331720"/>
+            <a:ext cx="3108960" cy="457200"/>
           </a:xfrm>
           <a:prstGeom prst="rect">
             <a:avLst/>
@@ -6629,7 +6535,7 @@
                 <a:ea typeface="微软雅黑"/>
                 <a:latin typeface="微软雅黑"/>
               </a:rPr>
-              <a:t>两本价</a:t>
+              <a:t>有真账</a:t>
             </a:r>
           </a:p>
         </p:txBody>
@@ -6642,8 +6548,8 @@
         </p:nvSpPr>
         <p:spPr>
           <a:xfrm>
-            <a:off x="4690872" y="3108960"/>
-            <a:ext cx="3108960" cy="2468880"/>
+            <a:off x="4690872" y="2971800"/>
+            <a:ext cx="3108960" cy="2560320"/>
           </a:xfrm>
           <a:prstGeom prst="rect">
             <a:avLst/>
@@ -6668,7 +6574,7 @@
                 <a:ea typeface="微软雅黑"/>
                 <a:latin typeface="微软雅黑"/>
               </a:rPr>
-              <a:t>开给奇瑞的是焊完的总成。</a:t>
+              <a:t>开给奇瑞的总成价、付给二级商的采购价，每月都要对账。</a:t>
             </a:r>
           </a:p>
           <a:p>
@@ -6686,25 +6592,7 @@
                 <a:ea typeface="微软雅黑"/>
                 <a:latin typeface="微软雅黑"/>
               </a:rPr>
-              <a:t>付给二级商的是分总成。</a:t>
-            </a:r>
-          </a:p>
-          <a:p>
-            <a:pPr algn="l">
-              <a:lnSpc>
-                <a:spcPts val="2600"/>
-              </a:lnSpc>
-            </a:pPr>
-            <a:r>
-              <a:rPr sz="1500" b="0">
-                <a:solidFill>
-                  <a:srgbClr val="6B6B6B"/>
-                </a:solidFill>
-                <a:latin typeface="微软雅黑"/>
-                <a:ea typeface="微软雅黑"/>
-                <a:latin typeface="微软雅黑"/>
-              </a:rPr>
-              <a:t>中间是公司自己的焊接。</a:t>
+              <a:t>建设立刻碰到钱。</a:t>
             </a:r>
           </a:p>
         </p:txBody>
@@ -6717,8 +6605,8 @@
         </p:nvSpPr>
         <p:spPr>
           <a:xfrm>
-            <a:off x="8229600" y="2011680"/>
-            <a:ext cx="3611880" cy="3977639"/>
+            <a:off x="8229600" y="2057400"/>
+            <a:ext cx="3611880" cy="3931920"/>
           </a:xfrm>
           <a:prstGeom prst="rect">
             <a:avLst/>
@@ -6762,7 +6650,7 @@
         </p:nvSpPr>
         <p:spPr>
           <a:xfrm>
-            <a:off x="8229600" y="2011680"/>
+            <a:off x="8229600" y="2057400"/>
             <a:ext cx="3611880" cy="41148"/>
           </a:xfrm>
           <a:prstGeom prst="rect">
@@ -6805,8 +6693,8 @@
         </p:nvSpPr>
         <p:spPr>
           <a:xfrm>
-            <a:off x="8485632" y="2286000"/>
-            <a:ext cx="3108960" cy="640080"/>
+            <a:off x="8485632" y="2331720"/>
+            <a:ext cx="3108960" cy="457200"/>
           </a:xfrm>
           <a:prstGeom prst="rect">
             <a:avLst/>
@@ -6827,7 +6715,7 @@
                 <a:ea typeface="微软雅黑"/>
                 <a:latin typeface="微软雅黑"/>
               </a:rPr>
-              <a:t>对账的工夫</a:t>
+              <a:t>立刻见效</a:t>
             </a:r>
           </a:p>
         </p:txBody>
@@ -6840,8 +6728,8 @@
         </p:nvSpPr>
         <p:spPr>
           <a:xfrm>
-            <a:off x="8485632" y="3108960"/>
-            <a:ext cx="3108960" cy="2468880"/>
+            <a:off x="8485632" y="2971800"/>
+            <a:ext cx="3108960" cy="2560320"/>
           </a:xfrm>
           <a:prstGeom prst="rect">
             <a:avLst/>
@@ -6866,7 +6754,7 @@
                 <a:ea typeface="微软雅黑"/>
                 <a:latin typeface="微软雅黑"/>
               </a:rPr>
-              <a:t>文件、人和版本留在平台。</a:t>
+              <a:t>一事一议以前要熟练人员做好几天。</a:t>
             </a:r>
           </a:p>
           <a:p>
@@ -6884,25 +6772,7 @@
                 <a:ea typeface="微软雅黑"/>
                 <a:latin typeface="微软雅黑"/>
               </a:rPr>
-              <a:t>对奇瑞、二级商和财务，</a:t>
-            </a:r>
-          </a:p>
-          <a:p>
-            <a:pPr algn="l">
-              <a:lnSpc>
-                <a:spcPts val="2600"/>
-              </a:lnSpc>
-            </a:pPr>
-            <a:r>
-              <a:rPr sz="1500" b="0">
-                <a:solidFill>
-                  <a:srgbClr val="6B6B6B"/>
-                </a:solidFill>
-                <a:latin typeface="微软雅黑"/>
-                <a:ea typeface="微软雅黑"/>
-                <a:latin typeface="微软雅黑"/>
-              </a:rPr>
-              <a:t>不必再开会统一口径。</a:t>
+              <a:t>上传后引擎约 20 秒。AI 问的是这本真账。</a:t>
             </a:r>
           </a:p>
         </p:txBody>
@@ -7189,7 +7059,7 @@
                 <a:ea typeface="微软雅黑"/>
                 <a:latin typeface="Arial"/>
               </a:rPr>
-              <a:t>02   VERSUS</a:t>
+              <a:t>02   WHAT IT IS</a:t>
             </a:r>
           </a:p>
         </p:txBody>
@@ -7224,7 +7094,7 @@
                 <a:ea typeface="微软雅黑"/>
                 <a:latin typeface="微软雅黑"/>
               </a:rPr>
-              <a:t>同样核价，Excel 和现网差在哪</a:t>
+              <a:t>结构件自动核价平台</a:t>
             </a:r>
           </a:p>
         </p:txBody>
@@ -7237,8 +7107,8 @@
         </p:nvSpPr>
         <p:spPr>
           <a:xfrm>
-            <a:off x="1737360" y="1353312"/>
-            <a:ext cx="3017520" cy="256032"/>
+            <a:off x="640080" y="1389888"/>
+            <a:ext cx="10972800" cy="640080"/>
           </a:xfrm>
           <a:prstGeom prst="rect">
             <a:avLst/>
@@ -7249,101 +7119,35 @@
           <a:bodyPr wrap="square" anchor="t"/>
           <a:lstStyle/>
           <a:p>
-            <a:pPr algn="l"/>
-            <a:r>
-              <a:rPr sz="1200" b="0" spc="60">
-                <a:solidFill>
-                  <a:srgbClr val="D04A02"/>
-                </a:solidFill>
-                <a:latin typeface="微软雅黑"/>
-                <a:ea typeface="微软雅黑"/>
-                <a:latin typeface="微软雅黑"/>
-              </a:rPr>
-              <a:t>Excel 手工</a:t>
-            </a:r>
-          </a:p>
-        </p:txBody>
-      </p:sp>
-      <p:sp>
-        <p:nvSpPr>
-          <p:cNvPr id="8" name="TextBox 7"/>
-          <p:cNvSpPr txBox="1"/>
-          <p:nvPr/>
-        </p:nvSpPr>
-        <p:spPr>
-          <a:xfrm>
-            <a:off x="4892040" y="1353312"/>
-            <a:ext cx="3017520" cy="256032"/>
-          </a:xfrm>
-          <a:prstGeom prst="rect">
-            <a:avLst/>
-          </a:prstGeom>
-          <a:noFill/>
-        </p:spPr>
-        <p:txBody>
-          <a:bodyPr wrap="square" anchor="t"/>
-          <a:lstStyle/>
-          <a:p>
-            <a:pPr algn="l"/>
-            <a:r>
-              <a:rPr sz="1200" b="0" spc="60">
-                <a:solidFill>
-                  <a:srgbClr val="D04A02"/>
-                </a:solidFill>
-                <a:latin typeface="微软雅黑"/>
-                <a:ea typeface="微软雅黑"/>
-                <a:latin typeface="微软雅黑"/>
-              </a:rPr>
-              <a:t>现网</a:t>
-            </a:r>
-          </a:p>
-        </p:txBody>
-      </p:sp>
-      <p:sp>
-        <p:nvSpPr>
-          <p:cNvPr id="9" name="TextBox 8"/>
-          <p:cNvSpPr txBox="1"/>
-          <p:nvPr/>
-        </p:nvSpPr>
-        <p:spPr>
-          <a:xfrm>
-            <a:off x="8046720" y="1353312"/>
-            <a:ext cx="3017520" cy="256032"/>
-          </a:xfrm>
-          <a:prstGeom prst="rect">
-            <a:avLst/>
-          </a:prstGeom>
-          <a:noFill/>
-        </p:spPr>
-        <p:txBody>
-          <a:bodyPr wrap="square" anchor="t"/>
-          <a:lstStyle/>
-          <a:p>
-            <a:pPr algn="l"/>
-            <a:r>
-              <a:rPr sz="1200" b="0" spc="60">
-                <a:solidFill>
-                  <a:srgbClr val="D04A02"/>
-                </a:solidFill>
-                <a:latin typeface="微软雅黑"/>
-                <a:ea typeface="微软雅黑"/>
-                <a:latin typeface="微软雅黑"/>
-              </a:rPr>
-              <a:t>公司得到</a:t>
-            </a:r>
-          </a:p>
-        </p:txBody>
-      </p:sp>
-      <p:sp>
-        <p:nvSpPr>
-          <p:cNvPr id="10" name="Rectangle 9"/>
+            <a:pPr algn="l">
+              <a:lnSpc>
+                <a:spcPts val="2600"/>
+              </a:lnSpc>
+            </a:pPr>
+            <a:r>
+              <a:rPr sz="1600" b="0">
+                <a:solidFill>
+                  <a:srgbClr val="6B6B6B"/>
+                </a:solidFill>
+                <a:latin typeface="微软雅黑"/>
+                <a:ea typeface="微软雅黑"/>
+                <a:latin typeface="微软雅黑"/>
+              </a:rPr>
+              <a:t>政策、BOM、工艺、变更纳入同一套规则。算出总成与采购对象价格，直接出协议；AI 解读动因。</a:t>
+            </a:r>
+          </a:p>
+        </p:txBody>
+      </p:sp>
+      <p:sp>
+        <p:nvSpPr>
+          <p:cNvPr id="8" name="Rectangle 7"/>
           <p:cNvSpPr/>
           <p:nvPr/>
         </p:nvSpPr>
         <p:spPr>
           <a:xfrm>
-            <a:off x="640080" y="1700784"/>
-            <a:ext cx="10908792" cy="1024128"/>
+            <a:off x="640080" y="2194560"/>
+            <a:ext cx="3611880" cy="1783080"/>
           </a:xfrm>
           <a:prstGeom prst="rect">
             <a:avLst/>
@@ -7381,14 +7185,14 @@
       </p:sp>
       <p:sp>
         <p:nvSpPr>
-          <p:cNvPr id="11" name="Rectangle 10"/>
+          <p:cNvPr id="9" name="Rectangle 8"/>
           <p:cNvSpPr/>
           <p:nvPr/>
         </p:nvSpPr>
         <p:spPr>
           <a:xfrm>
-            <a:off x="640080" y="1700784"/>
-            <a:ext cx="50292" cy="1024128"/>
+            <a:off x="640080" y="2194560"/>
+            <a:ext cx="3611880" cy="41148"/>
           </a:xfrm>
           <a:prstGeom prst="rect">
             <a:avLst/>
@@ -7424,14 +7228,14 @@
       </p:sp>
       <p:sp>
         <p:nvSpPr>
-          <p:cNvPr id="12" name="TextBox 11"/>
+          <p:cNvPr id="10" name="TextBox 9"/>
           <p:cNvSpPr txBox="1"/>
           <p:nvPr/>
         </p:nvSpPr>
         <p:spPr>
           <a:xfrm>
-            <a:off x="822960" y="1956816"/>
-            <a:ext cx="777240" cy="502920"/>
+            <a:off x="896112" y="2487168"/>
+            <a:ext cx="3108960" cy="292608"/>
           </a:xfrm>
           <a:prstGeom prst="rect">
             <a:avLst/>
@@ -7439,11 +7243,46 @@
           <a:noFill/>
         </p:spPr>
         <p:txBody>
-          <a:bodyPr wrap="square" anchor="ctr"/>
+          <a:bodyPr wrap="square" anchor="t"/>
           <a:lstStyle/>
           <a:p>
             <a:pPr algn="l"/>
             <a:r>
+              <a:rPr sz="1200" b="0" spc="80">
+                <a:solidFill>
+                  <a:srgbClr val="D04A02"/>
+                </a:solidFill>
+                <a:latin typeface="Arial"/>
+                <a:ea typeface="微软雅黑"/>
+                <a:latin typeface="Arial"/>
+              </a:rPr>
+              <a:t>Policy</a:t>
+            </a:r>
+          </a:p>
+        </p:txBody>
+      </p:sp>
+      <p:sp>
+        <p:nvSpPr>
+          <p:cNvPr id="11" name="TextBox 10"/>
+          <p:cNvSpPr txBox="1"/>
+          <p:nvPr/>
+        </p:nvSpPr>
+        <p:spPr>
+          <a:xfrm>
+            <a:off x="896112" y="2926080"/>
+            <a:ext cx="3108960" cy="640080"/>
+          </a:xfrm>
+          <a:prstGeom prst="rect">
+            <a:avLst/>
+          </a:prstGeom>
+          <a:noFill/>
+        </p:spPr>
+        <p:txBody>
+          <a:bodyPr wrap="square" anchor="t"/>
+          <a:lstStyle/>
+          <a:p>
+            <a:pPr algn="l"/>
+            <a:r>
               <a:rPr sz="2000" b="1">
                 <a:solidFill>
                   <a:srgbClr val="2D2D2D"/>
@@ -7452,192 +7291,21 @@
                 <a:ea typeface="微软雅黑"/>
                 <a:latin typeface="微软雅黑"/>
               </a:rPr>
-              <a:t>人</a:t>
-            </a:r>
-          </a:p>
-        </p:txBody>
-      </p:sp>
-      <p:sp>
-        <p:nvSpPr>
-          <p:cNvPr id="13" name="TextBox 12"/>
-          <p:cNvSpPr txBox="1"/>
-          <p:nvPr/>
-        </p:nvSpPr>
-        <p:spPr>
-          <a:xfrm>
-            <a:off x="1737360" y="1847088"/>
-            <a:ext cx="2971800" cy="749808"/>
-          </a:xfrm>
-          <a:prstGeom prst="rect">
-            <a:avLst/>
-          </a:prstGeom>
-          <a:noFill/>
-        </p:spPr>
-        <p:txBody>
-          <a:bodyPr wrap="square" anchor="t"/>
-          <a:lstStyle/>
-          <a:p>
-            <a:pPr algn="l">
-              <a:lnSpc>
-                <a:spcPts val="2200"/>
-              </a:lnSpc>
-            </a:pPr>
-            <a:r>
-              <a:rPr sz="1400" b="0">
-                <a:solidFill>
-                  <a:srgbClr val="6B6B6B"/>
-                </a:solidFill>
-                <a:latin typeface="微软雅黑"/>
-                <a:ea typeface="微软雅黑"/>
-                <a:latin typeface="微软雅黑"/>
-              </a:rPr>
-              <a:t>熟练人员做好几天。</a:t>
-            </a:r>
-          </a:p>
-          <a:p>
-            <a:pPr algn="l">
-              <a:lnSpc>
-                <a:spcPts val="2200"/>
-              </a:lnSpc>
-            </a:pPr>
-            <a:r>
-              <a:rPr sz="1400" b="0">
-                <a:solidFill>
-                  <a:srgbClr val="6B6B6B"/>
-                </a:solidFill>
-                <a:latin typeface="微软雅黑"/>
-                <a:ea typeface="微软雅黑"/>
-                <a:latin typeface="微软雅黑"/>
-              </a:rPr>
-              <a:t>人走，账就停。</a:t>
-            </a:r>
-          </a:p>
-        </p:txBody>
-      </p:sp>
-      <p:sp>
-        <p:nvSpPr>
-          <p:cNvPr id="14" name="TextBox 13"/>
-          <p:cNvSpPr txBox="1"/>
-          <p:nvPr/>
-        </p:nvSpPr>
-        <p:spPr>
-          <a:xfrm>
-            <a:off x="4892040" y="1847088"/>
-            <a:ext cx="2971800" cy="749808"/>
-          </a:xfrm>
-          <a:prstGeom prst="rect">
-            <a:avLst/>
-          </a:prstGeom>
-          <a:noFill/>
-        </p:spPr>
-        <p:txBody>
-          <a:bodyPr wrap="square" anchor="t"/>
-          <a:lstStyle/>
-          <a:p>
-            <a:pPr algn="l">
-              <a:lnSpc>
-                <a:spcPts val="2200"/>
-              </a:lnSpc>
-            </a:pPr>
-            <a:r>
-              <a:rPr sz="1400" b="0">
-                <a:solidFill>
-                  <a:srgbClr val="2D2D2D"/>
-                </a:solidFill>
-                <a:latin typeface="微软雅黑"/>
-                <a:ea typeface="微软雅黑"/>
-                <a:latin typeface="微软雅黑"/>
-              </a:rPr>
-              <a:t>上传之后，引擎约 20 秒。</a:t>
-            </a:r>
-          </a:p>
-          <a:p>
-            <a:pPr algn="l">
-              <a:lnSpc>
-                <a:spcPts val="2200"/>
-              </a:lnSpc>
-            </a:pPr>
-            <a:r>
-              <a:rPr sz="1400" b="0">
-                <a:solidFill>
-                  <a:srgbClr val="2D2D2D"/>
-                </a:solidFill>
-                <a:latin typeface="微软雅黑"/>
-                <a:ea typeface="微软雅黑"/>
-                <a:latin typeface="微软雅黑"/>
-              </a:rPr>
-              <a:t>规则留在平台。</a:t>
-            </a:r>
-          </a:p>
-        </p:txBody>
-      </p:sp>
-      <p:sp>
-        <p:nvSpPr>
-          <p:cNvPr id="15" name="TextBox 14"/>
-          <p:cNvSpPr txBox="1"/>
-          <p:nvPr/>
-        </p:nvSpPr>
-        <p:spPr>
-          <a:xfrm>
-            <a:off x="8046720" y="1847088"/>
-            <a:ext cx="3246120" cy="749808"/>
-          </a:xfrm>
-          <a:prstGeom prst="rect">
-            <a:avLst/>
-          </a:prstGeom>
-          <a:noFill/>
-        </p:spPr>
-        <p:txBody>
-          <a:bodyPr wrap="square" anchor="t"/>
-          <a:lstStyle/>
-          <a:p>
-            <a:pPr algn="l">
-              <a:lnSpc>
-                <a:spcPts val="2200"/>
-              </a:lnSpc>
-            </a:pPr>
-            <a:r>
-              <a:rPr sz="1400" b="1">
-                <a:solidFill>
-                  <a:srgbClr val="2D2D2D"/>
-                </a:solidFill>
-                <a:latin typeface="微软雅黑"/>
-                <a:ea typeface="微软雅黑"/>
-                <a:latin typeface="微软雅黑"/>
-              </a:rPr>
-              <a:t>人转去谈价和异常。</a:t>
-            </a:r>
-          </a:p>
-          <a:p>
-            <a:pPr algn="l">
-              <a:lnSpc>
-                <a:spcPts val="2200"/>
-              </a:lnSpc>
-            </a:pPr>
-            <a:r>
-              <a:rPr sz="1400" b="1">
-                <a:solidFill>
-                  <a:srgbClr val="2D2D2D"/>
-                </a:solidFill>
-                <a:latin typeface="微软雅黑"/>
-                <a:ea typeface="微软雅黑"/>
-                <a:latin typeface="微软雅黑"/>
-              </a:rPr>
-              <a:t>请假也不停账。</a:t>
-            </a:r>
-          </a:p>
-        </p:txBody>
-      </p:sp>
-      <p:sp>
-        <p:nvSpPr>
-          <p:cNvPr id="16" name="Rectangle 15"/>
+              <a:t>钢价一事一议</a:t>
+            </a:r>
+          </a:p>
+        </p:txBody>
+      </p:sp>
+      <p:sp>
+        <p:nvSpPr>
+          <p:cNvPr id="12" name="Rectangle 11"/>
           <p:cNvSpPr/>
           <p:nvPr/>
         </p:nvSpPr>
         <p:spPr>
           <a:xfrm>
-            <a:off x="640080" y="2816352"/>
-            <a:ext cx="10908792" cy="1024128"/>
+            <a:off x="4434840" y="2194560"/>
+            <a:ext cx="3611880" cy="1783080"/>
           </a:xfrm>
           <a:prstGeom prst="rect">
             <a:avLst/>
@@ -7675,14 +7343,14 @@
       </p:sp>
       <p:sp>
         <p:nvSpPr>
-          <p:cNvPr id="17" name="Rectangle 16"/>
+          <p:cNvPr id="13" name="Rectangle 12"/>
           <p:cNvSpPr/>
           <p:nvPr/>
         </p:nvSpPr>
         <p:spPr>
           <a:xfrm>
-            <a:off x="640080" y="2816352"/>
-            <a:ext cx="50292" cy="1024128"/>
+            <a:off x="4434840" y="2194560"/>
+            <a:ext cx="3611880" cy="41148"/>
           </a:xfrm>
           <a:prstGeom prst="rect">
             <a:avLst/>
@@ -7718,14 +7386,14 @@
       </p:sp>
       <p:sp>
         <p:nvSpPr>
-          <p:cNvPr id="18" name="TextBox 17"/>
+          <p:cNvPr id="14" name="TextBox 13"/>
           <p:cNvSpPr txBox="1"/>
           <p:nvPr/>
         </p:nvSpPr>
         <p:spPr>
           <a:xfrm>
-            <a:off x="822960" y="3072384"/>
-            <a:ext cx="777240" cy="502920"/>
+            <a:off x="4690872" y="2487168"/>
+            <a:ext cx="3108960" cy="292608"/>
           </a:xfrm>
           <a:prstGeom prst="rect">
             <a:avLst/>
@@ -7733,11 +7401,46 @@
           <a:noFill/>
         </p:spPr>
         <p:txBody>
-          <a:bodyPr wrap="square" anchor="ctr"/>
+          <a:bodyPr wrap="square" anchor="t"/>
           <a:lstStyle/>
           <a:p>
             <a:pPr algn="l"/>
             <a:r>
+              <a:rPr sz="1200" b="0" spc="80">
+                <a:solidFill>
+                  <a:srgbClr val="D04A02"/>
+                </a:solidFill>
+                <a:latin typeface="Arial"/>
+                <a:ea typeface="微软雅黑"/>
+                <a:latin typeface="Arial"/>
+              </a:rPr>
+              <a:t>BOM</a:t>
+            </a:r>
+          </a:p>
+        </p:txBody>
+      </p:sp>
+      <p:sp>
+        <p:nvSpPr>
+          <p:cNvPr id="15" name="TextBox 14"/>
+          <p:cNvSpPr txBox="1"/>
+          <p:nvPr/>
+        </p:nvSpPr>
+        <p:spPr>
+          <a:xfrm>
+            <a:off x="4690872" y="2926080"/>
+            <a:ext cx="3108960" cy="640080"/>
+          </a:xfrm>
+          <a:prstGeom prst="rect">
+            <a:avLst/>
+          </a:prstGeom>
+          <a:noFill/>
+        </p:spPr>
+        <p:txBody>
+          <a:bodyPr wrap="square" anchor="t"/>
+          <a:lstStyle/>
+          <a:p>
+            <a:pPr algn="l"/>
+            <a:r>
               <a:rPr sz="2000" b="1">
                 <a:solidFill>
                   <a:srgbClr val="2D2D2D"/>
@@ -7746,192 +7449,21 @@
                 <a:ea typeface="微软雅黑"/>
                 <a:latin typeface="微软雅黑"/>
               </a:rPr>
-              <a:t>价</a:t>
-            </a:r>
-          </a:p>
-        </p:txBody>
-      </p:sp>
-      <p:sp>
-        <p:nvSpPr>
-          <p:cNvPr id="19" name="TextBox 18"/>
-          <p:cNvSpPr txBox="1"/>
-          <p:nvPr/>
-        </p:nvSpPr>
-        <p:spPr>
-          <a:xfrm>
-            <a:off x="1737360" y="2962656"/>
-            <a:ext cx="2971800" cy="749808"/>
-          </a:xfrm>
-          <a:prstGeom prst="rect">
-            <a:avLst/>
-          </a:prstGeom>
-          <a:noFill/>
-        </p:spPr>
-        <p:txBody>
-          <a:bodyPr wrap="square" anchor="t"/>
-          <a:lstStyle/>
-          <a:p>
-            <a:pPr algn="l">
-              <a:lnSpc>
-                <a:spcPts val="2200"/>
-              </a:lnSpc>
-            </a:pPr>
-            <a:r>
-              <a:rPr sz="1400" b="0">
-                <a:solidFill>
-                  <a:srgbClr val="6B6B6B"/>
-                </a:solidFill>
-                <a:latin typeface="微软雅黑"/>
-                <a:ea typeface="微软雅黑"/>
-                <a:latin typeface="微软雅黑"/>
-              </a:rPr>
-              <a:t>总成、分总成各一张表。</a:t>
-            </a:r>
-          </a:p>
-          <a:p>
-            <a:pPr algn="l">
-              <a:lnSpc>
-                <a:spcPts val="2200"/>
-              </a:lnSpc>
-            </a:pPr>
-            <a:r>
-              <a:rPr sz="1400" b="0">
-                <a:solidFill>
-                  <a:srgbClr val="6B6B6B"/>
-                </a:solidFill>
-                <a:latin typeface="微软雅黑"/>
-                <a:ea typeface="微软雅黑"/>
-                <a:latin typeface="微软雅黑"/>
-              </a:rPr>
-              <a:t>两本对不到一起。</a:t>
-            </a:r>
-          </a:p>
-        </p:txBody>
-      </p:sp>
-      <p:sp>
-        <p:nvSpPr>
-          <p:cNvPr id="20" name="TextBox 19"/>
-          <p:cNvSpPr txBox="1"/>
-          <p:nvPr/>
-        </p:nvSpPr>
-        <p:spPr>
-          <a:xfrm>
-            <a:off x="4892040" y="2962656"/>
-            <a:ext cx="2971800" cy="749808"/>
-          </a:xfrm>
-          <a:prstGeom prst="rect">
-            <a:avLst/>
-          </a:prstGeom>
-          <a:noFill/>
-        </p:spPr>
-        <p:txBody>
-          <a:bodyPr wrap="square" anchor="t"/>
-          <a:lstStyle/>
-          <a:p>
-            <a:pPr algn="l">
-              <a:lnSpc>
-                <a:spcPts val="2200"/>
-              </a:lnSpc>
-            </a:pPr>
-            <a:r>
-              <a:rPr sz="1400" b="0">
-                <a:solidFill>
-                  <a:srgbClr val="2D2D2D"/>
-                </a:solidFill>
-                <a:latin typeface="微软雅黑"/>
-                <a:ea typeface="微软雅黑"/>
-                <a:latin typeface="微软雅黑"/>
-              </a:rPr>
-              <a:t>总成价、分总成价</a:t>
-            </a:r>
-          </a:p>
-          <a:p>
-            <a:pPr algn="l">
-              <a:lnSpc>
-                <a:spcPts val="2200"/>
-              </a:lnSpc>
-            </a:pPr>
-            <a:r>
-              <a:rPr sz="1400" b="0">
-                <a:solidFill>
-                  <a:srgbClr val="2D2D2D"/>
-                </a:solidFill>
-                <a:latin typeface="微软雅黑"/>
-                <a:ea typeface="微软雅黑"/>
-                <a:latin typeface="微软雅黑"/>
-              </a:rPr>
-              <a:t>同一引擎，各算各的。</a:t>
-            </a:r>
-          </a:p>
-        </p:txBody>
-      </p:sp>
-      <p:sp>
-        <p:nvSpPr>
-          <p:cNvPr id="21" name="TextBox 20"/>
-          <p:cNvSpPr txBox="1"/>
-          <p:nvPr/>
-        </p:nvSpPr>
-        <p:spPr>
-          <a:xfrm>
-            <a:off x="8046720" y="2962656"/>
-            <a:ext cx="3246120" cy="749808"/>
-          </a:xfrm>
-          <a:prstGeom prst="rect">
-            <a:avLst/>
-          </a:prstGeom>
-          <a:noFill/>
-        </p:spPr>
-        <p:txBody>
-          <a:bodyPr wrap="square" anchor="t"/>
-          <a:lstStyle/>
-          <a:p>
-            <a:pPr algn="l">
-              <a:lnSpc>
-                <a:spcPts val="2200"/>
-              </a:lnSpc>
-            </a:pPr>
-            <a:r>
-              <a:rPr sz="1400" b="1">
-                <a:solidFill>
-                  <a:srgbClr val="2D2D2D"/>
-                </a:solidFill>
-                <a:latin typeface="微软雅黑"/>
-                <a:ea typeface="微软雅黑"/>
-                <a:latin typeface="微软雅黑"/>
-              </a:rPr>
-              <a:t>焊费只计一次。</a:t>
-            </a:r>
-          </a:p>
-          <a:p>
-            <a:pPr algn="l">
-              <a:lnSpc>
-                <a:spcPts val="2200"/>
-              </a:lnSpc>
-            </a:pPr>
-            <a:r>
-              <a:rPr sz="1400" b="1">
-                <a:solidFill>
-                  <a:srgbClr val="2D2D2D"/>
-                </a:solidFill>
-                <a:latin typeface="微软雅黑"/>
-                <a:ea typeface="微软雅黑"/>
-                <a:latin typeface="微软雅黑"/>
-              </a:rPr>
-              <a:t>协议按分总成签。</a:t>
-            </a:r>
-          </a:p>
-        </p:txBody>
-      </p:sp>
-      <p:sp>
-        <p:nvSpPr>
-          <p:cNvPr id="22" name="Rectangle 21"/>
+              <a:t>结构与外购</a:t>
+            </a:r>
+          </a:p>
+        </p:txBody>
+      </p:sp>
+      <p:sp>
+        <p:nvSpPr>
+          <p:cNvPr id="16" name="Rectangle 15"/>
           <p:cNvSpPr/>
           <p:nvPr/>
         </p:nvSpPr>
         <p:spPr>
           <a:xfrm>
-            <a:off x="640080" y="3931920"/>
-            <a:ext cx="10908792" cy="1024128"/>
+            <a:off x="8229600" y="2194560"/>
+            <a:ext cx="3611880" cy="1783080"/>
           </a:xfrm>
           <a:prstGeom prst="rect">
             <a:avLst/>
@@ -7969,14 +7501,14 @@
       </p:sp>
       <p:sp>
         <p:nvSpPr>
-          <p:cNvPr id="23" name="Rectangle 22"/>
+          <p:cNvPr id="17" name="Rectangle 16"/>
           <p:cNvSpPr/>
           <p:nvPr/>
         </p:nvSpPr>
         <p:spPr>
           <a:xfrm>
-            <a:off x="640080" y="3931920"/>
-            <a:ext cx="50292" cy="1024128"/>
+            <a:off x="8229600" y="2194560"/>
+            <a:ext cx="3611880" cy="41148"/>
           </a:xfrm>
           <a:prstGeom prst="rect">
             <a:avLst/>
@@ -8012,14 +7544,14 @@
       </p:sp>
       <p:sp>
         <p:nvSpPr>
-          <p:cNvPr id="24" name="TextBox 23"/>
+          <p:cNvPr id="18" name="TextBox 17"/>
           <p:cNvSpPr txBox="1"/>
           <p:nvPr/>
         </p:nvSpPr>
         <p:spPr>
           <a:xfrm>
-            <a:off x="822960" y="4187952"/>
-            <a:ext cx="777240" cy="502920"/>
+            <a:off x="8485632" y="2487168"/>
+            <a:ext cx="3108960" cy="292608"/>
           </a:xfrm>
           <a:prstGeom prst="rect">
             <a:avLst/>
@@ -8027,11 +7559,46 @@
           <a:noFill/>
         </p:spPr>
         <p:txBody>
-          <a:bodyPr wrap="square" anchor="ctr"/>
+          <a:bodyPr wrap="square" anchor="t"/>
           <a:lstStyle/>
           <a:p>
             <a:pPr algn="l"/>
             <a:r>
+              <a:rPr sz="1200" b="0" spc="80">
+                <a:solidFill>
+                  <a:srgbClr val="D04A02"/>
+                </a:solidFill>
+                <a:latin typeface="Arial"/>
+                <a:ea typeface="微软雅黑"/>
+                <a:latin typeface="Arial"/>
+              </a:rPr>
+              <a:t>Process</a:t>
+            </a:r>
+          </a:p>
+        </p:txBody>
+      </p:sp>
+      <p:sp>
+        <p:nvSpPr>
+          <p:cNvPr id="19" name="TextBox 18"/>
+          <p:cNvSpPr txBox="1"/>
+          <p:nvPr/>
+        </p:nvSpPr>
+        <p:spPr>
+          <a:xfrm>
+            <a:off x="8485632" y="2926080"/>
+            <a:ext cx="3108960" cy="640080"/>
+          </a:xfrm>
+          <a:prstGeom prst="rect">
+            <a:avLst/>
+          </a:prstGeom>
+          <a:noFill/>
+        </p:spPr>
+        <p:txBody>
+          <a:bodyPr wrap="square" anchor="t"/>
+          <a:lstStyle/>
+          <a:p>
+            <a:pPr algn="l"/>
+            <a:r>
               <a:rPr sz="2000" b="1">
                 <a:solidFill>
                   <a:srgbClr val="2D2D2D"/>
@@ -8040,192 +7607,21 @@
                 <a:ea typeface="微软雅黑"/>
                 <a:latin typeface="微软雅黑"/>
               </a:rPr>
-              <a:t>月</a:t>
-            </a:r>
-          </a:p>
-        </p:txBody>
-      </p:sp>
-      <p:sp>
-        <p:nvSpPr>
-          <p:cNvPr id="25" name="TextBox 24"/>
-          <p:cNvSpPr txBox="1"/>
-          <p:nvPr/>
-        </p:nvSpPr>
-        <p:spPr>
-          <a:xfrm>
-            <a:off x="1737360" y="4078224"/>
-            <a:ext cx="2971800" cy="749808"/>
-          </a:xfrm>
-          <a:prstGeom prst="rect">
-            <a:avLst/>
-          </a:prstGeom>
-          <a:noFill/>
-        </p:spPr>
-        <p:txBody>
-          <a:bodyPr wrap="square" anchor="t"/>
-          <a:lstStyle/>
-          <a:p>
-            <a:pPr algn="l">
-              <a:lnSpc>
-                <a:spcPts val="2200"/>
-              </a:lnSpc>
-            </a:pPr>
-            <a:r>
-              <a:rPr sz="1400" b="0">
-                <a:solidFill>
-                  <a:srgbClr val="6B6B6B"/>
-                </a:solidFill>
-                <a:latin typeface="微软雅黑"/>
-                <a:ea typeface="微软雅黑"/>
-                <a:latin typeface="微软雅黑"/>
-              </a:rPr>
-              <a:t>钢价、BOM、工艺、设变</a:t>
-            </a:r>
-          </a:p>
-          <a:p>
-            <a:pPr algn="l">
-              <a:lnSpc>
-                <a:spcPts val="2200"/>
-              </a:lnSpc>
-            </a:pPr>
-            <a:r>
-              <a:rPr sz="1400" b="0">
-                <a:solidFill>
-                  <a:srgbClr val="6B6B6B"/>
-                </a:solidFill>
-                <a:latin typeface="微软雅黑"/>
-                <a:ea typeface="微软雅黑"/>
-                <a:latin typeface="微软雅黑"/>
-              </a:rPr>
-              <a:t>散在文件夹。</a:t>
-            </a:r>
-          </a:p>
-        </p:txBody>
-      </p:sp>
-      <p:sp>
-        <p:nvSpPr>
-          <p:cNvPr id="26" name="TextBox 25"/>
-          <p:cNvSpPr txBox="1"/>
-          <p:nvPr/>
-        </p:nvSpPr>
-        <p:spPr>
-          <a:xfrm>
-            <a:off x="4892040" y="4078224"/>
-            <a:ext cx="2971800" cy="749808"/>
-          </a:xfrm>
-          <a:prstGeom prst="rect">
-            <a:avLst/>
-          </a:prstGeom>
-          <a:noFill/>
-        </p:spPr>
-        <p:txBody>
-          <a:bodyPr wrap="square" anchor="t"/>
-          <a:lstStyle/>
-          <a:p>
-            <a:pPr algn="l">
-              <a:lnSpc>
-                <a:spcPts val="2200"/>
-              </a:lnSpc>
-            </a:pPr>
-            <a:r>
-              <a:rPr sz="1400" b="0">
-                <a:solidFill>
-                  <a:srgbClr val="2D2D2D"/>
-                </a:solidFill>
-                <a:latin typeface="微软雅黑"/>
-                <a:ea typeface="微软雅黑"/>
-                <a:latin typeface="微软雅黑"/>
-              </a:rPr>
-              <a:t>当月依据，</a:t>
-            </a:r>
-          </a:p>
-          <a:p>
-            <a:pPr algn="l">
-              <a:lnSpc>
-                <a:spcPts val="2200"/>
-              </a:lnSpc>
-            </a:pPr>
-            <a:r>
-              <a:rPr sz="1400" b="0">
-                <a:solidFill>
-                  <a:srgbClr val="2D2D2D"/>
-                </a:solidFill>
-                <a:latin typeface="微软雅黑"/>
-                <a:ea typeface="微软雅黑"/>
-                <a:latin typeface="微软雅黑"/>
-              </a:rPr>
-              <a:t>当月一起计算。</a:t>
-            </a:r>
-          </a:p>
-        </p:txBody>
-      </p:sp>
-      <p:sp>
-        <p:nvSpPr>
-          <p:cNvPr id="27" name="TextBox 26"/>
-          <p:cNvSpPr txBox="1"/>
-          <p:nvPr/>
-        </p:nvSpPr>
-        <p:spPr>
-          <a:xfrm>
-            <a:off x="8046720" y="4078224"/>
-            <a:ext cx="3246120" cy="749808"/>
-          </a:xfrm>
-          <a:prstGeom prst="rect">
-            <a:avLst/>
-          </a:prstGeom>
-          <a:noFill/>
-        </p:spPr>
-        <p:txBody>
-          <a:bodyPr wrap="square" anchor="t"/>
-          <a:lstStyle/>
-          <a:p>
-            <a:pPr algn="l">
-              <a:lnSpc>
-                <a:spcPts val="2200"/>
-              </a:lnSpc>
-            </a:pPr>
-            <a:r>
-              <a:rPr sz="1400" b="1">
-                <a:solidFill>
-                  <a:srgbClr val="2D2D2D"/>
-                </a:solidFill>
-                <a:latin typeface="微软雅黑"/>
-                <a:ea typeface="微软雅黑"/>
-                <a:latin typeface="微软雅黑"/>
-              </a:rPr>
-              <a:t>该调的开票价和采购价，</a:t>
-            </a:r>
-          </a:p>
-          <a:p>
-            <a:pPr algn="l">
-              <a:lnSpc>
-                <a:spcPts val="2200"/>
-              </a:lnSpc>
-            </a:pPr>
-            <a:r>
-              <a:rPr sz="1400" b="1">
-                <a:solidFill>
-                  <a:srgbClr val="2D2D2D"/>
-                </a:solidFill>
-                <a:latin typeface="微软雅黑"/>
-                <a:ea typeface="微软雅黑"/>
-                <a:latin typeface="微软雅黑"/>
-              </a:rPr>
-              <a:t>当月跟上。</a:t>
-            </a:r>
-          </a:p>
-        </p:txBody>
-      </p:sp>
-      <p:sp>
-        <p:nvSpPr>
-          <p:cNvPr id="28" name="Rectangle 27"/>
+              <a:t>工艺与模具</a:t>
+            </a:r>
+          </a:p>
+        </p:txBody>
+      </p:sp>
+      <p:sp>
+        <p:nvSpPr>
+          <p:cNvPr id="20" name="Rectangle 19"/>
           <p:cNvSpPr/>
           <p:nvPr/>
         </p:nvSpPr>
         <p:spPr>
           <a:xfrm>
-            <a:off x="640080" y="5047488"/>
-            <a:ext cx="10908792" cy="1024128"/>
+            <a:off x="640080" y="4160520"/>
+            <a:ext cx="3611880" cy="1783080"/>
           </a:xfrm>
           <a:prstGeom prst="rect">
             <a:avLst/>
@@ -8263,14 +7659,14 @@
       </p:sp>
       <p:sp>
         <p:nvSpPr>
-          <p:cNvPr id="29" name="Rectangle 28"/>
+          <p:cNvPr id="21" name="Rectangle 20"/>
           <p:cNvSpPr/>
           <p:nvPr/>
         </p:nvSpPr>
         <p:spPr>
           <a:xfrm>
-            <a:off x="640080" y="5047488"/>
-            <a:ext cx="50292" cy="1024128"/>
+            <a:off x="640080" y="4160520"/>
+            <a:ext cx="3611880" cy="41148"/>
           </a:xfrm>
           <a:prstGeom prst="rect">
             <a:avLst/>
@@ -8306,14 +7702,330 @@
       </p:sp>
       <p:sp>
         <p:nvSpPr>
+          <p:cNvPr id="22" name="TextBox 21"/>
+          <p:cNvSpPr txBox="1"/>
+          <p:nvPr/>
+        </p:nvSpPr>
+        <p:spPr>
+          <a:xfrm>
+            <a:off x="896112" y="4453128"/>
+            <a:ext cx="3108960" cy="292608"/>
+          </a:xfrm>
+          <a:prstGeom prst="rect">
+            <a:avLst/>
+          </a:prstGeom>
+          <a:noFill/>
+        </p:spPr>
+        <p:txBody>
+          <a:bodyPr wrap="square" anchor="t"/>
+          <a:lstStyle/>
+          <a:p>
+            <a:pPr algn="l"/>
+            <a:r>
+              <a:rPr sz="1200" b="0" spc="80">
+                <a:solidFill>
+                  <a:srgbClr val="D04A02"/>
+                </a:solidFill>
+                <a:latin typeface="Arial"/>
+                <a:ea typeface="微软雅黑"/>
+                <a:latin typeface="Arial"/>
+              </a:rPr>
+              <a:t>Change</a:t>
+            </a:r>
+          </a:p>
+        </p:txBody>
+      </p:sp>
+      <p:sp>
+        <p:nvSpPr>
+          <p:cNvPr id="23" name="TextBox 22"/>
+          <p:cNvSpPr txBox="1"/>
+          <p:nvPr/>
+        </p:nvSpPr>
+        <p:spPr>
+          <a:xfrm>
+            <a:off x="896112" y="4892040"/>
+            <a:ext cx="3108960" cy="640080"/>
+          </a:xfrm>
+          <a:prstGeom prst="rect">
+            <a:avLst/>
+          </a:prstGeom>
+          <a:noFill/>
+        </p:spPr>
+        <p:txBody>
+          <a:bodyPr wrap="square" anchor="t"/>
+          <a:lstStyle/>
+          <a:p>
+            <a:pPr algn="l"/>
+            <a:r>
+              <a:rPr sz="2000" b="1">
+                <a:solidFill>
+                  <a:srgbClr val="2D2D2D"/>
+                </a:solidFill>
+                <a:latin typeface="微软雅黑"/>
+                <a:ea typeface="微软雅黑"/>
+                <a:latin typeface="微软雅黑"/>
+              </a:rPr>
+              <a:t>工程变更</a:t>
+            </a:r>
+          </a:p>
+        </p:txBody>
+      </p:sp>
+      <p:sp>
+        <p:nvSpPr>
+          <p:cNvPr id="24" name="Rectangle 23"/>
+          <p:cNvSpPr/>
+          <p:nvPr/>
+        </p:nvSpPr>
+        <p:spPr>
+          <a:xfrm>
+            <a:off x="4434840" y="4160520"/>
+            <a:ext cx="3611880" cy="1783080"/>
+          </a:xfrm>
+          <a:prstGeom prst="rect">
+            <a:avLst/>
+          </a:prstGeom>
+          <a:solidFill>
+            <a:srgbClr val="FFFFFF"/>
+          </a:solidFill>
+          <a:ln w="9525">
+            <a:solidFill>
+              <a:srgbClr val="E6E0D6"/>
+            </a:solidFill>
+          </a:ln>
+        </p:spPr>
+        <p:style>
+          <a:lnRef idx="1">
+            <a:schemeClr val="accent1"/>
+          </a:lnRef>
+          <a:fillRef idx="3">
+            <a:schemeClr val="accent1"/>
+          </a:fillRef>
+          <a:effectRef idx="2">
+            <a:schemeClr val="accent1"/>
+          </a:effectRef>
+          <a:fontRef idx="minor">
+            <a:schemeClr val="lt1"/>
+          </a:fontRef>
+        </p:style>
+        <p:txBody>
+          <a:bodyPr rtlCol="0" anchor="ctr"/>
+          <a:lstStyle/>
+          <a:p>
+            <a:pPr algn="ctr"/>
+          </a:p>
+        </p:txBody>
+      </p:sp>
+      <p:sp>
+        <p:nvSpPr>
+          <p:cNvPr id="25" name="Rectangle 24"/>
+          <p:cNvSpPr/>
+          <p:nvPr/>
+        </p:nvSpPr>
+        <p:spPr>
+          <a:xfrm>
+            <a:off x="4434840" y="4160520"/>
+            <a:ext cx="3611880" cy="41148"/>
+          </a:xfrm>
+          <a:prstGeom prst="rect">
+            <a:avLst/>
+          </a:prstGeom>
+          <a:solidFill>
+            <a:srgbClr val="D04A02"/>
+          </a:solidFill>
+          <a:ln>
+            <a:noFill/>
+          </a:ln>
+        </p:spPr>
+        <p:style>
+          <a:lnRef idx="1">
+            <a:schemeClr val="accent1"/>
+          </a:lnRef>
+          <a:fillRef idx="3">
+            <a:schemeClr val="accent1"/>
+          </a:fillRef>
+          <a:effectRef idx="2">
+            <a:schemeClr val="accent1"/>
+          </a:effectRef>
+          <a:fontRef idx="minor">
+            <a:schemeClr val="lt1"/>
+          </a:fontRef>
+        </p:style>
+        <p:txBody>
+          <a:bodyPr rtlCol="0" anchor="ctr"/>
+          <a:lstStyle/>
+          <a:p>
+            <a:pPr algn="ctr"/>
+          </a:p>
+        </p:txBody>
+      </p:sp>
+      <p:sp>
+        <p:nvSpPr>
+          <p:cNvPr id="26" name="TextBox 25"/>
+          <p:cNvSpPr txBox="1"/>
+          <p:nvPr/>
+        </p:nvSpPr>
+        <p:spPr>
+          <a:xfrm>
+            <a:off x="4690872" y="4453128"/>
+            <a:ext cx="3108960" cy="292608"/>
+          </a:xfrm>
+          <a:prstGeom prst="rect">
+            <a:avLst/>
+          </a:prstGeom>
+          <a:noFill/>
+        </p:spPr>
+        <p:txBody>
+          <a:bodyPr wrap="square" anchor="t"/>
+          <a:lstStyle/>
+          <a:p>
+            <a:pPr algn="l"/>
+            <a:r>
+              <a:rPr sz="1200" b="0" spc="80">
+                <a:solidFill>
+                  <a:srgbClr val="D04A02"/>
+                </a:solidFill>
+                <a:latin typeface="Arial"/>
+                <a:ea typeface="微软雅黑"/>
+                <a:latin typeface="Arial"/>
+              </a:rPr>
+              <a:t>Costing</a:t>
+            </a:r>
+          </a:p>
+        </p:txBody>
+      </p:sp>
+      <p:sp>
+        <p:nvSpPr>
+          <p:cNvPr id="27" name="TextBox 26"/>
+          <p:cNvSpPr txBox="1"/>
+          <p:nvPr/>
+        </p:nvSpPr>
+        <p:spPr>
+          <a:xfrm>
+            <a:off x="4690872" y="4892040"/>
+            <a:ext cx="3108960" cy="640080"/>
+          </a:xfrm>
+          <a:prstGeom prst="rect">
+            <a:avLst/>
+          </a:prstGeom>
+          <a:noFill/>
+        </p:spPr>
+        <p:txBody>
+          <a:bodyPr wrap="square" anchor="t"/>
+          <a:lstStyle/>
+          <a:p>
+            <a:pPr algn="l"/>
+            <a:r>
+              <a:rPr sz="2000" b="1">
+                <a:solidFill>
+                  <a:srgbClr val="2D2D2D"/>
+                </a:solidFill>
+                <a:latin typeface="微软雅黑"/>
+                <a:ea typeface="微软雅黑"/>
+                <a:latin typeface="微软雅黑"/>
+              </a:rPr>
+              <a:t>件价与总成</a:t>
+            </a:r>
+          </a:p>
+        </p:txBody>
+      </p:sp>
+      <p:sp>
+        <p:nvSpPr>
+          <p:cNvPr id="28" name="Rectangle 27"/>
+          <p:cNvSpPr/>
+          <p:nvPr/>
+        </p:nvSpPr>
+        <p:spPr>
+          <a:xfrm>
+            <a:off x="8229600" y="4160520"/>
+            <a:ext cx="3611880" cy="1783080"/>
+          </a:xfrm>
+          <a:prstGeom prst="rect">
+            <a:avLst/>
+          </a:prstGeom>
+          <a:solidFill>
+            <a:srgbClr val="FFFFFF"/>
+          </a:solidFill>
+          <a:ln w="9525">
+            <a:solidFill>
+              <a:srgbClr val="E6E0D6"/>
+            </a:solidFill>
+          </a:ln>
+        </p:spPr>
+        <p:style>
+          <a:lnRef idx="1">
+            <a:schemeClr val="accent1"/>
+          </a:lnRef>
+          <a:fillRef idx="3">
+            <a:schemeClr val="accent1"/>
+          </a:fillRef>
+          <a:effectRef idx="2">
+            <a:schemeClr val="accent1"/>
+          </a:effectRef>
+          <a:fontRef idx="minor">
+            <a:schemeClr val="lt1"/>
+          </a:fontRef>
+        </p:style>
+        <p:txBody>
+          <a:bodyPr rtlCol="0" anchor="ctr"/>
+          <a:lstStyle/>
+          <a:p>
+            <a:pPr algn="ctr"/>
+          </a:p>
+        </p:txBody>
+      </p:sp>
+      <p:sp>
+        <p:nvSpPr>
+          <p:cNvPr id="29" name="Rectangle 28"/>
+          <p:cNvSpPr/>
+          <p:nvPr/>
+        </p:nvSpPr>
+        <p:spPr>
+          <a:xfrm>
+            <a:off x="8229600" y="4160520"/>
+            <a:ext cx="3611880" cy="41148"/>
+          </a:xfrm>
+          <a:prstGeom prst="rect">
+            <a:avLst/>
+          </a:prstGeom>
+          <a:solidFill>
+            <a:srgbClr val="D04A02"/>
+          </a:solidFill>
+          <a:ln>
+            <a:noFill/>
+          </a:ln>
+        </p:spPr>
+        <p:style>
+          <a:lnRef idx="1">
+            <a:schemeClr val="accent1"/>
+          </a:lnRef>
+          <a:fillRef idx="3">
+            <a:schemeClr val="accent1"/>
+          </a:fillRef>
+          <a:effectRef idx="2">
+            <a:schemeClr val="accent1"/>
+          </a:effectRef>
+          <a:fontRef idx="minor">
+            <a:schemeClr val="lt1"/>
+          </a:fontRef>
+        </p:style>
+        <p:txBody>
+          <a:bodyPr rtlCol="0" anchor="ctr"/>
+          <a:lstStyle/>
+          <a:p>
+            <a:pPr algn="ctr"/>
+          </a:p>
+        </p:txBody>
+      </p:sp>
+      <p:sp>
+        <p:nvSpPr>
           <p:cNvPr id="30" name="TextBox 29"/>
           <p:cNvSpPr txBox="1"/>
           <p:nvPr/>
         </p:nvSpPr>
         <p:spPr>
           <a:xfrm>
-            <a:off x="822960" y="5303520"/>
-            <a:ext cx="777240" cy="502920"/>
+            <a:off x="8485632" y="4453128"/>
+            <a:ext cx="3108960" cy="292608"/>
           </a:xfrm>
           <a:prstGeom prst="rect">
             <a:avLst/>
@@ -8321,20 +8033,20 @@
           <a:noFill/>
         </p:spPr>
         <p:txBody>
-          <a:bodyPr wrap="square" anchor="ctr"/>
+          <a:bodyPr wrap="square" anchor="t"/>
           <a:lstStyle/>
           <a:p>
             <a:pPr algn="l"/>
             <a:r>
-              <a:rPr sz="2000" b="1">
-                <a:solidFill>
-                  <a:srgbClr val="2D2D2D"/>
-                </a:solidFill>
-                <a:latin typeface="微软雅黑"/>
-                <a:ea typeface="微软雅黑"/>
-                <a:latin typeface="微软雅黑"/>
-              </a:rPr>
-              <a:t>对</a:t>
+              <a:rPr sz="1200" b="0" spc="80">
+                <a:solidFill>
+                  <a:srgbClr val="D04A02"/>
+                </a:solidFill>
+                <a:latin typeface="Arial"/>
+                <a:ea typeface="微软雅黑"/>
+                <a:latin typeface="Arial"/>
+              </a:rPr>
+              <a:t>Contract</a:t>
             </a:r>
           </a:p>
         </p:txBody>
@@ -8347,8 +8059,8 @@
         </p:nvSpPr>
         <p:spPr>
           <a:xfrm>
-            <a:off x="1737360" y="5193792"/>
-            <a:ext cx="2971800" cy="749808"/>
+            <a:off x="8485632" y="4892040"/>
+            <a:ext cx="3108960" cy="640080"/>
           </a:xfrm>
           <a:prstGeom prst="rect">
             <a:avLst/>
@@ -8359,70 +8071,9 @@
           <a:bodyPr wrap="square" anchor="t"/>
           <a:lstStyle/>
           <a:p>
-            <a:pPr algn="l">
-              <a:lnSpc>
-                <a:spcPts val="2200"/>
-              </a:lnSpc>
-            </a:pPr>
-            <a:r>
-              <a:rPr sz="1400" b="0">
-                <a:solidFill>
-                  <a:srgbClr val="6B6B6B"/>
-                </a:solidFill>
-                <a:latin typeface="微软雅黑"/>
-                <a:ea typeface="微软雅黑"/>
-                <a:latin typeface="微软雅黑"/>
-              </a:rPr>
-              <a:t>私人拷贝。</a:t>
-            </a:r>
-          </a:p>
-          <a:p>
-            <a:pPr algn="l">
-              <a:lnSpc>
-                <a:spcPts val="2200"/>
-              </a:lnSpc>
-            </a:pPr>
-            <a:r>
-              <a:rPr sz="1400" b="0">
-                <a:solidFill>
-                  <a:srgbClr val="6B6B6B"/>
-                </a:solidFill>
-                <a:latin typeface="微软雅黑"/>
-                <a:ea typeface="微软雅黑"/>
-                <a:latin typeface="微软雅黑"/>
-              </a:rPr>
-              <a:t>口径靠骨干记忆。</a:t>
-            </a:r>
-          </a:p>
-        </p:txBody>
-      </p:sp>
-      <p:sp>
-        <p:nvSpPr>
-          <p:cNvPr id="32" name="TextBox 31"/>
-          <p:cNvSpPr txBox="1"/>
-          <p:nvPr/>
-        </p:nvSpPr>
-        <p:spPr>
-          <a:xfrm>
-            <a:off x="4892040" y="5193792"/>
-            <a:ext cx="2971800" cy="749808"/>
-          </a:xfrm>
-          <a:prstGeom prst="rect">
-            <a:avLst/>
-          </a:prstGeom>
-          <a:noFill/>
-        </p:spPr>
-        <p:txBody>
-          <a:bodyPr wrap="square" anchor="t"/>
-          <a:lstStyle/>
-          <a:p>
-            <a:pPr algn="l">
-              <a:lnSpc>
-                <a:spcPts val="2200"/>
-              </a:lnSpc>
-            </a:pPr>
-            <a:r>
-              <a:rPr sz="1400" b="0">
+            <a:pPr algn="l"/>
+            <a:r>
+              <a:rPr sz="2000" b="1">
                 <a:solidFill>
                   <a:srgbClr val="2D2D2D"/>
                 </a:solidFill>
@@ -8430,89 +8081,14 @@
                 <a:ea typeface="微软雅黑"/>
                 <a:latin typeface="微软雅黑"/>
               </a:rPr>
-              <a:t>文件、操作、当期版本</a:t>
-            </a:r>
-          </a:p>
-          <a:p>
-            <a:pPr algn="l">
-              <a:lnSpc>
-                <a:spcPts val="2200"/>
-              </a:lnSpc>
-            </a:pPr>
-            <a:r>
-              <a:rPr sz="1400" b="0">
-                <a:solidFill>
-                  <a:srgbClr val="2D2D2D"/>
-                </a:solidFill>
-                <a:latin typeface="微软雅黑"/>
-                <a:ea typeface="微软雅黑"/>
-                <a:latin typeface="微软雅黑"/>
-              </a:rPr>
-              <a:t>都留着。</a:t>
-            </a:r>
-          </a:p>
-        </p:txBody>
-      </p:sp>
-      <p:sp>
-        <p:nvSpPr>
-          <p:cNvPr id="33" name="TextBox 32"/>
-          <p:cNvSpPr txBox="1"/>
-          <p:nvPr/>
-        </p:nvSpPr>
-        <p:spPr>
-          <a:xfrm>
-            <a:off x="8046720" y="5193792"/>
-            <a:ext cx="3246120" cy="749808"/>
-          </a:xfrm>
-          <a:prstGeom prst="rect">
-            <a:avLst/>
-          </a:prstGeom>
-          <a:noFill/>
-        </p:spPr>
-        <p:txBody>
-          <a:bodyPr wrap="square" anchor="t"/>
-          <a:lstStyle/>
-          <a:p>
-            <a:pPr algn="l">
-              <a:lnSpc>
-                <a:spcPts val="2200"/>
-              </a:lnSpc>
-            </a:pPr>
-            <a:r>
-              <a:rPr sz="1400" b="1">
-                <a:solidFill>
-                  <a:srgbClr val="2D2D2D"/>
-                </a:solidFill>
-                <a:latin typeface="微软雅黑"/>
-                <a:ea typeface="微软雅黑"/>
-                <a:latin typeface="微软雅黑"/>
-              </a:rPr>
-              <a:t>对奇瑞、二级商、财务，</a:t>
-            </a:r>
-          </a:p>
-          <a:p>
-            <a:pPr algn="l">
-              <a:lnSpc>
-                <a:spcPts val="2200"/>
-              </a:lnSpc>
-            </a:pPr>
-            <a:r>
-              <a:rPr sz="1400" b="1">
-                <a:solidFill>
-                  <a:srgbClr val="2D2D2D"/>
-                </a:solidFill>
-                <a:latin typeface="微软雅黑"/>
-                <a:ea typeface="微软雅黑"/>
-                <a:latin typeface="微软雅黑"/>
-              </a:rPr>
-              <a:t>拿记录对。</a:t>
+              <a:t>采购协议</a:t>
             </a:r>
           </a:p>
         </p:txBody>
       </p:sp>
       <p:cxnSp>
         <p:nvCxnSpPr>
-          <p:cNvPr id="34" name="Connector 33"/>
+          <p:cNvPr id="32" name="Connector 31"/>
           <p:cNvCxnSpPr/>
           <p:nvPr/>
         </p:nvCxnSpPr>
@@ -8547,7 +8123,7 @@
       </p:cxnSp>
       <p:sp>
         <p:nvSpPr>
-          <p:cNvPr id="35" name="TextBox 34"/>
+          <p:cNvPr id="33" name="TextBox 32"/>
           <p:cNvSpPr txBox="1"/>
           <p:nvPr/>
         </p:nvSpPr>
@@ -8582,7 +8158,7 @@
       </p:sp>
       <p:sp>
         <p:nvSpPr>
-          <p:cNvPr id="36" name="TextBox 35"/>
+          <p:cNvPr id="34" name="TextBox 33"/>
           <p:cNvSpPr txBox="1"/>
           <p:nvPr/>
         </p:nvSpPr>
@@ -8792,7 +8368,7 @@
                 <a:ea typeface="微软雅黑"/>
                 <a:latin typeface="Arial"/>
               </a:rPr>
-              <a:t>03   WHERE</a:t>
+              <a:t>03   SHIFT</a:t>
             </a:r>
           </a:p>
         </p:txBody>
@@ -8827,56 +8403,21 @@
                 <a:ea typeface="微软雅黑"/>
                 <a:latin typeface="微软雅黑"/>
               </a:rPr>
-              <a:t>这四项结果，从同一套规则里来</a:t>
-            </a:r>
-          </a:p>
-        </p:txBody>
-      </p:sp>
-      <p:sp>
-        <p:nvSpPr>
-          <p:cNvPr id="7" name="TextBox 6"/>
-          <p:cNvSpPr txBox="1"/>
-          <p:nvPr/>
-        </p:nvSpPr>
-        <p:spPr>
-          <a:xfrm>
-            <a:off x="640080" y="1371600"/>
-            <a:ext cx="10972800" cy="411480"/>
-          </a:xfrm>
-          <a:prstGeom prst="rect">
-            <a:avLst/>
-          </a:prstGeom>
-          <a:noFill/>
-        </p:spPr>
-        <p:txBody>
-          <a:bodyPr wrap="square" anchor="t"/>
-          <a:lstStyle/>
-          <a:p>
-            <a:pPr algn="l"/>
-            <a:r>
-              <a:rPr sz="1600" b="0">
-                <a:solidFill>
-                  <a:srgbClr val="6B6B6B"/>
-                </a:solidFill>
-                <a:latin typeface="微软雅黑"/>
-                <a:ea typeface="微软雅黑"/>
-                <a:latin typeface="微软雅黑"/>
-              </a:rPr>
-              <a:t>依据仍由人上传。耗掉好几天的，是其后的计算、对表和解释。</a:t>
-            </a:r>
-          </a:p>
-        </p:txBody>
-      </p:sp>
-      <p:sp>
-        <p:nvSpPr>
-          <p:cNvPr id="8" name="Rectangle 7"/>
+              <a:t>不是把 Excel 做得更复杂</a:t>
+            </a:r>
+          </a:p>
+        </p:txBody>
+      </p:sp>
+      <p:sp>
+        <p:nvSpPr>
+          <p:cNvPr id="7" name="Rectangle 6"/>
           <p:cNvSpPr/>
           <p:nvPr/>
         </p:nvSpPr>
         <p:spPr>
           <a:xfrm>
-            <a:off x="640080" y="2011680"/>
-            <a:ext cx="2743200" cy="3977639"/>
+            <a:off x="640080" y="1554480"/>
+            <a:ext cx="5212080" cy="4434840"/>
           </a:xfrm>
           <a:prstGeom prst="rect">
             <a:avLst/>
@@ -8914,14 +8455,14 @@
       </p:sp>
       <p:sp>
         <p:nvSpPr>
-          <p:cNvPr id="9" name="Rectangle 8"/>
+          <p:cNvPr id="8" name="Rectangle 7"/>
           <p:cNvSpPr/>
           <p:nvPr/>
         </p:nvSpPr>
         <p:spPr>
           <a:xfrm>
-            <a:off x="640080" y="2011680"/>
-            <a:ext cx="2743200" cy="41148"/>
+            <a:off x="640080" y="1554480"/>
+            <a:ext cx="5212080" cy="41148"/>
           </a:xfrm>
           <a:prstGeom prst="rect">
             <a:avLst/>
@@ -8957,14 +8498,49 @@
       </p:sp>
       <p:sp>
         <p:nvSpPr>
+          <p:cNvPr id="9" name="TextBox 8"/>
+          <p:cNvSpPr txBox="1"/>
+          <p:nvPr/>
+        </p:nvSpPr>
+        <p:spPr>
+          <a:xfrm>
+            <a:off x="960120" y="1874519"/>
+            <a:ext cx="4572000" cy="274320"/>
+          </a:xfrm>
+          <a:prstGeom prst="rect">
+            <a:avLst/>
+          </a:prstGeom>
+          <a:noFill/>
+        </p:spPr>
+        <p:txBody>
+          <a:bodyPr wrap="square" anchor="t"/>
+          <a:lstStyle/>
+          <a:p>
+            <a:pPr algn="l"/>
+            <a:r>
+              <a:rPr sz="1300" b="0">
+                <a:solidFill>
+                  <a:srgbClr val="8A8A8A"/>
+                </a:solidFill>
+                <a:latin typeface="微软雅黑"/>
+                <a:ea typeface="微软雅黑"/>
+                <a:latin typeface="微软雅黑"/>
+              </a:rPr>
+              <a:t>不是</a:t>
+            </a:r>
+          </a:p>
+        </p:txBody>
+      </p:sp>
+      <p:sp>
+        <p:nvSpPr>
           <p:cNvPr id="10" name="TextBox 9"/>
           <p:cNvSpPr txBox="1"/>
           <p:nvPr/>
         </p:nvSpPr>
         <p:spPr>
           <a:xfrm>
-            <a:off x="859536" y="2267712"/>
-            <a:ext cx="2286000" cy="292608"/>
+            <a:off x="960120" y="2286000"/>
+            <a:ext cx="4663440" cy="914400"/>
           </a:xfrm>
           <a:prstGeom prst="rect">
             <a:avLst/>
@@ -8977,15 +8553,15 @@
           <a:p>
             <a:pPr algn="l"/>
             <a:r>
-              <a:rPr sz="1300" b="0" spc="80">
-                <a:solidFill>
-                  <a:srgbClr val="D04A02"/>
-                </a:solidFill>
-                <a:latin typeface="Arial"/>
-                <a:ea typeface="微软雅黑"/>
-                <a:latin typeface="Arial"/>
-              </a:rPr>
-              <a:t>01</a:t>
+              <a:rPr sz="2400" b="1">
+                <a:solidFill>
+                  <a:srgbClr val="2D2D2D"/>
+                </a:solidFill>
+                <a:latin typeface="微软雅黑"/>
+                <a:ea typeface="微软雅黑"/>
+                <a:latin typeface="微软雅黑"/>
+              </a:rPr>
+              <a:t>再做一张更大的表</a:t>
             </a:r>
           </a:p>
         </p:txBody>
@@ -8998,43 +8574,8 @@
         </p:nvSpPr>
         <p:spPr>
           <a:xfrm>
-            <a:off x="859536" y="2743200"/>
-            <a:ext cx="2286000" cy="822960"/>
-          </a:xfrm>
-          <a:prstGeom prst="rect">
-            <a:avLst/>
-          </a:prstGeom>
-          <a:noFill/>
-        </p:spPr>
-        <p:txBody>
-          <a:bodyPr wrap="square" anchor="t"/>
-          <a:lstStyle/>
-          <a:p>
-            <a:pPr algn="l"/>
-            <a:r>
-              <a:rPr sz="2200" b="1">
-                <a:solidFill>
-                  <a:srgbClr val="2D2D2D"/>
-                </a:solidFill>
-                <a:latin typeface="微软雅黑"/>
-                <a:ea typeface="微软雅黑"/>
-                <a:latin typeface="微软雅黑"/>
-              </a:rPr>
-              <a:t>依据进入</a:t>
-            </a:r>
-          </a:p>
-        </p:txBody>
-      </p:sp>
-      <p:sp>
-        <p:nvSpPr>
-          <p:cNvPr id="12" name="TextBox 11"/>
-          <p:cNvSpPr txBox="1"/>
-          <p:nvPr/>
-        </p:nvSpPr>
-        <p:spPr>
-          <a:xfrm>
-            <a:off x="859536" y="3749039"/>
-            <a:ext cx="2286000" cy="1828800"/>
+            <a:off x="960120" y="3474720"/>
+            <a:ext cx="4526280" cy="2011680"/>
           </a:xfrm>
           <a:prstGeom prst="rect">
             <a:avLst/>
@@ -9059,57 +8600,21 @@
                 <a:ea typeface="微软雅黑"/>
                 <a:latin typeface="微软雅黑"/>
               </a:rPr>
-              <a:t>钢价政策、BOM、</a:t>
-            </a:r>
-          </a:p>
-          <a:p>
-            <a:pPr algn="l">
-              <a:lnSpc>
-                <a:spcPts val="2600"/>
-              </a:lnSpc>
-            </a:pPr>
-            <a:r>
-              <a:rPr sz="1500" b="0">
-                <a:solidFill>
-                  <a:srgbClr val="6B6B6B"/>
-                </a:solidFill>
-                <a:latin typeface="微软雅黑"/>
-                <a:ea typeface="微软雅黑"/>
-                <a:latin typeface="微软雅黑"/>
-              </a:rPr>
-              <a:t>工艺和工程变更，</a:t>
-            </a:r>
-          </a:p>
-          <a:p>
-            <a:pPr algn="l">
-              <a:lnSpc>
-                <a:spcPts val="2600"/>
-              </a:lnSpc>
-            </a:pPr>
-            <a:r>
-              <a:rPr sz="1500" b="0">
-                <a:solidFill>
-                  <a:srgbClr val="6B6B6B"/>
-                </a:solidFill>
-                <a:latin typeface="微软雅黑"/>
-                <a:ea typeface="微软雅黑"/>
-                <a:latin typeface="微软雅黑"/>
-              </a:rPr>
-              <a:t>按月纳入。</a:t>
-            </a:r>
-          </a:p>
-        </p:txBody>
-      </p:sp>
-      <p:sp>
-        <p:nvSpPr>
-          <p:cNvPr id="13" name="Rectangle 12"/>
+              <a:t>公式在私人文件夹。口径靠骨干记忆。对奇瑞、对二级商，各执一份表，只能扯皮。</a:t>
+            </a:r>
+          </a:p>
+        </p:txBody>
+      </p:sp>
+      <p:sp>
+        <p:nvSpPr>
+          <p:cNvPr id="12" name="Rectangle 11"/>
           <p:cNvSpPr/>
           <p:nvPr/>
         </p:nvSpPr>
         <p:spPr>
           <a:xfrm>
-            <a:off x="3520439" y="2011680"/>
-            <a:ext cx="2743200" cy="3977639"/>
+            <a:off x="6309360" y="1554480"/>
+            <a:ext cx="5212080" cy="4434840"/>
           </a:xfrm>
           <a:prstGeom prst="rect">
             <a:avLst/>
@@ -9147,14 +8652,14 @@
       </p:sp>
       <p:sp>
         <p:nvSpPr>
-          <p:cNvPr id="14" name="Rectangle 13"/>
+          <p:cNvPr id="13" name="Rectangle 12"/>
           <p:cNvSpPr/>
           <p:nvPr/>
         </p:nvSpPr>
         <p:spPr>
           <a:xfrm>
-            <a:off x="3520439" y="2011680"/>
-            <a:ext cx="2743200" cy="41148"/>
+            <a:off x="6309360" y="1554480"/>
+            <a:ext cx="5212080" cy="41148"/>
           </a:xfrm>
           <a:prstGeom prst="rect">
             <a:avLst/>
@@ -9190,14 +8695,49 @@
       </p:sp>
       <p:sp>
         <p:nvSpPr>
+          <p:cNvPr id="14" name="TextBox 13"/>
+          <p:cNvSpPr txBox="1"/>
+          <p:nvPr/>
+        </p:nvSpPr>
+        <p:spPr>
+          <a:xfrm>
+            <a:off x="6629400" y="1874519"/>
+            <a:ext cx="4572000" cy="274320"/>
+          </a:xfrm>
+          <a:prstGeom prst="rect">
+            <a:avLst/>
+          </a:prstGeom>
+          <a:noFill/>
+        </p:spPr>
+        <p:txBody>
+          <a:bodyPr wrap="square" anchor="t"/>
+          <a:lstStyle/>
+          <a:p>
+            <a:pPr algn="l"/>
+            <a:r>
+              <a:rPr sz="1300" b="0">
+                <a:solidFill>
+                  <a:srgbClr val="D04A02"/>
+                </a:solidFill>
+                <a:latin typeface="微软雅黑"/>
+                <a:ea typeface="微软雅黑"/>
+                <a:latin typeface="微软雅黑"/>
+              </a:rPr>
+              <a:t>而是</a:t>
+            </a:r>
+          </a:p>
+        </p:txBody>
+      </p:sp>
+      <p:sp>
+        <p:nvSpPr>
           <p:cNvPr id="15" name="TextBox 14"/>
           <p:cNvSpPr txBox="1"/>
           <p:nvPr/>
         </p:nvSpPr>
         <p:spPr>
           <a:xfrm>
-            <a:off x="3739895" y="2267712"/>
-            <a:ext cx="2286000" cy="292608"/>
+            <a:off x="6629400" y="2286000"/>
+            <a:ext cx="4663440" cy="914400"/>
           </a:xfrm>
           <a:prstGeom prst="rect">
             <a:avLst/>
@@ -9210,15 +8750,15 @@
           <a:p>
             <a:pPr algn="l"/>
             <a:r>
-              <a:rPr sz="1300" b="0" spc="80">
-                <a:solidFill>
-                  <a:srgbClr val="D04A02"/>
-                </a:solidFill>
-                <a:latin typeface="Arial"/>
-                <a:ea typeface="微软雅黑"/>
-                <a:latin typeface="Arial"/>
-              </a:rPr>
-              <a:t>02</a:t>
+              <a:rPr sz="2400" b="1">
+                <a:solidFill>
+                  <a:srgbClr val="2D2D2D"/>
+                </a:solidFill>
+                <a:latin typeface="微软雅黑"/>
+                <a:ea typeface="微软雅黑"/>
+                <a:latin typeface="微软雅黑"/>
+              </a:rPr>
+              <a:t>把核价变成公司能力</a:t>
             </a:r>
           </a:p>
         </p:txBody>
@@ -9231,43 +8771,8 @@
         </p:nvSpPr>
         <p:spPr>
           <a:xfrm>
-            <a:off x="3739895" y="2743200"/>
-            <a:ext cx="2286000" cy="822960"/>
-          </a:xfrm>
-          <a:prstGeom prst="rect">
-            <a:avLst/>
-          </a:prstGeom>
-          <a:noFill/>
-        </p:spPr>
-        <p:txBody>
-          <a:bodyPr wrap="square" anchor="t"/>
-          <a:lstStyle/>
-          <a:p>
-            <a:pPr algn="l"/>
-            <a:r>
-              <a:rPr sz="2200" b="1">
-                <a:solidFill>
-                  <a:srgbClr val="2D2D2D"/>
-                </a:solidFill>
-                <a:latin typeface="微软雅黑"/>
-                <a:ea typeface="微软雅黑"/>
-                <a:latin typeface="微软雅黑"/>
-              </a:rPr>
-              <a:t>引擎计算</a:t>
-            </a:r>
-          </a:p>
-        </p:txBody>
-      </p:sp>
-      <p:sp>
-        <p:nvSpPr>
-          <p:cNvPr id="17" name="TextBox 16"/>
-          <p:cNvSpPr txBox="1"/>
-          <p:nvPr/>
-        </p:nvSpPr>
-        <p:spPr>
-          <a:xfrm>
-            <a:off x="3739895" y="3749039"/>
-            <a:ext cx="2286000" cy="1828800"/>
+            <a:off x="6629400" y="3474720"/>
+            <a:ext cx="4572000" cy="2011680"/>
           </a:xfrm>
           <a:prstGeom prst="rect">
             <a:avLst/>
@@ -9292,480 +8797,14 @@
                 <a:ea typeface="微软雅黑"/>
                 <a:latin typeface="微软雅黑"/>
               </a:rPr>
-              <a:t>总成价与采购价，</a:t>
-            </a:r>
-          </a:p>
-          <a:p>
-            <a:pPr algn="l">
-              <a:lnSpc>
-                <a:spcPts val="2600"/>
-              </a:lnSpc>
-            </a:pPr>
-            <a:r>
-              <a:rPr sz="1500" b="0">
-                <a:solidFill>
-                  <a:srgbClr val="6B6B6B"/>
-                </a:solidFill>
-                <a:latin typeface="微软雅黑"/>
-                <a:ea typeface="微软雅黑"/>
-                <a:latin typeface="微软雅黑"/>
-              </a:rPr>
-              <a:t>同一套规则。</a:t>
-            </a:r>
-          </a:p>
-          <a:p>
-            <a:pPr algn="l">
-              <a:lnSpc>
-                <a:spcPts val="2600"/>
-              </a:lnSpc>
-            </a:pPr>
-            <a:r>
-              <a:rPr sz="1500" b="0">
-                <a:solidFill>
-                  <a:srgbClr val="6B6B6B"/>
-                </a:solidFill>
-                <a:latin typeface="微软雅黑"/>
-                <a:ea typeface="微软雅黑"/>
-                <a:latin typeface="微软雅黑"/>
-              </a:rPr>
-              <a:t>约 20 秒。</a:t>
-            </a:r>
-          </a:p>
-        </p:txBody>
-      </p:sp>
-      <p:sp>
-        <p:nvSpPr>
-          <p:cNvPr id="18" name="Rectangle 17"/>
-          <p:cNvSpPr/>
-          <p:nvPr/>
-        </p:nvSpPr>
-        <p:spPr>
-          <a:xfrm>
-            <a:off x="6400800" y="2011680"/>
-            <a:ext cx="2743200" cy="3977639"/>
-          </a:xfrm>
-          <a:prstGeom prst="rect">
-            <a:avLst/>
-          </a:prstGeom>
-          <a:solidFill>
-            <a:srgbClr val="FFFFFF"/>
-          </a:solidFill>
-          <a:ln w="9525">
-            <a:solidFill>
-              <a:srgbClr val="E6E0D6"/>
-            </a:solidFill>
-          </a:ln>
-        </p:spPr>
-        <p:style>
-          <a:lnRef idx="1">
-            <a:schemeClr val="accent1"/>
-          </a:lnRef>
-          <a:fillRef idx="3">
-            <a:schemeClr val="accent1"/>
-          </a:fillRef>
-          <a:effectRef idx="2">
-            <a:schemeClr val="accent1"/>
-          </a:effectRef>
-          <a:fontRef idx="minor">
-            <a:schemeClr val="lt1"/>
-          </a:fontRef>
-        </p:style>
-        <p:txBody>
-          <a:bodyPr rtlCol="0" anchor="ctr"/>
-          <a:lstStyle/>
-          <a:p>
-            <a:pPr algn="ctr"/>
-          </a:p>
-        </p:txBody>
-      </p:sp>
-      <p:sp>
-        <p:nvSpPr>
-          <p:cNvPr id="19" name="Rectangle 18"/>
-          <p:cNvSpPr/>
-          <p:nvPr/>
-        </p:nvSpPr>
-        <p:spPr>
-          <a:xfrm>
-            <a:off x="6400800" y="2011680"/>
-            <a:ext cx="2743200" cy="41148"/>
-          </a:xfrm>
-          <a:prstGeom prst="rect">
-            <a:avLst/>
-          </a:prstGeom>
-          <a:solidFill>
-            <a:srgbClr val="D04A02"/>
-          </a:solidFill>
-          <a:ln>
-            <a:noFill/>
-          </a:ln>
-        </p:spPr>
-        <p:style>
-          <a:lnRef idx="1">
-            <a:schemeClr val="accent1"/>
-          </a:lnRef>
-          <a:fillRef idx="3">
-            <a:schemeClr val="accent1"/>
-          </a:fillRef>
-          <a:effectRef idx="2">
-            <a:schemeClr val="accent1"/>
-          </a:effectRef>
-          <a:fontRef idx="minor">
-            <a:schemeClr val="lt1"/>
-          </a:fontRef>
-        </p:style>
-        <p:txBody>
-          <a:bodyPr rtlCol="0" anchor="ctr"/>
-          <a:lstStyle/>
-          <a:p>
-            <a:pPr algn="ctr"/>
-          </a:p>
-        </p:txBody>
-      </p:sp>
-      <p:sp>
-        <p:nvSpPr>
-          <p:cNvPr id="20" name="TextBox 19"/>
-          <p:cNvSpPr txBox="1"/>
-          <p:nvPr/>
-        </p:nvSpPr>
-        <p:spPr>
-          <a:xfrm>
-            <a:off x="6620256" y="2267712"/>
-            <a:ext cx="2286000" cy="292608"/>
-          </a:xfrm>
-          <a:prstGeom prst="rect">
-            <a:avLst/>
-          </a:prstGeom>
-          <a:noFill/>
-        </p:spPr>
-        <p:txBody>
-          <a:bodyPr wrap="square" anchor="t"/>
-          <a:lstStyle/>
-          <a:p>
-            <a:pPr algn="l"/>
-            <a:r>
-              <a:rPr sz="1300" b="0" spc="80">
-                <a:solidFill>
-                  <a:srgbClr val="D04A02"/>
-                </a:solidFill>
-                <a:latin typeface="Arial"/>
-                <a:ea typeface="微软雅黑"/>
-                <a:latin typeface="Arial"/>
-              </a:rPr>
-              <a:t>03</a:t>
-            </a:r>
-          </a:p>
-        </p:txBody>
-      </p:sp>
-      <p:sp>
-        <p:nvSpPr>
-          <p:cNvPr id="21" name="TextBox 20"/>
-          <p:cNvSpPr txBox="1"/>
-          <p:nvPr/>
-        </p:nvSpPr>
-        <p:spPr>
-          <a:xfrm>
-            <a:off x="6620256" y="2743200"/>
-            <a:ext cx="2286000" cy="822960"/>
-          </a:xfrm>
-          <a:prstGeom prst="rect">
-            <a:avLst/>
-          </a:prstGeom>
-          <a:noFill/>
-        </p:spPr>
-        <p:txBody>
-          <a:bodyPr wrap="square" anchor="t"/>
-          <a:lstStyle/>
-          <a:p>
-            <a:pPr algn="l"/>
-            <a:r>
-              <a:rPr sz="2200" b="1">
-                <a:solidFill>
-                  <a:srgbClr val="2D2D2D"/>
-                </a:solidFill>
-                <a:latin typeface="微软雅黑"/>
-                <a:ea typeface="微软雅黑"/>
-                <a:latin typeface="微软雅黑"/>
-              </a:rPr>
-              <a:t>协议落地</a:t>
-            </a:r>
-          </a:p>
-        </p:txBody>
-      </p:sp>
-      <p:sp>
-        <p:nvSpPr>
-          <p:cNvPr id="22" name="TextBox 21"/>
-          <p:cNvSpPr txBox="1"/>
-          <p:nvPr/>
-        </p:nvSpPr>
-        <p:spPr>
-          <a:xfrm>
-            <a:off x="6620256" y="3749039"/>
-            <a:ext cx="2286000" cy="1828800"/>
-          </a:xfrm>
-          <a:prstGeom prst="rect">
-            <a:avLst/>
-          </a:prstGeom>
-          <a:noFill/>
-        </p:spPr>
-        <p:txBody>
-          <a:bodyPr wrap="square" anchor="t"/>
-          <a:lstStyle/>
-          <a:p>
-            <a:pPr algn="l">
-              <a:lnSpc>
-                <a:spcPts val="2600"/>
-              </a:lnSpc>
-            </a:pPr>
-            <a:r>
-              <a:rPr sz="1500" b="0">
-                <a:solidFill>
-                  <a:srgbClr val="6B6B6B"/>
-                </a:solidFill>
-                <a:latin typeface="微软雅黑"/>
-                <a:ea typeface="微软雅黑"/>
-                <a:latin typeface="微软雅黑"/>
-              </a:rPr>
-              <a:t>采购协议按结果出。</a:t>
-            </a:r>
-          </a:p>
-          <a:p>
-            <a:pPr algn="l">
-              <a:lnSpc>
-                <a:spcPts val="2600"/>
-              </a:lnSpc>
-            </a:pPr>
-            <a:r>
-              <a:rPr sz="1500" b="0">
-                <a:solidFill>
-                  <a:srgbClr val="6B6B6B"/>
-                </a:solidFill>
-                <a:latin typeface="微软雅黑"/>
-                <a:ea typeface="微软雅黑"/>
-                <a:latin typeface="微软雅黑"/>
-              </a:rPr>
-              <a:t>不必再抄一版表。</a:t>
-            </a:r>
-          </a:p>
-        </p:txBody>
-      </p:sp>
-      <p:sp>
-        <p:nvSpPr>
-          <p:cNvPr id="23" name="Rectangle 22"/>
-          <p:cNvSpPr/>
-          <p:nvPr/>
-        </p:nvSpPr>
-        <p:spPr>
-          <a:xfrm>
-            <a:off x="9281159" y="2011680"/>
-            <a:ext cx="2743200" cy="3977639"/>
-          </a:xfrm>
-          <a:prstGeom prst="rect">
-            <a:avLst/>
-          </a:prstGeom>
-          <a:solidFill>
-            <a:srgbClr val="FFFFFF"/>
-          </a:solidFill>
-          <a:ln w="9525">
-            <a:solidFill>
-              <a:srgbClr val="E6E0D6"/>
-            </a:solidFill>
-          </a:ln>
-        </p:spPr>
-        <p:style>
-          <a:lnRef idx="1">
-            <a:schemeClr val="accent1"/>
-          </a:lnRef>
-          <a:fillRef idx="3">
-            <a:schemeClr val="accent1"/>
-          </a:fillRef>
-          <a:effectRef idx="2">
-            <a:schemeClr val="accent1"/>
-          </a:effectRef>
-          <a:fontRef idx="minor">
-            <a:schemeClr val="lt1"/>
-          </a:fontRef>
-        </p:style>
-        <p:txBody>
-          <a:bodyPr rtlCol="0" anchor="ctr"/>
-          <a:lstStyle/>
-          <a:p>
-            <a:pPr algn="ctr"/>
-          </a:p>
-        </p:txBody>
-      </p:sp>
-      <p:sp>
-        <p:nvSpPr>
-          <p:cNvPr id="24" name="Rectangle 23"/>
-          <p:cNvSpPr/>
-          <p:nvPr/>
-        </p:nvSpPr>
-        <p:spPr>
-          <a:xfrm>
-            <a:off x="9281159" y="2011680"/>
-            <a:ext cx="2743200" cy="41148"/>
-          </a:xfrm>
-          <a:prstGeom prst="rect">
-            <a:avLst/>
-          </a:prstGeom>
-          <a:solidFill>
-            <a:srgbClr val="D04A02"/>
-          </a:solidFill>
-          <a:ln>
-            <a:noFill/>
-          </a:ln>
-        </p:spPr>
-        <p:style>
-          <a:lnRef idx="1">
-            <a:schemeClr val="accent1"/>
-          </a:lnRef>
-          <a:fillRef idx="3">
-            <a:schemeClr val="accent1"/>
-          </a:fillRef>
-          <a:effectRef idx="2">
-            <a:schemeClr val="accent1"/>
-          </a:effectRef>
-          <a:fontRef idx="minor">
-            <a:schemeClr val="lt1"/>
-          </a:fontRef>
-        </p:style>
-        <p:txBody>
-          <a:bodyPr rtlCol="0" anchor="ctr"/>
-          <a:lstStyle/>
-          <a:p>
-            <a:pPr algn="ctr"/>
-          </a:p>
-        </p:txBody>
-      </p:sp>
-      <p:sp>
-        <p:nvSpPr>
-          <p:cNvPr id="25" name="TextBox 24"/>
-          <p:cNvSpPr txBox="1"/>
-          <p:nvPr/>
-        </p:nvSpPr>
-        <p:spPr>
-          <a:xfrm>
-            <a:off x="9500615" y="2267712"/>
-            <a:ext cx="2286000" cy="292608"/>
-          </a:xfrm>
-          <a:prstGeom prst="rect">
-            <a:avLst/>
-          </a:prstGeom>
-          <a:noFill/>
-        </p:spPr>
-        <p:txBody>
-          <a:bodyPr wrap="square" anchor="t"/>
-          <a:lstStyle/>
-          <a:p>
-            <a:pPr algn="l"/>
-            <a:r>
-              <a:rPr sz="1300" b="0" spc="80">
-                <a:solidFill>
-                  <a:srgbClr val="D04A02"/>
-                </a:solidFill>
-                <a:latin typeface="Arial"/>
-                <a:ea typeface="微软雅黑"/>
-                <a:latin typeface="Arial"/>
-              </a:rPr>
-              <a:t>04</a:t>
-            </a:r>
-          </a:p>
-        </p:txBody>
-      </p:sp>
-      <p:sp>
-        <p:nvSpPr>
-          <p:cNvPr id="26" name="TextBox 25"/>
-          <p:cNvSpPr txBox="1"/>
-          <p:nvPr/>
-        </p:nvSpPr>
-        <p:spPr>
-          <a:xfrm>
-            <a:off x="9500615" y="2743200"/>
-            <a:ext cx="2286000" cy="822960"/>
-          </a:xfrm>
-          <a:prstGeom prst="rect">
-            <a:avLst/>
-          </a:prstGeom>
-          <a:noFill/>
-        </p:spPr>
-        <p:txBody>
-          <a:bodyPr wrap="square" anchor="t"/>
-          <a:lstStyle/>
-          <a:p>
-            <a:pPr algn="l"/>
-            <a:r>
-              <a:rPr sz="2200" b="1">
-                <a:solidFill>
-                  <a:srgbClr val="2D2D2D"/>
-                </a:solidFill>
-                <a:latin typeface="微软雅黑"/>
-                <a:ea typeface="微软雅黑"/>
-                <a:latin typeface="微软雅黑"/>
-              </a:rPr>
-              <a:t>只解释</a:t>
-            </a:r>
-          </a:p>
-        </p:txBody>
-      </p:sp>
-      <p:sp>
-        <p:nvSpPr>
-          <p:cNvPr id="27" name="TextBox 26"/>
-          <p:cNvSpPr txBox="1"/>
-          <p:nvPr/>
-        </p:nvSpPr>
-        <p:spPr>
-          <a:xfrm>
-            <a:off x="9500615" y="3749039"/>
-            <a:ext cx="2286000" cy="1828800"/>
-          </a:xfrm>
-          <a:prstGeom prst="rect">
-            <a:avLst/>
-          </a:prstGeom>
-          <a:noFill/>
-        </p:spPr>
-        <p:txBody>
-          <a:bodyPr wrap="square" anchor="t"/>
-          <a:lstStyle/>
-          <a:p>
-            <a:pPr algn="l">
-              <a:lnSpc>
-                <a:spcPts val="2600"/>
-              </a:lnSpc>
-            </a:pPr>
-            <a:r>
-              <a:rPr sz="1500" b="0">
-                <a:solidFill>
-                  <a:srgbClr val="6B6B6B"/>
-                </a:solidFill>
-                <a:latin typeface="微软雅黑"/>
-                <a:ea typeface="微软雅黑"/>
-                <a:latin typeface="微软雅黑"/>
-              </a:rPr>
-              <a:t>AI 讲涨跌原因。</a:t>
-            </a:r>
-          </a:p>
-          <a:p>
-            <a:pPr algn="l">
-              <a:lnSpc>
-                <a:spcPts val="2600"/>
-              </a:lnSpc>
-            </a:pPr>
-            <a:r>
-              <a:rPr sz="1500" b="0">
-                <a:solidFill>
-                  <a:srgbClr val="6B6B6B"/>
-                </a:solidFill>
-                <a:latin typeface="微软雅黑"/>
-                <a:ea typeface="微软雅黑"/>
-                <a:latin typeface="微软雅黑"/>
-              </a:rPr>
-              <a:t>价格只认引擎。</a:t>
+              <a:t>规则、依据、结果留在平台。人可以交接。这是数字化建设真正落地的那一步。</a:t>
             </a:r>
           </a:p>
         </p:txBody>
       </p:sp>
       <p:cxnSp>
         <p:nvCxnSpPr>
-          <p:cNvPr id="28" name="Connector 27"/>
+          <p:cNvPr id="17" name="Connector 16"/>
           <p:cNvCxnSpPr/>
           <p:nvPr/>
         </p:nvCxnSpPr>
@@ -9800,7 +8839,7 @@
       </p:cxnSp>
       <p:sp>
         <p:nvSpPr>
-          <p:cNvPr id="29" name="TextBox 28"/>
+          <p:cNvPr id="18" name="TextBox 17"/>
           <p:cNvSpPr txBox="1"/>
           <p:nvPr/>
         </p:nvSpPr>
@@ -9835,7 +8874,7 @@
       </p:sp>
       <p:sp>
         <p:nvSpPr>
-          <p:cNvPr id="30" name="TextBox 29"/>
+          <p:cNvPr id="19" name="TextBox 18"/>
           <p:cNvSpPr txBox="1"/>
           <p:nvPr/>
         </p:nvSpPr>
@@ -10045,7 +9084,7 @@
                 <a:ea typeface="微软雅黑"/>
                 <a:latin typeface="Arial"/>
               </a:rPr>
-              <a:t>04   PEOPLE</a:t>
+              <a:t>04   TWO BOOKS</a:t>
             </a:r>
           </a:p>
         </p:txBody>
@@ -10080,7 +9119,7 @@
                 <a:ea typeface="微软雅黑"/>
                 <a:latin typeface="微软雅黑"/>
               </a:rPr>
-              <a:t>熟练人员不必再耗在做表上</a:t>
+              <a:t>两本钱要对齐，设变不能再是糊涂账</a:t>
             </a:r>
           </a:p>
         </p:txBody>
@@ -10094,7 +9133,7 @@
         <p:spPr>
           <a:xfrm>
             <a:off x="640080" y="1554480"/>
-            <a:ext cx="5212080" cy="4434840"/>
+            <a:ext cx="3611880" cy="4434840"/>
           </a:xfrm>
           <a:prstGeom prst="rect">
             <a:avLst/>
@@ -10139,7 +9178,7 @@
         <p:spPr>
           <a:xfrm>
             <a:off x="640080" y="1554480"/>
-            <a:ext cx="5212080" cy="41148"/>
+            <a:ext cx="3611880" cy="41148"/>
           </a:xfrm>
           <a:prstGeom prst="rect">
             <a:avLst/>
@@ -10181,8 +9220,8 @@
         </p:nvSpPr>
         <p:spPr>
           <a:xfrm>
-            <a:off x="960120" y="1828800"/>
-            <a:ext cx="4572000" cy="274320"/>
+            <a:off x="896112" y="1874519"/>
+            <a:ext cx="3108960" cy="292608"/>
           </a:xfrm>
           <a:prstGeom prst="rect">
             <a:avLst/>
@@ -10197,13 +9236,13 @@
             <a:r>
               <a:rPr sz="1300" b="0">
                 <a:solidFill>
-                  <a:srgbClr val="8A8A8A"/>
-                </a:solidFill>
-                <a:latin typeface="微软雅黑"/>
-                <a:ea typeface="微软雅黑"/>
-                <a:latin typeface="微软雅黑"/>
-              </a:rPr>
-              <a:t>Excel 手工</a:t>
+                  <a:srgbClr val="D04A02"/>
+                </a:solidFill>
+                <a:latin typeface="微软雅黑"/>
+                <a:ea typeface="微软雅黑"/>
+                <a:latin typeface="微软雅黑"/>
+              </a:rPr>
+              <a:t>商务</a:t>
             </a:r>
           </a:p>
         </p:txBody>
@@ -10216,8 +9255,8 @@
         </p:nvSpPr>
         <p:spPr>
           <a:xfrm>
-            <a:off x="960120" y="2286000"/>
-            <a:ext cx="4663440" cy="1051560"/>
+            <a:off x="896112" y="2286000"/>
+            <a:ext cx="3108960" cy="777240"/>
           </a:xfrm>
           <a:prstGeom prst="rect">
             <a:avLst/>
@@ -10228,13 +9267,9 @@
           <a:bodyPr wrap="square" anchor="t"/>
           <a:lstStyle/>
           <a:p>
-            <a:pPr algn="l">
-              <a:lnSpc>
-                <a:spcPts val="4200"/>
-              </a:lnSpc>
-            </a:pPr>
-            <a:r>
-              <a:rPr sz="3200" b="1">
+            <a:pPr algn="l"/>
+            <a:r>
+              <a:rPr sz="2200" b="1">
                 <a:solidFill>
                   <a:srgbClr val="2D2D2D"/>
                 </a:solidFill>
@@ -10242,25 +9277,7 @@
                 <a:ea typeface="微软雅黑"/>
                 <a:latin typeface="微软雅黑"/>
               </a:rPr>
-              <a:t>熟练人员</a:t>
-            </a:r>
-          </a:p>
-          <a:p>
-            <a:pPr algn="l">
-              <a:lnSpc>
-                <a:spcPts val="4200"/>
-              </a:lnSpc>
-            </a:pPr>
-            <a:r>
-              <a:rPr sz="3200" b="1">
-                <a:solidFill>
-                  <a:srgbClr val="2D2D2D"/>
-                </a:solidFill>
-                <a:latin typeface="微软雅黑"/>
-                <a:ea typeface="微软雅黑"/>
-                <a:latin typeface="微软雅黑"/>
-              </a:rPr>
-              <a:t>好几天</a:t>
+              <a:t>总成价</a:t>
             </a:r>
           </a:p>
         </p:txBody>
@@ -10273,8 +9290,8 @@
         </p:nvSpPr>
         <p:spPr>
           <a:xfrm>
-            <a:off x="960120" y="3977639"/>
-            <a:ext cx="4526280" cy="1645920"/>
+            <a:off x="896112" y="3246120"/>
+            <a:ext cx="3108960" cy="2286000"/>
           </a:xfrm>
           <a:prstGeom prst="rect">
             <a:avLst/>
@@ -10299,43 +9316,7 @@
                 <a:ea typeface="微软雅黑"/>
                 <a:latin typeface="微软雅黑"/>
               </a:rPr>
-              <a:t>一事一议、总成、采购对象，</a:t>
-            </a:r>
-          </a:p>
-          <a:p>
-            <a:pPr algn="l">
-              <a:lnSpc>
-                <a:spcPts val="2600"/>
-              </a:lnSpc>
-            </a:pPr>
-            <a:r>
-              <a:rPr sz="1500" b="0">
-                <a:solidFill>
-                  <a:srgbClr val="6B6B6B"/>
-                </a:solidFill>
-                <a:latin typeface="微软雅黑"/>
-                <a:ea typeface="微软雅黑"/>
-                <a:latin typeface="微软雅黑"/>
-              </a:rPr>
-              <a:t>都压在这几天里。</a:t>
-            </a:r>
-          </a:p>
-          <a:p>
-            <a:pPr algn="l">
-              <a:lnSpc>
-                <a:spcPts val="2600"/>
-              </a:lnSpc>
-            </a:pPr>
-            <a:r>
-              <a:rPr sz="1500" b="0">
-                <a:solidFill>
-                  <a:srgbClr val="6B6B6B"/>
-                </a:solidFill>
-                <a:latin typeface="微软雅黑"/>
-                <a:ea typeface="微软雅黑"/>
-                <a:latin typeface="微软雅黑"/>
-              </a:rPr>
-              <a:t>人一走，账就停。</a:t>
+              <a:t>开票给奇瑞的售价。谈价、开票、对账看这一本。</a:t>
             </a:r>
           </a:p>
         </p:txBody>
@@ -10348,8 +9329,8 @@
         </p:nvSpPr>
         <p:spPr>
           <a:xfrm>
-            <a:off x="6309360" y="1554480"/>
-            <a:ext cx="5212080" cy="4434840"/>
+            <a:off x="4434840" y="1554480"/>
+            <a:ext cx="3611880" cy="4434840"/>
           </a:xfrm>
           <a:prstGeom prst="rect">
             <a:avLst/>
@@ -10393,8 +9374,8 @@
         </p:nvSpPr>
         <p:spPr>
           <a:xfrm>
-            <a:off x="6309360" y="1554480"/>
-            <a:ext cx="5212080" cy="41148"/>
+            <a:off x="4434840" y="1554480"/>
+            <a:ext cx="3611880" cy="41148"/>
           </a:xfrm>
           <a:prstGeom prst="rect">
             <a:avLst/>
@@ -10436,8 +9417,8 @@
         </p:nvSpPr>
         <p:spPr>
           <a:xfrm>
-            <a:off x="6629400" y="1828800"/>
-            <a:ext cx="4572000" cy="274320"/>
+            <a:off x="4690872" y="1874519"/>
+            <a:ext cx="3108960" cy="292608"/>
           </a:xfrm>
           <a:prstGeom prst="rect">
             <a:avLst/>
@@ -10458,7 +9439,7 @@
                 <a:ea typeface="微软雅黑"/>
                 <a:latin typeface="微软雅黑"/>
               </a:rPr>
-              <a:t>现网</a:t>
+              <a:t>采购</a:t>
             </a:r>
           </a:p>
         </p:txBody>
@@ -10471,8 +9452,8 @@
         </p:nvSpPr>
         <p:spPr>
           <a:xfrm>
-            <a:off x="6629400" y="2286000"/>
-            <a:ext cx="4663440" cy="1051560"/>
+            <a:off x="4690872" y="2286000"/>
+            <a:ext cx="3108960" cy="777240"/>
           </a:xfrm>
           <a:prstGeom prst="rect">
             <a:avLst/>
@@ -10483,13 +9464,9 @@
           <a:bodyPr wrap="square" anchor="t"/>
           <a:lstStyle/>
           <a:p>
-            <a:pPr algn="l">
-              <a:lnSpc>
-                <a:spcPts val="4200"/>
-              </a:lnSpc>
-            </a:pPr>
-            <a:r>
-              <a:rPr sz="3200" b="1">
+            <a:pPr algn="l"/>
+            <a:r>
+              <a:rPr sz="2200" b="1">
                 <a:solidFill>
                   <a:srgbClr val="2D2D2D"/>
                 </a:solidFill>
@@ -10497,25 +9474,7 @@
                 <a:ea typeface="微软雅黑"/>
                 <a:latin typeface="微软雅黑"/>
               </a:rPr>
-              <a:t>上传之后</a:t>
-            </a:r>
-          </a:p>
-          <a:p>
-            <a:pPr algn="l">
-              <a:lnSpc>
-                <a:spcPts val="4200"/>
-              </a:lnSpc>
-            </a:pPr>
-            <a:r>
-              <a:rPr sz="3200" b="1">
-                <a:solidFill>
-                  <a:srgbClr val="2D2D2D"/>
-                </a:solidFill>
-                <a:latin typeface="微软雅黑"/>
-                <a:ea typeface="微软雅黑"/>
-                <a:latin typeface="微软雅黑"/>
-              </a:rPr>
-              <a:t>约 20 秒</a:t>
+              <a:t>采购对象</a:t>
             </a:r>
           </a:p>
         </p:txBody>
@@ -10528,8 +9487,8 @@
         </p:nvSpPr>
         <p:spPr>
           <a:xfrm>
-            <a:off x="6629400" y="3977639"/>
-            <a:ext cx="4572000" cy="1645920"/>
+            <a:off x="4690872" y="3246120"/>
+            <a:ext cx="3108960" cy="2286000"/>
           </a:xfrm>
           <a:prstGeom prst="rect">
             <a:avLst/>
@@ -10554,9 +9513,188 @@
                 <a:ea typeface="微软雅黑"/>
                 <a:latin typeface="微软雅黑"/>
               </a:rPr>
-              <a:t>规则在引擎里。</a:t>
-            </a:r>
-          </a:p>
+              <a:t>向二级商采购的价。该付多少、协议怎么签看这一本。</a:t>
+            </a:r>
+          </a:p>
+        </p:txBody>
+      </p:sp>
+      <p:sp>
+        <p:nvSpPr>
+          <p:cNvPr id="17" name="Rectangle 16"/>
+          <p:cNvSpPr/>
+          <p:nvPr/>
+        </p:nvSpPr>
+        <p:spPr>
+          <a:xfrm>
+            <a:off x="8229600" y="1554480"/>
+            <a:ext cx="3611880" cy="4434840"/>
+          </a:xfrm>
+          <a:prstGeom prst="rect">
+            <a:avLst/>
+          </a:prstGeom>
+          <a:solidFill>
+            <a:srgbClr val="FFFFFF"/>
+          </a:solidFill>
+          <a:ln w="9525">
+            <a:solidFill>
+              <a:srgbClr val="E6E0D6"/>
+            </a:solidFill>
+          </a:ln>
+        </p:spPr>
+        <p:style>
+          <a:lnRef idx="1">
+            <a:schemeClr val="accent1"/>
+          </a:lnRef>
+          <a:fillRef idx="3">
+            <a:schemeClr val="accent1"/>
+          </a:fillRef>
+          <a:effectRef idx="2">
+            <a:schemeClr val="accent1"/>
+          </a:effectRef>
+          <a:fontRef idx="minor">
+            <a:schemeClr val="lt1"/>
+          </a:fontRef>
+        </p:style>
+        <p:txBody>
+          <a:bodyPr rtlCol="0" anchor="ctr"/>
+          <a:lstStyle/>
+          <a:p>
+            <a:pPr algn="ctr"/>
+          </a:p>
+        </p:txBody>
+      </p:sp>
+      <p:sp>
+        <p:nvSpPr>
+          <p:cNvPr id="18" name="Rectangle 17"/>
+          <p:cNvSpPr/>
+          <p:nvPr/>
+        </p:nvSpPr>
+        <p:spPr>
+          <a:xfrm>
+            <a:off x="8229600" y="1554480"/>
+            <a:ext cx="3611880" cy="41148"/>
+          </a:xfrm>
+          <a:prstGeom prst="rect">
+            <a:avLst/>
+          </a:prstGeom>
+          <a:solidFill>
+            <a:srgbClr val="D04A02"/>
+          </a:solidFill>
+          <a:ln>
+            <a:noFill/>
+          </a:ln>
+        </p:spPr>
+        <p:style>
+          <a:lnRef idx="1">
+            <a:schemeClr val="accent1"/>
+          </a:lnRef>
+          <a:fillRef idx="3">
+            <a:schemeClr val="accent1"/>
+          </a:fillRef>
+          <a:effectRef idx="2">
+            <a:schemeClr val="accent1"/>
+          </a:effectRef>
+          <a:fontRef idx="minor">
+            <a:schemeClr val="lt1"/>
+          </a:fontRef>
+        </p:style>
+        <p:txBody>
+          <a:bodyPr rtlCol="0" anchor="ctr"/>
+          <a:lstStyle/>
+          <a:p>
+            <a:pPr algn="ctr"/>
+          </a:p>
+        </p:txBody>
+      </p:sp>
+      <p:sp>
+        <p:nvSpPr>
+          <p:cNvPr id="19" name="TextBox 18"/>
+          <p:cNvSpPr txBox="1"/>
+          <p:nvPr/>
+        </p:nvSpPr>
+        <p:spPr>
+          <a:xfrm>
+            <a:off x="8485632" y="1874519"/>
+            <a:ext cx="3108960" cy="292608"/>
+          </a:xfrm>
+          <a:prstGeom prst="rect">
+            <a:avLst/>
+          </a:prstGeom>
+          <a:noFill/>
+        </p:spPr>
+        <p:txBody>
+          <a:bodyPr wrap="square" anchor="t"/>
+          <a:lstStyle/>
+          <a:p>
+            <a:pPr algn="l"/>
+            <a:r>
+              <a:rPr sz="1300" b="0">
+                <a:solidFill>
+                  <a:srgbClr val="D04A02"/>
+                </a:solidFill>
+                <a:latin typeface="微软雅黑"/>
+                <a:ea typeface="微软雅黑"/>
+                <a:latin typeface="微软雅黑"/>
+              </a:rPr>
+              <a:t>工程</a:t>
+            </a:r>
+          </a:p>
+        </p:txBody>
+      </p:sp>
+      <p:sp>
+        <p:nvSpPr>
+          <p:cNvPr id="20" name="TextBox 19"/>
+          <p:cNvSpPr txBox="1"/>
+          <p:nvPr/>
+        </p:nvSpPr>
+        <p:spPr>
+          <a:xfrm>
+            <a:off x="8485632" y="2286000"/>
+            <a:ext cx="3108960" cy="777240"/>
+          </a:xfrm>
+          <a:prstGeom prst="rect">
+            <a:avLst/>
+          </a:prstGeom>
+          <a:noFill/>
+        </p:spPr>
+        <p:txBody>
+          <a:bodyPr wrap="square" anchor="t"/>
+          <a:lstStyle/>
+          <a:p>
+            <a:pPr algn="l"/>
+            <a:r>
+              <a:rPr sz="2200" b="1">
+                <a:solidFill>
+                  <a:srgbClr val="2D2D2D"/>
+                </a:solidFill>
+                <a:latin typeface="微软雅黑"/>
+                <a:ea typeface="微软雅黑"/>
+                <a:latin typeface="微软雅黑"/>
+              </a:rPr>
+              <a:t>当期用当期</a:t>
+            </a:r>
+          </a:p>
+        </p:txBody>
+      </p:sp>
+      <p:sp>
+        <p:nvSpPr>
+          <p:cNvPr id="21" name="TextBox 20"/>
+          <p:cNvSpPr txBox="1"/>
+          <p:nvPr/>
+        </p:nvSpPr>
+        <p:spPr>
+          <a:xfrm>
+            <a:off x="8485632" y="3246120"/>
+            <a:ext cx="3108960" cy="2286000"/>
+          </a:xfrm>
+          <a:prstGeom prst="rect">
+            <a:avLst/>
+          </a:prstGeom>
+          <a:noFill/>
+        </p:spPr>
+        <p:txBody>
+          <a:bodyPr wrap="square" anchor="t"/>
+          <a:lstStyle/>
           <a:p>
             <a:pPr algn="l">
               <a:lnSpc>
@@ -10572,32 +9710,14 @@
                 <a:ea typeface="微软雅黑"/>
                 <a:latin typeface="微软雅黑"/>
               </a:rPr>
-              <a:t>同样的人去谈价、看异常。</a:t>
-            </a:r>
-          </a:p>
-          <a:p>
-            <a:pPr algn="l">
-              <a:lnSpc>
-                <a:spcPts val="2600"/>
-              </a:lnSpc>
-            </a:pPr>
-            <a:r>
-              <a:rPr sz="1500" b="0">
-                <a:solidFill>
-                  <a:srgbClr val="6B6B6B"/>
-                </a:solidFill>
-                <a:latin typeface="微软雅黑"/>
-                <a:ea typeface="微软雅黑"/>
-                <a:latin typeface="微软雅黑"/>
-              </a:rPr>
-              <a:t>能力留在公司，不在个人身上。</a:t>
+              <a:t>Excel 里设变是糊涂账。变更进系统，开票和应付一起跟上。</a:t>
             </a:r>
           </a:p>
         </p:txBody>
       </p:sp>
       <p:cxnSp>
         <p:nvCxnSpPr>
-          <p:cNvPr id="17" name="Connector 16"/>
+          <p:cNvPr id="22" name="Connector 21"/>
           <p:cNvCxnSpPr/>
           <p:nvPr/>
         </p:nvCxnSpPr>
@@ -10632,7 +9752,7 @@
       </p:cxnSp>
       <p:sp>
         <p:nvSpPr>
-          <p:cNvPr id="18" name="TextBox 17"/>
+          <p:cNvPr id="23" name="TextBox 22"/>
           <p:cNvSpPr txBox="1"/>
           <p:nvPr/>
         </p:nvSpPr>
@@ -10667,7 +9787,7 @@
       </p:sp>
       <p:sp>
         <p:nvSpPr>
-          <p:cNvPr id="19" name="TextBox 18"/>
+          <p:cNvPr id="24" name="TextBox 23"/>
           <p:cNvSpPr txBox="1"/>
           <p:nvPr/>
         </p:nvSpPr>
@@ -10877,7 +9997,7 @@
                 <a:ea typeface="微软雅黑"/>
                 <a:latin typeface="Arial"/>
               </a:rPr>
-              <a:t>05   WELD</a:t>
+              <a:t>05   FIRST VALUE</a:t>
             </a:r>
           </a:p>
         </p:txBody>
@@ -10912,7 +10032,7 @@
                 <a:ea typeface="微软雅黑"/>
                 <a:latin typeface="微软雅黑"/>
               </a:rPr>
-              <a:t>买的是分总成，卖的是焊完的总成</a:t>
+              <a:t>第一价值：降低对人的依赖</a:t>
             </a:r>
           </a:p>
         </p:txBody>
@@ -10926,7 +10046,7 @@
         <p:spPr>
           <a:xfrm>
             <a:off x="640080" y="1554480"/>
-            <a:ext cx="3611880" cy="4434840"/>
+            <a:ext cx="5212080" cy="4434840"/>
           </a:xfrm>
           <a:prstGeom prst="rect">
             <a:avLst/>
@@ -10971,7 +10091,7 @@
         <p:spPr>
           <a:xfrm>
             <a:off x="640080" y="1554480"/>
-            <a:ext cx="3611880" cy="41148"/>
+            <a:ext cx="5212080" cy="41148"/>
           </a:xfrm>
           <a:prstGeom prst="rect">
             <a:avLst/>
@@ -11013,8 +10133,8 @@
         </p:nvSpPr>
         <p:spPr>
           <a:xfrm>
-            <a:off x="896112" y="1874519"/>
-            <a:ext cx="3108960" cy="292608"/>
+            <a:off x="960120" y="1874519"/>
+            <a:ext cx="4572000" cy="274320"/>
           </a:xfrm>
           <a:prstGeom prst="rect">
             <a:avLst/>
@@ -11029,13 +10149,13 @@
             <a:r>
               <a:rPr sz="1300" b="0">
                 <a:solidFill>
-                  <a:srgbClr val="D04A02"/>
-                </a:solidFill>
-                <a:latin typeface="微软雅黑"/>
-                <a:ea typeface="微软雅黑"/>
-                <a:latin typeface="微软雅黑"/>
-              </a:rPr>
-              <a:t>卖出</a:t>
+                  <a:srgbClr val="8A8A8A"/>
+                </a:solidFill>
+                <a:latin typeface="微软雅黑"/>
+                <a:ea typeface="微软雅黑"/>
+                <a:latin typeface="微软雅黑"/>
+              </a:rPr>
+              <a:t>以前</a:t>
             </a:r>
           </a:p>
         </p:txBody>
@@ -11048,8 +10168,8 @@
         </p:nvSpPr>
         <p:spPr>
           <a:xfrm>
-            <a:off x="896112" y="2331720"/>
-            <a:ext cx="3108960" cy="1005840"/>
+            <a:off x="960120" y="2286000"/>
+            <a:ext cx="4663440" cy="1051560"/>
           </a:xfrm>
           <a:prstGeom prst="rect">
             <a:avLst/>
@@ -11060,9 +10180,13 @@
           <a:bodyPr wrap="square" anchor="t"/>
           <a:lstStyle/>
           <a:p>
-            <a:pPr algn="l"/>
-            <a:r>
-              <a:rPr sz="2600" b="1">
+            <a:pPr algn="l">
+              <a:lnSpc>
+                <a:spcPts val="4200"/>
+              </a:lnSpc>
+            </a:pPr>
+            <a:r>
+              <a:rPr sz="3200" b="1">
                 <a:solidFill>
                   <a:srgbClr val="2D2D2D"/>
                 </a:solidFill>
@@ -11070,7 +10194,25 @@
                 <a:ea typeface="微软雅黑"/>
                 <a:latin typeface="微软雅黑"/>
               </a:rPr>
-              <a:t>焊完的总成</a:t>
+              <a:t>熟练人员</a:t>
+            </a:r>
+          </a:p>
+          <a:p>
+            <a:pPr algn="l">
+              <a:lnSpc>
+                <a:spcPts val="4200"/>
+              </a:lnSpc>
+            </a:pPr>
+            <a:r>
+              <a:rPr sz="3200" b="1">
+                <a:solidFill>
+                  <a:srgbClr val="2D2D2D"/>
+                </a:solidFill>
+                <a:latin typeface="微软雅黑"/>
+                <a:ea typeface="微软雅黑"/>
+                <a:latin typeface="微软雅黑"/>
+              </a:rPr>
+              <a:t>好几天</a:t>
             </a:r>
           </a:p>
         </p:txBody>
@@ -11083,8 +10225,8 @@
         </p:nvSpPr>
         <p:spPr>
           <a:xfrm>
-            <a:off x="896112" y="3566160"/>
-            <a:ext cx="3108960" cy="1920240"/>
+            <a:off x="960120" y="4023360"/>
+            <a:ext cx="4526280" cy="1554480"/>
           </a:xfrm>
           <a:prstGeom prst="rect">
             <a:avLst/>
@@ -11101,7 +10243,7 @@
               </a:lnSpc>
             </a:pPr>
             <a:r>
-              <a:rPr sz="1600" b="0">
+              <a:rPr sz="1500" b="0">
                 <a:solidFill>
                   <a:srgbClr val="6B6B6B"/>
                 </a:solidFill>
@@ -11109,7 +10251,7 @@
                 <a:ea typeface="微软雅黑"/>
                 <a:latin typeface="微软雅黑"/>
               </a:rPr>
-              <a:t>开给奇瑞的是总成。</a:t>
+              <a:t>一事一议、总成、采购对象靠骨干手感。</a:t>
             </a:r>
           </a:p>
           <a:p>
@@ -11119,7 +10261,7 @@
               </a:lnSpc>
             </a:pPr>
             <a:r>
-              <a:rPr sz="1600" b="0">
+              <a:rPr sz="1500" b="0">
                 <a:solidFill>
                   <a:srgbClr val="6B6B6B"/>
                 </a:solidFill>
@@ -11127,7 +10269,7 @@
                 <a:ea typeface="微软雅黑"/>
                 <a:latin typeface="微软雅黑"/>
               </a:rPr>
-              <a:t>谈价、开票看这一本。</a:t>
+              <a:t>人一走，账就停。</a:t>
             </a:r>
           </a:p>
         </p:txBody>
@@ -11140,8 +10282,8 @@
         </p:nvSpPr>
         <p:spPr>
           <a:xfrm>
-            <a:off x="4434840" y="1554480"/>
-            <a:ext cx="3611880" cy="4434840"/>
+            <a:off x="6309360" y="1554480"/>
+            <a:ext cx="5212080" cy="4434840"/>
           </a:xfrm>
           <a:prstGeom prst="rect">
             <a:avLst/>
@@ -11185,8 +10327,8 @@
         </p:nvSpPr>
         <p:spPr>
           <a:xfrm>
-            <a:off x="4434840" y="1554480"/>
-            <a:ext cx="3611880" cy="41148"/>
+            <a:off x="6309360" y="1554480"/>
+            <a:ext cx="5212080" cy="41148"/>
           </a:xfrm>
           <a:prstGeom prst="rect">
             <a:avLst/>
@@ -11228,8 +10370,8 @@
         </p:nvSpPr>
         <p:spPr>
           <a:xfrm>
-            <a:off x="4690872" y="1874519"/>
-            <a:ext cx="3108960" cy="292608"/>
+            <a:off x="6629400" y="1874519"/>
+            <a:ext cx="4572000" cy="274320"/>
           </a:xfrm>
           <a:prstGeom prst="rect">
             <a:avLst/>
@@ -11250,7 +10392,7 @@
                 <a:ea typeface="微软雅黑"/>
                 <a:latin typeface="微软雅黑"/>
               </a:rPr>
-              <a:t>买入</a:t>
+              <a:t>现在</a:t>
             </a:r>
           </a:p>
         </p:txBody>
@@ -11263,8 +10405,8 @@
         </p:nvSpPr>
         <p:spPr>
           <a:xfrm>
-            <a:off x="4690872" y="2331720"/>
-            <a:ext cx="3108960" cy="1005840"/>
+            <a:off x="6629400" y="2286000"/>
+            <a:ext cx="4663440" cy="1051560"/>
           </a:xfrm>
           <a:prstGeom prst="rect">
             <a:avLst/>
@@ -11275,9 +10417,13 @@
           <a:bodyPr wrap="square" anchor="t"/>
           <a:lstStyle/>
           <a:p>
-            <a:pPr algn="l"/>
-            <a:r>
-              <a:rPr sz="2600" b="1">
+            <a:pPr algn="l">
+              <a:lnSpc>
+                <a:spcPts val="4200"/>
+              </a:lnSpc>
+            </a:pPr>
+            <a:r>
+              <a:rPr sz="3200" b="1">
                 <a:solidFill>
                   <a:srgbClr val="2D2D2D"/>
                 </a:solidFill>
@@ -11285,7 +10431,25 @@
                 <a:ea typeface="微软雅黑"/>
                 <a:latin typeface="微软雅黑"/>
               </a:rPr>
-              <a:t>分总成</a:t>
+              <a:t>上传依据</a:t>
+            </a:r>
+          </a:p>
+          <a:p>
+            <a:pPr algn="l">
+              <a:lnSpc>
+                <a:spcPts val="4200"/>
+              </a:lnSpc>
+            </a:pPr>
+            <a:r>
+              <a:rPr sz="3200" b="1">
+                <a:solidFill>
+                  <a:srgbClr val="2D2D2D"/>
+                </a:solidFill>
+                <a:latin typeface="微软雅黑"/>
+                <a:ea typeface="微软雅黑"/>
+                <a:latin typeface="微软雅黑"/>
+              </a:rPr>
+              <a:t>约 20 秒</a:t>
             </a:r>
           </a:p>
         </p:txBody>
@@ -11298,8 +10462,8 @@
         </p:nvSpPr>
         <p:spPr>
           <a:xfrm>
-            <a:off x="4690872" y="3566160"/>
-            <a:ext cx="3108960" cy="1920240"/>
+            <a:off x="6629400" y="4023360"/>
+            <a:ext cx="4572000" cy="1554480"/>
           </a:xfrm>
           <a:prstGeom prst="rect">
             <a:avLst/>
@@ -11316,7 +10480,7 @@
               </a:lnSpc>
             </a:pPr>
             <a:r>
-              <a:rPr sz="1600" b="0">
+              <a:rPr sz="1500" b="0">
                 <a:solidFill>
                   <a:srgbClr val="6B6B6B"/>
                 </a:solidFill>
@@ -11324,7 +10488,7 @@
                 <a:ea typeface="微软雅黑"/>
                 <a:latin typeface="微软雅黑"/>
               </a:rPr>
-              <a:t>付给二级商的是分总成。</a:t>
+              <a:t>规则在引擎里。人请假，总成账和采购账照样能出。</a:t>
             </a:r>
           </a:p>
           <a:p>
@@ -11334,7 +10498,7 @@
               </a:lnSpc>
             </a:pPr>
             <a:r>
-              <a:rPr sz="1600" b="0">
+              <a:rPr sz="1500" b="0">
                 <a:solidFill>
                   <a:srgbClr val="6B6B6B"/>
                 </a:solidFill>
@@ -11342,229 +10506,14 @@
                 <a:ea typeface="微软雅黑"/>
                 <a:latin typeface="微软雅黑"/>
               </a:rPr>
-              <a:t>买回来还要再焊。</a:t>
-            </a:r>
-          </a:p>
-        </p:txBody>
-      </p:sp>
-      <p:sp>
-        <p:nvSpPr>
-          <p:cNvPr id="17" name="Rectangle 16"/>
-          <p:cNvSpPr/>
-          <p:nvPr/>
-        </p:nvSpPr>
-        <p:spPr>
-          <a:xfrm>
-            <a:off x="8229600" y="1554480"/>
-            <a:ext cx="3611880" cy="4434840"/>
-          </a:xfrm>
-          <a:prstGeom prst="rect">
-            <a:avLst/>
-          </a:prstGeom>
-          <a:solidFill>
-            <a:srgbClr val="FFFFFF"/>
-          </a:solidFill>
-          <a:ln w="9525">
-            <a:solidFill>
-              <a:srgbClr val="E6E0D6"/>
-            </a:solidFill>
-          </a:ln>
-        </p:spPr>
-        <p:style>
-          <a:lnRef idx="1">
-            <a:schemeClr val="accent1"/>
-          </a:lnRef>
-          <a:fillRef idx="3">
-            <a:schemeClr val="accent1"/>
-          </a:fillRef>
-          <a:effectRef idx="2">
-            <a:schemeClr val="accent1"/>
-          </a:effectRef>
-          <a:fontRef idx="minor">
-            <a:schemeClr val="lt1"/>
-          </a:fontRef>
-        </p:style>
-        <p:txBody>
-          <a:bodyPr rtlCol="0" anchor="ctr"/>
-          <a:lstStyle/>
-          <a:p>
-            <a:pPr algn="ctr"/>
-          </a:p>
-        </p:txBody>
-      </p:sp>
-      <p:sp>
-        <p:nvSpPr>
-          <p:cNvPr id="18" name="Rectangle 17"/>
-          <p:cNvSpPr/>
-          <p:nvPr/>
-        </p:nvSpPr>
-        <p:spPr>
-          <a:xfrm>
-            <a:off x="8229600" y="1554480"/>
-            <a:ext cx="3611880" cy="41148"/>
-          </a:xfrm>
-          <a:prstGeom prst="rect">
-            <a:avLst/>
-          </a:prstGeom>
-          <a:solidFill>
-            <a:srgbClr val="D04A02"/>
-          </a:solidFill>
-          <a:ln>
-            <a:noFill/>
-          </a:ln>
-        </p:spPr>
-        <p:style>
-          <a:lnRef idx="1">
-            <a:schemeClr val="accent1"/>
-          </a:lnRef>
-          <a:fillRef idx="3">
-            <a:schemeClr val="accent1"/>
-          </a:fillRef>
-          <a:effectRef idx="2">
-            <a:schemeClr val="accent1"/>
-          </a:effectRef>
-          <a:fontRef idx="minor">
-            <a:schemeClr val="lt1"/>
-          </a:fontRef>
-        </p:style>
-        <p:txBody>
-          <a:bodyPr rtlCol="0" anchor="ctr"/>
-          <a:lstStyle/>
-          <a:p>
-            <a:pPr algn="ctr"/>
-          </a:p>
-        </p:txBody>
-      </p:sp>
-      <p:sp>
-        <p:nvSpPr>
-          <p:cNvPr id="19" name="TextBox 18"/>
-          <p:cNvSpPr txBox="1"/>
-          <p:nvPr/>
-        </p:nvSpPr>
-        <p:spPr>
-          <a:xfrm>
-            <a:off x="8485632" y="1874519"/>
-            <a:ext cx="3108960" cy="292608"/>
-          </a:xfrm>
-          <a:prstGeom prst="rect">
-            <a:avLst/>
-          </a:prstGeom>
-          <a:noFill/>
-        </p:spPr>
-        <p:txBody>
-          <a:bodyPr wrap="square" anchor="t"/>
-          <a:lstStyle/>
-          <a:p>
-            <a:pPr algn="l"/>
-            <a:r>
-              <a:rPr sz="1300" b="0">
-                <a:solidFill>
-                  <a:srgbClr val="D04A02"/>
-                </a:solidFill>
-                <a:latin typeface="微软雅黑"/>
-                <a:ea typeface="微软雅黑"/>
-                <a:latin typeface="微软雅黑"/>
-              </a:rPr>
-              <a:t>中间</a:t>
-            </a:r>
-          </a:p>
-        </p:txBody>
-      </p:sp>
-      <p:sp>
-        <p:nvSpPr>
-          <p:cNvPr id="20" name="TextBox 19"/>
-          <p:cNvSpPr txBox="1"/>
-          <p:nvPr/>
-        </p:nvSpPr>
-        <p:spPr>
-          <a:xfrm>
-            <a:off x="8485632" y="2331720"/>
-            <a:ext cx="3108960" cy="1005840"/>
-          </a:xfrm>
-          <a:prstGeom prst="rect">
-            <a:avLst/>
-          </a:prstGeom>
-          <a:noFill/>
-        </p:spPr>
-        <p:txBody>
-          <a:bodyPr wrap="square" anchor="t"/>
-          <a:lstStyle/>
-          <a:p>
-            <a:pPr algn="l"/>
-            <a:r>
-              <a:rPr sz="2600" b="1">
-                <a:solidFill>
-                  <a:srgbClr val="2D2D2D"/>
-                </a:solidFill>
-                <a:latin typeface="微软雅黑"/>
-                <a:ea typeface="微软雅黑"/>
-                <a:latin typeface="微软雅黑"/>
-              </a:rPr>
-              <a:t>公司焊接</a:t>
-            </a:r>
-          </a:p>
-        </p:txBody>
-      </p:sp>
-      <p:sp>
-        <p:nvSpPr>
-          <p:cNvPr id="21" name="TextBox 20"/>
-          <p:cNvSpPr txBox="1"/>
-          <p:nvPr/>
-        </p:nvSpPr>
-        <p:spPr>
-          <a:xfrm>
-            <a:off x="8485632" y="3566160"/>
-            <a:ext cx="3108960" cy="1920240"/>
-          </a:xfrm>
-          <a:prstGeom prst="rect">
-            <a:avLst/>
-          </a:prstGeom>
-          <a:noFill/>
-        </p:spPr>
-        <p:txBody>
-          <a:bodyPr wrap="square" anchor="t"/>
-          <a:lstStyle/>
-          <a:p>
-            <a:pPr algn="l">
-              <a:lnSpc>
-                <a:spcPts val="2600"/>
-              </a:lnSpc>
-            </a:pPr>
-            <a:r>
-              <a:rPr sz="1600" b="0">
-                <a:solidFill>
-                  <a:srgbClr val="6B6B6B"/>
-                </a:solidFill>
-                <a:latin typeface="微软雅黑"/>
-                <a:ea typeface="微软雅黑"/>
-                <a:latin typeface="微软雅黑"/>
-              </a:rPr>
-              <a:t>分总成要焊成总成。</a:t>
-            </a:r>
-          </a:p>
-          <a:p>
-            <a:pPr algn="l">
-              <a:lnSpc>
-                <a:spcPts val="2600"/>
-              </a:lnSpc>
-            </a:pPr>
-            <a:r>
-              <a:rPr sz="1600" b="0">
-                <a:solidFill>
-                  <a:srgbClr val="6B6B6B"/>
-                </a:solidFill>
-                <a:latin typeface="微软雅黑"/>
-                <a:ea typeface="微软雅黑"/>
-                <a:latin typeface="微软雅黑"/>
-              </a:rPr>
-              <a:t>这一截是焊接，不是毛利。</a:t>
+              <a:t>能力属于公司。</a:t>
             </a:r>
           </a:p>
         </p:txBody>
       </p:sp>
       <p:cxnSp>
         <p:nvCxnSpPr>
-          <p:cNvPr id="22" name="Connector 21"/>
+          <p:cNvPr id="17" name="Connector 16"/>
           <p:cNvCxnSpPr/>
           <p:nvPr/>
         </p:nvCxnSpPr>
@@ -11599,7 +10548,7 @@
       </p:cxnSp>
       <p:sp>
         <p:nvSpPr>
-          <p:cNvPr id="23" name="TextBox 22"/>
+          <p:cNvPr id="18" name="TextBox 17"/>
           <p:cNvSpPr txBox="1"/>
           <p:nvPr/>
         </p:nvSpPr>
@@ -11634,7 +10583,7 @@
       </p:sp>
       <p:sp>
         <p:nvSpPr>
-          <p:cNvPr id="24" name="TextBox 23"/>
+          <p:cNvPr id="19" name="TextBox 18"/>
           <p:cNvSpPr txBox="1"/>
           <p:nvPr/>
         </p:nvSpPr>
@@ -11844,7 +10793,7 @@
                 <a:ea typeface="微软雅黑"/>
                 <a:latin typeface="Arial"/>
               </a:rPr>
-              <a:t>06   MONTH</a:t>
+              <a:t>06   SECOND VALUE</a:t>
             </a:r>
           </a:p>
         </p:txBody>
@@ -11879,7 +10828,7 @@
                 <a:ea typeface="微软雅黑"/>
                 <a:latin typeface="微软雅黑"/>
               </a:rPr>
-              <a:t>价跟着当月的事实走</a:t>
+              <a:t>第二价值：溯源清楚，不必再扯皮</a:t>
             </a:r>
           </a:p>
         </p:txBody>
@@ -11892,8 +10841,8 @@
         </p:nvSpPr>
         <p:spPr>
           <a:xfrm>
-            <a:off x="640080" y="1554480"/>
-            <a:ext cx="5212080" cy="4434840"/>
+            <a:off x="640080" y="1508760"/>
+            <a:ext cx="5532120" cy="2084831"/>
           </a:xfrm>
           <a:prstGeom prst="rect">
             <a:avLst/>
@@ -11937,8 +10886,8 @@
         </p:nvSpPr>
         <p:spPr>
           <a:xfrm>
-            <a:off x="640080" y="1554480"/>
-            <a:ext cx="5212080" cy="41148"/>
+            <a:off x="640080" y="1508760"/>
+            <a:ext cx="5532120" cy="41148"/>
           </a:xfrm>
           <a:prstGeom prst="rect">
             <a:avLst/>
@@ -11980,8 +10929,8 @@
         </p:nvSpPr>
         <p:spPr>
           <a:xfrm>
-            <a:off x="960120" y="1874519"/>
-            <a:ext cx="4572000" cy="274320"/>
+            <a:off x="932688" y="1828800"/>
+            <a:ext cx="4937760" cy="457200"/>
           </a:xfrm>
           <a:prstGeom prst="rect">
             <a:avLst/>
@@ -11994,15 +10943,15 @@
           <a:p>
             <a:pPr algn="l"/>
             <a:r>
-              <a:rPr sz="1300" b="0">
-                <a:solidFill>
-                  <a:srgbClr val="8A8A8A"/>
-                </a:solidFill>
-                <a:latin typeface="微软雅黑"/>
-                <a:ea typeface="微软雅黑"/>
-                <a:latin typeface="微软雅黑"/>
-              </a:rPr>
-              <a:t>Excel 手工</a:t>
+              <a:rPr sz="2200" b="1">
+                <a:solidFill>
+                  <a:srgbClr val="2D2D2D"/>
+                </a:solidFill>
+                <a:latin typeface="微软雅黑"/>
+                <a:ea typeface="微软雅黑"/>
+                <a:latin typeface="微软雅黑"/>
+              </a:rPr>
+              <a:t>哪份文件</a:t>
             </a:r>
           </a:p>
         </p:txBody>
@@ -12015,43 +10964,8 @@
         </p:nvSpPr>
         <p:spPr>
           <a:xfrm>
-            <a:off x="960120" y="2331720"/>
-            <a:ext cx="4663440" cy="1097280"/>
-          </a:xfrm>
-          <a:prstGeom prst="rect">
-            <a:avLst/>
-          </a:prstGeom>
-          <a:noFill/>
-        </p:spPr>
-        <p:txBody>
-          <a:bodyPr wrap="square" anchor="t"/>
-          <a:lstStyle/>
-          <a:p>
-            <a:pPr algn="l"/>
-            <a:r>
-              <a:rPr sz="3200" b="1">
-                <a:solidFill>
-                  <a:srgbClr val="2D2D2D"/>
-                </a:solidFill>
-                <a:latin typeface="微软雅黑"/>
-                <a:ea typeface="微软雅黑"/>
-                <a:latin typeface="微软雅黑"/>
-              </a:rPr>
-              <a:t>价晚一步</a:t>
-            </a:r>
-          </a:p>
-        </p:txBody>
-      </p:sp>
-      <p:sp>
-        <p:nvSpPr>
-          <p:cNvPr id="11" name="TextBox 10"/>
-          <p:cNvSpPr txBox="1"/>
-          <p:nvPr/>
-        </p:nvSpPr>
-        <p:spPr>
-          <a:xfrm>
-            <a:off x="960120" y="3657600"/>
-            <a:ext cx="4526280" cy="1920240"/>
+            <a:off x="932688" y="2468880"/>
+            <a:ext cx="4937760" cy="777240"/>
           </a:xfrm>
           <a:prstGeom prst="rect">
             <a:avLst/>
@@ -12068,7 +10982,7 @@
               </a:lnSpc>
             </a:pPr>
             <a:r>
-              <a:rPr sz="1500" b="0">
+              <a:rPr sz="1600" b="0">
                 <a:solidFill>
                   <a:srgbClr val="6B6B6B"/>
                 </a:solidFill>
@@ -12076,75 +10990,21 @@
                 <a:ea typeface="微软雅黑"/>
                 <a:latin typeface="微软雅黑"/>
               </a:rPr>
-              <a:t>钢价变了，设变来了。</a:t>
-            </a:r>
-          </a:p>
-          <a:p>
-            <a:pPr algn="l">
-              <a:lnSpc>
-                <a:spcPts val="2600"/>
-              </a:lnSpc>
-            </a:pPr>
-            <a:r>
-              <a:rPr sz="1500" b="0">
-                <a:solidFill>
-                  <a:srgbClr val="6B6B6B"/>
-                </a:solidFill>
-                <a:latin typeface="微软雅黑"/>
-                <a:ea typeface="微软雅黑"/>
-                <a:latin typeface="微软雅黑"/>
-              </a:rPr>
-              <a:t>表还停在文件夹里。</a:t>
-            </a:r>
-          </a:p>
-          <a:p>
-            <a:pPr algn="l">
-              <a:lnSpc>
-                <a:spcPts val="2600"/>
-              </a:lnSpc>
-            </a:pPr>
-            <a:r>
-              <a:rPr sz="1500" b="0">
-                <a:solidFill>
-                  <a:srgbClr val="6B6B6B"/>
-                </a:solidFill>
-                <a:latin typeface="微软雅黑"/>
-                <a:ea typeface="微软雅黑"/>
-                <a:latin typeface="微软雅黑"/>
-              </a:rPr>
-              <a:t>该向奇瑞调的，晚了一个月。</a:t>
-            </a:r>
-          </a:p>
-          <a:p>
-            <a:pPr algn="l">
-              <a:lnSpc>
-                <a:spcPts val="2600"/>
-              </a:lnSpc>
-            </a:pPr>
-            <a:r>
-              <a:rPr sz="1500" b="0">
-                <a:solidFill>
-                  <a:srgbClr val="6B6B6B"/>
-                </a:solidFill>
-                <a:latin typeface="微软雅黑"/>
-                <a:ea typeface="微软雅黑"/>
-                <a:latin typeface="微软雅黑"/>
-              </a:rPr>
-              <a:t>该向二级商调的，也晚了。</a:t>
-            </a:r>
-          </a:p>
-        </p:txBody>
-      </p:sp>
-      <p:sp>
-        <p:nvSpPr>
-          <p:cNvPr id="12" name="Rectangle 11"/>
+              <a:t>当时用的 Excel 能找回，不是私人拷贝。</a:t>
+            </a:r>
+          </a:p>
+        </p:txBody>
+      </p:sp>
+      <p:sp>
+        <p:nvSpPr>
+          <p:cNvPr id="11" name="Rectangle 10"/>
           <p:cNvSpPr/>
           <p:nvPr/>
         </p:nvSpPr>
         <p:spPr>
           <a:xfrm>
-            <a:off x="6309360" y="1554480"/>
-            <a:ext cx="5212080" cy="4434840"/>
+            <a:off x="6400800" y="1508760"/>
+            <a:ext cx="5532120" cy="2084831"/>
           </a:xfrm>
           <a:prstGeom prst="rect">
             <a:avLst/>
@@ -12182,14 +11042,14 @@
       </p:sp>
       <p:sp>
         <p:nvSpPr>
-          <p:cNvPr id="13" name="Rectangle 12"/>
+          <p:cNvPr id="12" name="Rectangle 11"/>
           <p:cNvSpPr/>
           <p:nvPr/>
         </p:nvSpPr>
         <p:spPr>
           <a:xfrm>
-            <a:off x="6309360" y="1554480"/>
-            <a:ext cx="5212080" cy="41148"/>
+            <a:off x="6400800" y="1508760"/>
+            <a:ext cx="5532120" cy="41148"/>
           </a:xfrm>
           <a:prstGeom prst="rect">
             <a:avLst/>
@@ -12225,84 +11085,49 @@
       </p:sp>
       <p:sp>
         <p:nvSpPr>
+          <p:cNvPr id="13" name="TextBox 12"/>
+          <p:cNvSpPr txBox="1"/>
+          <p:nvPr/>
+        </p:nvSpPr>
+        <p:spPr>
+          <a:xfrm>
+            <a:off x="6693408" y="1828800"/>
+            <a:ext cx="4937760" cy="457200"/>
+          </a:xfrm>
+          <a:prstGeom prst="rect">
+            <a:avLst/>
+          </a:prstGeom>
+          <a:noFill/>
+        </p:spPr>
+        <p:txBody>
+          <a:bodyPr wrap="square" anchor="t"/>
+          <a:lstStyle/>
+          <a:p>
+            <a:pPr algn="l"/>
+            <a:r>
+              <a:rPr sz="2200" b="1">
+                <a:solidFill>
+                  <a:srgbClr val="2D2D2D"/>
+                </a:solidFill>
+                <a:latin typeface="微软雅黑"/>
+                <a:ea typeface="微软雅黑"/>
+                <a:latin typeface="微软雅黑"/>
+              </a:rPr>
+              <a:t>谁操作的</a:t>
+            </a:r>
+          </a:p>
+        </p:txBody>
+      </p:sp>
+      <p:sp>
+        <p:nvSpPr>
           <p:cNvPr id="14" name="TextBox 13"/>
           <p:cNvSpPr txBox="1"/>
           <p:nvPr/>
         </p:nvSpPr>
         <p:spPr>
           <a:xfrm>
-            <a:off x="6629400" y="1874519"/>
-            <a:ext cx="4572000" cy="274320"/>
-          </a:xfrm>
-          <a:prstGeom prst="rect">
-            <a:avLst/>
-          </a:prstGeom>
-          <a:noFill/>
-        </p:spPr>
-        <p:txBody>
-          <a:bodyPr wrap="square" anchor="t"/>
-          <a:lstStyle/>
-          <a:p>
-            <a:pPr algn="l"/>
-            <a:r>
-              <a:rPr sz="1300" b="0">
-                <a:solidFill>
-                  <a:srgbClr val="D04A02"/>
-                </a:solidFill>
-                <a:latin typeface="微软雅黑"/>
-                <a:ea typeface="微软雅黑"/>
-                <a:latin typeface="微软雅黑"/>
-              </a:rPr>
-              <a:t>现网</a:t>
-            </a:r>
-          </a:p>
-        </p:txBody>
-      </p:sp>
-      <p:sp>
-        <p:nvSpPr>
-          <p:cNvPr id="15" name="TextBox 14"/>
-          <p:cNvSpPr txBox="1"/>
-          <p:nvPr/>
-        </p:nvSpPr>
-        <p:spPr>
-          <a:xfrm>
-            <a:off x="6629400" y="2331720"/>
-            <a:ext cx="4663440" cy="1097280"/>
-          </a:xfrm>
-          <a:prstGeom prst="rect">
-            <a:avLst/>
-          </a:prstGeom>
-          <a:noFill/>
-        </p:spPr>
-        <p:txBody>
-          <a:bodyPr wrap="square" anchor="t"/>
-          <a:lstStyle/>
-          <a:p>
-            <a:pPr algn="l"/>
-            <a:r>
-              <a:rPr sz="3200" b="1">
-                <a:solidFill>
-                  <a:srgbClr val="2D2D2D"/>
-                </a:solidFill>
-                <a:latin typeface="微软雅黑"/>
-                <a:ea typeface="微软雅黑"/>
-                <a:latin typeface="微软雅黑"/>
-              </a:rPr>
-              <a:t>当月算当月</a:t>
-            </a:r>
-          </a:p>
-        </p:txBody>
-      </p:sp>
-      <p:sp>
-        <p:nvSpPr>
-          <p:cNvPr id="16" name="TextBox 15"/>
-          <p:cNvSpPr txBox="1"/>
-          <p:nvPr/>
-        </p:nvSpPr>
-        <p:spPr>
-          <a:xfrm>
-            <a:off x="6629400" y="3657600"/>
-            <a:ext cx="4572000" cy="1920240"/>
+            <a:off x="6693408" y="2468880"/>
+            <a:ext cx="4937760" cy="777240"/>
           </a:xfrm>
           <a:prstGeom prst="rect">
             <a:avLst/>
@@ -12319,7 +11144,7 @@
               </a:lnSpc>
             </a:pPr>
             <a:r>
-              <a:rPr sz="1500" b="0">
+              <a:rPr sz="1600" b="0">
                 <a:solidFill>
                   <a:srgbClr val="6B6B6B"/>
                 </a:solidFill>
@@ -12327,9 +11152,153 @@
                 <a:ea typeface="微软雅黑"/>
                 <a:latin typeface="微软雅黑"/>
               </a:rPr>
-              <a:t>钢价、BOM、工艺、设变，</a:t>
-            </a:r>
-          </a:p>
+              <a:t>上传、计算、变更有日志。对账问记录。</a:t>
+            </a:r>
+          </a:p>
+        </p:txBody>
+      </p:sp>
+      <p:sp>
+        <p:nvSpPr>
+          <p:cNvPr id="15" name="Rectangle 14"/>
+          <p:cNvSpPr/>
+          <p:nvPr/>
+        </p:nvSpPr>
+        <p:spPr>
+          <a:xfrm>
+            <a:off x="640080" y="3794760"/>
+            <a:ext cx="5532120" cy="2084831"/>
+          </a:xfrm>
+          <a:prstGeom prst="rect">
+            <a:avLst/>
+          </a:prstGeom>
+          <a:solidFill>
+            <a:srgbClr val="FFFFFF"/>
+          </a:solidFill>
+          <a:ln w="9525">
+            <a:solidFill>
+              <a:srgbClr val="E6E0D6"/>
+            </a:solidFill>
+          </a:ln>
+        </p:spPr>
+        <p:style>
+          <a:lnRef idx="1">
+            <a:schemeClr val="accent1"/>
+          </a:lnRef>
+          <a:fillRef idx="3">
+            <a:schemeClr val="accent1"/>
+          </a:fillRef>
+          <a:effectRef idx="2">
+            <a:schemeClr val="accent1"/>
+          </a:effectRef>
+          <a:fontRef idx="minor">
+            <a:schemeClr val="lt1"/>
+          </a:fontRef>
+        </p:style>
+        <p:txBody>
+          <a:bodyPr rtlCol="0" anchor="ctr"/>
+          <a:lstStyle/>
+          <a:p>
+            <a:pPr algn="ctr"/>
+          </a:p>
+        </p:txBody>
+      </p:sp>
+      <p:sp>
+        <p:nvSpPr>
+          <p:cNvPr id="16" name="Rectangle 15"/>
+          <p:cNvSpPr/>
+          <p:nvPr/>
+        </p:nvSpPr>
+        <p:spPr>
+          <a:xfrm>
+            <a:off x="640080" y="3794760"/>
+            <a:ext cx="5532120" cy="41148"/>
+          </a:xfrm>
+          <a:prstGeom prst="rect">
+            <a:avLst/>
+          </a:prstGeom>
+          <a:solidFill>
+            <a:srgbClr val="D04A02"/>
+          </a:solidFill>
+          <a:ln>
+            <a:noFill/>
+          </a:ln>
+        </p:spPr>
+        <p:style>
+          <a:lnRef idx="1">
+            <a:schemeClr val="accent1"/>
+          </a:lnRef>
+          <a:fillRef idx="3">
+            <a:schemeClr val="accent1"/>
+          </a:fillRef>
+          <a:effectRef idx="2">
+            <a:schemeClr val="accent1"/>
+          </a:effectRef>
+          <a:fontRef idx="minor">
+            <a:schemeClr val="lt1"/>
+          </a:fontRef>
+        </p:style>
+        <p:txBody>
+          <a:bodyPr rtlCol="0" anchor="ctr"/>
+          <a:lstStyle/>
+          <a:p>
+            <a:pPr algn="ctr"/>
+          </a:p>
+        </p:txBody>
+      </p:sp>
+      <p:sp>
+        <p:nvSpPr>
+          <p:cNvPr id="17" name="TextBox 16"/>
+          <p:cNvSpPr txBox="1"/>
+          <p:nvPr/>
+        </p:nvSpPr>
+        <p:spPr>
+          <a:xfrm>
+            <a:off x="932688" y="4114800"/>
+            <a:ext cx="4937760" cy="457200"/>
+          </a:xfrm>
+          <a:prstGeom prst="rect">
+            <a:avLst/>
+          </a:prstGeom>
+          <a:noFill/>
+        </p:spPr>
+        <p:txBody>
+          <a:bodyPr wrap="square" anchor="t"/>
+          <a:lstStyle/>
+          <a:p>
+            <a:pPr algn="l"/>
+            <a:r>
+              <a:rPr sz="2200" b="1">
+                <a:solidFill>
+                  <a:srgbClr val="2D2D2D"/>
+                </a:solidFill>
+                <a:latin typeface="微软雅黑"/>
+                <a:ea typeface="微软雅黑"/>
+                <a:latin typeface="微软雅黑"/>
+              </a:rPr>
+              <a:t>当期哪版</a:t>
+            </a:r>
+          </a:p>
+        </p:txBody>
+      </p:sp>
+      <p:sp>
+        <p:nvSpPr>
+          <p:cNvPr id="18" name="TextBox 17"/>
+          <p:cNvSpPr txBox="1"/>
+          <p:nvPr/>
+        </p:nvSpPr>
+        <p:spPr>
+          <a:xfrm>
+            <a:off x="932688" y="4754880"/>
+            <a:ext cx="4937760" cy="777240"/>
+          </a:xfrm>
+          <a:prstGeom prst="rect">
+            <a:avLst/>
+          </a:prstGeom>
+          <a:noFill/>
+        </p:spPr>
+        <p:txBody>
+          <a:bodyPr wrap="square" anchor="t"/>
+          <a:lstStyle/>
           <a:p>
             <a:pPr algn="l">
               <a:lnSpc>
@@ -12337,7 +11306,7 @@
               </a:lnSpc>
             </a:pPr>
             <a:r>
-              <a:rPr sz="1500" b="0">
+              <a:rPr sz="1600" b="0">
                 <a:solidFill>
                   <a:srgbClr val="6B6B6B"/>
                 </a:solidFill>
@@ -12345,9 +11314,153 @@
                 <a:ea typeface="微软雅黑"/>
                 <a:latin typeface="微软雅黑"/>
               </a:rPr>
-              <a:t>进入当月一起算。</a:t>
-            </a:r>
-          </a:p>
+              <a:t>钢价、BOM、工艺、设变按月对齐。</a:t>
+            </a:r>
+          </a:p>
+        </p:txBody>
+      </p:sp>
+      <p:sp>
+        <p:nvSpPr>
+          <p:cNvPr id="19" name="Rectangle 18"/>
+          <p:cNvSpPr/>
+          <p:nvPr/>
+        </p:nvSpPr>
+        <p:spPr>
+          <a:xfrm>
+            <a:off x="6400800" y="3794760"/>
+            <a:ext cx="5532120" cy="2084831"/>
+          </a:xfrm>
+          <a:prstGeom prst="rect">
+            <a:avLst/>
+          </a:prstGeom>
+          <a:solidFill>
+            <a:srgbClr val="FFFFFF"/>
+          </a:solidFill>
+          <a:ln w="9525">
+            <a:solidFill>
+              <a:srgbClr val="E6E0D6"/>
+            </a:solidFill>
+          </a:ln>
+        </p:spPr>
+        <p:style>
+          <a:lnRef idx="1">
+            <a:schemeClr val="accent1"/>
+          </a:lnRef>
+          <a:fillRef idx="3">
+            <a:schemeClr val="accent1"/>
+          </a:fillRef>
+          <a:effectRef idx="2">
+            <a:schemeClr val="accent1"/>
+          </a:effectRef>
+          <a:fontRef idx="minor">
+            <a:schemeClr val="lt1"/>
+          </a:fontRef>
+        </p:style>
+        <p:txBody>
+          <a:bodyPr rtlCol="0" anchor="ctr"/>
+          <a:lstStyle/>
+          <a:p>
+            <a:pPr algn="ctr"/>
+          </a:p>
+        </p:txBody>
+      </p:sp>
+      <p:sp>
+        <p:nvSpPr>
+          <p:cNvPr id="20" name="Rectangle 19"/>
+          <p:cNvSpPr/>
+          <p:nvPr/>
+        </p:nvSpPr>
+        <p:spPr>
+          <a:xfrm>
+            <a:off x="6400800" y="3794760"/>
+            <a:ext cx="5532120" cy="41148"/>
+          </a:xfrm>
+          <a:prstGeom prst="rect">
+            <a:avLst/>
+          </a:prstGeom>
+          <a:solidFill>
+            <a:srgbClr val="D04A02"/>
+          </a:solidFill>
+          <a:ln>
+            <a:noFill/>
+          </a:ln>
+        </p:spPr>
+        <p:style>
+          <a:lnRef idx="1">
+            <a:schemeClr val="accent1"/>
+          </a:lnRef>
+          <a:fillRef idx="3">
+            <a:schemeClr val="accent1"/>
+          </a:fillRef>
+          <a:effectRef idx="2">
+            <a:schemeClr val="accent1"/>
+          </a:effectRef>
+          <a:fontRef idx="minor">
+            <a:schemeClr val="lt1"/>
+          </a:fontRef>
+        </p:style>
+        <p:txBody>
+          <a:bodyPr rtlCol="0" anchor="ctr"/>
+          <a:lstStyle/>
+          <a:p>
+            <a:pPr algn="ctr"/>
+          </a:p>
+        </p:txBody>
+      </p:sp>
+      <p:sp>
+        <p:nvSpPr>
+          <p:cNvPr id="21" name="TextBox 20"/>
+          <p:cNvSpPr txBox="1"/>
+          <p:nvPr/>
+        </p:nvSpPr>
+        <p:spPr>
+          <a:xfrm>
+            <a:off x="6693408" y="4114800"/>
+            <a:ext cx="4937760" cy="457200"/>
+          </a:xfrm>
+          <a:prstGeom prst="rect">
+            <a:avLst/>
+          </a:prstGeom>
+          <a:noFill/>
+        </p:spPr>
+        <p:txBody>
+          <a:bodyPr wrap="square" anchor="t"/>
+          <a:lstStyle/>
+          <a:p>
+            <a:pPr algn="l"/>
+            <a:r>
+              <a:rPr sz="2200" b="1">
+                <a:solidFill>
+                  <a:srgbClr val="2D2D2D"/>
+                </a:solidFill>
+                <a:latin typeface="微软雅黑"/>
+                <a:ea typeface="微软雅黑"/>
+                <a:latin typeface="微软雅黑"/>
+              </a:rPr>
+              <a:t>同一套规则</a:t>
+            </a:r>
+          </a:p>
+        </p:txBody>
+      </p:sp>
+      <p:sp>
+        <p:nvSpPr>
+          <p:cNvPr id="22" name="TextBox 21"/>
+          <p:cNvSpPr txBox="1"/>
+          <p:nvPr/>
+        </p:nvSpPr>
+        <p:spPr>
+          <a:xfrm>
+            <a:off x="6693408" y="4754880"/>
+            <a:ext cx="4937760" cy="777240"/>
+          </a:xfrm>
+          <a:prstGeom prst="rect">
+            <a:avLst/>
+          </a:prstGeom>
+          <a:noFill/>
+        </p:spPr>
+        <p:txBody>
+          <a:bodyPr wrap="square" anchor="t"/>
+          <a:lstStyle/>
           <a:p>
             <a:pPr algn="l">
               <a:lnSpc>
@@ -12355,7 +11468,7 @@
               </a:lnSpc>
             </a:pPr>
             <a:r>
-              <a:rPr sz="1500" b="0">
+              <a:rPr sz="1600" b="0">
                 <a:solidFill>
                   <a:srgbClr val="6B6B6B"/>
                 </a:solidFill>
@@ -12363,14 +11476,14 @@
                 <a:ea typeface="微软雅黑"/>
                 <a:latin typeface="微软雅黑"/>
               </a:rPr>
-              <a:t>开票价和采购价一起跟上。</a:t>
+              <a:t>开给奇瑞和付给二级商，同一引擎。</a:t>
             </a:r>
           </a:p>
         </p:txBody>
       </p:sp>
       <p:cxnSp>
         <p:nvCxnSpPr>
-          <p:cNvPr id="17" name="Connector 16"/>
+          <p:cNvPr id="23" name="Connector 22"/>
           <p:cNvCxnSpPr/>
           <p:nvPr/>
         </p:nvCxnSpPr>
@@ -12405,7 +11518,7 @@
       </p:cxnSp>
       <p:sp>
         <p:nvSpPr>
-          <p:cNvPr id="18" name="TextBox 17"/>
+          <p:cNvPr id="24" name="TextBox 23"/>
           <p:cNvSpPr txBox="1"/>
           <p:nvPr/>
         </p:nvSpPr>
@@ -12440,7 +11553,7 @@
       </p:sp>
       <p:sp>
         <p:nvSpPr>
-          <p:cNvPr id="19" name="TextBox 18"/>
+          <p:cNvPr id="25" name="TextBox 24"/>
           <p:cNvSpPr txBox="1"/>
           <p:nvPr/>
         </p:nvSpPr>
@@ -12650,7 +11763,7 @@
                 <a:ea typeface="微软雅黑"/>
                 <a:latin typeface="Arial"/>
               </a:rPr>
-              <a:t>07   TRACE</a:t>
+              <a:t>07   VALUE</a:t>
             </a:r>
           </a:p>
         </p:txBody>
@@ -12685,7 +11798,7 @@
                 <a:ea typeface="微软雅黑"/>
                 <a:latin typeface="微软雅黑"/>
               </a:rPr>
-              <a:t>对得上，就不必再开会扯皮</a:t>
+              <a:t>四项价值，进的是公司而不是个人</a:t>
             </a:r>
           </a:p>
         </p:txBody>
@@ -12786,8 +11899,8 @@
         </p:nvSpPr>
         <p:spPr>
           <a:xfrm>
-            <a:off x="932688" y="1856232"/>
-            <a:ext cx="4937760" cy="457200"/>
+            <a:off x="932688" y="1764792"/>
+            <a:ext cx="1097280" cy="292608"/>
           </a:xfrm>
           <a:prstGeom prst="rect">
             <a:avLst/>
@@ -12800,15 +11913,15 @@
           <a:p>
             <a:pPr algn="l"/>
             <a:r>
-              <a:rPr sz="2200" b="1">
-                <a:solidFill>
-                  <a:srgbClr val="2D2D2D"/>
-                </a:solidFill>
-                <a:latin typeface="微软雅黑"/>
-                <a:ea typeface="微软雅黑"/>
-                <a:latin typeface="微软雅黑"/>
-              </a:rPr>
-              <a:t>哪份文件</a:t>
+              <a:rPr sz="1300" b="0">
+                <a:solidFill>
+                  <a:srgbClr val="D04A02"/>
+                </a:solidFill>
+                <a:latin typeface="Arial"/>
+                <a:ea typeface="微软雅黑"/>
+                <a:latin typeface="Arial"/>
+              </a:rPr>
+              <a:t>01</a:t>
             </a:r>
           </a:p>
         </p:txBody>
@@ -12821,8 +11934,43 @@
         </p:nvSpPr>
         <p:spPr>
           <a:xfrm>
-            <a:off x="932688" y="2514600"/>
-            <a:ext cx="4937760" cy="777240"/>
+            <a:off x="932688" y="2103120"/>
+            <a:ext cx="4937760" cy="411480"/>
+          </a:xfrm>
+          <a:prstGeom prst="rect">
+            <a:avLst/>
+          </a:prstGeom>
+          <a:noFill/>
+        </p:spPr>
+        <p:txBody>
+          <a:bodyPr wrap="square" anchor="t"/>
+          <a:lstStyle/>
+          <a:p>
+            <a:pPr algn="l"/>
+            <a:r>
+              <a:rPr sz="2200" b="1">
+                <a:solidFill>
+                  <a:srgbClr val="2D2D2D"/>
+                </a:solidFill>
+                <a:latin typeface="微软雅黑"/>
+                <a:ea typeface="微软雅黑"/>
+                <a:latin typeface="微软雅黑"/>
+              </a:rPr>
+              <a:t>少绑人</a:t>
+            </a:r>
+          </a:p>
+        </p:txBody>
+      </p:sp>
+      <p:sp>
+        <p:nvSpPr>
+          <p:cNvPr id="11" name="TextBox 10"/>
+          <p:cNvSpPr txBox="1"/>
+          <p:nvPr/>
+        </p:nvSpPr>
+        <p:spPr>
+          <a:xfrm>
+            <a:off x="932688" y="2606040"/>
+            <a:ext cx="4937760" cy="731520"/>
           </a:xfrm>
           <a:prstGeom prst="rect">
             <a:avLst/>
@@ -12835,11 +11983,11 @@
           <a:p>
             <a:pPr algn="l">
               <a:lnSpc>
-                <a:spcPts val="2600"/>
+                <a:spcPts val="2200"/>
               </a:lnSpc>
             </a:pPr>
             <a:r>
-              <a:rPr sz="1600" b="0">
+              <a:rPr sz="1400" b="0">
                 <a:solidFill>
                   <a:srgbClr val="6B6B6B"/>
                 </a:solidFill>
@@ -12847,14 +11995,14 @@
                 <a:ea typeface="微软雅黑"/>
                 <a:latin typeface="微软雅黑"/>
               </a:rPr>
-              <a:t>当时用的 Excel 能找回。省下的是翻私人拷贝。</a:t>
-            </a:r>
-          </a:p>
-        </p:txBody>
-      </p:sp>
-      <p:sp>
-        <p:nvSpPr>
-          <p:cNvPr id="11" name="Rectangle 10"/>
+              <a:t>核价能力属于公司。熟练骨干好几天，变成约 20 秒。</a:t>
+            </a:r>
+          </a:p>
+        </p:txBody>
+      </p:sp>
+      <p:sp>
+        <p:nvSpPr>
+          <p:cNvPr id="12" name="Rectangle 11"/>
           <p:cNvSpPr/>
           <p:nvPr/>
         </p:nvSpPr>
@@ -12899,7 +12047,7 @@
       </p:sp>
       <p:sp>
         <p:nvSpPr>
-          <p:cNvPr id="12" name="Rectangle 11"/>
+          <p:cNvPr id="13" name="Rectangle 12"/>
           <p:cNvSpPr/>
           <p:nvPr/>
         </p:nvSpPr>
@@ -12942,49 +12090,84 @@
       </p:sp>
       <p:sp>
         <p:nvSpPr>
-          <p:cNvPr id="13" name="TextBox 12"/>
-          <p:cNvSpPr txBox="1"/>
-          <p:nvPr/>
-        </p:nvSpPr>
-        <p:spPr>
-          <a:xfrm>
-            <a:off x="6693408" y="1856232"/>
-            <a:ext cx="4937760" cy="457200"/>
-          </a:xfrm>
-          <a:prstGeom prst="rect">
-            <a:avLst/>
-          </a:prstGeom>
-          <a:noFill/>
-        </p:spPr>
-        <p:txBody>
-          <a:bodyPr wrap="square" anchor="t"/>
-          <a:lstStyle/>
-          <a:p>
-            <a:pPr algn="l"/>
-            <a:r>
-              <a:rPr sz="2200" b="1">
-                <a:solidFill>
-                  <a:srgbClr val="2D2D2D"/>
-                </a:solidFill>
-                <a:latin typeface="微软雅黑"/>
-                <a:ea typeface="微软雅黑"/>
-                <a:latin typeface="微软雅黑"/>
-              </a:rPr>
-              <a:t>谁操作的</a:t>
-            </a:r>
-          </a:p>
-        </p:txBody>
-      </p:sp>
-      <p:sp>
-        <p:nvSpPr>
           <p:cNvPr id="14" name="TextBox 13"/>
           <p:cNvSpPr txBox="1"/>
           <p:nvPr/>
         </p:nvSpPr>
         <p:spPr>
           <a:xfrm>
-            <a:off x="6693408" y="2514600"/>
-            <a:ext cx="4937760" cy="777240"/>
+            <a:off x="6693408" y="1764792"/>
+            <a:ext cx="1097280" cy="292608"/>
+          </a:xfrm>
+          <a:prstGeom prst="rect">
+            <a:avLst/>
+          </a:prstGeom>
+          <a:noFill/>
+        </p:spPr>
+        <p:txBody>
+          <a:bodyPr wrap="square" anchor="t"/>
+          <a:lstStyle/>
+          <a:p>
+            <a:pPr algn="l"/>
+            <a:r>
+              <a:rPr sz="1300" b="0">
+                <a:solidFill>
+                  <a:srgbClr val="D04A02"/>
+                </a:solidFill>
+                <a:latin typeface="Arial"/>
+                <a:ea typeface="微软雅黑"/>
+                <a:latin typeface="Arial"/>
+              </a:rPr>
+              <a:t>02</a:t>
+            </a:r>
+          </a:p>
+        </p:txBody>
+      </p:sp>
+      <p:sp>
+        <p:nvSpPr>
+          <p:cNvPr id="15" name="TextBox 14"/>
+          <p:cNvSpPr txBox="1"/>
+          <p:nvPr/>
+        </p:nvSpPr>
+        <p:spPr>
+          <a:xfrm>
+            <a:off x="6693408" y="2103120"/>
+            <a:ext cx="4937760" cy="411480"/>
+          </a:xfrm>
+          <a:prstGeom prst="rect">
+            <a:avLst/>
+          </a:prstGeom>
+          <a:noFill/>
+        </p:spPr>
+        <p:txBody>
+          <a:bodyPr wrap="square" anchor="t"/>
+          <a:lstStyle/>
+          <a:p>
+            <a:pPr algn="l"/>
+            <a:r>
+              <a:rPr sz="2200" b="1">
+                <a:solidFill>
+                  <a:srgbClr val="2D2D2D"/>
+                </a:solidFill>
+                <a:latin typeface="微软雅黑"/>
+                <a:ea typeface="微软雅黑"/>
+                <a:latin typeface="微软雅黑"/>
+              </a:rPr>
+              <a:t>少扯皮</a:t>
+            </a:r>
+          </a:p>
+        </p:txBody>
+      </p:sp>
+      <p:sp>
+        <p:nvSpPr>
+          <p:cNvPr id="16" name="TextBox 15"/>
+          <p:cNvSpPr txBox="1"/>
+          <p:nvPr/>
+        </p:nvSpPr>
+        <p:spPr>
+          <a:xfrm>
+            <a:off x="6693408" y="2606040"/>
+            <a:ext cx="4937760" cy="731520"/>
           </a:xfrm>
           <a:prstGeom prst="rect">
             <a:avLst/>
@@ -12997,11 +12180,11 @@
           <a:p>
             <a:pPr algn="l">
               <a:lnSpc>
-                <a:spcPts val="2600"/>
+                <a:spcPts val="2200"/>
               </a:lnSpc>
             </a:pPr>
             <a:r>
-              <a:rPr sz="1600" b="0">
+              <a:rPr sz="1400" b="0">
                 <a:solidFill>
                   <a:srgbClr val="6B6B6B"/>
                 </a:solidFill>
@@ -13009,14 +12192,14 @@
                 <a:ea typeface="微软雅黑"/>
                 <a:latin typeface="微软雅黑"/>
               </a:rPr>
-              <a:t>上传、计算、变更有日志。责任落得到人。</a:t>
-            </a:r>
-          </a:p>
-        </p:txBody>
-      </p:sp>
-      <p:sp>
-        <p:nvSpPr>
-          <p:cNvPr id="15" name="Rectangle 14"/>
+              <a:t>文件、操作、当期依据可对。对奇瑞、对二级商、对财务同一本账。</a:t>
+            </a:r>
+          </a:p>
+        </p:txBody>
+      </p:sp>
+      <p:sp>
+        <p:nvSpPr>
+          <p:cNvPr id="17" name="Rectangle 16"/>
           <p:cNvSpPr/>
           <p:nvPr/>
         </p:nvSpPr>
@@ -13061,7 +12244,7 @@
       </p:sp>
       <p:sp>
         <p:nvSpPr>
-          <p:cNvPr id="16" name="Rectangle 15"/>
+          <p:cNvPr id="18" name="Rectangle 17"/>
           <p:cNvSpPr/>
           <p:nvPr/>
         </p:nvSpPr>
@@ -13104,14 +12287,14 @@
       </p:sp>
       <p:sp>
         <p:nvSpPr>
-          <p:cNvPr id="17" name="TextBox 16"/>
+          <p:cNvPr id="19" name="TextBox 18"/>
           <p:cNvSpPr txBox="1"/>
           <p:nvPr/>
         </p:nvSpPr>
         <p:spPr>
           <a:xfrm>
-            <a:off x="932688" y="4142232"/>
-            <a:ext cx="4937760" cy="457200"/>
+            <a:off x="932688" y="4050792"/>
+            <a:ext cx="1097280" cy="292608"/>
           </a:xfrm>
           <a:prstGeom prst="rect">
             <a:avLst/>
@@ -13124,6 +12307,41 @@
           <a:p>
             <a:pPr algn="l"/>
             <a:r>
+              <a:rPr sz="1300" b="0">
+                <a:solidFill>
+                  <a:srgbClr val="D04A02"/>
+                </a:solidFill>
+                <a:latin typeface="Arial"/>
+                <a:ea typeface="微软雅黑"/>
+                <a:latin typeface="Arial"/>
+              </a:rPr>
+              <a:t>03</a:t>
+            </a:r>
+          </a:p>
+        </p:txBody>
+      </p:sp>
+      <p:sp>
+        <p:nvSpPr>
+          <p:cNvPr id="20" name="TextBox 19"/>
+          <p:cNvSpPr txBox="1"/>
+          <p:nvPr/>
+        </p:nvSpPr>
+        <p:spPr>
+          <a:xfrm>
+            <a:off x="932688" y="4389120"/>
+            <a:ext cx="4937760" cy="411480"/>
+          </a:xfrm>
+          <a:prstGeom prst="rect">
+            <a:avLst/>
+          </a:prstGeom>
+          <a:noFill/>
+        </p:spPr>
+        <p:txBody>
+          <a:bodyPr wrap="square" anchor="t"/>
+          <a:lstStyle/>
+          <a:p>
+            <a:pPr algn="l"/>
+            <a:r>
               <a:rPr sz="2200" b="1">
                 <a:solidFill>
                   <a:srgbClr val="2D2D2D"/>
@@ -13132,21 +12350,21 @@
                 <a:ea typeface="微软雅黑"/>
                 <a:latin typeface="微软雅黑"/>
               </a:rPr>
-              <a:t>当期哪版</a:t>
-            </a:r>
-          </a:p>
-        </p:txBody>
-      </p:sp>
-      <p:sp>
-        <p:nvSpPr>
-          <p:cNvPr id="18" name="TextBox 17"/>
+              <a:t>算得一致</a:t>
+            </a:r>
+          </a:p>
+        </p:txBody>
+      </p:sp>
+      <p:sp>
+        <p:nvSpPr>
+          <p:cNvPr id="21" name="TextBox 20"/>
           <p:cNvSpPr txBox="1"/>
           <p:nvPr/>
         </p:nvSpPr>
         <p:spPr>
           <a:xfrm>
-            <a:off x="932688" y="4800600"/>
-            <a:ext cx="4937760" cy="777240"/>
+            <a:off x="932688" y="4892040"/>
+            <a:ext cx="4937760" cy="731520"/>
           </a:xfrm>
           <a:prstGeom prst="rect">
             <a:avLst/>
@@ -13159,11 +12377,11 @@
           <a:p>
             <a:pPr algn="l">
               <a:lnSpc>
-                <a:spcPts val="2600"/>
+                <a:spcPts val="2200"/>
               </a:lnSpc>
             </a:pPr>
             <a:r>
-              <a:rPr sz="1600" b="0">
+              <a:rPr sz="1400" b="0">
                 <a:solidFill>
                   <a:srgbClr val="6B6B6B"/>
                 </a:solidFill>
@@ -13171,14 +12389,32 @@
                 <a:ea typeface="微软雅黑"/>
                 <a:latin typeface="微软雅黑"/>
               </a:rPr>
-              <a:t>钢价、BOM、工艺、设变按月对齐。不会用错月。</a:t>
-            </a:r>
-          </a:p>
-        </p:txBody>
-      </p:sp>
-      <p:sp>
-        <p:nvSpPr>
-          <p:cNvPr id="19" name="Rectangle 18"/>
+              <a:t>同一套规则、同一套口径。</a:t>
+            </a:r>
+          </a:p>
+          <a:p>
+            <a:pPr algn="l">
+              <a:lnSpc>
+                <a:spcPts val="2200"/>
+              </a:lnSpc>
+            </a:pPr>
+            <a:r>
+              <a:rPr sz="1400" b="0">
+                <a:solidFill>
+                  <a:srgbClr val="6B6B6B"/>
+                </a:solidFill>
+                <a:latin typeface="微软雅黑"/>
+                <a:ea typeface="微软雅黑"/>
+                <a:latin typeface="微软雅黑"/>
+              </a:rPr>
+              <a:t>总成售价和采购应付不再各算各的。</a:t>
+            </a:r>
+          </a:p>
+        </p:txBody>
+      </p:sp>
+      <p:sp>
+        <p:nvSpPr>
+          <p:cNvPr id="22" name="Rectangle 21"/>
           <p:cNvSpPr/>
           <p:nvPr/>
         </p:nvSpPr>
@@ -13223,7 +12459,7 @@
       </p:sp>
       <p:sp>
         <p:nvSpPr>
-          <p:cNvPr id="20" name="Rectangle 19"/>
+          <p:cNvPr id="23" name="Rectangle 22"/>
           <p:cNvSpPr/>
           <p:nvPr/>
         </p:nvSpPr>
@@ -13266,14 +12502,14 @@
       </p:sp>
       <p:sp>
         <p:nvSpPr>
-          <p:cNvPr id="21" name="TextBox 20"/>
+          <p:cNvPr id="24" name="TextBox 23"/>
           <p:cNvSpPr txBox="1"/>
           <p:nvPr/>
         </p:nvSpPr>
         <p:spPr>
           <a:xfrm>
-            <a:off x="6693408" y="4142232"/>
-            <a:ext cx="4937760" cy="457200"/>
+            <a:off x="6693408" y="4050792"/>
+            <a:ext cx="1097280" cy="292608"/>
           </a:xfrm>
           <a:prstGeom prst="rect">
             <a:avLst/>
@@ -13286,6 +12522,41 @@
           <a:p>
             <a:pPr algn="l"/>
             <a:r>
+              <a:rPr sz="1300" b="0">
+                <a:solidFill>
+                  <a:srgbClr val="D04A02"/>
+                </a:solidFill>
+                <a:latin typeface="Arial"/>
+                <a:ea typeface="微软雅黑"/>
+                <a:latin typeface="Arial"/>
+              </a:rPr>
+              <a:t>04</a:t>
+            </a:r>
+          </a:p>
+        </p:txBody>
+      </p:sp>
+      <p:sp>
+        <p:nvSpPr>
+          <p:cNvPr id="25" name="TextBox 24"/>
+          <p:cNvSpPr txBox="1"/>
+          <p:nvPr/>
+        </p:nvSpPr>
+        <p:spPr>
+          <a:xfrm>
+            <a:off x="6693408" y="4389120"/>
+            <a:ext cx="4937760" cy="411480"/>
+          </a:xfrm>
+          <a:prstGeom prst="rect">
+            <a:avLst/>
+          </a:prstGeom>
+          <a:noFill/>
+        </p:spPr>
+        <p:txBody>
+          <a:bodyPr wrap="square" anchor="t"/>
+          <a:lstStyle/>
+          <a:p>
+            <a:pPr algn="l"/>
+            <a:r>
               <a:rPr sz="2200" b="1">
                 <a:solidFill>
                   <a:srgbClr val="2D2D2D"/>
@@ -13294,21 +12565,21 @@
                 <a:ea typeface="微软雅黑"/>
                 <a:latin typeface="微软雅黑"/>
               </a:rPr>
-              <a:t>同一套规则</a:t>
-            </a:r>
-          </a:p>
-        </p:txBody>
-      </p:sp>
-      <p:sp>
-        <p:nvSpPr>
-          <p:cNvPr id="22" name="TextBox 21"/>
+              <a:t>每月跟得上</a:t>
+            </a:r>
+          </a:p>
+        </p:txBody>
+      </p:sp>
+      <p:sp>
+        <p:nvSpPr>
+          <p:cNvPr id="26" name="TextBox 25"/>
           <p:cNvSpPr txBox="1"/>
           <p:nvPr/>
         </p:nvSpPr>
         <p:spPr>
           <a:xfrm>
-            <a:off x="6693408" y="4800600"/>
-            <a:ext cx="4937760" cy="777240"/>
+            <a:off x="6693408" y="4892040"/>
+            <a:ext cx="4937760" cy="731520"/>
           </a:xfrm>
           <a:prstGeom prst="rect">
             <a:avLst/>
@@ -13321,11 +12592,11 @@
           <a:p>
             <a:pPr algn="l">
               <a:lnSpc>
-                <a:spcPts val="2600"/>
+                <a:spcPts val="2200"/>
               </a:lnSpc>
             </a:pPr>
             <a:r>
-              <a:rPr sz="1600" b="0">
+              <a:rPr sz="1400" b="0">
                 <a:solidFill>
                   <a:srgbClr val="6B6B6B"/>
                 </a:solidFill>
@@ -13333,17 +12604,17 @@
                 <a:ea typeface="微软雅黑"/>
                 <a:latin typeface="微软雅黑"/>
               </a:rPr>
-              <a:t>总成价、分总成价同一引擎，各算各的。</a:t>
+              <a:t>钢价、BOM、工艺、工程变更进入系统。</a:t>
             </a:r>
           </a:p>
           <a:p>
             <a:pPr algn="l">
               <a:lnSpc>
-                <a:spcPts val="2600"/>
+                <a:spcPts val="2200"/>
               </a:lnSpc>
             </a:pPr>
             <a:r>
-              <a:rPr sz="1600" b="0">
+              <a:rPr sz="1400" b="0">
                 <a:solidFill>
                   <a:srgbClr val="6B6B6B"/>
                 </a:solidFill>
@@ -13351,14 +12622,14 @@
                 <a:ea typeface="微软雅黑"/>
                 <a:latin typeface="微软雅黑"/>
               </a:rPr>
-              <a:t>焊费计在总成上，不重复计。</a:t>
+              <a:t>当月依据，当月计算。</a:t>
             </a:r>
           </a:p>
         </p:txBody>
       </p:sp>
       <p:cxnSp>
         <p:nvCxnSpPr>
-          <p:cNvPr id="23" name="Connector 22"/>
+          <p:cNvPr id="27" name="Connector 26"/>
           <p:cNvCxnSpPr/>
           <p:nvPr/>
         </p:nvCxnSpPr>
@@ -13393,7 +12664,7 @@
       </p:cxnSp>
       <p:sp>
         <p:nvSpPr>
-          <p:cNvPr id="24" name="TextBox 23"/>
+          <p:cNvPr id="28" name="TextBox 27"/>
           <p:cNvSpPr txBox="1"/>
           <p:nvPr/>
         </p:nvSpPr>
@@ -13428,7 +12699,7 @@
       </p:sp>
       <p:sp>
         <p:nvSpPr>
-          <p:cNvPr id="25" name="TextBox 24"/>
+          <p:cNvPr id="29" name="TextBox 28"/>
           <p:cNvSpPr txBox="1"/>
           <p:nvPr/>
         </p:nvSpPr>
@@ -13638,7 +12909,7 @@
                 <a:ea typeface="微软雅黑"/>
                 <a:latin typeface="Arial"/>
               </a:rPr>
-              <a:t>08   ANSWER</a:t>
+              <a:t>08   AI</a:t>
             </a:r>
           </a:p>
         </p:txBody>
@@ -13673,7 +12944,7 @@
                 <a:ea typeface="微软雅黑"/>
                 <a:latin typeface="微软雅黑"/>
               </a:rPr>
-              <a:t>看懂涨跌，不用再等做表的人</a:t>
+              <a:t>引擎把账算准，AI 把账讲明白</a:t>
             </a:r>
           </a:p>
         </p:txBody>
@@ -13708,7 +12979,7 @@
                 <a:ea typeface="微软雅黑"/>
                 <a:latin typeface="微软雅黑"/>
               </a:rPr>
-              <a:t>数字由引擎计算。AI 只讲原因。约 30 秒抓住问题、关键数字和核对线索。</a:t>
+              <a:t>这才是 AI 落地：不是让模型编价格，是让管理人员直接问公司的账。</a:t>
             </a:r>
           </a:p>
         </p:txBody>

--- a/docs/结构件自动核价平台-产品介绍.pptx
+++ b/docs/结构件自动核价平台-产品介绍.pptx
@@ -5,20 +5,20 @@
     <p:sldMasterId id="2147483648" r:id="rId1"/>
   </p:sldMasterIdLst>
   <p:sldIdLst>
-    <p:sldId id="256" r:id="rId7"/>
-    <p:sldId id="257" r:id="rId8"/>
-    <p:sldId id="258" r:id="rId9"/>
-    <p:sldId id="259" r:id="rId10"/>
-    <p:sldId id="260" r:id="rId11"/>
-    <p:sldId id="261" r:id="rId12"/>
-    <p:sldId id="262" r:id="rId13"/>
-    <p:sldId id="263" r:id="rId14"/>
-    <p:sldId id="264" r:id="rId15"/>
-    <p:sldId id="265" r:id="rId16"/>
-    <p:sldId id="266" r:id="rId17"/>
-    <p:sldId id="267" r:id="rId18"/>
+    <p:sldId id="256" r:id="rId2"/>
+    <p:sldId id="257" r:id="rId3"/>
+    <p:sldId id="258" r:id="rId4"/>
+    <p:sldId id="259" r:id="rId5"/>
+    <p:sldId id="260" r:id="rId6"/>
+    <p:sldId id="261" r:id="rId7"/>
+    <p:sldId id="262" r:id="rId8"/>
+    <p:sldId id="263" r:id="rId9"/>
+    <p:sldId id="264" r:id="rId10"/>
+    <p:sldId id="265" r:id="rId11"/>
+    <p:sldId id="266" r:id="rId12"/>
+    <p:sldId id="267" r:id="rId13"/>
   </p:sldIdLst>
-  <p:sldSz cx="12191695" cy="6858000" type="screen4x3"/>
+  <p:sldSz cx="12192000" cy="6858000"/>
   <p:notesSz cx="6858000" cy="9144000"/>
   <p:defaultTextStyle>
     <a:defPPr>
@@ -115,6 +115,22 @@
       </a:defRPr>
     </a:lvl9pPr>
   </p:defaultTextStyle>
+  <p:extLst>
+    <p:ext uri="{EFAFB233-063F-42B5-8137-9DF3F51BA10A}">
+      <p15:sldGuideLst xmlns:p15="http://schemas.microsoft.com/office/powerpoint/2012/main">
+        <p15:guide id="1" orient="horz" pos="2160">
+          <p15:clr>
+            <a:srgbClr val="A4A3A4"/>
+          </p15:clr>
+        </p15:guide>
+        <p15:guide id="2" pos="2880">
+          <p15:clr>
+            <a:srgbClr val="A4A3A4"/>
+          </p15:clr>
+        </p15:guide>
+      </p15:sldGuideLst>
+    </p:ext>
+  </p:extLst>
 </p:presentation>
 </file>
 
@@ -156,10 +172,9 @@
           <a:lstStyle/>
           <a:p>
             <a:r>
-              <a:rPr lang="en-US" smtClean="0"/>
+              <a:rPr lang="en-US"/>
               <a:t>Click to edit Master title style</a:t>
             </a:r>
-            <a:endParaRPr lang="en-US"/>
           </a:p>
         </p:txBody>
       </p:sp>
@@ -275,10 +290,9 @@
           </a:lstStyle>
           <a:p>
             <a:r>
-              <a:rPr lang="en-US" smtClean="0"/>
+              <a:rPr lang="en-US"/>
               <a:t>Click to edit Master subtitle style</a:t>
             </a:r>
-            <a:endParaRPr lang="en-US"/>
           </a:p>
         </p:txBody>
       </p:sp>
@@ -299,7 +313,7 @@
           <a:p>
             <a:fld id="{5BCAD085-E8A6-8845-BD4E-CB4CCA059FC4}" type="datetimeFigureOut">
               <a:rPr lang="en-US" smtClean="0"/>
-              <a:t>1/27/13</a:t>
+              <a:t>10/10/2026</a:t>
             </a:fld>
             <a:endParaRPr lang="en-US"/>
           </a:p>
@@ -393,10 +407,9 @@
           <a:lstStyle/>
           <a:p>
             <a:r>
-              <a:rPr lang="en-US" smtClean="0"/>
+              <a:rPr lang="en-US"/>
               <a:t>Click to edit Master title style</a:t>
             </a:r>
-            <a:endParaRPr lang="en-US"/>
           </a:p>
         </p:txBody>
       </p:sp>
@@ -417,38 +430,37 @@
           <a:p>
             <a:pPr lvl="0"/>
             <a:r>
-              <a:rPr lang="en-US" smtClean="0"/>
+              <a:rPr lang="en-US"/>
               <a:t>Click to edit Master text styles</a:t>
             </a:r>
           </a:p>
           <a:p>
             <a:pPr lvl="1"/>
             <a:r>
-              <a:rPr lang="en-US" smtClean="0"/>
+              <a:rPr lang="en-US"/>
               <a:t>Second level</a:t>
             </a:r>
           </a:p>
           <a:p>
             <a:pPr lvl="2"/>
             <a:r>
-              <a:rPr lang="en-US" smtClean="0"/>
+              <a:rPr lang="en-US"/>
               <a:t>Third level</a:t>
             </a:r>
           </a:p>
           <a:p>
             <a:pPr lvl="3"/>
             <a:r>
-              <a:rPr lang="en-US" smtClean="0"/>
+              <a:rPr lang="en-US"/>
               <a:t>Fourth level</a:t>
             </a:r>
           </a:p>
           <a:p>
             <a:pPr lvl="4"/>
             <a:r>
-              <a:rPr lang="en-US" smtClean="0"/>
+              <a:rPr lang="en-US"/>
               <a:t>Fifth level</a:t>
             </a:r>
-            <a:endParaRPr lang="en-US"/>
           </a:p>
         </p:txBody>
       </p:sp>
@@ -469,7 +481,7 @@
           <a:p>
             <a:fld id="{5BCAD085-E8A6-8845-BD4E-CB4CCA059FC4}" type="datetimeFigureOut">
               <a:rPr lang="en-US" smtClean="0"/>
-              <a:t>1/27/13</a:t>
+              <a:t>10/10/2026</a:t>
             </a:fld>
             <a:endParaRPr lang="en-US"/>
           </a:p>
@@ -568,10 +580,9 @@
           <a:lstStyle/>
           <a:p>
             <a:r>
-              <a:rPr lang="en-US" smtClean="0"/>
+              <a:rPr lang="en-US"/>
               <a:t>Click to edit Master title style</a:t>
             </a:r>
-            <a:endParaRPr lang="en-US"/>
           </a:p>
         </p:txBody>
       </p:sp>
@@ -597,38 +608,37 @@
           <a:p>
             <a:pPr lvl="0"/>
             <a:r>
-              <a:rPr lang="en-US" smtClean="0"/>
+              <a:rPr lang="en-US"/>
               <a:t>Click to edit Master text styles</a:t>
             </a:r>
           </a:p>
           <a:p>
             <a:pPr lvl="1"/>
             <a:r>
-              <a:rPr lang="en-US" smtClean="0"/>
+              <a:rPr lang="en-US"/>
               <a:t>Second level</a:t>
             </a:r>
           </a:p>
           <a:p>
             <a:pPr lvl="2"/>
             <a:r>
-              <a:rPr lang="en-US" smtClean="0"/>
+              <a:rPr lang="en-US"/>
               <a:t>Third level</a:t>
             </a:r>
           </a:p>
           <a:p>
             <a:pPr lvl="3"/>
             <a:r>
-              <a:rPr lang="en-US" smtClean="0"/>
+              <a:rPr lang="en-US"/>
               <a:t>Fourth level</a:t>
             </a:r>
           </a:p>
           <a:p>
             <a:pPr lvl="4"/>
             <a:r>
-              <a:rPr lang="en-US" smtClean="0"/>
+              <a:rPr lang="en-US"/>
               <a:t>Fifth level</a:t>
             </a:r>
-            <a:endParaRPr lang="en-US"/>
           </a:p>
         </p:txBody>
       </p:sp>
@@ -649,7 +659,7 @@
           <a:p>
             <a:fld id="{5BCAD085-E8A6-8845-BD4E-CB4CCA059FC4}" type="datetimeFigureOut">
               <a:rPr lang="en-US" smtClean="0"/>
-              <a:t>1/27/13</a:t>
+              <a:t>10/10/2026</a:t>
             </a:fld>
             <a:endParaRPr lang="en-US"/>
           </a:p>
@@ -743,10 +753,9 @@
           <a:lstStyle/>
           <a:p>
             <a:r>
-              <a:rPr lang="en-US" smtClean="0"/>
+              <a:rPr lang="en-US"/>
               <a:t>Click to edit Master title style</a:t>
             </a:r>
-            <a:endParaRPr lang="en-US"/>
           </a:p>
         </p:txBody>
       </p:sp>
@@ -767,38 +776,37 @@
           <a:p>
             <a:pPr lvl="0"/>
             <a:r>
-              <a:rPr lang="en-US" smtClean="0"/>
+              <a:rPr lang="en-US"/>
               <a:t>Click to edit Master text styles</a:t>
             </a:r>
           </a:p>
           <a:p>
             <a:pPr lvl="1"/>
             <a:r>
-              <a:rPr lang="en-US" smtClean="0"/>
+              <a:rPr lang="en-US"/>
               <a:t>Second level</a:t>
             </a:r>
           </a:p>
           <a:p>
             <a:pPr lvl="2"/>
             <a:r>
-              <a:rPr lang="en-US" smtClean="0"/>
+              <a:rPr lang="en-US"/>
               <a:t>Third level</a:t>
             </a:r>
           </a:p>
           <a:p>
             <a:pPr lvl="3"/>
             <a:r>
-              <a:rPr lang="en-US" smtClean="0"/>
+              <a:rPr lang="en-US"/>
               <a:t>Fourth level</a:t>
             </a:r>
           </a:p>
           <a:p>
             <a:pPr lvl="4"/>
             <a:r>
-              <a:rPr lang="en-US" smtClean="0"/>
+              <a:rPr lang="en-US"/>
               <a:t>Fifth level</a:t>
             </a:r>
-            <a:endParaRPr lang="en-US"/>
           </a:p>
         </p:txBody>
       </p:sp>
@@ -819,7 +827,7 @@
           <a:p>
             <a:fld id="{5BCAD085-E8A6-8845-BD4E-CB4CCA059FC4}" type="datetimeFigureOut">
               <a:rPr lang="en-US" smtClean="0"/>
-              <a:t>1/27/13</a:t>
+              <a:t>10/10/2026</a:t>
             </a:fld>
             <a:endParaRPr lang="en-US"/>
           </a:p>
@@ -922,10 +930,9 @@
           </a:lstStyle>
           <a:p>
             <a:r>
-              <a:rPr lang="en-US" smtClean="0"/>
+              <a:rPr lang="en-US"/>
               <a:t>Click to edit Master title style</a:t>
             </a:r>
-            <a:endParaRPr lang="en-US"/>
           </a:p>
         </p:txBody>
       </p:sp>
@@ -1042,7 +1049,7 @@
           <a:p>
             <a:pPr lvl="0"/>
             <a:r>
-              <a:rPr lang="en-US" smtClean="0"/>
+              <a:rPr lang="en-US"/>
               <a:t>Click to edit Master text styles</a:t>
             </a:r>
           </a:p>
@@ -1065,7 +1072,7 @@
           <a:p>
             <a:fld id="{5BCAD085-E8A6-8845-BD4E-CB4CCA059FC4}" type="datetimeFigureOut">
               <a:rPr lang="en-US" smtClean="0"/>
-              <a:t>1/27/13</a:t>
+              <a:t>10/10/2026</a:t>
             </a:fld>
             <a:endParaRPr lang="en-US"/>
           </a:p>
@@ -1159,10 +1166,9 @@
           <a:lstStyle/>
           <a:p>
             <a:r>
-              <a:rPr lang="en-US" smtClean="0"/>
+              <a:rPr lang="en-US"/>
               <a:t>Click to edit Master title style</a:t>
             </a:r>
-            <a:endParaRPr lang="en-US"/>
           </a:p>
         </p:txBody>
       </p:sp>
@@ -1216,38 +1222,37 @@
           <a:p>
             <a:pPr lvl="0"/>
             <a:r>
-              <a:rPr lang="en-US" smtClean="0"/>
+              <a:rPr lang="en-US"/>
               <a:t>Click to edit Master text styles</a:t>
             </a:r>
           </a:p>
           <a:p>
             <a:pPr lvl="1"/>
             <a:r>
-              <a:rPr lang="en-US" smtClean="0"/>
+              <a:rPr lang="en-US"/>
               <a:t>Second level</a:t>
             </a:r>
           </a:p>
           <a:p>
             <a:pPr lvl="2"/>
             <a:r>
-              <a:rPr lang="en-US" smtClean="0"/>
+              <a:rPr lang="en-US"/>
               <a:t>Third level</a:t>
             </a:r>
           </a:p>
           <a:p>
             <a:pPr lvl="3"/>
             <a:r>
-              <a:rPr lang="en-US" smtClean="0"/>
+              <a:rPr lang="en-US"/>
               <a:t>Fourth level</a:t>
             </a:r>
           </a:p>
           <a:p>
             <a:pPr lvl="4"/>
             <a:r>
-              <a:rPr lang="en-US" smtClean="0"/>
+              <a:rPr lang="en-US"/>
               <a:t>Fifth level</a:t>
             </a:r>
-            <a:endParaRPr lang="en-US"/>
           </a:p>
         </p:txBody>
       </p:sp>
@@ -1301,38 +1306,37 @@
           <a:p>
             <a:pPr lvl="0"/>
             <a:r>
-              <a:rPr lang="en-US" smtClean="0"/>
+              <a:rPr lang="en-US"/>
               <a:t>Click to edit Master text styles</a:t>
             </a:r>
           </a:p>
           <a:p>
             <a:pPr lvl="1"/>
             <a:r>
-              <a:rPr lang="en-US" smtClean="0"/>
+              <a:rPr lang="en-US"/>
               <a:t>Second level</a:t>
             </a:r>
           </a:p>
           <a:p>
             <a:pPr lvl="2"/>
             <a:r>
-              <a:rPr lang="en-US" smtClean="0"/>
+              <a:rPr lang="en-US"/>
               <a:t>Third level</a:t>
             </a:r>
           </a:p>
           <a:p>
             <a:pPr lvl="3"/>
             <a:r>
-              <a:rPr lang="en-US" smtClean="0"/>
+              <a:rPr lang="en-US"/>
               <a:t>Fourth level</a:t>
             </a:r>
           </a:p>
           <a:p>
             <a:pPr lvl="4"/>
             <a:r>
-              <a:rPr lang="en-US" smtClean="0"/>
+              <a:rPr lang="en-US"/>
               <a:t>Fifth level</a:t>
             </a:r>
-            <a:endParaRPr lang="en-US"/>
           </a:p>
         </p:txBody>
       </p:sp>
@@ -1353,7 +1357,7 @@
           <a:p>
             <a:fld id="{5BCAD085-E8A6-8845-BD4E-CB4CCA059FC4}" type="datetimeFigureOut">
               <a:rPr lang="en-US" smtClean="0"/>
-              <a:t>1/27/13</a:t>
+              <a:t>10/10/2026</a:t>
             </a:fld>
             <a:endParaRPr lang="en-US"/>
           </a:p>
@@ -1451,10 +1455,9 @@
           </a:lstStyle>
           <a:p>
             <a:r>
-              <a:rPr lang="en-US" smtClean="0"/>
+              <a:rPr lang="en-US"/>
               <a:t>Click to edit Master title style</a:t>
             </a:r>
-            <a:endParaRPr lang="en-US"/>
           </a:p>
         </p:txBody>
       </p:sp>
@@ -1517,7 +1520,7 @@
           <a:p>
             <a:pPr lvl="0"/>
             <a:r>
-              <a:rPr lang="en-US" smtClean="0"/>
+              <a:rPr lang="en-US"/>
               <a:t>Click to edit Master text styles</a:t>
             </a:r>
           </a:p>
@@ -1573,38 +1576,37 @@
           <a:p>
             <a:pPr lvl="0"/>
             <a:r>
-              <a:rPr lang="en-US" smtClean="0"/>
+              <a:rPr lang="en-US"/>
               <a:t>Click to edit Master text styles</a:t>
             </a:r>
           </a:p>
           <a:p>
             <a:pPr lvl="1"/>
             <a:r>
-              <a:rPr lang="en-US" smtClean="0"/>
+              <a:rPr lang="en-US"/>
               <a:t>Second level</a:t>
             </a:r>
           </a:p>
           <a:p>
             <a:pPr lvl="2"/>
             <a:r>
-              <a:rPr lang="en-US" smtClean="0"/>
+              <a:rPr lang="en-US"/>
               <a:t>Third level</a:t>
             </a:r>
           </a:p>
           <a:p>
             <a:pPr lvl="3"/>
             <a:r>
-              <a:rPr lang="en-US" smtClean="0"/>
+              <a:rPr lang="en-US"/>
               <a:t>Fourth level</a:t>
             </a:r>
           </a:p>
           <a:p>
             <a:pPr lvl="4"/>
             <a:r>
-              <a:rPr lang="en-US" smtClean="0"/>
+              <a:rPr lang="en-US"/>
               <a:t>Fifth level</a:t>
             </a:r>
-            <a:endParaRPr lang="en-US"/>
           </a:p>
         </p:txBody>
       </p:sp>
@@ -1667,7 +1669,7 @@
           <a:p>
             <a:pPr lvl="0"/>
             <a:r>
-              <a:rPr lang="en-US" smtClean="0"/>
+              <a:rPr lang="en-US"/>
               <a:t>Click to edit Master text styles</a:t>
             </a:r>
           </a:p>
@@ -1723,38 +1725,37 @@
           <a:p>
             <a:pPr lvl="0"/>
             <a:r>
-              <a:rPr lang="en-US" smtClean="0"/>
+              <a:rPr lang="en-US"/>
               <a:t>Click to edit Master text styles</a:t>
             </a:r>
           </a:p>
           <a:p>
             <a:pPr lvl="1"/>
             <a:r>
-              <a:rPr lang="en-US" smtClean="0"/>
+              <a:rPr lang="en-US"/>
               <a:t>Second level</a:t>
             </a:r>
           </a:p>
           <a:p>
             <a:pPr lvl="2"/>
             <a:r>
-              <a:rPr lang="en-US" smtClean="0"/>
+              <a:rPr lang="en-US"/>
               <a:t>Third level</a:t>
             </a:r>
           </a:p>
           <a:p>
             <a:pPr lvl="3"/>
             <a:r>
-              <a:rPr lang="en-US" smtClean="0"/>
+              <a:rPr lang="en-US"/>
               <a:t>Fourth level</a:t>
             </a:r>
           </a:p>
           <a:p>
             <a:pPr lvl="4"/>
             <a:r>
-              <a:rPr lang="en-US" smtClean="0"/>
+              <a:rPr lang="en-US"/>
               <a:t>Fifth level</a:t>
             </a:r>
-            <a:endParaRPr lang="en-US"/>
           </a:p>
         </p:txBody>
       </p:sp>
@@ -1775,7 +1776,7 @@
           <a:p>
             <a:fld id="{5BCAD085-E8A6-8845-BD4E-CB4CCA059FC4}" type="datetimeFigureOut">
               <a:rPr lang="en-US" smtClean="0"/>
-              <a:t>1/27/13</a:t>
+              <a:t>10/10/2026</a:t>
             </a:fld>
             <a:endParaRPr lang="en-US"/>
           </a:p>
@@ -1869,10 +1870,9 @@
           <a:lstStyle/>
           <a:p>
             <a:r>
-              <a:rPr lang="en-US" smtClean="0"/>
+              <a:rPr lang="en-US"/>
               <a:t>Click to edit Master title style</a:t>
             </a:r>
-            <a:endParaRPr lang="en-US"/>
           </a:p>
         </p:txBody>
       </p:sp>
@@ -1893,7 +1893,7 @@
           <a:p>
             <a:fld id="{5BCAD085-E8A6-8845-BD4E-CB4CCA059FC4}" type="datetimeFigureOut">
               <a:rPr lang="en-US" smtClean="0"/>
-              <a:t>1/27/13</a:t>
+              <a:t>10/10/2026</a:t>
             </a:fld>
             <a:endParaRPr lang="en-US"/>
           </a:p>
@@ -1988,7 +1988,7 @@
           <a:p>
             <a:fld id="{5BCAD085-E8A6-8845-BD4E-CB4CCA059FC4}" type="datetimeFigureOut">
               <a:rPr lang="en-US" smtClean="0"/>
-              <a:t>1/27/13</a:t>
+              <a:t>10/10/2026</a:t>
             </a:fld>
             <a:endParaRPr lang="en-US"/>
           </a:p>
@@ -2091,10 +2091,9 @@
           </a:lstStyle>
           <a:p>
             <a:r>
-              <a:rPr lang="en-US" smtClean="0"/>
+              <a:rPr lang="en-US"/>
               <a:t>Click to edit Master title style</a:t>
             </a:r>
-            <a:endParaRPr lang="en-US"/>
           </a:p>
         </p:txBody>
       </p:sp>
@@ -2148,38 +2147,37 @@
           <a:p>
             <a:pPr lvl="0"/>
             <a:r>
-              <a:rPr lang="en-US" smtClean="0"/>
+              <a:rPr lang="en-US"/>
               <a:t>Click to edit Master text styles</a:t>
             </a:r>
           </a:p>
           <a:p>
             <a:pPr lvl="1"/>
             <a:r>
-              <a:rPr lang="en-US" smtClean="0"/>
+              <a:rPr lang="en-US"/>
               <a:t>Second level</a:t>
             </a:r>
           </a:p>
           <a:p>
             <a:pPr lvl="2"/>
             <a:r>
-              <a:rPr lang="en-US" smtClean="0"/>
+              <a:rPr lang="en-US"/>
               <a:t>Third level</a:t>
             </a:r>
           </a:p>
           <a:p>
             <a:pPr lvl="3"/>
             <a:r>
-              <a:rPr lang="en-US" smtClean="0"/>
+              <a:rPr lang="en-US"/>
               <a:t>Fourth level</a:t>
             </a:r>
           </a:p>
           <a:p>
             <a:pPr lvl="4"/>
             <a:r>
-              <a:rPr lang="en-US" smtClean="0"/>
+              <a:rPr lang="en-US"/>
               <a:t>Fifth level</a:t>
             </a:r>
-            <a:endParaRPr lang="en-US"/>
           </a:p>
         </p:txBody>
       </p:sp>
@@ -2242,7 +2240,7 @@
           <a:p>
             <a:pPr lvl="0"/>
             <a:r>
-              <a:rPr lang="en-US" smtClean="0"/>
+              <a:rPr lang="en-US"/>
               <a:t>Click to edit Master text styles</a:t>
             </a:r>
           </a:p>
@@ -2265,7 +2263,7 @@
           <a:p>
             <a:fld id="{5BCAD085-E8A6-8845-BD4E-CB4CCA059FC4}" type="datetimeFigureOut">
               <a:rPr lang="en-US" smtClean="0"/>
-              <a:t>1/27/13</a:t>
+              <a:t>10/10/2026</a:t>
             </a:fld>
             <a:endParaRPr lang="en-US"/>
           </a:p>
@@ -2368,10 +2366,9 @@
           </a:lstStyle>
           <a:p>
             <a:r>
-              <a:rPr lang="en-US" smtClean="0"/>
+              <a:rPr lang="en-US"/>
               <a:t>Click to edit Master title style</a:t>
             </a:r>
-            <a:endParaRPr lang="en-US"/>
           </a:p>
         </p:txBody>
       </p:sp>
@@ -2495,7 +2492,7 @@
           <a:p>
             <a:pPr lvl="0"/>
             <a:r>
-              <a:rPr lang="en-US" smtClean="0"/>
+              <a:rPr lang="en-US"/>
               <a:t>Click to edit Master text styles</a:t>
             </a:r>
           </a:p>
@@ -2518,7 +2515,7 @@
           <a:p>
             <a:fld id="{5BCAD085-E8A6-8845-BD4E-CB4CCA059FC4}" type="datetimeFigureOut">
               <a:rPr lang="en-US" smtClean="0"/>
-              <a:t>1/27/13</a:t>
+              <a:t>10/10/2026</a:t>
             </a:fld>
             <a:endParaRPr lang="en-US"/>
           </a:p>
@@ -2627,10 +2624,9 @@
           <a:lstStyle/>
           <a:p>
             <a:r>
-              <a:rPr lang="en-US" smtClean="0"/>
+              <a:rPr lang="en-US"/>
               <a:t>Click to edit Master title style</a:t>
             </a:r>
-            <a:endParaRPr lang="en-US"/>
           </a:p>
         </p:txBody>
       </p:sp>
@@ -2661,38 +2657,37 @@
           <a:p>
             <a:pPr lvl="0"/>
             <a:r>
-              <a:rPr lang="en-US" smtClean="0"/>
+              <a:rPr lang="en-US"/>
               <a:t>Click to edit Master text styles</a:t>
             </a:r>
           </a:p>
           <a:p>
             <a:pPr lvl="1"/>
             <a:r>
-              <a:rPr lang="en-US" smtClean="0"/>
+              <a:rPr lang="en-US"/>
               <a:t>Second level</a:t>
             </a:r>
           </a:p>
           <a:p>
             <a:pPr lvl="2"/>
             <a:r>
-              <a:rPr lang="en-US" smtClean="0"/>
+              <a:rPr lang="en-US"/>
               <a:t>Third level</a:t>
             </a:r>
           </a:p>
           <a:p>
             <a:pPr lvl="3"/>
             <a:r>
-              <a:rPr lang="en-US" smtClean="0"/>
+              <a:rPr lang="en-US"/>
               <a:t>Fourth level</a:t>
             </a:r>
           </a:p>
           <a:p>
             <a:pPr lvl="4"/>
             <a:r>
-              <a:rPr lang="en-US" smtClean="0"/>
+              <a:rPr lang="en-US"/>
               <a:t>Fifth level</a:t>
             </a:r>
-            <a:endParaRPr lang="en-US"/>
           </a:p>
         </p:txBody>
       </p:sp>
@@ -2731,7 +2726,7 @@
           <a:p>
             <a:fld id="{5BCAD085-E8A6-8845-BD4E-CB4CCA059FC4}" type="datetimeFigureOut">
               <a:rPr lang="en-US" smtClean="0"/>
-              <a:t>1/27/13</a:t>
+              <a:t>10/10/2026</a:t>
             </a:fld>
             <a:endParaRPr lang="en-US"/>
           </a:p>
@@ -3090,7 +3085,7 @@
 </file>
 
 <file path=ppt/slides/slide1.xml><?xml version="1.0" encoding="utf-8"?>
-<p:sld xmlns:a="http://schemas.openxmlformats.org/drawingml/2006/main" xmlns:p="http://schemas.openxmlformats.org/presentationml/2006/main" xmlns:r="http://schemas.openxmlformats.org/officeDocument/2006/relationships">
+<p:sld xmlns:a="http://schemas.openxmlformats.org/drawingml/2006/main" xmlns:r="http://schemas.openxmlformats.org/officeDocument/2006/relationships" xmlns:p="http://schemas.openxmlformats.org/presentationml/2006/main">
   <p:cSld>
     <p:spTree>
       <p:nvGrpSpPr>
@@ -3098,7 +3093,14 @@
         <p:cNvGrpSpPr/>
         <p:nvPr/>
       </p:nvGrpSpPr>
-      <p:grpSpPr/>
+      <p:grpSpPr>
+        <a:xfrm>
+          <a:off x="0" y="0"/>
+          <a:ext cx="0" cy="0"/>
+          <a:chOff x="0" y="0"/>
+          <a:chExt cx="0" cy="0"/>
+        </a:xfrm>
+      </p:grpSpPr>
       <p:sp>
         <p:nvSpPr>
           <p:cNvPr id="2" name="Rectangle 1"/>
@@ -3139,6 +3141,7 @@
           <a:lstStyle/>
           <a:p>
             <a:pPr algn="ctr"/>
+            <a:endParaRPr/>
           </a:p>
         </p:txBody>
       </p:sp>
@@ -3182,6 +3185,7 @@
           <a:lstStyle/>
           <a:p>
             <a:pPr algn="ctr"/>
+            <a:endParaRPr/>
           </a:p>
         </p:txBody>
       </p:sp>
@@ -3213,7 +3217,6 @@
                 </a:solidFill>
                 <a:latin typeface="微软雅黑"/>
                 <a:ea typeface="微软雅黑"/>
-                <a:latin typeface="微软雅黑"/>
               </a:rPr>
               <a:t>普炳软件</a:t>
             </a:r>
@@ -3283,7 +3286,6 @@
                 </a:solidFill>
                 <a:latin typeface="微软雅黑"/>
                 <a:ea typeface="微软雅黑"/>
-                <a:latin typeface="微软雅黑"/>
               </a:rPr>
               <a:t>从靠人做表，到公司能力</a:t>
             </a:r>
@@ -3318,7 +3320,6 @@
                 </a:solidFill>
                 <a:latin typeface="微软雅黑"/>
                 <a:ea typeface="微软雅黑"/>
-                <a:latin typeface="微软雅黑"/>
               </a:rPr>
               <a:t>结构件自动核价平台</a:t>
             </a:r>
@@ -3351,15 +3352,24 @@
               </a:lnSpc>
             </a:pPr>
             <a:r>
-              <a:rPr sz="2200" b="0">
+              <a:rPr sz="2200" b="0" dirty="0" err="1">
                 <a:solidFill>
                   <a:srgbClr val="C8C8C8"/>
                 </a:solidFill>
                 <a:latin typeface="微软雅黑"/>
                 <a:ea typeface="微软雅黑"/>
+              </a:rPr>
+              <a:t>管理人员是公司的建设者</a:t>
+            </a:r>
+            <a:r>
+              <a:rPr sz="2200" b="0" dirty="0">
+                <a:solidFill>
+                  <a:srgbClr val="C8C8C8"/>
+                </a:solidFill>
                 <a:latin typeface="微软雅黑"/>
-              </a:rPr>
-              <a:t>管理人员是公司的建设者。</a:t>
+                <a:ea typeface="微软雅黑"/>
+              </a:rPr>
+              <a:t>。</a:t>
             </a:r>
           </a:p>
           <a:p>
@@ -3369,16 +3379,147 @@
               </a:lnSpc>
             </a:pPr>
             <a:r>
-              <a:rPr sz="2200" b="0">
+              <a:rPr sz="2200" b="0" dirty="0" err="1">
                 <a:solidFill>
                   <a:srgbClr val="C8C8C8"/>
                 </a:solidFill>
                 <a:latin typeface="微软雅黑"/>
                 <a:ea typeface="微软雅黑"/>
+              </a:rPr>
+              <a:t>核价，是数字化建设、AI</a:t>
+            </a:r>
+            <a:r>
+              <a:rPr sz="2200" b="0" dirty="0">
+                <a:solidFill>
+                  <a:srgbClr val="C8C8C8"/>
+                </a:solidFill>
                 <a:latin typeface="微软雅黑"/>
-              </a:rPr>
-              <a:t>核价，是数字化建设、AI 落地最好的抓手。</a:t>
-            </a:r>
+                <a:ea typeface="微软雅黑"/>
+              </a:rPr>
+              <a:t> </a:t>
+            </a:r>
+            <a:r>
+              <a:rPr sz="2200" b="0" dirty="0" err="1">
+                <a:solidFill>
+                  <a:srgbClr val="C8C8C8"/>
+                </a:solidFill>
+                <a:latin typeface="微软雅黑"/>
+                <a:ea typeface="微软雅黑"/>
+              </a:rPr>
+              <a:t>落地最好的抓手</a:t>
+            </a:r>
+            <a:r>
+              <a:rPr sz="2200" b="0" dirty="0">
+                <a:solidFill>
+                  <a:srgbClr val="C8C8C8"/>
+                </a:solidFill>
+                <a:latin typeface="微软雅黑"/>
+                <a:ea typeface="微软雅黑"/>
+              </a:rPr>
+              <a:t>。</a:t>
+            </a:r>
+            <a:endParaRPr lang="en-US" sz="2200" b="0" dirty="0">
+              <a:solidFill>
+                <a:srgbClr val="C8C8C8"/>
+              </a:solidFill>
+              <a:latin typeface="微软雅黑"/>
+              <a:ea typeface="微软雅黑"/>
+            </a:endParaRPr>
+          </a:p>
+          <a:p>
+            <a:pPr algn="l">
+              <a:lnSpc>
+                <a:spcPts val="3600"/>
+              </a:lnSpc>
+            </a:pPr>
+            <a:endParaRPr lang="en-US" sz="2200" b="0" dirty="0">
+              <a:solidFill>
+                <a:srgbClr val="C8C8C8"/>
+              </a:solidFill>
+              <a:latin typeface="微软雅黑"/>
+              <a:ea typeface="微软雅黑"/>
+            </a:endParaRPr>
+          </a:p>
+          <a:p>
+            <a:pPr>
+              <a:lnSpc>
+                <a:spcPts val="3600"/>
+              </a:lnSpc>
+            </a:pPr>
+            <a:r>
+              <a:rPr lang="en-US" sz="1600" dirty="0">
+                <a:solidFill>
+                  <a:srgbClr val="FF0000"/>
+                </a:solidFill>
+                <a:latin typeface="微软雅黑"/>
+                <a:ea typeface="微软雅黑"/>
+                <a:hlinkClick r:id="rId2">
+                  <a:extLst>
+                    <a:ext uri="{A12FA001-AC4F-418D-AE19-62706E023703}">
+                      <ahyp:hlinkClr xmlns:ahyp="http://schemas.microsoft.com/office/drawing/2018/hyperlinkcolor" val="tx"/>
+                    </a:ext>
+                  </a:extLst>
+                </a:hlinkClick>
+              </a:rPr>
+              <a:t>http://117.143.214.90:8000/</a:t>
+            </a:r>
+            <a:r>
+              <a:rPr lang="en-US" sz="1600" dirty="0">
+                <a:solidFill>
+                  <a:srgbClr val="C8C8C8"/>
+                </a:solidFill>
+                <a:latin typeface="微软雅黑"/>
+                <a:ea typeface="微软雅黑"/>
+              </a:rPr>
+              <a:t>  </a:t>
+            </a:r>
+            <a:r>
+              <a:rPr lang="zh-CN" altLang="en-US" sz="1600" dirty="0">
+                <a:solidFill>
+                  <a:srgbClr val="C8C8C8"/>
+                </a:solidFill>
+                <a:latin typeface="微软雅黑"/>
+                <a:ea typeface="微软雅黑"/>
+              </a:rPr>
+              <a:t>用户名：</a:t>
+            </a:r>
+            <a:r>
+              <a:rPr lang="en-US" altLang="zh-CN" sz="1600" dirty="0">
+                <a:solidFill>
+                  <a:srgbClr val="C8C8C8"/>
+                </a:solidFill>
+                <a:latin typeface="微软雅黑"/>
+                <a:ea typeface="微软雅黑"/>
+              </a:rPr>
+              <a:t>admin </a:t>
+            </a:r>
+            <a:r>
+              <a:rPr lang="zh-CN" altLang="en-US" sz="1600" dirty="0">
+                <a:solidFill>
+                  <a:srgbClr val="C8C8C8"/>
+                </a:solidFill>
+                <a:latin typeface="微软雅黑"/>
+                <a:ea typeface="微软雅黑"/>
+              </a:rPr>
+              <a:t>密码：</a:t>
+            </a:r>
+            <a:r>
+              <a:rPr lang="en-US" altLang="zh-CN" sz="1600" dirty="0">
+                <a:solidFill>
+                  <a:srgbClr val="C8C8C8"/>
+                </a:solidFill>
+                <a:latin typeface="微软雅黑"/>
+                <a:ea typeface="微软雅黑"/>
+              </a:rPr>
+              <a:t>admin123</a:t>
+            </a:r>
+            <a:endParaRPr sz="1600" b="0" dirty="0">
+              <a:solidFill>
+                <a:srgbClr val="C8C8C8"/>
+              </a:solidFill>
+              <a:latin typeface="微软雅黑"/>
+              <a:ea typeface="微软雅黑"/>
+            </a:endParaRPr>
           </a:p>
         </p:txBody>
       </p:sp>
@@ -3410,7 +3551,6 @@
                 </a:solidFill>
                 <a:latin typeface="微软雅黑"/>
                 <a:ea typeface="微软雅黑"/>
-                <a:latin typeface="微软雅黑"/>
               </a:rPr>
               <a:t>普炳软件</a:t>
             </a:r>
@@ -3445,7 +3585,6 @@
                 </a:solidFill>
                 <a:latin typeface="Arial"/>
                 <a:ea typeface="微软雅黑"/>
-                <a:latin typeface="Arial"/>
               </a:rPr>
               <a:t>1 / 12</a:t>
             </a:r>
@@ -3461,7 +3600,7 @@
 </file>
 
 <file path=ppt/slides/slide10.xml><?xml version="1.0" encoding="utf-8"?>
-<p:sld xmlns:a="http://schemas.openxmlformats.org/drawingml/2006/main" xmlns:p="http://schemas.openxmlformats.org/presentationml/2006/main" xmlns:r="http://schemas.openxmlformats.org/officeDocument/2006/relationships">
+<p:sld xmlns:a="http://schemas.openxmlformats.org/drawingml/2006/main" xmlns:r="http://schemas.openxmlformats.org/officeDocument/2006/relationships" xmlns:p="http://schemas.openxmlformats.org/presentationml/2006/main">
   <p:cSld>
     <p:spTree>
       <p:nvGrpSpPr>
@@ -3469,7 +3608,14 @@
         <p:cNvGrpSpPr/>
         <p:nvPr/>
       </p:nvGrpSpPr>
-      <p:grpSpPr/>
+      <p:grpSpPr>
+        <a:xfrm>
+          <a:off x="0" y="0"/>
+          <a:ext cx="0" cy="0"/>
+          <a:chOff x="0" y="0"/>
+          <a:chExt cx="0" cy="0"/>
+        </a:xfrm>
+      </p:grpSpPr>
       <p:sp>
         <p:nvSpPr>
           <p:cNvPr id="2" name="Rectangle 1"/>
@@ -3510,6 +3656,7 @@
           <a:lstStyle/>
           <a:p>
             <a:pPr algn="ctr"/>
+            <a:endParaRPr/>
           </a:p>
         </p:txBody>
       </p:sp>
@@ -3553,6 +3700,7 @@
           <a:lstStyle/>
           <a:p>
             <a:pPr algn="ctr"/>
+            <a:endParaRPr/>
           </a:p>
         </p:txBody>
       </p:sp>
@@ -3596,6 +3744,7 @@
           <a:lstStyle/>
           <a:p>
             <a:pPr algn="ctr"/>
+            <a:endParaRPr/>
           </a:p>
         </p:txBody>
       </p:sp>
@@ -3627,7 +3776,6 @@
                 </a:solidFill>
                 <a:latin typeface="Arial"/>
                 <a:ea typeface="微软雅黑"/>
-                <a:latin typeface="Arial"/>
               </a:rPr>
               <a:t>09   FLOW</a:t>
             </a:r>
@@ -3662,7 +3810,6 @@
                 </a:solidFill>
                 <a:latin typeface="微软雅黑"/>
                 <a:ea typeface="微软雅黑"/>
-                <a:latin typeface="微软雅黑"/>
               </a:rPr>
               <a:t>从找表，到直接问</a:t>
             </a:r>
@@ -3697,7 +3844,6 @@
                 </a:solidFill>
                 <a:latin typeface="微软雅黑"/>
                 <a:ea typeface="微软雅黑"/>
-                <a:latin typeface="微软雅黑"/>
               </a:rPr>
               <a:t>过去</a:t>
             </a:r>
@@ -3732,7 +3878,6 @@
                 </a:solidFill>
                 <a:latin typeface="微软雅黑"/>
                 <a:ea typeface="微软雅黑"/>
-                <a:latin typeface="微软雅黑"/>
               </a:rPr>
               <a:t>现在</a:t>
             </a:r>
@@ -3781,6 +3926,7 @@
           <a:lstStyle/>
           <a:p>
             <a:pPr algn="ctr"/>
+            <a:endParaRPr/>
           </a:p>
         </p:txBody>
       </p:sp>
@@ -3812,7 +3958,6 @@
                 </a:solidFill>
                 <a:latin typeface="微软雅黑"/>
                 <a:ea typeface="微软雅黑"/>
-                <a:latin typeface="微软雅黑"/>
               </a:rPr>
               <a:t>01    人找 Excel</a:t>
             </a:r>
@@ -3861,6 +4006,7 @@
           <a:lstStyle/>
           <a:p>
             <a:pPr algn="ctr"/>
+            <a:endParaRPr/>
           </a:p>
         </p:txBody>
       </p:sp>
@@ -3892,7 +4038,6 @@
                 </a:solidFill>
                 <a:latin typeface="微软雅黑"/>
                 <a:ea typeface="微软雅黑"/>
-                <a:latin typeface="微软雅黑"/>
               </a:rPr>
               <a:t>02    找数据</a:t>
             </a:r>
@@ -3941,6 +4086,7 @@
           <a:lstStyle/>
           <a:p>
             <a:pPr algn="ctr"/>
+            <a:endParaRPr/>
           </a:p>
         </p:txBody>
       </p:sp>
@@ -3972,7 +4118,6 @@
                 </a:solidFill>
                 <a:latin typeface="微软雅黑"/>
                 <a:ea typeface="微软雅黑"/>
-                <a:latin typeface="微软雅黑"/>
               </a:rPr>
               <a:t>03    找公式</a:t>
             </a:r>
@@ -4021,6 +4166,7 @@
           <a:lstStyle/>
           <a:p>
             <a:pPr algn="ctr"/>
+            <a:endParaRPr/>
           </a:p>
         </p:txBody>
       </p:sp>
@@ -4052,7 +4198,6 @@
                 </a:solidFill>
                 <a:latin typeface="微软雅黑"/>
                 <a:ea typeface="微软雅黑"/>
-                <a:latin typeface="微软雅黑"/>
               </a:rPr>
               <a:t>04    做分析</a:t>
             </a:r>
@@ -4101,6 +4246,7 @@
           <a:lstStyle/>
           <a:p>
             <a:pPr algn="ctr"/>
+            <a:endParaRPr/>
           </a:p>
         </p:txBody>
       </p:sp>
@@ -4132,7 +4278,6 @@
                 </a:solidFill>
                 <a:latin typeface="微软雅黑"/>
                 <a:ea typeface="微软雅黑"/>
-                <a:latin typeface="微软雅黑"/>
               </a:rPr>
               <a:t>05    得出结论</a:t>
             </a:r>
@@ -4181,6 +4326,7 @@
           <a:lstStyle/>
           <a:p>
             <a:pPr algn="ctr"/>
+            <a:endParaRPr/>
           </a:p>
         </p:txBody>
       </p:sp>
@@ -4224,6 +4370,7 @@
           <a:lstStyle/>
           <a:p>
             <a:pPr algn="ctr"/>
+            <a:endParaRPr/>
           </a:p>
         </p:txBody>
       </p:sp>
@@ -4255,7 +4402,6 @@
                 </a:solidFill>
                 <a:latin typeface="微软雅黑"/>
                 <a:ea typeface="微软雅黑"/>
-                <a:latin typeface="微软雅黑"/>
               </a:rPr>
               <a:t>01    直接问</a:t>
             </a:r>
@@ -4304,6 +4450,7 @@
           <a:lstStyle/>
           <a:p>
             <a:pPr algn="ctr"/>
+            <a:endParaRPr/>
           </a:p>
         </p:txBody>
       </p:sp>
@@ -4347,6 +4494,7 @@
           <a:lstStyle/>
           <a:p>
             <a:pPr algn="ctr"/>
+            <a:endParaRPr/>
           </a:p>
         </p:txBody>
       </p:sp>
@@ -4378,7 +4526,6 @@
                 </a:solidFill>
                 <a:latin typeface="微软雅黑"/>
                 <a:ea typeface="微软雅黑"/>
-                <a:latin typeface="微软雅黑"/>
               </a:rPr>
               <a:t>02    系统取数</a:t>
             </a:r>
@@ -4427,6 +4574,7 @@
           <a:lstStyle/>
           <a:p>
             <a:pPr algn="ctr"/>
+            <a:endParaRPr/>
           </a:p>
         </p:txBody>
       </p:sp>
@@ -4470,6 +4618,7 @@
           <a:lstStyle/>
           <a:p>
             <a:pPr algn="ctr"/>
+            <a:endParaRPr/>
           </a:p>
         </p:txBody>
       </p:sp>
@@ -4501,7 +4650,6 @@
                 </a:solidFill>
                 <a:latin typeface="微软雅黑"/>
                 <a:ea typeface="微软雅黑"/>
-                <a:latin typeface="微软雅黑"/>
               </a:rPr>
               <a:t>03    核价引擎计算</a:t>
             </a:r>
@@ -4550,6 +4698,7 @@
           <a:lstStyle/>
           <a:p>
             <a:pPr algn="ctr"/>
+            <a:endParaRPr/>
           </a:p>
         </p:txBody>
       </p:sp>
@@ -4593,6 +4742,7 @@
           <a:lstStyle/>
           <a:p>
             <a:pPr algn="ctr"/>
+            <a:endParaRPr/>
           </a:p>
         </p:txBody>
       </p:sp>
@@ -4624,7 +4774,6 @@
                 </a:solidFill>
                 <a:latin typeface="微软雅黑"/>
                 <a:ea typeface="微软雅黑"/>
-                <a:latin typeface="微软雅黑"/>
               </a:rPr>
               <a:t>04    AI 解释</a:t>
             </a:r>
@@ -4694,7 +4843,6 @@
                 </a:solidFill>
                 <a:latin typeface="微软雅黑"/>
                 <a:ea typeface="微软雅黑"/>
-                <a:latin typeface="微软雅黑"/>
               </a:rPr>
               <a:t>普炳软件  ·  核价平台</a:t>
             </a:r>
@@ -4729,7 +4877,6 @@
                 </a:solidFill>
                 <a:latin typeface="Arial"/>
                 <a:ea typeface="微软雅黑"/>
-                <a:latin typeface="Arial"/>
               </a:rPr>
               <a:t>10 / 12</a:t>
             </a:r>
@@ -4745,7 +4892,7 @@
 </file>
 
 <file path=ppt/slides/slide11.xml><?xml version="1.0" encoding="utf-8"?>
-<p:sld xmlns:a="http://schemas.openxmlformats.org/drawingml/2006/main" xmlns:p="http://schemas.openxmlformats.org/presentationml/2006/main" xmlns:r="http://schemas.openxmlformats.org/officeDocument/2006/relationships">
+<p:sld xmlns:a="http://schemas.openxmlformats.org/drawingml/2006/main" xmlns:r="http://schemas.openxmlformats.org/officeDocument/2006/relationships" xmlns:p="http://schemas.openxmlformats.org/presentationml/2006/main">
   <p:cSld>
     <p:spTree>
       <p:nvGrpSpPr>
@@ -4753,7 +4900,14 @@
         <p:cNvGrpSpPr/>
         <p:nvPr/>
       </p:nvGrpSpPr>
-      <p:grpSpPr/>
+      <p:grpSpPr>
+        <a:xfrm>
+          <a:off x="0" y="0"/>
+          <a:ext cx="0" cy="0"/>
+          <a:chOff x="0" y="0"/>
+          <a:chExt cx="0" cy="0"/>
+        </a:xfrm>
+      </p:grpSpPr>
       <p:sp>
         <p:nvSpPr>
           <p:cNvPr id="2" name="Rectangle 1"/>
@@ -4794,6 +4948,7 @@
           <a:lstStyle/>
           <a:p>
             <a:pPr algn="ctr"/>
+            <a:endParaRPr/>
           </a:p>
         </p:txBody>
       </p:sp>
@@ -4837,6 +4992,7 @@
           <a:lstStyle/>
           <a:p>
             <a:pPr algn="ctr"/>
+            <a:endParaRPr/>
           </a:p>
         </p:txBody>
       </p:sp>
@@ -4880,6 +5036,7 @@
           <a:lstStyle/>
           <a:p>
             <a:pPr algn="ctr"/>
+            <a:endParaRPr/>
           </a:p>
         </p:txBody>
       </p:sp>
@@ -4911,7 +5068,6 @@
                 </a:solidFill>
                 <a:latin typeface="Arial"/>
                 <a:ea typeface="微软雅黑"/>
-                <a:latin typeface="Arial"/>
               </a:rPr>
               <a:t>10   ONE LEDGER</a:t>
             </a:r>
@@ -4946,7 +5102,6 @@
                 </a:solidFill>
                 <a:latin typeface="微软雅黑"/>
                 <a:ea typeface="微软雅黑"/>
-                <a:latin typeface="微软雅黑"/>
               </a:rPr>
               <a:t>采购、财务、管理人员，看见同一本账</a:t>
             </a:r>
@@ -4995,6 +5150,7 @@
           <a:lstStyle/>
           <a:p>
             <a:pPr algn="ctr"/>
+            <a:endParaRPr/>
           </a:p>
         </p:txBody>
       </p:sp>
@@ -5038,6 +5194,7 @@
           <a:lstStyle/>
           <a:p>
             <a:pPr algn="ctr"/>
+            <a:endParaRPr/>
           </a:p>
         </p:txBody>
       </p:sp>
@@ -5069,7 +5226,6 @@
                 </a:solidFill>
                 <a:latin typeface="Arial"/>
                 <a:ea typeface="微软雅黑"/>
-                <a:latin typeface="Arial"/>
               </a:rPr>
               <a:t>Data</a:t>
             </a:r>
@@ -5104,7 +5260,6 @@
                 </a:solidFill>
                 <a:latin typeface="微软雅黑"/>
                 <a:ea typeface="微软雅黑"/>
-                <a:latin typeface="微软雅黑"/>
               </a:rPr>
               <a:t>同一套数据</a:t>
             </a:r>
@@ -5143,7 +5298,6 @@
                 </a:solidFill>
                 <a:latin typeface="微软雅黑"/>
                 <a:ea typeface="微软雅黑"/>
-                <a:latin typeface="微软雅黑"/>
               </a:rPr>
               <a:t>文件可溯，不是私人拷贝。</a:t>
             </a:r>
@@ -5192,6 +5346,7 @@
           <a:lstStyle/>
           <a:p>
             <a:pPr algn="ctr"/>
+            <a:endParaRPr/>
           </a:p>
         </p:txBody>
       </p:sp>
@@ -5235,6 +5390,7 @@
           <a:lstStyle/>
           <a:p>
             <a:pPr algn="ctr"/>
+            <a:endParaRPr/>
           </a:p>
         </p:txBody>
       </p:sp>
@@ -5266,7 +5422,6 @@
                 </a:solidFill>
                 <a:latin typeface="Arial"/>
                 <a:ea typeface="微软雅黑"/>
-                <a:latin typeface="Arial"/>
               </a:rPr>
               <a:t>Rule</a:t>
             </a:r>
@@ -5301,7 +5456,6 @@
                 </a:solidFill>
                 <a:latin typeface="微软雅黑"/>
                 <a:ea typeface="微软雅黑"/>
-                <a:latin typeface="微软雅黑"/>
               </a:rPr>
               <a:t>同一套规则</a:t>
             </a:r>
@@ -5340,7 +5494,6 @@
                 </a:solidFill>
                 <a:latin typeface="微软雅黑"/>
                 <a:ea typeface="微软雅黑"/>
-                <a:latin typeface="微软雅黑"/>
               </a:rPr>
               <a:t>开给奇瑞、付给二级商，同一引擎。</a:t>
             </a:r>
@@ -5389,6 +5542,7 @@
           <a:lstStyle/>
           <a:p>
             <a:pPr algn="ctr"/>
+            <a:endParaRPr/>
           </a:p>
         </p:txBody>
       </p:sp>
@@ -5432,6 +5586,7 @@
           <a:lstStyle/>
           <a:p>
             <a:pPr algn="ctr"/>
+            <a:endParaRPr/>
           </a:p>
         </p:txBody>
       </p:sp>
@@ -5463,7 +5618,6 @@
                 </a:solidFill>
                 <a:latin typeface="Arial"/>
                 <a:ea typeface="微软雅黑"/>
-                <a:latin typeface="Arial"/>
               </a:rPr>
               <a:t>Result</a:t>
             </a:r>
@@ -5498,7 +5652,6 @@
                 </a:solidFill>
                 <a:latin typeface="微软雅黑"/>
                 <a:ea typeface="微软雅黑"/>
-                <a:latin typeface="微软雅黑"/>
               </a:rPr>
               <a:t>同一套结果</a:t>
             </a:r>
@@ -5537,7 +5690,6 @@
                 </a:solidFill>
                 <a:latin typeface="微软雅黑"/>
                 <a:ea typeface="微软雅黑"/>
-                <a:latin typeface="微软雅黑"/>
               </a:rPr>
               <a:t>当月依据，当月结果。对账不必扯皮。</a:t>
             </a:r>
@@ -5607,7 +5759,6 @@
                 </a:solidFill>
                 <a:latin typeface="微软雅黑"/>
                 <a:ea typeface="微软雅黑"/>
-                <a:latin typeface="微软雅黑"/>
               </a:rPr>
               <a:t>普炳软件  ·  核价平台</a:t>
             </a:r>
@@ -5642,7 +5793,6 @@
                 </a:solidFill>
                 <a:latin typeface="Arial"/>
                 <a:ea typeface="微软雅黑"/>
-                <a:latin typeface="Arial"/>
               </a:rPr>
               <a:t>11 / 12</a:t>
             </a:r>
@@ -5658,7 +5808,7 @@
 </file>
 
 <file path=ppt/slides/slide12.xml><?xml version="1.0" encoding="utf-8"?>
-<p:sld xmlns:a="http://schemas.openxmlformats.org/drawingml/2006/main" xmlns:p="http://schemas.openxmlformats.org/presentationml/2006/main" xmlns:r="http://schemas.openxmlformats.org/officeDocument/2006/relationships">
+<p:sld xmlns:a="http://schemas.openxmlformats.org/drawingml/2006/main" xmlns:r="http://schemas.openxmlformats.org/officeDocument/2006/relationships" xmlns:p="http://schemas.openxmlformats.org/presentationml/2006/main">
   <p:cSld>
     <p:spTree>
       <p:nvGrpSpPr>
@@ -5666,7 +5816,14 @@
         <p:cNvGrpSpPr/>
         <p:nvPr/>
       </p:nvGrpSpPr>
-      <p:grpSpPr/>
+      <p:grpSpPr>
+        <a:xfrm>
+          <a:off x="0" y="0"/>
+          <a:ext cx="0" cy="0"/>
+          <a:chOff x="0" y="0"/>
+          <a:chExt cx="0" cy="0"/>
+        </a:xfrm>
+      </p:grpSpPr>
       <p:sp>
         <p:nvSpPr>
           <p:cNvPr id="2" name="Rectangle 1"/>
@@ -5707,6 +5864,7 @@
           <a:lstStyle/>
           <a:p>
             <a:pPr algn="ctr"/>
+            <a:endParaRPr/>
           </a:p>
         </p:txBody>
       </p:sp>
@@ -5750,6 +5908,7 @@
           <a:lstStyle/>
           <a:p>
             <a:pPr algn="ctr"/>
+            <a:endParaRPr/>
           </a:p>
         </p:txBody>
       </p:sp>
@@ -5816,7 +5975,6 @@
                 </a:solidFill>
                 <a:latin typeface="Arial"/>
                 <a:ea typeface="微软雅黑"/>
-                <a:latin typeface="Arial"/>
               </a:rPr>
               <a:t>ONE LINE</a:t>
             </a:r>
@@ -5855,7 +6013,6 @@
                 </a:solidFill>
                 <a:latin typeface="微软雅黑"/>
                 <a:ea typeface="微软雅黑"/>
-                <a:latin typeface="微软雅黑"/>
               </a:rPr>
               <a:t>先把核价做成公司能力。</a:t>
             </a:r>
@@ -5873,7 +6030,6 @@
                 </a:solidFill>
                 <a:latin typeface="微软雅黑"/>
                 <a:ea typeface="微软雅黑"/>
-                <a:latin typeface="微软雅黑"/>
               </a:rPr>
               <a:t>数字化建设和 AI 落地，就有了抓手。</a:t>
             </a:r>
@@ -5908,7 +6064,6 @@
                 </a:solidFill>
                 <a:latin typeface="微软雅黑"/>
                 <a:ea typeface="微软雅黑"/>
-                <a:latin typeface="微软雅黑"/>
               </a:rPr>
               <a:t>少绑人、少扯皮。开给奇瑞多少、付给二级商多少，约 20 秒能算清。</a:t>
             </a:r>
@@ -5943,7 +6098,6 @@
                 </a:solidFill>
                 <a:latin typeface="微软雅黑"/>
                 <a:ea typeface="微软雅黑"/>
-                <a:latin typeface="微软雅黑"/>
               </a:rPr>
               <a:t>普炳软件</a:t>
             </a:r>
@@ -5978,7 +6132,6 @@
                 </a:solidFill>
                 <a:latin typeface="Arial"/>
                 <a:ea typeface="微软雅黑"/>
-                <a:latin typeface="Arial"/>
               </a:rPr>
               <a:t>12 / 12</a:t>
             </a:r>
@@ -5994,7 +6147,7 @@
 </file>
 
 <file path=ppt/slides/slide2.xml><?xml version="1.0" encoding="utf-8"?>
-<p:sld xmlns:a="http://schemas.openxmlformats.org/drawingml/2006/main" xmlns:p="http://schemas.openxmlformats.org/presentationml/2006/main" xmlns:r="http://schemas.openxmlformats.org/officeDocument/2006/relationships">
+<p:sld xmlns:a="http://schemas.openxmlformats.org/drawingml/2006/main" xmlns:r="http://schemas.openxmlformats.org/officeDocument/2006/relationships" xmlns:p="http://schemas.openxmlformats.org/presentationml/2006/main">
   <p:cSld>
     <p:spTree>
       <p:nvGrpSpPr>
@@ -6002,7 +6155,14 @@
         <p:cNvGrpSpPr/>
         <p:nvPr/>
       </p:nvGrpSpPr>
-      <p:grpSpPr/>
+      <p:grpSpPr>
+        <a:xfrm>
+          <a:off x="0" y="0"/>
+          <a:ext cx="0" cy="0"/>
+          <a:chOff x="0" y="0"/>
+          <a:chExt cx="0" cy="0"/>
+        </a:xfrm>
+      </p:grpSpPr>
       <p:sp>
         <p:nvSpPr>
           <p:cNvPr id="2" name="Rectangle 1"/>
@@ -6043,6 +6203,7 @@
           <a:lstStyle/>
           <a:p>
             <a:pPr algn="ctr"/>
+            <a:endParaRPr/>
           </a:p>
         </p:txBody>
       </p:sp>
@@ -6086,6 +6247,7 @@
           <a:lstStyle/>
           <a:p>
             <a:pPr algn="ctr"/>
+            <a:endParaRPr/>
           </a:p>
         </p:txBody>
       </p:sp>
@@ -6129,6 +6291,7 @@
           <a:lstStyle/>
           <a:p>
             <a:pPr algn="ctr"/>
+            <a:endParaRPr/>
           </a:p>
         </p:txBody>
       </p:sp>
@@ -6160,7 +6323,6 @@
                 </a:solidFill>
                 <a:latin typeface="Arial"/>
                 <a:ea typeface="微软雅黑"/>
-                <a:latin typeface="Arial"/>
               </a:rPr>
               <a:t>01   THE LEVER</a:t>
             </a:r>
@@ -6195,7 +6357,6 @@
                 </a:solidFill>
                 <a:latin typeface="微软雅黑"/>
                 <a:ea typeface="微软雅黑"/>
-                <a:latin typeface="微软雅黑"/>
               </a:rPr>
               <a:t>数字化、AI 要落地，核价是最好的抓手</a:t>
             </a:r>
@@ -6230,7 +6391,6 @@
                 </a:solidFill>
                 <a:latin typeface="微软雅黑"/>
                 <a:ea typeface="微软雅黑"/>
-                <a:latin typeface="微软雅黑"/>
               </a:rPr>
               <a:t>建设不是再上一个系统。是把公司最痛、最有规则、立刻能见效的事做成能力。</a:t>
             </a:r>
@@ -6279,6 +6439,7 @@
           <a:lstStyle/>
           <a:p>
             <a:pPr algn="ctr"/>
+            <a:endParaRPr/>
           </a:p>
         </p:txBody>
       </p:sp>
@@ -6322,6 +6483,7 @@
           <a:lstStyle/>
           <a:p>
             <a:pPr algn="ctr"/>
+            <a:endParaRPr/>
           </a:p>
         </p:txBody>
       </p:sp>
@@ -6353,7 +6515,6 @@
                 </a:solidFill>
                 <a:latin typeface="微软雅黑"/>
                 <a:ea typeface="微软雅黑"/>
-                <a:latin typeface="微软雅黑"/>
               </a:rPr>
               <a:t>有规则</a:t>
             </a:r>
@@ -6392,7 +6553,6 @@
                 </a:solidFill>
                 <a:latin typeface="微软雅黑"/>
                 <a:ea typeface="微软雅黑"/>
-                <a:latin typeface="微软雅黑"/>
               </a:rPr>
               <a:t>钢价政策、工艺、BOM、设变，本来就有企业口径。</a:t>
             </a:r>
@@ -6410,7 +6570,6 @@
                 </a:solidFill>
                 <a:latin typeface="微软雅黑"/>
                 <a:ea typeface="微软雅黑"/>
-                <a:latin typeface="微软雅黑"/>
               </a:rPr>
               <a:t>适合写成引擎，而不是口头 AI。</a:t>
             </a:r>
@@ -6459,6 +6618,7 @@
           <a:lstStyle/>
           <a:p>
             <a:pPr algn="ctr"/>
+            <a:endParaRPr/>
           </a:p>
         </p:txBody>
       </p:sp>
@@ -6502,6 +6662,7 @@
           <a:lstStyle/>
           <a:p>
             <a:pPr algn="ctr"/>
+            <a:endParaRPr/>
           </a:p>
         </p:txBody>
       </p:sp>
@@ -6533,7 +6694,6 @@
                 </a:solidFill>
                 <a:latin typeface="微软雅黑"/>
                 <a:ea typeface="微软雅黑"/>
-                <a:latin typeface="微软雅黑"/>
               </a:rPr>
               <a:t>有真账</a:t>
             </a:r>
@@ -6572,7 +6732,6 @@
                 </a:solidFill>
                 <a:latin typeface="微软雅黑"/>
                 <a:ea typeface="微软雅黑"/>
-                <a:latin typeface="微软雅黑"/>
               </a:rPr>
               <a:t>开给奇瑞的总成价、付给二级商的采购价，每月都要对账。</a:t>
             </a:r>
@@ -6590,7 +6749,6 @@
                 </a:solidFill>
                 <a:latin typeface="微软雅黑"/>
                 <a:ea typeface="微软雅黑"/>
-                <a:latin typeface="微软雅黑"/>
               </a:rPr>
               <a:t>建设立刻碰到钱。</a:t>
             </a:r>
@@ -6639,6 +6797,7 @@
           <a:lstStyle/>
           <a:p>
             <a:pPr algn="ctr"/>
+            <a:endParaRPr/>
           </a:p>
         </p:txBody>
       </p:sp>
@@ -6682,6 +6841,7 @@
           <a:lstStyle/>
           <a:p>
             <a:pPr algn="ctr"/>
+            <a:endParaRPr/>
           </a:p>
         </p:txBody>
       </p:sp>
@@ -6713,7 +6873,6 @@
                 </a:solidFill>
                 <a:latin typeface="微软雅黑"/>
                 <a:ea typeface="微软雅黑"/>
-                <a:latin typeface="微软雅黑"/>
               </a:rPr>
               <a:t>立刻见效</a:t>
             </a:r>
@@ -6752,7 +6911,6 @@
                 </a:solidFill>
                 <a:latin typeface="微软雅黑"/>
                 <a:ea typeface="微软雅黑"/>
-                <a:latin typeface="微软雅黑"/>
               </a:rPr>
               <a:t>一事一议以前要熟练人员做好几天。</a:t>
             </a:r>
@@ -6770,7 +6928,6 @@
                 </a:solidFill>
                 <a:latin typeface="微软雅黑"/>
                 <a:ea typeface="微软雅黑"/>
-                <a:latin typeface="微软雅黑"/>
               </a:rPr>
               <a:t>上传后引擎约 20 秒。AI 问的是这本真账。</a:t>
             </a:r>
@@ -6840,7 +6997,6 @@
                 </a:solidFill>
                 <a:latin typeface="微软雅黑"/>
                 <a:ea typeface="微软雅黑"/>
-                <a:latin typeface="微软雅黑"/>
               </a:rPr>
               <a:t>普炳软件  ·  核价平台</a:t>
             </a:r>
@@ -6875,7 +7031,6 @@
                 </a:solidFill>
                 <a:latin typeface="Arial"/>
                 <a:ea typeface="微软雅黑"/>
-                <a:latin typeface="Arial"/>
               </a:rPr>
               <a:t>2 / 12</a:t>
             </a:r>
@@ -6891,7 +7046,7 @@
 </file>
 
 <file path=ppt/slides/slide3.xml><?xml version="1.0" encoding="utf-8"?>
-<p:sld xmlns:a="http://schemas.openxmlformats.org/drawingml/2006/main" xmlns:p="http://schemas.openxmlformats.org/presentationml/2006/main" xmlns:r="http://schemas.openxmlformats.org/officeDocument/2006/relationships">
+<p:sld xmlns:a="http://schemas.openxmlformats.org/drawingml/2006/main" xmlns:r="http://schemas.openxmlformats.org/officeDocument/2006/relationships" xmlns:p="http://schemas.openxmlformats.org/presentationml/2006/main">
   <p:cSld>
     <p:spTree>
       <p:nvGrpSpPr>
@@ -6899,7 +7054,14 @@
         <p:cNvGrpSpPr/>
         <p:nvPr/>
       </p:nvGrpSpPr>
-      <p:grpSpPr/>
+      <p:grpSpPr>
+        <a:xfrm>
+          <a:off x="0" y="0"/>
+          <a:ext cx="0" cy="0"/>
+          <a:chOff x="0" y="0"/>
+          <a:chExt cx="0" cy="0"/>
+        </a:xfrm>
+      </p:grpSpPr>
       <p:sp>
         <p:nvSpPr>
           <p:cNvPr id="2" name="Rectangle 1"/>
@@ -6940,6 +7102,7 @@
           <a:lstStyle/>
           <a:p>
             <a:pPr algn="ctr"/>
+            <a:endParaRPr/>
           </a:p>
         </p:txBody>
       </p:sp>
@@ -6983,6 +7146,7 @@
           <a:lstStyle/>
           <a:p>
             <a:pPr algn="ctr"/>
+            <a:endParaRPr/>
           </a:p>
         </p:txBody>
       </p:sp>
@@ -7026,6 +7190,7 @@
           <a:lstStyle/>
           <a:p>
             <a:pPr algn="ctr"/>
+            <a:endParaRPr/>
           </a:p>
         </p:txBody>
       </p:sp>
@@ -7057,7 +7222,6 @@
                 </a:solidFill>
                 <a:latin typeface="Arial"/>
                 <a:ea typeface="微软雅黑"/>
-                <a:latin typeface="Arial"/>
               </a:rPr>
               <a:t>02   WHAT IT IS</a:t>
             </a:r>
@@ -7092,7 +7256,6 @@
                 </a:solidFill>
                 <a:latin typeface="微软雅黑"/>
                 <a:ea typeface="微软雅黑"/>
-                <a:latin typeface="微软雅黑"/>
               </a:rPr>
               <a:t>结构件自动核价平台</a:t>
             </a:r>
@@ -7131,7 +7294,6 @@
                 </a:solidFill>
                 <a:latin typeface="微软雅黑"/>
                 <a:ea typeface="微软雅黑"/>
-                <a:latin typeface="微软雅黑"/>
               </a:rPr>
               <a:t>政策、BOM、工艺、变更纳入同一套规则。算出总成与采购对象价格，直接出协议；AI 解读动因。</a:t>
             </a:r>
@@ -7180,6 +7342,7 @@
           <a:lstStyle/>
           <a:p>
             <a:pPr algn="ctr"/>
+            <a:endParaRPr/>
           </a:p>
         </p:txBody>
       </p:sp>
@@ -7223,6 +7386,7 @@
           <a:lstStyle/>
           <a:p>
             <a:pPr algn="ctr"/>
+            <a:endParaRPr/>
           </a:p>
         </p:txBody>
       </p:sp>
@@ -7254,7 +7418,6 @@
                 </a:solidFill>
                 <a:latin typeface="Arial"/>
                 <a:ea typeface="微软雅黑"/>
-                <a:latin typeface="Arial"/>
               </a:rPr>
               <a:t>Policy</a:t>
             </a:r>
@@ -7289,7 +7452,6 @@
                 </a:solidFill>
                 <a:latin typeface="微软雅黑"/>
                 <a:ea typeface="微软雅黑"/>
-                <a:latin typeface="微软雅黑"/>
               </a:rPr>
               <a:t>钢价一事一议</a:t>
             </a:r>
@@ -7338,6 +7500,7 @@
           <a:lstStyle/>
           <a:p>
             <a:pPr algn="ctr"/>
+            <a:endParaRPr/>
           </a:p>
         </p:txBody>
       </p:sp>
@@ -7381,6 +7544,7 @@
           <a:lstStyle/>
           <a:p>
             <a:pPr algn="ctr"/>
+            <a:endParaRPr/>
           </a:p>
         </p:txBody>
       </p:sp>
@@ -7412,7 +7576,6 @@
                 </a:solidFill>
                 <a:latin typeface="Arial"/>
                 <a:ea typeface="微软雅黑"/>
-                <a:latin typeface="Arial"/>
               </a:rPr>
               <a:t>BOM</a:t>
             </a:r>
@@ -7447,7 +7610,6 @@
                 </a:solidFill>
                 <a:latin typeface="微软雅黑"/>
                 <a:ea typeface="微软雅黑"/>
-                <a:latin typeface="微软雅黑"/>
               </a:rPr>
               <a:t>结构与外购</a:t>
             </a:r>
@@ -7496,6 +7658,7 @@
           <a:lstStyle/>
           <a:p>
             <a:pPr algn="ctr"/>
+            <a:endParaRPr/>
           </a:p>
         </p:txBody>
       </p:sp>
@@ -7539,6 +7702,7 @@
           <a:lstStyle/>
           <a:p>
             <a:pPr algn="ctr"/>
+            <a:endParaRPr/>
           </a:p>
         </p:txBody>
       </p:sp>
@@ -7570,7 +7734,6 @@
                 </a:solidFill>
                 <a:latin typeface="Arial"/>
                 <a:ea typeface="微软雅黑"/>
-                <a:latin typeface="Arial"/>
               </a:rPr>
               <a:t>Process</a:t>
             </a:r>
@@ -7605,7 +7768,6 @@
                 </a:solidFill>
                 <a:latin typeface="微软雅黑"/>
                 <a:ea typeface="微软雅黑"/>
-                <a:latin typeface="微软雅黑"/>
               </a:rPr>
               <a:t>工艺与模具</a:t>
             </a:r>
@@ -7654,6 +7816,7 @@
           <a:lstStyle/>
           <a:p>
             <a:pPr algn="ctr"/>
+            <a:endParaRPr/>
           </a:p>
         </p:txBody>
       </p:sp>
@@ -7697,6 +7860,7 @@
           <a:lstStyle/>
           <a:p>
             <a:pPr algn="ctr"/>
+            <a:endParaRPr/>
           </a:p>
         </p:txBody>
       </p:sp>
@@ -7728,7 +7892,6 @@
                 </a:solidFill>
                 <a:latin typeface="Arial"/>
                 <a:ea typeface="微软雅黑"/>
-                <a:latin typeface="Arial"/>
               </a:rPr>
               <a:t>Change</a:t>
             </a:r>
@@ -7763,7 +7926,6 @@
                 </a:solidFill>
                 <a:latin typeface="微软雅黑"/>
                 <a:ea typeface="微软雅黑"/>
-                <a:latin typeface="微软雅黑"/>
               </a:rPr>
               <a:t>工程变更</a:t>
             </a:r>
@@ -7812,6 +7974,7 @@
           <a:lstStyle/>
           <a:p>
             <a:pPr algn="ctr"/>
+            <a:endParaRPr/>
           </a:p>
         </p:txBody>
       </p:sp>
@@ -7855,6 +8018,7 @@
           <a:lstStyle/>
           <a:p>
             <a:pPr algn="ctr"/>
+            <a:endParaRPr/>
           </a:p>
         </p:txBody>
       </p:sp>
@@ -7886,7 +8050,6 @@
                 </a:solidFill>
                 <a:latin typeface="Arial"/>
                 <a:ea typeface="微软雅黑"/>
-                <a:latin typeface="Arial"/>
               </a:rPr>
               <a:t>Costing</a:t>
             </a:r>
@@ -7921,7 +8084,6 @@
                 </a:solidFill>
                 <a:latin typeface="微软雅黑"/>
                 <a:ea typeface="微软雅黑"/>
-                <a:latin typeface="微软雅黑"/>
               </a:rPr>
               <a:t>件价与总成</a:t>
             </a:r>
@@ -7970,6 +8132,7 @@
           <a:lstStyle/>
           <a:p>
             <a:pPr algn="ctr"/>
+            <a:endParaRPr/>
           </a:p>
         </p:txBody>
       </p:sp>
@@ -8013,6 +8176,7 @@
           <a:lstStyle/>
           <a:p>
             <a:pPr algn="ctr"/>
+            <a:endParaRPr/>
           </a:p>
         </p:txBody>
       </p:sp>
@@ -8044,7 +8208,6 @@
                 </a:solidFill>
                 <a:latin typeface="Arial"/>
                 <a:ea typeface="微软雅黑"/>
-                <a:latin typeface="Arial"/>
               </a:rPr>
               <a:t>Contract</a:t>
             </a:r>
@@ -8079,7 +8242,6 @@
                 </a:solidFill>
                 <a:latin typeface="微软雅黑"/>
                 <a:ea typeface="微软雅黑"/>
-                <a:latin typeface="微软雅黑"/>
               </a:rPr>
               <a:t>采购协议</a:t>
             </a:r>
@@ -8149,7 +8311,6 @@
                 </a:solidFill>
                 <a:latin typeface="微软雅黑"/>
                 <a:ea typeface="微软雅黑"/>
-                <a:latin typeface="微软雅黑"/>
               </a:rPr>
               <a:t>普炳软件  ·  核价平台</a:t>
             </a:r>
@@ -8184,7 +8345,6 @@
                 </a:solidFill>
                 <a:latin typeface="Arial"/>
                 <a:ea typeface="微软雅黑"/>
-                <a:latin typeface="Arial"/>
               </a:rPr>
               <a:t>3 / 12</a:t>
             </a:r>
@@ -8200,7 +8360,7 @@
 </file>
 
 <file path=ppt/slides/slide4.xml><?xml version="1.0" encoding="utf-8"?>
-<p:sld xmlns:a="http://schemas.openxmlformats.org/drawingml/2006/main" xmlns:p="http://schemas.openxmlformats.org/presentationml/2006/main" xmlns:r="http://schemas.openxmlformats.org/officeDocument/2006/relationships">
+<p:sld xmlns:a="http://schemas.openxmlformats.org/drawingml/2006/main" xmlns:r="http://schemas.openxmlformats.org/officeDocument/2006/relationships" xmlns:p="http://schemas.openxmlformats.org/presentationml/2006/main">
   <p:cSld>
     <p:spTree>
       <p:nvGrpSpPr>
@@ -8208,7 +8368,14 @@
         <p:cNvGrpSpPr/>
         <p:nvPr/>
       </p:nvGrpSpPr>
-      <p:grpSpPr/>
+      <p:grpSpPr>
+        <a:xfrm>
+          <a:off x="0" y="0"/>
+          <a:ext cx="0" cy="0"/>
+          <a:chOff x="0" y="0"/>
+          <a:chExt cx="0" cy="0"/>
+        </a:xfrm>
+      </p:grpSpPr>
       <p:sp>
         <p:nvSpPr>
           <p:cNvPr id="2" name="Rectangle 1"/>
@@ -8249,6 +8416,7 @@
           <a:lstStyle/>
           <a:p>
             <a:pPr algn="ctr"/>
+            <a:endParaRPr/>
           </a:p>
         </p:txBody>
       </p:sp>
@@ -8292,6 +8460,7 @@
           <a:lstStyle/>
           <a:p>
             <a:pPr algn="ctr"/>
+            <a:endParaRPr/>
           </a:p>
         </p:txBody>
       </p:sp>
@@ -8335,6 +8504,7 @@
           <a:lstStyle/>
           <a:p>
             <a:pPr algn="ctr"/>
+            <a:endParaRPr/>
           </a:p>
         </p:txBody>
       </p:sp>
@@ -8366,7 +8536,6 @@
                 </a:solidFill>
                 <a:latin typeface="Arial"/>
                 <a:ea typeface="微软雅黑"/>
-                <a:latin typeface="Arial"/>
               </a:rPr>
               <a:t>03   SHIFT</a:t>
             </a:r>
@@ -8401,7 +8570,6 @@
                 </a:solidFill>
                 <a:latin typeface="微软雅黑"/>
                 <a:ea typeface="微软雅黑"/>
-                <a:latin typeface="微软雅黑"/>
               </a:rPr>
               <a:t>不是把 Excel 做得更复杂</a:t>
             </a:r>
@@ -8450,6 +8618,7 @@
           <a:lstStyle/>
           <a:p>
             <a:pPr algn="ctr"/>
+            <a:endParaRPr/>
           </a:p>
         </p:txBody>
       </p:sp>
@@ -8493,6 +8662,7 @@
           <a:lstStyle/>
           <a:p>
             <a:pPr algn="ctr"/>
+            <a:endParaRPr/>
           </a:p>
         </p:txBody>
       </p:sp>
@@ -8524,7 +8694,6 @@
                 </a:solidFill>
                 <a:latin typeface="微软雅黑"/>
                 <a:ea typeface="微软雅黑"/>
-                <a:latin typeface="微软雅黑"/>
               </a:rPr>
               <a:t>不是</a:t>
             </a:r>
@@ -8559,7 +8728,6 @@
                 </a:solidFill>
                 <a:latin typeface="微软雅黑"/>
                 <a:ea typeface="微软雅黑"/>
-                <a:latin typeface="微软雅黑"/>
               </a:rPr>
               <a:t>再做一张更大的表</a:t>
             </a:r>
@@ -8598,7 +8766,6 @@
                 </a:solidFill>
                 <a:latin typeface="微软雅黑"/>
                 <a:ea typeface="微软雅黑"/>
-                <a:latin typeface="微软雅黑"/>
               </a:rPr>
               <a:t>公式在私人文件夹。口径靠骨干记忆。对奇瑞、对二级商，各执一份表，只能扯皮。</a:t>
             </a:r>
@@ -8647,6 +8814,7 @@
           <a:lstStyle/>
           <a:p>
             <a:pPr algn="ctr"/>
+            <a:endParaRPr/>
           </a:p>
         </p:txBody>
       </p:sp>
@@ -8690,6 +8858,7 @@
           <a:lstStyle/>
           <a:p>
             <a:pPr algn="ctr"/>
+            <a:endParaRPr/>
           </a:p>
         </p:txBody>
       </p:sp>
@@ -8721,7 +8890,6 @@
                 </a:solidFill>
                 <a:latin typeface="微软雅黑"/>
                 <a:ea typeface="微软雅黑"/>
-                <a:latin typeface="微软雅黑"/>
               </a:rPr>
               <a:t>而是</a:t>
             </a:r>
@@ -8756,7 +8924,6 @@
                 </a:solidFill>
                 <a:latin typeface="微软雅黑"/>
                 <a:ea typeface="微软雅黑"/>
-                <a:latin typeface="微软雅黑"/>
               </a:rPr>
               <a:t>把核价变成公司能力</a:t>
             </a:r>
@@ -8795,7 +8962,6 @@
                 </a:solidFill>
                 <a:latin typeface="微软雅黑"/>
                 <a:ea typeface="微软雅黑"/>
-                <a:latin typeface="微软雅黑"/>
               </a:rPr>
               <a:t>规则、依据、结果留在平台。人可以交接。这是数字化建设真正落地的那一步。</a:t>
             </a:r>
@@ -8865,7 +9031,6 @@
                 </a:solidFill>
                 <a:latin typeface="微软雅黑"/>
                 <a:ea typeface="微软雅黑"/>
-                <a:latin typeface="微软雅黑"/>
               </a:rPr>
               <a:t>普炳软件  ·  核价平台</a:t>
             </a:r>
@@ -8900,7 +9065,6 @@
                 </a:solidFill>
                 <a:latin typeface="Arial"/>
                 <a:ea typeface="微软雅黑"/>
-                <a:latin typeface="Arial"/>
               </a:rPr>
               <a:t>4 / 12</a:t>
             </a:r>
@@ -8916,7 +9080,7 @@
 </file>
 
 <file path=ppt/slides/slide5.xml><?xml version="1.0" encoding="utf-8"?>
-<p:sld xmlns:a="http://schemas.openxmlformats.org/drawingml/2006/main" xmlns:p="http://schemas.openxmlformats.org/presentationml/2006/main" xmlns:r="http://schemas.openxmlformats.org/officeDocument/2006/relationships">
+<p:sld xmlns:a="http://schemas.openxmlformats.org/drawingml/2006/main" xmlns:r="http://schemas.openxmlformats.org/officeDocument/2006/relationships" xmlns:p="http://schemas.openxmlformats.org/presentationml/2006/main">
   <p:cSld>
     <p:spTree>
       <p:nvGrpSpPr>
@@ -8924,7 +9088,14 @@
         <p:cNvGrpSpPr/>
         <p:nvPr/>
       </p:nvGrpSpPr>
-      <p:grpSpPr/>
+      <p:grpSpPr>
+        <a:xfrm>
+          <a:off x="0" y="0"/>
+          <a:ext cx="0" cy="0"/>
+          <a:chOff x="0" y="0"/>
+          <a:chExt cx="0" cy="0"/>
+        </a:xfrm>
+      </p:grpSpPr>
       <p:sp>
         <p:nvSpPr>
           <p:cNvPr id="2" name="Rectangle 1"/>
@@ -8965,6 +9136,7 @@
           <a:lstStyle/>
           <a:p>
             <a:pPr algn="ctr"/>
+            <a:endParaRPr/>
           </a:p>
         </p:txBody>
       </p:sp>
@@ -9008,6 +9180,7 @@
           <a:lstStyle/>
           <a:p>
             <a:pPr algn="ctr"/>
+            <a:endParaRPr/>
           </a:p>
         </p:txBody>
       </p:sp>
@@ -9051,6 +9224,7 @@
           <a:lstStyle/>
           <a:p>
             <a:pPr algn="ctr"/>
+            <a:endParaRPr/>
           </a:p>
         </p:txBody>
       </p:sp>
@@ -9082,7 +9256,6 @@
                 </a:solidFill>
                 <a:latin typeface="Arial"/>
                 <a:ea typeface="微软雅黑"/>
-                <a:latin typeface="Arial"/>
               </a:rPr>
               <a:t>04   TWO BOOKS</a:t>
             </a:r>
@@ -9117,7 +9290,6 @@
                 </a:solidFill>
                 <a:latin typeface="微软雅黑"/>
                 <a:ea typeface="微软雅黑"/>
-                <a:latin typeface="微软雅黑"/>
               </a:rPr>
               <a:t>两本钱要对齐，设变不能再是糊涂账</a:t>
             </a:r>
@@ -9166,6 +9338,7 @@
           <a:lstStyle/>
           <a:p>
             <a:pPr algn="ctr"/>
+            <a:endParaRPr/>
           </a:p>
         </p:txBody>
       </p:sp>
@@ -9209,6 +9382,7 @@
           <a:lstStyle/>
           <a:p>
             <a:pPr algn="ctr"/>
+            <a:endParaRPr/>
           </a:p>
         </p:txBody>
       </p:sp>
@@ -9240,7 +9414,6 @@
                 </a:solidFill>
                 <a:latin typeface="微软雅黑"/>
                 <a:ea typeface="微软雅黑"/>
-                <a:latin typeface="微软雅黑"/>
               </a:rPr>
               <a:t>商务</a:t>
             </a:r>
@@ -9275,7 +9448,6 @@
                 </a:solidFill>
                 <a:latin typeface="微软雅黑"/>
                 <a:ea typeface="微软雅黑"/>
-                <a:latin typeface="微软雅黑"/>
               </a:rPr>
               <a:t>总成价</a:t>
             </a:r>
@@ -9314,7 +9486,6 @@
                 </a:solidFill>
                 <a:latin typeface="微软雅黑"/>
                 <a:ea typeface="微软雅黑"/>
-                <a:latin typeface="微软雅黑"/>
               </a:rPr>
               <a:t>开票给奇瑞的售价。谈价、开票、对账看这一本。</a:t>
             </a:r>
@@ -9363,6 +9534,7 @@
           <a:lstStyle/>
           <a:p>
             <a:pPr algn="ctr"/>
+            <a:endParaRPr/>
           </a:p>
         </p:txBody>
       </p:sp>
@@ -9406,6 +9578,7 @@
           <a:lstStyle/>
           <a:p>
             <a:pPr algn="ctr"/>
+            <a:endParaRPr/>
           </a:p>
         </p:txBody>
       </p:sp>
@@ -9437,7 +9610,6 @@
                 </a:solidFill>
                 <a:latin typeface="微软雅黑"/>
                 <a:ea typeface="微软雅黑"/>
-                <a:latin typeface="微软雅黑"/>
               </a:rPr>
               <a:t>采购</a:t>
             </a:r>
@@ -9472,7 +9644,6 @@
                 </a:solidFill>
                 <a:latin typeface="微软雅黑"/>
                 <a:ea typeface="微软雅黑"/>
-                <a:latin typeface="微软雅黑"/>
               </a:rPr>
               <a:t>采购对象</a:t>
             </a:r>
@@ -9511,7 +9682,6 @@
                 </a:solidFill>
                 <a:latin typeface="微软雅黑"/>
                 <a:ea typeface="微软雅黑"/>
-                <a:latin typeface="微软雅黑"/>
               </a:rPr>
               <a:t>向二级商采购的价。该付多少、协议怎么签看这一本。</a:t>
             </a:r>
@@ -9560,6 +9730,7 @@
           <a:lstStyle/>
           <a:p>
             <a:pPr algn="ctr"/>
+            <a:endParaRPr/>
           </a:p>
         </p:txBody>
       </p:sp>
@@ -9603,6 +9774,7 @@
           <a:lstStyle/>
           <a:p>
             <a:pPr algn="ctr"/>
+            <a:endParaRPr/>
           </a:p>
         </p:txBody>
       </p:sp>
@@ -9634,7 +9806,6 @@
                 </a:solidFill>
                 <a:latin typeface="微软雅黑"/>
                 <a:ea typeface="微软雅黑"/>
-                <a:latin typeface="微软雅黑"/>
               </a:rPr>
               <a:t>工程</a:t>
             </a:r>
@@ -9669,7 +9840,6 @@
                 </a:solidFill>
                 <a:latin typeface="微软雅黑"/>
                 <a:ea typeface="微软雅黑"/>
-                <a:latin typeface="微软雅黑"/>
               </a:rPr>
               <a:t>当期用当期</a:t>
             </a:r>
@@ -9708,7 +9878,6 @@
                 </a:solidFill>
                 <a:latin typeface="微软雅黑"/>
                 <a:ea typeface="微软雅黑"/>
-                <a:latin typeface="微软雅黑"/>
               </a:rPr>
               <a:t>Excel 里设变是糊涂账。变更进系统，开票和应付一起跟上。</a:t>
             </a:r>
@@ -9778,7 +9947,6 @@
                 </a:solidFill>
                 <a:latin typeface="微软雅黑"/>
                 <a:ea typeface="微软雅黑"/>
-                <a:latin typeface="微软雅黑"/>
               </a:rPr>
               <a:t>普炳软件  ·  核价平台</a:t>
             </a:r>
@@ -9813,7 +9981,6 @@
                 </a:solidFill>
                 <a:latin typeface="Arial"/>
                 <a:ea typeface="微软雅黑"/>
-                <a:latin typeface="Arial"/>
               </a:rPr>
               <a:t>5 / 12</a:t>
             </a:r>
@@ -9829,7 +9996,7 @@
 </file>
 
 <file path=ppt/slides/slide6.xml><?xml version="1.0" encoding="utf-8"?>
-<p:sld xmlns:a="http://schemas.openxmlformats.org/drawingml/2006/main" xmlns:p="http://schemas.openxmlformats.org/presentationml/2006/main" xmlns:r="http://schemas.openxmlformats.org/officeDocument/2006/relationships">
+<p:sld xmlns:a="http://schemas.openxmlformats.org/drawingml/2006/main" xmlns:r="http://schemas.openxmlformats.org/officeDocument/2006/relationships" xmlns:p="http://schemas.openxmlformats.org/presentationml/2006/main">
   <p:cSld>
     <p:spTree>
       <p:nvGrpSpPr>
@@ -9837,7 +10004,14 @@
         <p:cNvGrpSpPr/>
         <p:nvPr/>
       </p:nvGrpSpPr>
-      <p:grpSpPr/>
+      <p:grpSpPr>
+        <a:xfrm>
+          <a:off x="0" y="0"/>
+          <a:ext cx="0" cy="0"/>
+          <a:chOff x="0" y="0"/>
+          <a:chExt cx="0" cy="0"/>
+        </a:xfrm>
+      </p:grpSpPr>
       <p:sp>
         <p:nvSpPr>
           <p:cNvPr id="2" name="Rectangle 1"/>
@@ -9878,6 +10052,7 @@
           <a:lstStyle/>
           <a:p>
             <a:pPr algn="ctr"/>
+            <a:endParaRPr/>
           </a:p>
         </p:txBody>
       </p:sp>
@@ -9921,6 +10096,7 @@
           <a:lstStyle/>
           <a:p>
             <a:pPr algn="ctr"/>
+            <a:endParaRPr/>
           </a:p>
         </p:txBody>
       </p:sp>
@@ -9964,6 +10140,7 @@
           <a:lstStyle/>
           <a:p>
             <a:pPr algn="ctr"/>
+            <a:endParaRPr/>
           </a:p>
         </p:txBody>
       </p:sp>
@@ -9995,7 +10172,6 @@
                 </a:solidFill>
                 <a:latin typeface="Arial"/>
                 <a:ea typeface="微软雅黑"/>
-                <a:latin typeface="Arial"/>
               </a:rPr>
               <a:t>05   FIRST VALUE</a:t>
             </a:r>
@@ -10030,7 +10206,6 @@
                 </a:solidFill>
                 <a:latin typeface="微软雅黑"/>
                 <a:ea typeface="微软雅黑"/>
-                <a:latin typeface="微软雅黑"/>
               </a:rPr>
               <a:t>第一价值：降低对人的依赖</a:t>
             </a:r>
@@ -10079,6 +10254,7 @@
           <a:lstStyle/>
           <a:p>
             <a:pPr algn="ctr"/>
+            <a:endParaRPr/>
           </a:p>
         </p:txBody>
       </p:sp>
@@ -10122,6 +10298,7 @@
           <a:lstStyle/>
           <a:p>
             <a:pPr algn="ctr"/>
+            <a:endParaRPr/>
           </a:p>
         </p:txBody>
       </p:sp>
@@ -10153,7 +10330,6 @@
                 </a:solidFill>
                 <a:latin typeface="微软雅黑"/>
                 <a:ea typeface="微软雅黑"/>
-                <a:latin typeface="微软雅黑"/>
               </a:rPr>
               <a:t>以前</a:t>
             </a:r>
@@ -10192,7 +10368,6 @@
                 </a:solidFill>
                 <a:latin typeface="微软雅黑"/>
                 <a:ea typeface="微软雅黑"/>
-                <a:latin typeface="微软雅黑"/>
               </a:rPr>
               <a:t>熟练人员</a:t>
             </a:r>
@@ -10210,7 +10385,6 @@
                 </a:solidFill>
                 <a:latin typeface="微软雅黑"/>
                 <a:ea typeface="微软雅黑"/>
-                <a:latin typeface="微软雅黑"/>
               </a:rPr>
               <a:t>好几天</a:t>
             </a:r>
@@ -10249,7 +10423,6 @@
                 </a:solidFill>
                 <a:latin typeface="微软雅黑"/>
                 <a:ea typeface="微软雅黑"/>
-                <a:latin typeface="微软雅黑"/>
               </a:rPr>
               <a:t>一事一议、总成、采购对象靠骨干手感。</a:t>
             </a:r>
@@ -10267,7 +10440,6 @@
                 </a:solidFill>
                 <a:latin typeface="微软雅黑"/>
                 <a:ea typeface="微软雅黑"/>
-                <a:latin typeface="微软雅黑"/>
               </a:rPr>
               <a:t>人一走，账就停。</a:t>
             </a:r>
@@ -10316,6 +10488,7 @@
           <a:lstStyle/>
           <a:p>
             <a:pPr algn="ctr"/>
+            <a:endParaRPr/>
           </a:p>
         </p:txBody>
       </p:sp>
@@ -10359,6 +10532,7 @@
           <a:lstStyle/>
           <a:p>
             <a:pPr algn="ctr"/>
+            <a:endParaRPr/>
           </a:p>
         </p:txBody>
       </p:sp>
@@ -10390,7 +10564,6 @@
                 </a:solidFill>
                 <a:latin typeface="微软雅黑"/>
                 <a:ea typeface="微软雅黑"/>
-                <a:latin typeface="微软雅黑"/>
               </a:rPr>
               <a:t>现在</a:t>
             </a:r>
@@ -10429,7 +10602,6 @@
                 </a:solidFill>
                 <a:latin typeface="微软雅黑"/>
                 <a:ea typeface="微软雅黑"/>
-                <a:latin typeface="微软雅黑"/>
               </a:rPr>
               <a:t>上传依据</a:t>
             </a:r>
@@ -10447,7 +10619,6 @@
                 </a:solidFill>
                 <a:latin typeface="微软雅黑"/>
                 <a:ea typeface="微软雅黑"/>
-                <a:latin typeface="微软雅黑"/>
               </a:rPr>
               <a:t>约 20 秒</a:t>
             </a:r>
@@ -10486,7 +10657,6 @@
                 </a:solidFill>
                 <a:latin typeface="微软雅黑"/>
                 <a:ea typeface="微软雅黑"/>
-                <a:latin typeface="微软雅黑"/>
               </a:rPr>
               <a:t>规则在引擎里。人请假，总成账和采购账照样能出。</a:t>
             </a:r>
@@ -10504,7 +10674,6 @@
                 </a:solidFill>
                 <a:latin typeface="微软雅黑"/>
                 <a:ea typeface="微软雅黑"/>
-                <a:latin typeface="微软雅黑"/>
               </a:rPr>
               <a:t>能力属于公司。</a:t>
             </a:r>
@@ -10574,7 +10743,6 @@
                 </a:solidFill>
                 <a:latin typeface="微软雅黑"/>
                 <a:ea typeface="微软雅黑"/>
-                <a:latin typeface="微软雅黑"/>
               </a:rPr>
               <a:t>普炳软件  ·  核价平台</a:t>
             </a:r>
@@ -10609,7 +10777,6 @@
                 </a:solidFill>
                 <a:latin typeface="Arial"/>
                 <a:ea typeface="微软雅黑"/>
-                <a:latin typeface="Arial"/>
               </a:rPr>
               <a:t>6 / 12</a:t>
             </a:r>
@@ -10625,7 +10792,7 @@
 </file>
 
 <file path=ppt/slides/slide7.xml><?xml version="1.0" encoding="utf-8"?>
-<p:sld xmlns:a="http://schemas.openxmlformats.org/drawingml/2006/main" xmlns:p="http://schemas.openxmlformats.org/presentationml/2006/main" xmlns:r="http://schemas.openxmlformats.org/officeDocument/2006/relationships">
+<p:sld xmlns:a="http://schemas.openxmlformats.org/drawingml/2006/main" xmlns:r="http://schemas.openxmlformats.org/officeDocument/2006/relationships" xmlns:p="http://schemas.openxmlformats.org/presentationml/2006/main">
   <p:cSld>
     <p:spTree>
       <p:nvGrpSpPr>
@@ -10633,7 +10800,14 @@
         <p:cNvGrpSpPr/>
         <p:nvPr/>
       </p:nvGrpSpPr>
-      <p:grpSpPr/>
+      <p:grpSpPr>
+        <a:xfrm>
+          <a:off x="0" y="0"/>
+          <a:ext cx="0" cy="0"/>
+          <a:chOff x="0" y="0"/>
+          <a:chExt cx="0" cy="0"/>
+        </a:xfrm>
+      </p:grpSpPr>
       <p:sp>
         <p:nvSpPr>
           <p:cNvPr id="2" name="Rectangle 1"/>
@@ -10674,6 +10848,7 @@
           <a:lstStyle/>
           <a:p>
             <a:pPr algn="ctr"/>
+            <a:endParaRPr/>
           </a:p>
         </p:txBody>
       </p:sp>
@@ -10717,6 +10892,7 @@
           <a:lstStyle/>
           <a:p>
             <a:pPr algn="ctr"/>
+            <a:endParaRPr/>
           </a:p>
         </p:txBody>
       </p:sp>
@@ -10760,6 +10936,7 @@
           <a:lstStyle/>
           <a:p>
             <a:pPr algn="ctr"/>
+            <a:endParaRPr/>
           </a:p>
         </p:txBody>
       </p:sp>
@@ -10791,7 +10968,6 @@
                 </a:solidFill>
                 <a:latin typeface="Arial"/>
                 <a:ea typeface="微软雅黑"/>
-                <a:latin typeface="Arial"/>
               </a:rPr>
               <a:t>06   SECOND VALUE</a:t>
             </a:r>
@@ -10826,7 +11002,6 @@
                 </a:solidFill>
                 <a:latin typeface="微软雅黑"/>
                 <a:ea typeface="微软雅黑"/>
-                <a:latin typeface="微软雅黑"/>
               </a:rPr>
               <a:t>第二价值：溯源清楚，不必再扯皮</a:t>
             </a:r>
@@ -10875,6 +11050,7 @@
           <a:lstStyle/>
           <a:p>
             <a:pPr algn="ctr"/>
+            <a:endParaRPr/>
           </a:p>
         </p:txBody>
       </p:sp>
@@ -10918,6 +11094,7 @@
           <a:lstStyle/>
           <a:p>
             <a:pPr algn="ctr"/>
+            <a:endParaRPr/>
           </a:p>
         </p:txBody>
       </p:sp>
@@ -10949,7 +11126,6 @@
                 </a:solidFill>
                 <a:latin typeface="微软雅黑"/>
                 <a:ea typeface="微软雅黑"/>
-                <a:latin typeface="微软雅黑"/>
               </a:rPr>
               <a:t>哪份文件</a:t>
             </a:r>
@@ -10988,7 +11164,6 @@
                 </a:solidFill>
                 <a:latin typeface="微软雅黑"/>
                 <a:ea typeface="微软雅黑"/>
-                <a:latin typeface="微软雅黑"/>
               </a:rPr>
               <a:t>当时用的 Excel 能找回，不是私人拷贝。</a:t>
             </a:r>
@@ -11037,6 +11212,7 @@
           <a:lstStyle/>
           <a:p>
             <a:pPr algn="ctr"/>
+            <a:endParaRPr/>
           </a:p>
         </p:txBody>
       </p:sp>
@@ -11080,6 +11256,7 @@
           <a:lstStyle/>
           <a:p>
             <a:pPr algn="ctr"/>
+            <a:endParaRPr/>
           </a:p>
         </p:txBody>
       </p:sp>
@@ -11111,7 +11288,6 @@
                 </a:solidFill>
                 <a:latin typeface="微软雅黑"/>
                 <a:ea typeface="微软雅黑"/>
-                <a:latin typeface="微软雅黑"/>
               </a:rPr>
               <a:t>谁操作的</a:t>
             </a:r>
@@ -11150,7 +11326,6 @@
                 </a:solidFill>
                 <a:latin typeface="微软雅黑"/>
                 <a:ea typeface="微软雅黑"/>
-                <a:latin typeface="微软雅黑"/>
               </a:rPr>
               <a:t>上传、计算、变更有日志。对账问记录。</a:t>
             </a:r>
@@ -11199,6 +11374,7 @@
           <a:lstStyle/>
           <a:p>
             <a:pPr algn="ctr"/>
+            <a:endParaRPr/>
           </a:p>
         </p:txBody>
       </p:sp>
@@ -11242,6 +11418,7 @@
           <a:lstStyle/>
           <a:p>
             <a:pPr algn="ctr"/>
+            <a:endParaRPr/>
           </a:p>
         </p:txBody>
       </p:sp>
@@ -11273,7 +11450,6 @@
                 </a:solidFill>
                 <a:latin typeface="微软雅黑"/>
                 <a:ea typeface="微软雅黑"/>
-                <a:latin typeface="微软雅黑"/>
               </a:rPr>
               <a:t>当期哪版</a:t>
             </a:r>
@@ -11312,7 +11488,6 @@
                 </a:solidFill>
                 <a:latin typeface="微软雅黑"/>
                 <a:ea typeface="微软雅黑"/>
-                <a:latin typeface="微软雅黑"/>
               </a:rPr>
               <a:t>钢价、BOM、工艺、设变按月对齐。</a:t>
             </a:r>
@@ -11361,6 +11536,7 @@
           <a:lstStyle/>
           <a:p>
             <a:pPr algn="ctr"/>
+            <a:endParaRPr/>
           </a:p>
         </p:txBody>
       </p:sp>
@@ -11404,6 +11580,7 @@
           <a:lstStyle/>
           <a:p>
             <a:pPr algn="ctr"/>
+            <a:endParaRPr/>
           </a:p>
         </p:txBody>
       </p:sp>
@@ -11435,7 +11612,6 @@
                 </a:solidFill>
                 <a:latin typeface="微软雅黑"/>
                 <a:ea typeface="微软雅黑"/>
-                <a:latin typeface="微软雅黑"/>
               </a:rPr>
               <a:t>同一套规则</a:t>
             </a:r>
@@ -11474,7 +11650,6 @@
                 </a:solidFill>
                 <a:latin typeface="微软雅黑"/>
                 <a:ea typeface="微软雅黑"/>
-                <a:latin typeface="微软雅黑"/>
               </a:rPr>
               <a:t>开给奇瑞和付给二级商，同一引擎。</a:t>
             </a:r>
@@ -11544,7 +11719,6 @@
                 </a:solidFill>
                 <a:latin typeface="微软雅黑"/>
                 <a:ea typeface="微软雅黑"/>
-                <a:latin typeface="微软雅黑"/>
               </a:rPr>
               <a:t>普炳软件  ·  核价平台</a:t>
             </a:r>
@@ -11579,7 +11753,6 @@
                 </a:solidFill>
                 <a:latin typeface="Arial"/>
                 <a:ea typeface="微软雅黑"/>
-                <a:latin typeface="Arial"/>
               </a:rPr>
               <a:t>7 / 12</a:t>
             </a:r>
@@ -11595,7 +11768,7 @@
 </file>
 
 <file path=ppt/slides/slide8.xml><?xml version="1.0" encoding="utf-8"?>
-<p:sld xmlns:a="http://schemas.openxmlformats.org/drawingml/2006/main" xmlns:p="http://schemas.openxmlformats.org/presentationml/2006/main" xmlns:r="http://schemas.openxmlformats.org/officeDocument/2006/relationships">
+<p:sld xmlns:a="http://schemas.openxmlformats.org/drawingml/2006/main" xmlns:r="http://schemas.openxmlformats.org/officeDocument/2006/relationships" xmlns:p="http://schemas.openxmlformats.org/presentationml/2006/main">
   <p:cSld>
     <p:spTree>
       <p:nvGrpSpPr>
@@ -11603,7 +11776,14 @@
         <p:cNvGrpSpPr/>
         <p:nvPr/>
       </p:nvGrpSpPr>
-      <p:grpSpPr/>
+      <p:grpSpPr>
+        <a:xfrm>
+          <a:off x="0" y="0"/>
+          <a:ext cx="0" cy="0"/>
+          <a:chOff x="0" y="0"/>
+          <a:chExt cx="0" cy="0"/>
+        </a:xfrm>
+      </p:grpSpPr>
       <p:sp>
         <p:nvSpPr>
           <p:cNvPr id="2" name="Rectangle 1"/>
@@ -11644,6 +11824,7 @@
           <a:lstStyle/>
           <a:p>
             <a:pPr algn="ctr"/>
+            <a:endParaRPr/>
           </a:p>
         </p:txBody>
       </p:sp>
@@ -11687,6 +11868,7 @@
           <a:lstStyle/>
           <a:p>
             <a:pPr algn="ctr"/>
+            <a:endParaRPr/>
           </a:p>
         </p:txBody>
       </p:sp>
@@ -11730,6 +11912,7 @@
           <a:lstStyle/>
           <a:p>
             <a:pPr algn="ctr"/>
+            <a:endParaRPr/>
           </a:p>
         </p:txBody>
       </p:sp>
@@ -11761,7 +11944,6 @@
                 </a:solidFill>
                 <a:latin typeface="Arial"/>
                 <a:ea typeface="微软雅黑"/>
-                <a:latin typeface="Arial"/>
               </a:rPr>
               <a:t>07   VALUE</a:t>
             </a:r>
@@ -11796,7 +11978,6 @@
                 </a:solidFill>
                 <a:latin typeface="微软雅黑"/>
                 <a:ea typeface="微软雅黑"/>
-                <a:latin typeface="微软雅黑"/>
               </a:rPr>
               <a:t>四项价值，进的是公司而不是个人</a:t>
             </a:r>
@@ -11845,6 +12026,7 @@
           <a:lstStyle/>
           <a:p>
             <a:pPr algn="ctr"/>
+            <a:endParaRPr/>
           </a:p>
         </p:txBody>
       </p:sp>
@@ -11888,6 +12070,7 @@
           <a:lstStyle/>
           <a:p>
             <a:pPr algn="ctr"/>
+            <a:endParaRPr/>
           </a:p>
         </p:txBody>
       </p:sp>
@@ -11919,7 +12102,6 @@
                 </a:solidFill>
                 <a:latin typeface="Arial"/>
                 <a:ea typeface="微软雅黑"/>
-                <a:latin typeface="Arial"/>
               </a:rPr>
               <a:t>01</a:t>
             </a:r>
@@ -11954,7 +12136,6 @@
                 </a:solidFill>
                 <a:latin typeface="微软雅黑"/>
                 <a:ea typeface="微软雅黑"/>
-                <a:latin typeface="微软雅黑"/>
               </a:rPr>
               <a:t>少绑人</a:t>
             </a:r>
@@ -11993,7 +12174,6 @@
                 </a:solidFill>
                 <a:latin typeface="微软雅黑"/>
                 <a:ea typeface="微软雅黑"/>
-                <a:latin typeface="微软雅黑"/>
               </a:rPr>
               <a:t>核价能力属于公司。熟练骨干好几天，变成约 20 秒。</a:t>
             </a:r>
@@ -12042,6 +12222,7 @@
           <a:lstStyle/>
           <a:p>
             <a:pPr algn="ctr"/>
+            <a:endParaRPr/>
           </a:p>
         </p:txBody>
       </p:sp>
@@ -12085,6 +12266,7 @@
           <a:lstStyle/>
           <a:p>
             <a:pPr algn="ctr"/>
+            <a:endParaRPr/>
           </a:p>
         </p:txBody>
       </p:sp>
@@ -12116,7 +12298,6 @@
                 </a:solidFill>
                 <a:latin typeface="Arial"/>
                 <a:ea typeface="微软雅黑"/>
-                <a:latin typeface="Arial"/>
               </a:rPr>
               <a:t>02</a:t>
             </a:r>
@@ -12151,7 +12332,6 @@
                 </a:solidFill>
                 <a:latin typeface="微软雅黑"/>
                 <a:ea typeface="微软雅黑"/>
-                <a:latin typeface="微软雅黑"/>
               </a:rPr>
               <a:t>少扯皮</a:t>
             </a:r>
@@ -12190,7 +12370,6 @@
                 </a:solidFill>
                 <a:latin typeface="微软雅黑"/>
                 <a:ea typeface="微软雅黑"/>
-                <a:latin typeface="微软雅黑"/>
               </a:rPr>
               <a:t>文件、操作、当期依据可对。对奇瑞、对二级商、对财务同一本账。</a:t>
             </a:r>
@@ -12239,6 +12418,7 @@
           <a:lstStyle/>
           <a:p>
             <a:pPr algn="ctr"/>
+            <a:endParaRPr/>
           </a:p>
         </p:txBody>
       </p:sp>
@@ -12282,6 +12462,7 @@
           <a:lstStyle/>
           <a:p>
             <a:pPr algn="ctr"/>
+            <a:endParaRPr/>
           </a:p>
         </p:txBody>
       </p:sp>
@@ -12313,7 +12494,6 @@
                 </a:solidFill>
                 <a:latin typeface="Arial"/>
                 <a:ea typeface="微软雅黑"/>
-                <a:latin typeface="Arial"/>
               </a:rPr>
               <a:t>03</a:t>
             </a:r>
@@ -12348,7 +12528,6 @@
                 </a:solidFill>
                 <a:latin typeface="微软雅黑"/>
                 <a:ea typeface="微软雅黑"/>
-                <a:latin typeface="微软雅黑"/>
               </a:rPr>
               <a:t>算得一致</a:t>
             </a:r>
@@ -12387,7 +12566,6 @@
                 </a:solidFill>
                 <a:latin typeface="微软雅黑"/>
                 <a:ea typeface="微软雅黑"/>
-                <a:latin typeface="微软雅黑"/>
               </a:rPr>
               <a:t>同一套规则、同一套口径。</a:t>
             </a:r>
@@ -12405,7 +12583,6 @@
                 </a:solidFill>
                 <a:latin typeface="微软雅黑"/>
                 <a:ea typeface="微软雅黑"/>
-                <a:latin typeface="微软雅黑"/>
               </a:rPr>
               <a:t>总成售价和采购应付不再各算各的。</a:t>
             </a:r>
@@ -12454,6 +12631,7 @@
           <a:lstStyle/>
           <a:p>
             <a:pPr algn="ctr"/>
+            <a:endParaRPr/>
           </a:p>
         </p:txBody>
       </p:sp>
@@ -12497,6 +12675,7 @@
           <a:lstStyle/>
           <a:p>
             <a:pPr algn="ctr"/>
+            <a:endParaRPr/>
           </a:p>
         </p:txBody>
       </p:sp>
@@ -12528,7 +12707,6 @@
                 </a:solidFill>
                 <a:latin typeface="Arial"/>
                 <a:ea typeface="微软雅黑"/>
-                <a:latin typeface="Arial"/>
               </a:rPr>
               <a:t>04</a:t>
             </a:r>
@@ -12563,7 +12741,6 @@
                 </a:solidFill>
                 <a:latin typeface="微软雅黑"/>
                 <a:ea typeface="微软雅黑"/>
-                <a:latin typeface="微软雅黑"/>
               </a:rPr>
               <a:t>每月跟得上</a:t>
             </a:r>
@@ -12602,7 +12779,6 @@
                 </a:solidFill>
                 <a:latin typeface="微软雅黑"/>
                 <a:ea typeface="微软雅黑"/>
-                <a:latin typeface="微软雅黑"/>
               </a:rPr>
               <a:t>钢价、BOM、工艺、工程变更进入系统。</a:t>
             </a:r>
@@ -12620,7 +12796,6 @@
                 </a:solidFill>
                 <a:latin typeface="微软雅黑"/>
                 <a:ea typeface="微软雅黑"/>
-                <a:latin typeface="微软雅黑"/>
               </a:rPr>
               <a:t>当月依据，当月计算。</a:t>
             </a:r>
@@ -12690,7 +12865,6 @@
                 </a:solidFill>
                 <a:latin typeface="微软雅黑"/>
                 <a:ea typeface="微软雅黑"/>
-                <a:latin typeface="微软雅黑"/>
               </a:rPr>
               <a:t>普炳软件  ·  核价平台</a:t>
             </a:r>
@@ -12725,7 +12899,6 @@
                 </a:solidFill>
                 <a:latin typeface="Arial"/>
                 <a:ea typeface="微软雅黑"/>
-                <a:latin typeface="Arial"/>
               </a:rPr>
               <a:t>8 / 12</a:t>
             </a:r>
@@ -12741,7 +12914,7 @@
 </file>
 
 <file path=ppt/slides/slide9.xml><?xml version="1.0" encoding="utf-8"?>
-<p:sld xmlns:a="http://schemas.openxmlformats.org/drawingml/2006/main" xmlns:p="http://schemas.openxmlformats.org/presentationml/2006/main" xmlns:r="http://schemas.openxmlformats.org/officeDocument/2006/relationships">
+<p:sld xmlns:a="http://schemas.openxmlformats.org/drawingml/2006/main" xmlns:r="http://schemas.openxmlformats.org/officeDocument/2006/relationships" xmlns:p="http://schemas.openxmlformats.org/presentationml/2006/main">
   <p:cSld>
     <p:spTree>
       <p:nvGrpSpPr>
@@ -12749,7 +12922,14 @@
         <p:cNvGrpSpPr/>
         <p:nvPr/>
       </p:nvGrpSpPr>
-      <p:grpSpPr/>
+      <p:grpSpPr>
+        <a:xfrm>
+          <a:off x="0" y="0"/>
+          <a:ext cx="0" cy="0"/>
+          <a:chOff x="0" y="0"/>
+          <a:chExt cx="0" cy="0"/>
+        </a:xfrm>
+      </p:grpSpPr>
       <p:sp>
         <p:nvSpPr>
           <p:cNvPr id="2" name="Rectangle 1"/>
@@ -12790,6 +12970,7 @@
           <a:lstStyle/>
           <a:p>
             <a:pPr algn="ctr"/>
+            <a:endParaRPr/>
           </a:p>
         </p:txBody>
       </p:sp>
@@ -12833,6 +13014,7 @@
           <a:lstStyle/>
           <a:p>
             <a:pPr algn="ctr"/>
+            <a:endParaRPr/>
           </a:p>
         </p:txBody>
       </p:sp>
@@ -12876,6 +13058,7 @@
           <a:lstStyle/>
           <a:p>
             <a:pPr algn="ctr"/>
+            <a:endParaRPr/>
           </a:p>
         </p:txBody>
       </p:sp>
@@ -12907,7 +13090,6 @@
                 </a:solidFill>
                 <a:latin typeface="Arial"/>
                 <a:ea typeface="微软雅黑"/>
-                <a:latin typeface="Arial"/>
               </a:rPr>
               <a:t>08   AI</a:t>
             </a:r>
@@ -12942,7 +13124,6 @@
                 </a:solidFill>
                 <a:latin typeface="微软雅黑"/>
                 <a:ea typeface="微软雅黑"/>
-                <a:latin typeface="微软雅黑"/>
               </a:rPr>
               <a:t>引擎把账算准，AI 把账讲明白</a:t>
             </a:r>
@@ -12977,7 +13158,6 @@
                 </a:solidFill>
                 <a:latin typeface="微软雅黑"/>
                 <a:ea typeface="微软雅黑"/>
-                <a:latin typeface="微软雅黑"/>
               </a:rPr>
               <a:t>这才是 AI 落地：不是让模型编价格，是让管理人员直接问公司的账。</a:t>
             </a:r>
@@ -13026,6 +13206,7 @@
           <a:lstStyle/>
           <a:p>
             <a:pPr algn="ctr"/>
+            <a:endParaRPr/>
           </a:p>
         </p:txBody>
       </p:sp>
@@ -13069,6 +13250,7 @@
           <a:lstStyle/>
           <a:p>
             <a:pPr algn="ctr"/>
+            <a:endParaRPr/>
           </a:p>
         </p:txBody>
       </p:sp>
@@ -13100,7 +13282,6 @@
                 </a:solidFill>
                 <a:latin typeface="Arial"/>
                 <a:ea typeface="微软雅黑"/>
-                <a:latin typeface="Arial"/>
               </a:rPr>
               <a:t>Q1</a:t>
             </a:r>
@@ -13135,7 +13316,6 @@
                 </a:solidFill>
                 <a:latin typeface="微软雅黑"/>
                 <a:ea typeface="微软雅黑"/>
-                <a:latin typeface="微软雅黑"/>
               </a:rPr>
               <a:t>这个月总成开给奇瑞的价，为什么涨了？</a:t>
             </a:r>
@@ -13184,6 +13364,7 @@
           <a:lstStyle/>
           <a:p>
             <a:pPr algn="ctr"/>
+            <a:endParaRPr/>
           </a:p>
         </p:txBody>
       </p:sp>
@@ -13227,6 +13408,7 @@
           <a:lstStyle/>
           <a:p>
             <a:pPr algn="ctr"/>
+            <a:endParaRPr/>
           </a:p>
         </p:txBody>
       </p:sp>
@@ -13258,7 +13440,6 @@
                 </a:solidFill>
                 <a:latin typeface="Arial"/>
                 <a:ea typeface="微软雅黑"/>
-                <a:latin typeface="Arial"/>
               </a:rPr>
               <a:t>Q2</a:t>
             </a:r>
@@ -13293,7 +13474,6 @@
                 </a:solidFill>
                 <a:latin typeface="微软雅黑"/>
                 <a:ea typeface="微软雅黑"/>
-                <a:latin typeface="微软雅黑"/>
               </a:rPr>
               <a:t>向二级商采购的对象，哪些涨幅最大？</a:t>
             </a:r>
@@ -13342,6 +13522,7 @@
           <a:lstStyle/>
           <a:p>
             <a:pPr algn="ctr"/>
+            <a:endParaRPr/>
           </a:p>
         </p:txBody>
       </p:sp>
@@ -13385,6 +13566,7 @@
           <a:lstStyle/>
           <a:p>
             <a:pPr algn="ctr"/>
+            <a:endParaRPr/>
           </a:p>
         </p:txBody>
       </p:sp>
@@ -13416,7 +13598,6 @@
                 </a:solidFill>
                 <a:latin typeface="Arial"/>
                 <a:ea typeface="微软雅黑"/>
-                <a:latin typeface="Arial"/>
               </a:rPr>
               <a:t>Q3</a:t>
             </a:r>
@@ -13451,7 +13632,6 @@
                 </a:solidFill>
                 <a:latin typeface="微软雅黑"/>
                 <a:ea typeface="微软雅黑"/>
-                <a:latin typeface="微软雅黑"/>
               </a:rPr>
               <a:t>工程变更之后，开票价和采购价各动了多少？</a:t>
             </a:r>
@@ -13500,6 +13680,7 @@
           <a:lstStyle/>
           <a:p>
             <a:pPr algn="ctr"/>
+            <a:endParaRPr/>
           </a:p>
         </p:txBody>
       </p:sp>
@@ -13543,6 +13724,7 @@
           <a:lstStyle/>
           <a:p>
             <a:pPr algn="ctr"/>
+            <a:endParaRPr/>
           </a:p>
         </p:txBody>
       </p:sp>
@@ -13574,7 +13756,6 @@
                 </a:solidFill>
                 <a:latin typeface="Arial"/>
                 <a:ea typeface="微软雅黑"/>
-                <a:latin typeface="Arial"/>
               </a:rPr>
               <a:t>Q4</a:t>
             </a:r>
@@ -13609,7 +13790,6 @@
                 </a:solidFill>
                 <a:latin typeface="微软雅黑"/>
                 <a:ea typeface="微软雅黑"/>
-                <a:latin typeface="微软雅黑"/>
               </a:rPr>
               <a:t>这个总成和上个月差在哪里？</a:t>
             </a:r>
@@ -13658,6 +13838,7 @@
           <a:lstStyle/>
           <a:p>
             <a:pPr algn="ctr"/>
+            <a:endParaRPr/>
           </a:p>
         </p:txBody>
       </p:sp>
@@ -13701,6 +13882,7 @@
           <a:lstStyle/>
           <a:p>
             <a:pPr algn="ctr"/>
+            <a:endParaRPr/>
           </a:p>
         </p:txBody>
       </p:sp>
@@ -13732,7 +13914,6 @@
                 </a:solidFill>
                 <a:latin typeface="Arial"/>
                 <a:ea typeface="微软雅黑"/>
-                <a:latin typeface="Arial"/>
               </a:rPr>
               <a:t>Q5</a:t>
             </a:r>
@@ -13767,7 +13948,6 @@
                 </a:solidFill>
                 <a:latin typeface="微软雅黑"/>
                 <a:ea typeface="微软雅黑"/>
-                <a:latin typeface="微软雅黑"/>
               </a:rPr>
               <a:t>把本月成本变化整理一下。</a:t>
             </a:r>
@@ -13837,7 +14017,6 @@
                 </a:solidFill>
                 <a:latin typeface="微软雅黑"/>
                 <a:ea typeface="微软雅黑"/>
-                <a:latin typeface="微软雅黑"/>
               </a:rPr>
               <a:t>普炳软件  ·  核价平台</a:t>
             </a:r>
@@ -13872,7 +14051,6 @@
                 </a:solidFill>
                 <a:latin typeface="Arial"/>
                 <a:ea typeface="微软雅黑"/>
-                <a:latin typeface="Arial"/>
               </a:rPr>
               <a:t>9 / 12</a:t>
             </a:r>

--- a/docs/结构件自动核价平台-产品介绍.pptx
+++ b/docs/结构件自动核价平台-产品介绍.pptx
@@ -5,20 +5,20 @@
     <p:sldMasterId id="2147483648" r:id="rId1"/>
   </p:sldMasterIdLst>
   <p:sldIdLst>
-    <p:sldId id="256" r:id="rId2"/>
-    <p:sldId id="257" r:id="rId3"/>
-    <p:sldId id="258" r:id="rId4"/>
-    <p:sldId id="259" r:id="rId5"/>
-    <p:sldId id="260" r:id="rId6"/>
-    <p:sldId id="261" r:id="rId7"/>
-    <p:sldId id="262" r:id="rId8"/>
-    <p:sldId id="263" r:id="rId9"/>
-    <p:sldId id="264" r:id="rId10"/>
-    <p:sldId id="265" r:id="rId11"/>
-    <p:sldId id="266" r:id="rId12"/>
-    <p:sldId id="267" r:id="rId13"/>
+    <p:sldId id="256" r:id="rId7"/>
+    <p:sldId id="257" r:id="rId8"/>
+    <p:sldId id="258" r:id="rId9"/>
+    <p:sldId id="259" r:id="rId10"/>
+    <p:sldId id="260" r:id="rId11"/>
+    <p:sldId id="261" r:id="rId12"/>
+    <p:sldId id="262" r:id="rId13"/>
+    <p:sldId id="263" r:id="rId14"/>
+    <p:sldId id="264" r:id="rId15"/>
+    <p:sldId id="265" r:id="rId16"/>
+    <p:sldId id="266" r:id="rId17"/>
+    <p:sldId id="267" r:id="rId18"/>
   </p:sldIdLst>
-  <p:sldSz cx="12192000" cy="6858000"/>
+  <p:sldSz cx="12191695" cy="6858000" type="screen4x3"/>
   <p:notesSz cx="6858000" cy="9144000"/>
   <p:defaultTextStyle>
     <a:defPPr>
@@ -115,22 +115,6 @@
       </a:defRPr>
     </a:lvl9pPr>
   </p:defaultTextStyle>
-  <p:extLst>
-    <p:ext uri="{EFAFB233-063F-42B5-8137-9DF3F51BA10A}">
-      <p15:sldGuideLst xmlns:p15="http://schemas.microsoft.com/office/powerpoint/2012/main">
-        <p15:guide id="1" orient="horz" pos="2160">
-          <p15:clr>
-            <a:srgbClr val="A4A3A4"/>
-          </p15:clr>
-        </p15:guide>
-        <p15:guide id="2" pos="2880">
-          <p15:clr>
-            <a:srgbClr val="A4A3A4"/>
-          </p15:clr>
-        </p15:guide>
-      </p15:sldGuideLst>
-    </p:ext>
-  </p:extLst>
 </p:presentation>
 </file>
 
@@ -172,9 +156,10 @@
           <a:lstStyle/>
           <a:p>
             <a:r>
-              <a:rPr lang="en-US"/>
+              <a:rPr lang="en-US" smtClean="0"/>
               <a:t>Click to edit Master title style</a:t>
             </a:r>
+            <a:endParaRPr lang="en-US"/>
           </a:p>
         </p:txBody>
       </p:sp>
@@ -290,9 +275,10 @@
           </a:lstStyle>
           <a:p>
             <a:r>
-              <a:rPr lang="en-US"/>
+              <a:rPr lang="en-US" smtClean="0"/>
               <a:t>Click to edit Master subtitle style</a:t>
             </a:r>
+            <a:endParaRPr lang="en-US"/>
           </a:p>
         </p:txBody>
       </p:sp>
@@ -313,7 +299,7 @@
           <a:p>
             <a:fld id="{5BCAD085-E8A6-8845-BD4E-CB4CCA059FC4}" type="datetimeFigureOut">
               <a:rPr lang="en-US" smtClean="0"/>
-              <a:t>10/10/2026</a:t>
+              <a:t>1/27/13</a:t>
             </a:fld>
             <a:endParaRPr lang="en-US"/>
           </a:p>
@@ -407,9 +393,10 @@
           <a:lstStyle/>
           <a:p>
             <a:r>
-              <a:rPr lang="en-US"/>
+              <a:rPr lang="en-US" smtClean="0"/>
               <a:t>Click to edit Master title style</a:t>
             </a:r>
+            <a:endParaRPr lang="en-US"/>
           </a:p>
         </p:txBody>
       </p:sp>
@@ -430,37 +417,38 @@
           <a:p>
             <a:pPr lvl="0"/>
             <a:r>
-              <a:rPr lang="en-US"/>
+              <a:rPr lang="en-US" smtClean="0"/>
               <a:t>Click to edit Master text styles</a:t>
             </a:r>
           </a:p>
           <a:p>
             <a:pPr lvl="1"/>
             <a:r>
-              <a:rPr lang="en-US"/>
+              <a:rPr lang="en-US" smtClean="0"/>
               <a:t>Second level</a:t>
             </a:r>
           </a:p>
           <a:p>
             <a:pPr lvl="2"/>
             <a:r>
-              <a:rPr lang="en-US"/>
+              <a:rPr lang="en-US" smtClean="0"/>
               <a:t>Third level</a:t>
             </a:r>
           </a:p>
           <a:p>
             <a:pPr lvl="3"/>
             <a:r>
-              <a:rPr lang="en-US"/>
+              <a:rPr lang="en-US" smtClean="0"/>
               <a:t>Fourth level</a:t>
             </a:r>
           </a:p>
           <a:p>
             <a:pPr lvl="4"/>
             <a:r>
-              <a:rPr lang="en-US"/>
+              <a:rPr lang="en-US" smtClean="0"/>
               <a:t>Fifth level</a:t>
             </a:r>
+            <a:endParaRPr lang="en-US"/>
           </a:p>
         </p:txBody>
       </p:sp>
@@ -481,7 +469,7 @@
           <a:p>
             <a:fld id="{5BCAD085-E8A6-8845-BD4E-CB4CCA059FC4}" type="datetimeFigureOut">
               <a:rPr lang="en-US" smtClean="0"/>
-              <a:t>10/10/2026</a:t>
+              <a:t>1/27/13</a:t>
             </a:fld>
             <a:endParaRPr lang="en-US"/>
           </a:p>
@@ -580,9 +568,10 @@
           <a:lstStyle/>
           <a:p>
             <a:r>
-              <a:rPr lang="en-US"/>
+              <a:rPr lang="en-US" smtClean="0"/>
               <a:t>Click to edit Master title style</a:t>
             </a:r>
+            <a:endParaRPr lang="en-US"/>
           </a:p>
         </p:txBody>
       </p:sp>
@@ -608,37 +597,38 @@
           <a:p>
             <a:pPr lvl="0"/>
             <a:r>
-              <a:rPr lang="en-US"/>
+              <a:rPr lang="en-US" smtClean="0"/>
               <a:t>Click to edit Master text styles</a:t>
             </a:r>
           </a:p>
           <a:p>
             <a:pPr lvl="1"/>
             <a:r>
-              <a:rPr lang="en-US"/>
+              <a:rPr lang="en-US" smtClean="0"/>
               <a:t>Second level</a:t>
             </a:r>
           </a:p>
           <a:p>
             <a:pPr lvl="2"/>
             <a:r>
-              <a:rPr lang="en-US"/>
+              <a:rPr lang="en-US" smtClean="0"/>
               <a:t>Third level</a:t>
             </a:r>
           </a:p>
           <a:p>
             <a:pPr lvl="3"/>
             <a:r>
-              <a:rPr lang="en-US"/>
+              <a:rPr lang="en-US" smtClean="0"/>
               <a:t>Fourth level</a:t>
             </a:r>
           </a:p>
           <a:p>
             <a:pPr lvl="4"/>
             <a:r>
-              <a:rPr lang="en-US"/>
+              <a:rPr lang="en-US" smtClean="0"/>
               <a:t>Fifth level</a:t>
             </a:r>
+            <a:endParaRPr lang="en-US"/>
           </a:p>
         </p:txBody>
       </p:sp>
@@ -659,7 +649,7 @@
           <a:p>
             <a:fld id="{5BCAD085-E8A6-8845-BD4E-CB4CCA059FC4}" type="datetimeFigureOut">
               <a:rPr lang="en-US" smtClean="0"/>
-              <a:t>10/10/2026</a:t>
+              <a:t>1/27/13</a:t>
             </a:fld>
             <a:endParaRPr lang="en-US"/>
           </a:p>
@@ -753,9 +743,10 @@
           <a:lstStyle/>
           <a:p>
             <a:r>
-              <a:rPr lang="en-US"/>
+              <a:rPr lang="en-US" smtClean="0"/>
               <a:t>Click to edit Master title style</a:t>
             </a:r>
+            <a:endParaRPr lang="en-US"/>
           </a:p>
         </p:txBody>
       </p:sp>
@@ -776,37 +767,38 @@
           <a:p>
             <a:pPr lvl="0"/>
             <a:r>
-              <a:rPr lang="en-US"/>
+              <a:rPr lang="en-US" smtClean="0"/>
               <a:t>Click to edit Master text styles</a:t>
             </a:r>
           </a:p>
           <a:p>
             <a:pPr lvl="1"/>
             <a:r>
-              <a:rPr lang="en-US"/>
+              <a:rPr lang="en-US" smtClean="0"/>
               <a:t>Second level</a:t>
             </a:r>
           </a:p>
           <a:p>
             <a:pPr lvl="2"/>
             <a:r>
-              <a:rPr lang="en-US"/>
+              <a:rPr lang="en-US" smtClean="0"/>
               <a:t>Third level</a:t>
             </a:r>
           </a:p>
           <a:p>
             <a:pPr lvl="3"/>
             <a:r>
-              <a:rPr lang="en-US"/>
+              <a:rPr lang="en-US" smtClean="0"/>
               <a:t>Fourth level</a:t>
             </a:r>
           </a:p>
           <a:p>
             <a:pPr lvl="4"/>
             <a:r>
-              <a:rPr lang="en-US"/>
+              <a:rPr lang="en-US" smtClean="0"/>
               <a:t>Fifth level</a:t>
             </a:r>
+            <a:endParaRPr lang="en-US"/>
           </a:p>
         </p:txBody>
       </p:sp>
@@ -827,7 +819,7 @@
           <a:p>
             <a:fld id="{5BCAD085-E8A6-8845-BD4E-CB4CCA059FC4}" type="datetimeFigureOut">
               <a:rPr lang="en-US" smtClean="0"/>
-              <a:t>10/10/2026</a:t>
+              <a:t>1/27/13</a:t>
             </a:fld>
             <a:endParaRPr lang="en-US"/>
           </a:p>
@@ -930,9 +922,10 @@
           </a:lstStyle>
           <a:p>
             <a:r>
-              <a:rPr lang="en-US"/>
+              <a:rPr lang="en-US" smtClean="0"/>
               <a:t>Click to edit Master title style</a:t>
             </a:r>
+            <a:endParaRPr lang="en-US"/>
           </a:p>
         </p:txBody>
       </p:sp>
@@ -1049,7 +1042,7 @@
           <a:p>
             <a:pPr lvl="0"/>
             <a:r>
-              <a:rPr lang="en-US"/>
+              <a:rPr lang="en-US" smtClean="0"/>
               <a:t>Click to edit Master text styles</a:t>
             </a:r>
           </a:p>
@@ -1072,7 +1065,7 @@
           <a:p>
             <a:fld id="{5BCAD085-E8A6-8845-BD4E-CB4CCA059FC4}" type="datetimeFigureOut">
               <a:rPr lang="en-US" smtClean="0"/>
-              <a:t>10/10/2026</a:t>
+              <a:t>1/27/13</a:t>
             </a:fld>
             <a:endParaRPr lang="en-US"/>
           </a:p>
@@ -1166,9 +1159,10 @@
           <a:lstStyle/>
           <a:p>
             <a:r>
-              <a:rPr lang="en-US"/>
+              <a:rPr lang="en-US" smtClean="0"/>
               <a:t>Click to edit Master title style</a:t>
             </a:r>
+            <a:endParaRPr lang="en-US"/>
           </a:p>
         </p:txBody>
       </p:sp>
@@ -1222,37 +1216,38 @@
           <a:p>
             <a:pPr lvl="0"/>
             <a:r>
-              <a:rPr lang="en-US"/>
+              <a:rPr lang="en-US" smtClean="0"/>
               <a:t>Click to edit Master text styles</a:t>
             </a:r>
           </a:p>
           <a:p>
             <a:pPr lvl="1"/>
             <a:r>
-              <a:rPr lang="en-US"/>
+              <a:rPr lang="en-US" smtClean="0"/>
               <a:t>Second level</a:t>
             </a:r>
           </a:p>
           <a:p>
             <a:pPr lvl="2"/>
             <a:r>
-              <a:rPr lang="en-US"/>
+              <a:rPr lang="en-US" smtClean="0"/>
               <a:t>Third level</a:t>
             </a:r>
           </a:p>
           <a:p>
             <a:pPr lvl="3"/>
             <a:r>
-              <a:rPr lang="en-US"/>
+              <a:rPr lang="en-US" smtClean="0"/>
               <a:t>Fourth level</a:t>
             </a:r>
           </a:p>
           <a:p>
             <a:pPr lvl="4"/>
             <a:r>
-              <a:rPr lang="en-US"/>
+              <a:rPr lang="en-US" smtClean="0"/>
               <a:t>Fifth level</a:t>
             </a:r>
+            <a:endParaRPr lang="en-US"/>
           </a:p>
         </p:txBody>
       </p:sp>
@@ -1306,37 +1301,38 @@
           <a:p>
             <a:pPr lvl="0"/>
             <a:r>
-              <a:rPr lang="en-US"/>
+              <a:rPr lang="en-US" smtClean="0"/>
               <a:t>Click to edit Master text styles</a:t>
             </a:r>
           </a:p>
           <a:p>
             <a:pPr lvl="1"/>
             <a:r>
-              <a:rPr lang="en-US"/>
+              <a:rPr lang="en-US" smtClean="0"/>
               <a:t>Second level</a:t>
             </a:r>
           </a:p>
           <a:p>
             <a:pPr lvl="2"/>
             <a:r>
-              <a:rPr lang="en-US"/>
+              <a:rPr lang="en-US" smtClean="0"/>
               <a:t>Third level</a:t>
             </a:r>
           </a:p>
           <a:p>
             <a:pPr lvl="3"/>
             <a:r>
-              <a:rPr lang="en-US"/>
+              <a:rPr lang="en-US" smtClean="0"/>
               <a:t>Fourth level</a:t>
             </a:r>
           </a:p>
           <a:p>
             <a:pPr lvl="4"/>
             <a:r>
-              <a:rPr lang="en-US"/>
+              <a:rPr lang="en-US" smtClean="0"/>
               <a:t>Fifth level</a:t>
             </a:r>
+            <a:endParaRPr lang="en-US"/>
           </a:p>
         </p:txBody>
       </p:sp>
@@ -1357,7 +1353,7 @@
           <a:p>
             <a:fld id="{5BCAD085-E8A6-8845-BD4E-CB4CCA059FC4}" type="datetimeFigureOut">
               <a:rPr lang="en-US" smtClean="0"/>
-              <a:t>10/10/2026</a:t>
+              <a:t>1/27/13</a:t>
             </a:fld>
             <a:endParaRPr lang="en-US"/>
           </a:p>
@@ -1455,9 +1451,10 @@
           </a:lstStyle>
           <a:p>
             <a:r>
-              <a:rPr lang="en-US"/>
+              <a:rPr lang="en-US" smtClean="0"/>
               <a:t>Click to edit Master title style</a:t>
             </a:r>
+            <a:endParaRPr lang="en-US"/>
           </a:p>
         </p:txBody>
       </p:sp>
@@ -1520,7 +1517,7 @@
           <a:p>
             <a:pPr lvl="0"/>
             <a:r>
-              <a:rPr lang="en-US"/>
+              <a:rPr lang="en-US" smtClean="0"/>
               <a:t>Click to edit Master text styles</a:t>
             </a:r>
           </a:p>
@@ -1576,37 +1573,38 @@
           <a:p>
             <a:pPr lvl="0"/>
             <a:r>
-              <a:rPr lang="en-US"/>
+              <a:rPr lang="en-US" smtClean="0"/>
               <a:t>Click to edit Master text styles</a:t>
             </a:r>
           </a:p>
           <a:p>
             <a:pPr lvl="1"/>
             <a:r>
-              <a:rPr lang="en-US"/>
+              <a:rPr lang="en-US" smtClean="0"/>
               <a:t>Second level</a:t>
             </a:r>
           </a:p>
           <a:p>
             <a:pPr lvl="2"/>
             <a:r>
-              <a:rPr lang="en-US"/>
+              <a:rPr lang="en-US" smtClean="0"/>
               <a:t>Third level</a:t>
             </a:r>
           </a:p>
           <a:p>
             <a:pPr lvl="3"/>
             <a:r>
-              <a:rPr lang="en-US"/>
+              <a:rPr lang="en-US" smtClean="0"/>
               <a:t>Fourth level</a:t>
             </a:r>
           </a:p>
           <a:p>
             <a:pPr lvl="4"/>
             <a:r>
-              <a:rPr lang="en-US"/>
+              <a:rPr lang="en-US" smtClean="0"/>
               <a:t>Fifth level</a:t>
             </a:r>
+            <a:endParaRPr lang="en-US"/>
           </a:p>
         </p:txBody>
       </p:sp>
@@ -1669,7 +1667,7 @@
           <a:p>
             <a:pPr lvl="0"/>
             <a:r>
-              <a:rPr lang="en-US"/>
+              <a:rPr lang="en-US" smtClean="0"/>
               <a:t>Click to edit Master text styles</a:t>
             </a:r>
           </a:p>
@@ -1725,37 +1723,38 @@
           <a:p>
             <a:pPr lvl="0"/>
             <a:r>
-              <a:rPr lang="en-US"/>
+              <a:rPr lang="en-US" smtClean="0"/>
               <a:t>Click to edit Master text styles</a:t>
             </a:r>
           </a:p>
           <a:p>
             <a:pPr lvl="1"/>
             <a:r>
-              <a:rPr lang="en-US"/>
+              <a:rPr lang="en-US" smtClean="0"/>
               <a:t>Second level</a:t>
             </a:r>
           </a:p>
           <a:p>
             <a:pPr lvl="2"/>
             <a:r>
-              <a:rPr lang="en-US"/>
+              <a:rPr lang="en-US" smtClean="0"/>
               <a:t>Third level</a:t>
             </a:r>
           </a:p>
           <a:p>
             <a:pPr lvl="3"/>
             <a:r>
-              <a:rPr lang="en-US"/>
+              <a:rPr lang="en-US" smtClean="0"/>
               <a:t>Fourth level</a:t>
             </a:r>
           </a:p>
           <a:p>
             <a:pPr lvl="4"/>
             <a:r>
-              <a:rPr lang="en-US"/>
+              <a:rPr lang="en-US" smtClean="0"/>
               <a:t>Fifth level</a:t>
             </a:r>
+            <a:endParaRPr lang="en-US"/>
           </a:p>
         </p:txBody>
       </p:sp>
@@ -1776,7 +1775,7 @@
           <a:p>
             <a:fld id="{5BCAD085-E8A6-8845-BD4E-CB4CCA059FC4}" type="datetimeFigureOut">
               <a:rPr lang="en-US" smtClean="0"/>
-              <a:t>10/10/2026</a:t>
+              <a:t>1/27/13</a:t>
             </a:fld>
             <a:endParaRPr lang="en-US"/>
           </a:p>
@@ -1870,9 +1869,10 @@
           <a:lstStyle/>
           <a:p>
             <a:r>
-              <a:rPr lang="en-US"/>
+              <a:rPr lang="en-US" smtClean="0"/>
               <a:t>Click to edit Master title style</a:t>
             </a:r>
+            <a:endParaRPr lang="en-US"/>
           </a:p>
         </p:txBody>
       </p:sp>
@@ -1893,7 +1893,7 @@
           <a:p>
             <a:fld id="{5BCAD085-E8A6-8845-BD4E-CB4CCA059FC4}" type="datetimeFigureOut">
               <a:rPr lang="en-US" smtClean="0"/>
-              <a:t>10/10/2026</a:t>
+              <a:t>1/27/13</a:t>
             </a:fld>
             <a:endParaRPr lang="en-US"/>
           </a:p>
@@ -1988,7 +1988,7 @@
           <a:p>
             <a:fld id="{5BCAD085-E8A6-8845-BD4E-CB4CCA059FC4}" type="datetimeFigureOut">
               <a:rPr lang="en-US" smtClean="0"/>
-              <a:t>10/10/2026</a:t>
+              <a:t>1/27/13</a:t>
             </a:fld>
             <a:endParaRPr lang="en-US"/>
           </a:p>
@@ -2091,9 +2091,10 @@
           </a:lstStyle>
           <a:p>
             <a:r>
-              <a:rPr lang="en-US"/>
+              <a:rPr lang="en-US" smtClean="0"/>
               <a:t>Click to edit Master title style</a:t>
             </a:r>
+            <a:endParaRPr lang="en-US"/>
           </a:p>
         </p:txBody>
       </p:sp>
@@ -2147,37 +2148,38 @@
           <a:p>
             <a:pPr lvl="0"/>
             <a:r>
-              <a:rPr lang="en-US"/>
+              <a:rPr lang="en-US" smtClean="0"/>
               <a:t>Click to edit Master text styles</a:t>
             </a:r>
           </a:p>
           <a:p>
             <a:pPr lvl="1"/>
             <a:r>
-              <a:rPr lang="en-US"/>
+              <a:rPr lang="en-US" smtClean="0"/>
               <a:t>Second level</a:t>
             </a:r>
           </a:p>
           <a:p>
             <a:pPr lvl="2"/>
             <a:r>
-              <a:rPr lang="en-US"/>
+              <a:rPr lang="en-US" smtClean="0"/>
               <a:t>Third level</a:t>
             </a:r>
           </a:p>
           <a:p>
             <a:pPr lvl="3"/>
             <a:r>
-              <a:rPr lang="en-US"/>
+              <a:rPr lang="en-US" smtClean="0"/>
               <a:t>Fourth level</a:t>
             </a:r>
           </a:p>
           <a:p>
             <a:pPr lvl="4"/>
             <a:r>
-              <a:rPr lang="en-US"/>
+              <a:rPr lang="en-US" smtClean="0"/>
               <a:t>Fifth level</a:t>
             </a:r>
+            <a:endParaRPr lang="en-US"/>
           </a:p>
         </p:txBody>
       </p:sp>
@@ -2240,7 +2242,7 @@
           <a:p>
             <a:pPr lvl="0"/>
             <a:r>
-              <a:rPr lang="en-US"/>
+              <a:rPr lang="en-US" smtClean="0"/>
               <a:t>Click to edit Master text styles</a:t>
             </a:r>
           </a:p>
@@ -2263,7 +2265,7 @@
           <a:p>
             <a:fld id="{5BCAD085-E8A6-8845-BD4E-CB4CCA059FC4}" type="datetimeFigureOut">
               <a:rPr lang="en-US" smtClean="0"/>
-              <a:t>10/10/2026</a:t>
+              <a:t>1/27/13</a:t>
             </a:fld>
             <a:endParaRPr lang="en-US"/>
           </a:p>
@@ -2366,9 +2368,10 @@
           </a:lstStyle>
           <a:p>
             <a:r>
-              <a:rPr lang="en-US"/>
+              <a:rPr lang="en-US" smtClean="0"/>
               <a:t>Click to edit Master title style</a:t>
             </a:r>
+            <a:endParaRPr lang="en-US"/>
           </a:p>
         </p:txBody>
       </p:sp>
@@ -2492,7 +2495,7 @@
           <a:p>
             <a:pPr lvl="0"/>
             <a:r>
-              <a:rPr lang="en-US"/>
+              <a:rPr lang="en-US" smtClean="0"/>
               <a:t>Click to edit Master text styles</a:t>
             </a:r>
           </a:p>
@@ -2515,7 +2518,7 @@
           <a:p>
             <a:fld id="{5BCAD085-E8A6-8845-BD4E-CB4CCA059FC4}" type="datetimeFigureOut">
               <a:rPr lang="en-US" smtClean="0"/>
-              <a:t>10/10/2026</a:t>
+              <a:t>1/27/13</a:t>
             </a:fld>
             <a:endParaRPr lang="en-US"/>
           </a:p>
@@ -2624,9 +2627,10 @@
           <a:lstStyle/>
           <a:p>
             <a:r>
-              <a:rPr lang="en-US"/>
+              <a:rPr lang="en-US" smtClean="0"/>
               <a:t>Click to edit Master title style</a:t>
             </a:r>
+            <a:endParaRPr lang="en-US"/>
           </a:p>
         </p:txBody>
       </p:sp>
@@ -2657,37 +2661,38 @@
           <a:p>
             <a:pPr lvl="0"/>
             <a:r>
-              <a:rPr lang="en-US"/>
+              <a:rPr lang="en-US" smtClean="0"/>
               <a:t>Click to edit Master text styles</a:t>
             </a:r>
           </a:p>
           <a:p>
             <a:pPr lvl="1"/>
             <a:r>
-              <a:rPr lang="en-US"/>
+              <a:rPr lang="en-US" smtClean="0"/>
               <a:t>Second level</a:t>
             </a:r>
           </a:p>
           <a:p>
             <a:pPr lvl="2"/>
             <a:r>
-              <a:rPr lang="en-US"/>
+              <a:rPr lang="en-US" smtClean="0"/>
               <a:t>Third level</a:t>
             </a:r>
           </a:p>
           <a:p>
             <a:pPr lvl="3"/>
             <a:r>
-              <a:rPr lang="en-US"/>
+              <a:rPr lang="en-US" smtClean="0"/>
               <a:t>Fourth level</a:t>
             </a:r>
           </a:p>
           <a:p>
             <a:pPr lvl="4"/>
             <a:r>
-              <a:rPr lang="en-US"/>
+              <a:rPr lang="en-US" smtClean="0"/>
               <a:t>Fifth level</a:t>
             </a:r>
+            <a:endParaRPr lang="en-US"/>
           </a:p>
         </p:txBody>
       </p:sp>
@@ -2726,7 +2731,7 @@
           <a:p>
             <a:fld id="{5BCAD085-E8A6-8845-BD4E-CB4CCA059FC4}" type="datetimeFigureOut">
               <a:rPr lang="en-US" smtClean="0"/>
-              <a:t>10/10/2026</a:t>
+              <a:t>1/27/13</a:t>
             </a:fld>
             <a:endParaRPr lang="en-US"/>
           </a:p>
@@ -3085,7 +3090,7 @@
 </file>
 
 <file path=ppt/slides/slide1.xml><?xml version="1.0" encoding="utf-8"?>
-<p:sld xmlns:a="http://schemas.openxmlformats.org/drawingml/2006/main" xmlns:r="http://schemas.openxmlformats.org/officeDocument/2006/relationships" xmlns:p="http://schemas.openxmlformats.org/presentationml/2006/main">
+<p:sld xmlns:a="http://schemas.openxmlformats.org/drawingml/2006/main" xmlns:p="http://schemas.openxmlformats.org/presentationml/2006/main" xmlns:r="http://schemas.openxmlformats.org/officeDocument/2006/relationships">
   <p:cSld>
     <p:spTree>
       <p:nvGrpSpPr>
@@ -3093,14 +3098,7 @@
         <p:cNvGrpSpPr/>
         <p:nvPr/>
       </p:nvGrpSpPr>
-      <p:grpSpPr>
-        <a:xfrm>
-          <a:off x="0" y="0"/>
-          <a:ext cx="0" cy="0"/>
-          <a:chOff x="0" y="0"/>
-          <a:chExt cx="0" cy="0"/>
-        </a:xfrm>
-      </p:grpSpPr>
+      <p:grpSpPr/>
       <p:sp>
         <p:nvSpPr>
           <p:cNvPr id="2" name="Rectangle 1"/>
@@ -3141,7 +3139,6 @@
           <a:lstStyle/>
           <a:p>
             <a:pPr algn="ctr"/>
-            <a:endParaRPr/>
           </a:p>
         </p:txBody>
       </p:sp>
@@ -3185,7 +3182,6 @@
           <a:lstStyle/>
           <a:p>
             <a:pPr algn="ctr"/>
-            <a:endParaRPr/>
           </a:p>
         </p:txBody>
       </p:sp>
@@ -3217,6 +3213,7 @@
                 </a:solidFill>
                 <a:latin typeface="微软雅黑"/>
                 <a:ea typeface="微软雅黑"/>
+                <a:latin typeface="微软雅黑"/>
               </a:rPr>
               <a:t>普炳软件</a:t>
             </a:r>
@@ -3286,6 +3283,7 @@
                 </a:solidFill>
                 <a:latin typeface="微软雅黑"/>
                 <a:ea typeface="微软雅黑"/>
+                <a:latin typeface="微软雅黑"/>
               </a:rPr>
               <a:t>从靠人做表，到公司能力</a:t>
             </a:r>
@@ -3320,6 +3318,7 @@
                 </a:solidFill>
                 <a:latin typeface="微软雅黑"/>
                 <a:ea typeface="微软雅黑"/>
+                <a:latin typeface="微软雅黑"/>
               </a:rPr>
               <a:t>结构件自动核价平台</a:t>
             </a:r>
@@ -3352,24 +3351,15 @@
               </a:lnSpc>
             </a:pPr>
             <a:r>
-              <a:rPr sz="2200" b="0" dirty="0" err="1">
+              <a:rPr sz="2200" b="0">
                 <a:solidFill>
                   <a:srgbClr val="C8C8C8"/>
                 </a:solidFill>
                 <a:latin typeface="微软雅黑"/>
                 <a:ea typeface="微软雅黑"/>
-              </a:rPr>
-              <a:t>管理人员是公司的建设者</a:t>
-            </a:r>
-            <a:r>
-              <a:rPr sz="2200" b="0" dirty="0">
-                <a:solidFill>
-                  <a:srgbClr val="C8C8C8"/>
-                </a:solidFill>
-                <a:latin typeface="微软雅黑"/>
-                <a:ea typeface="微软雅黑"/>
-              </a:rPr>
-              <a:t>。</a:t>
+                <a:latin typeface="微软雅黑"/>
+              </a:rPr>
+              <a:t>管理人员是公司的建设者。</a:t>
             </a:r>
           </a:p>
           <a:p>
@@ -3379,153 +3369,92 @@
               </a:lnSpc>
             </a:pPr>
             <a:r>
-              <a:rPr sz="2200" b="0" dirty="0" err="1">
+              <a:rPr sz="2200" b="0">
                 <a:solidFill>
                   <a:srgbClr val="C8C8C8"/>
                 </a:solidFill>
                 <a:latin typeface="微软雅黑"/>
                 <a:ea typeface="微软雅黑"/>
-              </a:rPr>
-              <a:t>核价，是数字化建设、AI</a:t>
-            </a:r>
-            <a:r>
-              <a:rPr sz="2200" b="0" dirty="0">
+                <a:latin typeface="微软雅黑"/>
+              </a:rPr>
+              <a:t>核价，是数字化建设、AI 落地最好的抓手。</a:t>
+            </a:r>
+          </a:p>
+        </p:txBody>
+      </p:sp>
+      <p:sp>
+        <p:nvSpPr>
+          <p:cNvPr id="9" name="TextBox 8"/>
+          <p:cNvSpPr txBox="1"/>
+          <p:nvPr/>
+        </p:nvSpPr>
+        <p:spPr>
+          <a:xfrm>
+            <a:off x="640080" y="4754880"/>
+            <a:ext cx="10424160" cy="365760"/>
+          </a:xfrm>
+          <a:prstGeom prst="rect">
+            <a:avLst/>
+          </a:prstGeom>
+          <a:noFill/>
+        </p:spPr>
+        <p:txBody>
+          <a:bodyPr wrap="square" anchor="t"/>
+          <a:lstStyle/>
+          <a:p>
+            <a:pPr algn="l"/>
+            <a:r>
+              <a:rPr sz="1600" b="0">
+                <a:solidFill>
+                  <a:srgbClr val="D04A02"/>
+                </a:solidFill>
+                <a:latin typeface="微软雅黑"/>
+                <a:ea typeface="微软雅黑"/>
+                <a:latin typeface="微软雅黑"/>
+              </a:rPr>
+              <a:t>试用地址  http://117.143.214.90:8000/</a:t>
+            </a:r>
+          </a:p>
+        </p:txBody>
+      </p:sp>
+      <p:sp>
+        <p:nvSpPr>
+          <p:cNvPr id="10" name="TextBox 9"/>
+          <p:cNvSpPr txBox="1"/>
+          <p:nvPr/>
+        </p:nvSpPr>
+        <p:spPr>
+          <a:xfrm>
+            <a:off x="640080" y="5166360"/>
+            <a:ext cx="10424160" cy="365760"/>
+          </a:xfrm>
+          <a:prstGeom prst="rect">
+            <a:avLst/>
+          </a:prstGeom>
+          <a:noFill/>
+        </p:spPr>
+        <p:txBody>
+          <a:bodyPr wrap="square" anchor="t"/>
+          <a:lstStyle/>
+          <a:p>
+            <a:pPr algn="l"/>
+            <a:r>
+              <a:rPr sz="1600" b="0">
                 <a:solidFill>
                   <a:srgbClr val="C8C8C8"/>
                 </a:solidFill>
                 <a:latin typeface="微软雅黑"/>
                 <a:ea typeface="微软雅黑"/>
-              </a:rPr>
-              <a:t> </a:t>
-            </a:r>
-            <a:r>
-              <a:rPr sz="2200" b="0" dirty="0" err="1">
-                <a:solidFill>
-                  <a:srgbClr val="C8C8C8"/>
-                </a:solidFill>
-                <a:latin typeface="微软雅黑"/>
-                <a:ea typeface="微软雅黑"/>
-              </a:rPr>
-              <a:t>落地最好的抓手</a:t>
-            </a:r>
-            <a:r>
-              <a:rPr sz="2200" b="0" dirty="0">
-                <a:solidFill>
-                  <a:srgbClr val="C8C8C8"/>
-                </a:solidFill>
-                <a:latin typeface="微软雅黑"/>
-                <a:ea typeface="微软雅黑"/>
-              </a:rPr>
-              <a:t>。</a:t>
-            </a:r>
-            <a:endParaRPr lang="en-US" sz="2200" b="0" dirty="0">
-              <a:solidFill>
-                <a:srgbClr val="C8C8C8"/>
-              </a:solidFill>
-              <a:latin typeface="微软雅黑"/>
-              <a:ea typeface="微软雅黑"/>
-            </a:endParaRPr>
-          </a:p>
-          <a:p>
-            <a:pPr algn="l">
-              <a:lnSpc>
-                <a:spcPts val="3600"/>
-              </a:lnSpc>
-            </a:pPr>
-            <a:endParaRPr lang="en-US" sz="2200" b="0" dirty="0">
-              <a:solidFill>
-                <a:srgbClr val="C8C8C8"/>
-              </a:solidFill>
-              <a:latin typeface="微软雅黑"/>
-              <a:ea typeface="微软雅黑"/>
-            </a:endParaRPr>
-          </a:p>
-          <a:p>
-            <a:pPr>
-              <a:lnSpc>
-                <a:spcPts val="3600"/>
-              </a:lnSpc>
-            </a:pPr>
-            <a:r>
-              <a:rPr lang="en-US" sz="1600" dirty="0">
-                <a:solidFill>
-                  <a:srgbClr val="FF0000"/>
-                </a:solidFill>
-                <a:latin typeface="微软雅黑"/>
-                <a:ea typeface="微软雅黑"/>
-                <a:hlinkClick r:id="rId2">
-                  <a:extLst>
-                    <a:ext uri="{A12FA001-AC4F-418D-AE19-62706E023703}">
-                      <ahyp:hlinkClr xmlns:ahyp="http://schemas.microsoft.com/office/drawing/2018/hyperlinkcolor" val="tx"/>
-                    </a:ext>
-                  </a:extLst>
-                </a:hlinkClick>
-              </a:rPr>
-              <a:t>http://117.143.214.90:8000/</a:t>
-            </a:r>
-            <a:r>
-              <a:rPr lang="en-US" sz="1600" dirty="0">
-                <a:solidFill>
-                  <a:srgbClr val="C8C8C8"/>
-                </a:solidFill>
-                <a:latin typeface="微软雅黑"/>
-                <a:ea typeface="微软雅黑"/>
-              </a:rPr>
-              <a:t>  </a:t>
-            </a:r>
-            <a:r>
-              <a:rPr lang="zh-CN" altLang="en-US" sz="1600" dirty="0">
-                <a:solidFill>
-                  <a:srgbClr val="C8C8C8"/>
-                </a:solidFill>
-                <a:latin typeface="微软雅黑"/>
-                <a:ea typeface="微软雅黑"/>
-              </a:rPr>
-              <a:t>用户名：</a:t>
-            </a:r>
-            <a:r>
-              <a:rPr lang="en-US" altLang="zh-CN" sz="1600" dirty="0">
-                <a:solidFill>
-                  <a:srgbClr val="C8C8C8"/>
-                </a:solidFill>
-                <a:latin typeface="微软雅黑"/>
-                <a:ea typeface="微软雅黑"/>
-              </a:rPr>
-              <a:t>admin </a:t>
-            </a:r>
-            <a:r>
-              <a:rPr lang="zh-CN" altLang="en-US" sz="1600" dirty="0">
-                <a:solidFill>
-                  <a:srgbClr val="C8C8C8"/>
-                </a:solidFill>
-                <a:latin typeface="微软雅黑"/>
-                <a:ea typeface="微软雅黑"/>
-              </a:rPr>
-              <a:t>密码：</a:t>
-            </a:r>
-            <a:r>
-              <a:rPr lang="en-US" altLang="zh-CN" sz="1600" dirty="0">
-                <a:solidFill>
-                  <a:srgbClr val="C8C8C8"/>
-                </a:solidFill>
-                <a:latin typeface="微软雅黑"/>
-                <a:ea typeface="微软雅黑"/>
-              </a:rPr>
-              <a:t>admin123</a:t>
-            </a:r>
-            <a:endParaRPr sz="1600" b="0" dirty="0">
-              <a:solidFill>
-                <a:srgbClr val="C8C8C8"/>
-              </a:solidFill>
-              <a:latin typeface="微软雅黑"/>
-              <a:ea typeface="微软雅黑"/>
-            </a:endParaRPr>
-          </a:p>
-        </p:txBody>
-      </p:sp>
-      <p:sp>
-        <p:nvSpPr>
-          <p:cNvPr id="9" name="TextBox 8"/>
+                <a:latin typeface="微软雅黑"/>
+              </a:rPr>
+              <a:t>默认账号  admin / admin123</a:t>
+            </a:r>
+          </a:p>
+        </p:txBody>
+      </p:sp>
+      <p:sp>
+        <p:nvSpPr>
+          <p:cNvPr id="11" name="TextBox 10"/>
           <p:cNvSpPr txBox="1"/>
           <p:nvPr/>
         </p:nvSpPr>
@@ -3551,6 +3480,7 @@
                 </a:solidFill>
                 <a:latin typeface="微软雅黑"/>
                 <a:ea typeface="微软雅黑"/>
+                <a:latin typeface="微软雅黑"/>
               </a:rPr>
               <a:t>普炳软件</a:t>
             </a:r>
@@ -3559,7 +3489,7 @@
       </p:sp>
       <p:sp>
         <p:nvSpPr>
-          <p:cNvPr id="10" name="TextBox 9"/>
+          <p:cNvPr id="12" name="TextBox 11"/>
           <p:cNvSpPr txBox="1"/>
           <p:nvPr/>
         </p:nvSpPr>
@@ -3585,6 +3515,7 @@
                 </a:solidFill>
                 <a:latin typeface="Arial"/>
                 <a:ea typeface="微软雅黑"/>
+                <a:latin typeface="Arial"/>
               </a:rPr>
               <a:t>1 / 12</a:t>
             </a:r>
@@ -3600,7 +3531,7 @@
 </file>
 
 <file path=ppt/slides/slide10.xml><?xml version="1.0" encoding="utf-8"?>
-<p:sld xmlns:a="http://schemas.openxmlformats.org/drawingml/2006/main" xmlns:r="http://schemas.openxmlformats.org/officeDocument/2006/relationships" xmlns:p="http://schemas.openxmlformats.org/presentationml/2006/main">
+<p:sld xmlns:a="http://schemas.openxmlformats.org/drawingml/2006/main" xmlns:p="http://schemas.openxmlformats.org/presentationml/2006/main" xmlns:r="http://schemas.openxmlformats.org/officeDocument/2006/relationships">
   <p:cSld>
     <p:spTree>
       <p:nvGrpSpPr>
@@ -3608,14 +3539,7 @@
         <p:cNvGrpSpPr/>
         <p:nvPr/>
       </p:nvGrpSpPr>
-      <p:grpSpPr>
-        <a:xfrm>
-          <a:off x="0" y="0"/>
-          <a:ext cx="0" cy="0"/>
-          <a:chOff x="0" y="0"/>
-          <a:chExt cx="0" cy="0"/>
-        </a:xfrm>
-      </p:grpSpPr>
+      <p:grpSpPr/>
       <p:sp>
         <p:nvSpPr>
           <p:cNvPr id="2" name="Rectangle 1"/>
@@ -3656,7 +3580,6 @@
           <a:lstStyle/>
           <a:p>
             <a:pPr algn="ctr"/>
-            <a:endParaRPr/>
           </a:p>
         </p:txBody>
       </p:sp>
@@ -3700,7 +3623,6 @@
           <a:lstStyle/>
           <a:p>
             <a:pPr algn="ctr"/>
-            <a:endParaRPr/>
           </a:p>
         </p:txBody>
       </p:sp>
@@ -3744,7 +3666,6 @@
           <a:lstStyle/>
           <a:p>
             <a:pPr algn="ctr"/>
-            <a:endParaRPr/>
           </a:p>
         </p:txBody>
       </p:sp>
@@ -3776,6 +3697,7 @@
                 </a:solidFill>
                 <a:latin typeface="Arial"/>
                 <a:ea typeface="微软雅黑"/>
+                <a:latin typeface="Arial"/>
               </a:rPr>
               <a:t>09   FLOW</a:t>
             </a:r>
@@ -3810,6 +3732,7 @@
                 </a:solidFill>
                 <a:latin typeface="微软雅黑"/>
                 <a:ea typeface="微软雅黑"/>
+                <a:latin typeface="微软雅黑"/>
               </a:rPr>
               <a:t>从找表，到直接问</a:t>
             </a:r>
@@ -3844,6 +3767,7 @@
                 </a:solidFill>
                 <a:latin typeface="微软雅黑"/>
                 <a:ea typeface="微软雅黑"/>
+                <a:latin typeface="微软雅黑"/>
               </a:rPr>
               <a:t>过去</a:t>
             </a:r>
@@ -3878,6 +3802,7 @@
                 </a:solidFill>
                 <a:latin typeface="微软雅黑"/>
                 <a:ea typeface="微软雅黑"/>
+                <a:latin typeface="微软雅黑"/>
               </a:rPr>
               <a:t>现在</a:t>
             </a:r>
@@ -3926,7 +3851,6 @@
           <a:lstStyle/>
           <a:p>
             <a:pPr algn="ctr"/>
-            <a:endParaRPr/>
           </a:p>
         </p:txBody>
       </p:sp>
@@ -3958,6 +3882,7 @@
                 </a:solidFill>
                 <a:latin typeface="微软雅黑"/>
                 <a:ea typeface="微软雅黑"/>
+                <a:latin typeface="微软雅黑"/>
               </a:rPr>
               <a:t>01    人找 Excel</a:t>
             </a:r>
@@ -4006,7 +3931,6 @@
           <a:lstStyle/>
           <a:p>
             <a:pPr algn="ctr"/>
-            <a:endParaRPr/>
           </a:p>
         </p:txBody>
       </p:sp>
@@ -4038,6 +3962,7 @@
                 </a:solidFill>
                 <a:latin typeface="微软雅黑"/>
                 <a:ea typeface="微软雅黑"/>
+                <a:latin typeface="微软雅黑"/>
               </a:rPr>
               <a:t>02    找数据</a:t>
             </a:r>
@@ -4086,7 +4011,6 @@
           <a:lstStyle/>
           <a:p>
             <a:pPr algn="ctr"/>
-            <a:endParaRPr/>
           </a:p>
         </p:txBody>
       </p:sp>
@@ -4118,6 +4042,7 @@
                 </a:solidFill>
                 <a:latin typeface="微软雅黑"/>
                 <a:ea typeface="微软雅黑"/>
+                <a:latin typeface="微软雅黑"/>
               </a:rPr>
               <a:t>03    找公式</a:t>
             </a:r>
@@ -4166,7 +4091,6 @@
           <a:lstStyle/>
           <a:p>
             <a:pPr algn="ctr"/>
-            <a:endParaRPr/>
           </a:p>
         </p:txBody>
       </p:sp>
@@ -4198,6 +4122,7 @@
                 </a:solidFill>
                 <a:latin typeface="微软雅黑"/>
                 <a:ea typeface="微软雅黑"/>
+                <a:latin typeface="微软雅黑"/>
               </a:rPr>
               <a:t>04    做分析</a:t>
             </a:r>
@@ -4246,7 +4171,6 @@
           <a:lstStyle/>
           <a:p>
             <a:pPr algn="ctr"/>
-            <a:endParaRPr/>
           </a:p>
         </p:txBody>
       </p:sp>
@@ -4278,6 +4202,7 @@
                 </a:solidFill>
                 <a:latin typeface="微软雅黑"/>
                 <a:ea typeface="微软雅黑"/>
+                <a:latin typeface="微软雅黑"/>
               </a:rPr>
               <a:t>05    得出结论</a:t>
             </a:r>
@@ -4326,7 +4251,6 @@
           <a:lstStyle/>
           <a:p>
             <a:pPr algn="ctr"/>
-            <a:endParaRPr/>
           </a:p>
         </p:txBody>
       </p:sp>
@@ -4370,7 +4294,6 @@
           <a:lstStyle/>
           <a:p>
             <a:pPr algn="ctr"/>
-            <a:endParaRPr/>
           </a:p>
         </p:txBody>
       </p:sp>
@@ -4402,6 +4325,7 @@
                 </a:solidFill>
                 <a:latin typeface="微软雅黑"/>
                 <a:ea typeface="微软雅黑"/>
+                <a:latin typeface="微软雅黑"/>
               </a:rPr>
               <a:t>01    直接问</a:t>
             </a:r>
@@ -4450,7 +4374,6 @@
           <a:lstStyle/>
           <a:p>
             <a:pPr algn="ctr"/>
-            <a:endParaRPr/>
           </a:p>
         </p:txBody>
       </p:sp>
@@ -4494,7 +4417,6 @@
           <a:lstStyle/>
           <a:p>
             <a:pPr algn="ctr"/>
-            <a:endParaRPr/>
           </a:p>
         </p:txBody>
       </p:sp>
@@ -4526,6 +4448,7 @@
                 </a:solidFill>
                 <a:latin typeface="微软雅黑"/>
                 <a:ea typeface="微软雅黑"/>
+                <a:latin typeface="微软雅黑"/>
               </a:rPr>
               <a:t>02    系统取数</a:t>
             </a:r>
@@ -4574,7 +4497,6 @@
           <a:lstStyle/>
           <a:p>
             <a:pPr algn="ctr"/>
-            <a:endParaRPr/>
           </a:p>
         </p:txBody>
       </p:sp>
@@ -4618,7 +4540,6 @@
           <a:lstStyle/>
           <a:p>
             <a:pPr algn="ctr"/>
-            <a:endParaRPr/>
           </a:p>
         </p:txBody>
       </p:sp>
@@ -4650,6 +4571,7 @@
                 </a:solidFill>
                 <a:latin typeface="微软雅黑"/>
                 <a:ea typeface="微软雅黑"/>
+                <a:latin typeface="微软雅黑"/>
               </a:rPr>
               <a:t>03    核价引擎计算</a:t>
             </a:r>
@@ -4698,7 +4620,6 @@
           <a:lstStyle/>
           <a:p>
             <a:pPr algn="ctr"/>
-            <a:endParaRPr/>
           </a:p>
         </p:txBody>
       </p:sp>
@@ -4742,7 +4663,6 @@
           <a:lstStyle/>
           <a:p>
             <a:pPr algn="ctr"/>
-            <a:endParaRPr/>
           </a:p>
         </p:txBody>
       </p:sp>
@@ -4774,6 +4694,7 @@
                 </a:solidFill>
                 <a:latin typeface="微软雅黑"/>
                 <a:ea typeface="微软雅黑"/>
+                <a:latin typeface="微软雅黑"/>
               </a:rPr>
               <a:t>04    AI 解释</a:t>
             </a:r>
@@ -4843,6 +4764,7 @@
                 </a:solidFill>
                 <a:latin typeface="微软雅黑"/>
                 <a:ea typeface="微软雅黑"/>
+                <a:latin typeface="微软雅黑"/>
               </a:rPr>
               <a:t>普炳软件  ·  核价平台</a:t>
             </a:r>
@@ -4877,6 +4799,7 @@
                 </a:solidFill>
                 <a:latin typeface="Arial"/>
                 <a:ea typeface="微软雅黑"/>
+                <a:latin typeface="Arial"/>
               </a:rPr>
               <a:t>10 / 12</a:t>
             </a:r>
@@ -4892,7 +4815,7 @@
 </file>
 
 <file path=ppt/slides/slide11.xml><?xml version="1.0" encoding="utf-8"?>
-<p:sld xmlns:a="http://schemas.openxmlformats.org/drawingml/2006/main" xmlns:r="http://schemas.openxmlformats.org/officeDocument/2006/relationships" xmlns:p="http://schemas.openxmlformats.org/presentationml/2006/main">
+<p:sld xmlns:a="http://schemas.openxmlformats.org/drawingml/2006/main" xmlns:p="http://schemas.openxmlformats.org/presentationml/2006/main" xmlns:r="http://schemas.openxmlformats.org/officeDocument/2006/relationships">
   <p:cSld>
     <p:spTree>
       <p:nvGrpSpPr>
@@ -4900,14 +4823,7 @@
         <p:cNvGrpSpPr/>
         <p:nvPr/>
       </p:nvGrpSpPr>
-      <p:grpSpPr>
-        <a:xfrm>
-          <a:off x="0" y="0"/>
-          <a:ext cx="0" cy="0"/>
-          <a:chOff x="0" y="0"/>
-          <a:chExt cx="0" cy="0"/>
-        </a:xfrm>
-      </p:grpSpPr>
+      <p:grpSpPr/>
       <p:sp>
         <p:nvSpPr>
           <p:cNvPr id="2" name="Rectangle 1"/>
@@ -4948,7 +4864,6 @@
           <a:lstStyle/>
           <a:p>
             <a:pPr algn="ctr"/>
-            <a:endParaRPr/>
           </a:p>
         </p:txBody>
       </p:sp>
@@ -4992,7 +4907,6 @@
           <a:lstStyle/>
           <a:p>
             <a:pPr algn="ctr"/>
-            <a:endParaRPr/>
           </a:p>
         </p:txBody>
       </p:sp>
@@ -5036,7 +4950,6 @@
           <a:lstStyle/>
           <a:p>
             <a:pPr algn="ctr"/>
-            <a:endParaRPr/>
           </a:p>
         </p:txBody>
       </p:sp>
@@ -5068,6 +4981,7 @@
                 </a:solidFill>
                 <a:latin typeface="Arial"/>
                 <a:ea typeface="微软雅黑"/>
+                <a:latin typeface="Arial"/>
               </a:rPr>
               <a:t>10   ONE LEDGER</a:t>
             </a:r>
@@ -5102,6 +5016,7 @@
                 </a:solidFill>
                 <a:latin typeface="微软雅黑"/>
                 <a:ea typeface="微软雅黑"/>
+                <a:latin typeface="微软雅黑"/>
               </a:rPr>
               <a:t>采购、财务、管理人员，看见同一本账</a:t>
             </a:r>
@@ -5150,7 +5065,6 @@
           <a:lstStyle/>
           <a:p>
             <a:pPr algn="ctr"/>
-            <a:endParaRPr/>
           </a:p>
         </p:txBody>
       </p:sp>
@@ -5194,7 +5108,6 @@
           <a:lstStyle/>
           <a:p>
             <a:pPr algn="ctr"/>
-            <a:endParaRPr/>
           </a:p>
         </p:txBody>
       </p:sp>
@@ -5226,6 +5139,7 @@
                 </a:solidFill>
                 <a:latin typeface="Arial"/>
                 <a:ea typeface="微软雅黑"/>
+                <a:latin typeface="Arial"/>
               </a:rPr>
               <a:t>Data</a:t>
             </a:r>
@@ -5260,6 +5174,7 @@
                 </a:solidFill>
                 <a:latin typeface="微软雅黑"/>
                 <a:ea typeface="微软雅黑"/>
+                <a:latin typeface="微软雅黑"/>
               </a:rPr>
               <a:t>同一套数据</a:t>
             </a:r>
@@ -5298,6 +5213,7 @@
                 </a:solidFill>
                 <a:latin typeface="微软雅黑"/>
                 <a:ea typeface="微软雅黑"/>
+                <a:latin typeface="微软雅黑"/>
               </a:rPr>
               <a:t>文件可溯，不是私人拷贝。</a:t>
             </a:r>
@@ -5346,7 +5262,6 @@
           <a:lstStyle/>
           <a:p>
             <a:pPr algn="ctr"/>
-            <a:endParaRPr/>
           </a:p>
         </p:txBody>
       </p:sp>
@@ -5390,7 +5305,6 @@
           <a:lstStyle/>
           <a:p>
             <a:pPr algn="ctr"/>
-            <a:endParaRPr/>
           </a:p>
         </p:txBody>
       </p:sp>
@@ -5422,6 +5336,7 @@
                 </a:solidFill>
                 <a:latin typeface="Arial"/>
                 <a:ea typeface="微软雅黑"/>
+                <a:latin typeface="Arial"/>
               </a:rPr>
               <a:t>Rule</a:t>
             </a:r>
@@ -5456,6 +5371,7 @@
                 </a:solidFill>
                 <a:latin typeface="微软雅黑"/>
                 <a:ea typeface="微软雅黑"/>
+                <a:latin typeface="微软雅黑"/>
               </a:rPr>
               <a:t>同一套规则</a:t>
             </a:r>
@@ -5494,6 +5410,7 @@
                 </a:solidFill>
                 <a:latin typeface="微软雅黑"/>
                 <a:ea typeface="微软雅黑"/>
+                <a:latin typeface="微软雅黑"/>
               </a:rPr>
               <a:t>开给奇瑞、付给二级商，同一引擎。</a:t>
             </a:r>
@@ -5542,7 +5459,6 @@
           <a:lstStyle/>
           <a:p>
             <a:pPr algn="ctr"/>
-            <a:endParaRPr/>
           </a:p>
         </p:txBody>
       </p:sp>
@@ -5586,7 +5502,6 @@
           <a:lstStyle/>
           <a:p>
             <a:pPr algn="ctr"/>
-            <a:endParaRPr/>
           </a:p>
         </p:txBody>
       </p:sp>
@@ -5618,6 +5533,7 @@
                 </a:solidFill>
                 <a:latin typeface="Arial"/>
                 <a:ea typeface="微软雅黑"/>
+                <a:latin typeface="Arial"/>
               </a:rPr>
               <a:t>Result</a:t>
             </a:r>
@@ -5652,6 +5568,7 @@
                 </a:solidFill>
                 <a:latin typeface="微软雅黑"/>
                 <a:ea typeface="微软雅黑"/>
+                <a:latin typeface="微软雅黑"/>
               </a:rPr>
               <a:t>同一套结果</a:t>
             </a:r>
@@ -5690,6 +5607,7 @@
                 </a:solidFill>
                 <a:latin typeface="微软雅黑"/>
                 <a:ea typeface="微软雅黑"/>
+                <a:latin typeface="微软雅黑"/>
               </a:rPr>
               <a:t>当月依据，当月结果。对账不必扯皮。</a:t>
             </a:r>
@@ -5759,6 +5677,7 @@
                 </a:solidFill>
                 <a:latin typeface="微软雅黑"/>
                 <a:ea typeface="微软雅黑"/>
+                <a:latin typeface="微软雅黑"/>
               </a:rPr>
               <a:t>普炳软件  ·  核价平台</a:t>
             </a:r>
@@ -5793,6 +5712,7 @@
                 </a:solidFill>
                 <a:latin typeface="Arial"/>
                 <a:ea typeface="微软雅黑"/>
+                <a:latin typeface="Arial"/>
               </a:rPr>
               <a:t>11 / 12</a:t>
             </a:r>
@@ -5808,7 +5728,7 @@
 </file>
 
 <file path=ppt/slides/slide12.xml><?xml version="1.0" encoding="utf-8"?>
-<p:sld xmlns:a="http://schemas.openxmlformats.org/drawingml/2006/main" xmlns:r="http://schemas.openxmlformats.org/officeDocument/2006/relationships" xmlns:p="http://schemas.openxmlformats.org/presentationml/2006/main">
+<p:sld xmlns:a="http://schemas.openxmlformats.org/drawingml/2006/main" xmlns:p="http://schemas.openxmlformats.org/presentationml/2006/main" xmlns:r="http://schemas.openxmlformats.org/officeDocument/2006/relationships">
   <p:cSld>
     <p:spTree>
       <p:nvGrpSpPr>
@@ -5816,14 +5736,7 @@
         <p:cNvGrpSpPr/>
         <p:nvPr/>
       </p:nvGrpSpPr>
-      <p:grpSpPr>
-        <a:xfrm>
-          <a:off x="0" y="0"/>
-          <a:ext cx="0" cy="0"/>
-          <a:chOff x="0" y="0"/>
-          <a:chExt cx="0" cy="0"/>
-        </a:xfrm>
-      </p:grpSpPr>
+      <p:grpSpPr/>
       <p:sp>
         <p:nvSpPr>
           <p:cNvPr id="2" name="Rectangle 1"/>
@@ -5864,7 +5777,6 @@
           <a:lstStyle/>
           <a:p>
             <a:pPr algn="ctr"/>
-            <a:endParaRPr/>
           </a:p>
         </p:txBody>
       </p:sp>
@@ -5908,7 +5820,6 @@
           <a:lstStyle/>
           <a:p>
             <a:pPr algn="ctr"/>
-            <a:endParaRPr/>
           </a:p>
         </p:txBody>
       </p:sp>
@@ -5975,6 +5886,7 @@
                 </a:solidFill>
                 <a:latin typeface="Arial"/>
                 <a:ea typeface="微软雅黑"/>
+                <a:latin typeface="Arial"/>
               </a:rPr>
               <a:t>ONE LINE</a:t>
             </a:r>
@@ -6013,6 +5925,7 @@
                 </a:solidFill>
                 <a:latin typeface="微软雅黑"/>
                 <a:ea typeface="微软雅黑"/>
+                <a:latin typeface="微软雅黑"/>
               </a:rPr>
               <a:t>先把核价做成公司能力。</a:t>
             </a:r>
@@ -6030,6 +5943,7 @@
                 </a:solidFill>
                 <a:latin typeface="微软雅黑"/>
                 <a:ea typeface="微软雅黑"/>
+                <a:latin typeface="微软雅黑"/>
               </a:rPr>
               <a:t>数字化建设和 AI 落地，就有了抓手。</a:t>
             </a:r>
@@ -6064,6 +5978,7 @@
                 </a:solidFill>
                 <a:latin typeface="微软雅黑"/>
                 <a:ea typeface="微软雅黑"/>
+                <a:latin typeface="微软雅黑"/>
               </a:rPr>
               <a:t>少绑人、少扯皮。开给奇瑞多少、付给二级商多少，约 20 秒能算清。</a:t>
             </a:r>
@@ -6098,6 +6013,7 @@
                 </a:solidFill>
                 <a:latin typeface="微软雅黑"/>
                 <a:ea typeface="微软雅黑"/>
+                <a:latin typeface="微软雅黑"/>
               </a:rPr>
               <a:t>普炳软件</a:t>
             </a:r>
@@ -6132,6 +6048,7 @@
                 </a:solidFill>
                 <a:latin typeface="Arial"/>
                 <a:ea typeface="微软雅黑"/>
+                <a:latin typeface="Arial"/>
               </a:rPr>
               <a:t>12 / 12</a:t>
             </a:r>
@@ -6147,7 +6064,7 @@
 </file>
 
 <file path=ppt/slides/slide2.xml><?xml version="1.0" encoding="utf-8"?>
-<p:sld xmlns:a="http://schemas.openxmlformats.org/drawingml/2006/main" xmlns:r="http://schemas.openxmlformats.org/officeDocument/2006/relationships" xmlns:p="http://schemas.openxmlformats.org/presentationml/2006/main">
+<p:sld xmlns:a="http://schemas.openxmlformats.org/drawingml/2006/main" xmlns:p="http://schemas.openxmlformats.org/presentationml/2006/main" xmlns:r="http://schemas.openxmlformats.org/officeDocument/2006/relationships">
   <p:cSld>
     <p:spTree>
       <p:nvGrpSpPr>
@@ -6155,14 +6072,7 @@
         <p:cNvGrpSpPr/>
         <p:nvPr/>
       </p:nvGrpSpPr>
-      <p:grpSpPr>
-        <a:xfrm>
-          <a:off x="0" y="0"/>
-          <a:ext cx="0" cy="0"/>
-          <a:chOff x="0" y="0"/>
-          <a:chExt cx="0" cy="0"/>
-        </a:xfrm>
-      </p:grpSpPr>
+      <p:grpSpPr/>
       <p:sp>
         <p:nvSpPr>
           <p:cNvPr id="2" name="Rectangle 1"/>
@@ -6203,7 +6113,6 @@
           <a:lstStyle/>
           <a:p>
             <a:pPr algn="ctr"/>
-            <a:endParaRPr/>
           </a:p>
         </p:txBody>
       </p:sp>
@@ -6247,7 +6156,6 @@
           <a:lstStyle/>
           <a:p>
             <a:pPr algn="ctr"/>
-            <a:endParaRPr/>
           </a:p>
         </p:txBody>
       </p:sp>
@@ -6291,7 +6199,6 @@
           <a:lstStyle/>
           <a:p>
             <a:pPr algn="ctr"/>
-            <a:endParaRPr/>
           </a:p>
         </p:txBody>
       </p:sp>
@@ -6323,6 +6230,7 @@
                 </a:solidFill>
                 <a:latin typeface="Arial"/>
                 <a:ea typeface="微软雅黑"/>
+                <a:latin typeface="Arial"/>
               </a:rPr>
               <a:t>01   THE LEVER</a:t>
             </a:r>
@@ -6357,6 +6265,7 @@
                 </a:solidFill>
                 <a:latin typeface="微软雅黑"/>
                 <a:ea typeface="微软雅黑"/>
+                <a:latin typeface="微软雅黑"/>
               </a:rPr>
               <a:t>数字化、AI 要落地，核价是最好的抓手</a:t>
             </a:r>
@@ -6391,6 +6300,7 @@
                 </a:solidFill>
                 <a:latin typeface="微软雅黑"/>
                 <a:ea typeface="微软雅黑"/>
+                <a:latin typeface="微软雅黑"/>
               </a:rPr>
               <a:t>建设不是再上一个系统。是把公司最痛、最有规则、立刻能见效的事做成能力。</a:t>
             </a:r>
@@ -6439,7 +6349,6 @@
           <a:lstStyle/>
           <a:p>
             <a:pPr algn="ctr"/>
-            <a:endParaRPr/>
           </a:p>
         </p:txBody>
       </p:sp>
@@ -6483,7 +6392,6 @@
           <a:lstStyle/>
           <a:p>
             <a:pPr algn="ctr"/>
-            <a:endParaRPr/>
           </a:p>
         </p:txBody>
       </p:sp>
@@ -6515,6 +6423,7 @@
                 </a:solidFill>
                 <a:latin typeface="微软雅黑"/>
                 <a:ea typeface="微软雅黑"/>
+                <a:latin typeface="微软雅黑"/>
               </a:rPr>
               <a:t>有规则</a:t>
             </a:r>
@@ -6553,6 +6462,7 @@
                 </a:solidFill>
                 <a:latin typeface="微软雅黑"/>
                 <a:ea typeface="微软雅黑"/>
+                <a:latin typeface="微软雅黑"/>
               </a:rPr>
               <a:t>钢价政策、工艺、BOM、设变，本来就有企业口径。</a:t>
             </a:r>
@@ -6570,6 +6480,7 @@
                 </a:solidFill>
                 <a:latin typeface="微软雅黑"/>
                 <a:ea typeface="微软雅黑"/>
+                <a:latin typeface="微软雅黑"/>
               </a:rPr>
               <a:t>适合写成引擎，而不是口头 AI。</a:t>
             </a:r>
@@ -6618,7 +6529,6 @@
           <a:lstStyle/>
           <a:p>
             <a:pPr algn="ctr"/>
-            <a:endParaRPr/>
           </a:p>
         </p:txBody>
       </p:sp>
@@ -6662,7 +6572,6 @@
           <a:lstStyle/>
           <a:p>
             <a:pPr algn="ctr"/>
-            <a:endParaRPr/>
           </a:p>
         </p:txBody>
       </p:sp>
@@ -6694,6 +6603,7 @@
                 </a:solidFill>
                 <a:latin typeface="微软雅黑"/>
                 <a:ea typeface="微软雅黑"/>
+                <a:latin typeface="微软雅黑"/>
               </a:rPr>
               <a:t>有真账</a:t>
             </a:r>
@@ -6732,6 +6642,7 @@
                 </a:solidFill>
                 <a:latin typeface="微软雅黑"/>
                 <a:ea typeface="微软雅黑"/>
+                <a:latin typeface="微软雅黑"/>
               </a:rPr>
               <a:t>开给奇瑞的总成价、付给二级商的采购价，每月都要对账。</a:t>
             </a:r>
@@ -6749,6 +6660,7 @@
                 </a:solidFill>
                 <a:latin typeface="微软雅黑"/>
                 <a:ea typeface="微软雅黑"/>
+                <a:latin typeface="微软雅黑"/>
               </a:rPr>
               <a:t>建设立刻碰到钱。</a:t>
             </a:r>
@@ -6797,7 +6709,6 @@
           <a:lstStyle/>
           <a:p>
             <a:pPr algn="ctr"/>
-            <a:endParaRPr/>
           </a:p>
         </p:txBody>
       </p:sp>
@@ -6841,7 +6752,6 @@
           <a:lstStyle/>
           <a:p>
             <a:pPr algn="ctr"/>
-            <a:endParaRPr/>
           </a:p>
         </p:txBody>
       </p:sp>
@@ -6873,6 +6783,7 @@
                 </a:solidFill>
                 <a:latin typeface="微软雅黑"/>
                 <a:ea typeface="微软雅黑"/>
+                <a:latin typeface="微软雅黑"/>
               </a:rPr>
               <a:t>立刻见效</a:t>
             </a:r>
@@ -6911,6 +6822,7 @@
                 </a:solidFill>
                 <a:latin typeface="微软雅黑"/>
                 <a:ea typeface="微软雅黑"/>
+                <a:latin typeface="微软雅黑"/>
               </a:rPr>
               <a:t>一事一议以前要熟练人员做好几天。</a:t>
             </a:r>
@@ -6928,6 +6840,7 @@
                 </a:solidFill>
                 <a:latin typeface="微软雅黑"/>
                 <a:ea typeface="微软雅黑"/>
+                <a:latin typeface="微软雅黑"/>
               </a:rPr>
               <a:t>上传后引擎约 20 秒。AI 问的是这本真账。</a:t>
             </a:r>
@@ -6997,6 +6910,7 @@
                 </a:solidFill>
                 <a:latin typeface="微软雅黑"/>
                 <a:ea typeface="微软雅黑"/>
+                <a:latin typeface="微软雅黑"/>
               </a:rPr>
               <a:t>普炳软件  ·  核价平台</a:t>
             </a:r>
@@ -7031,6 +6945,7 @@
                 </a:solidFill>
                 <a:latin typeface="Arial"/>
                 <a:ea typeface="微软雅黑"/>
+                <a:latin typeface="Arial"/>
               </a:rPr>
               <a:t>2 / 12</a:t>
             </a:r>
@@ -7046,7 +6961,7 @@
 </file>
 
 <file path=ppt/slides/slide3.xml><?xml version="1.0" encoding="utf-8"?>
-<p:sld xmlns:a="http://schemas.openxmlformats.org/drawingml/2006/main" xmlns:r="http://schemas.openxmlformats.org/officeDocument/2006/relationships" xmlns:p="http://schemas.openxmlformats.org/presentationml/2006/main">
+<p:sld xmlns:a="http://schemas.openxmlformats.org/drawingml/2006/main" xmlns:p="http://schemas.openxmlformats.org/presentationml/2006/main" xmlns:r="http://schemas.openxmlformats.org/officeDocument/2006/relationships">
   <p:cSld>
     <p:spTree>
       <p:nvGrpSpPr>
@@ -7054,14 +6969,7 @@
         <p:cNvGrpSpPr/>
         <p:nvPr/>
       </p:nvGrpSpPr>
-      <p:grpSpPr>
-        <a:xfrm>
-          <a:off x="0" y="0"/>
-          <a:ext cx="0" cy="0"/>
-          <a:chOff x="0" y="0"/>
-          <a:chExt cx="0" cy="0"/>
-        </a:xfrm>
-      </p:grpSpPr>
+      <p:grpSpPr/>
       <p:sp>
         <p:nvSpPr>
           <p:cNvPr id="2" name="Rectangle 1"/>
@@ -7102,7 +7010,6 @@
           <a:lstStyle/>
           <a:p>
             <a:pPr algn="ctr"/>
-            <a:endParaRPr/>
           </a:p>
         </p:txBody>
       </p:sp>
@@ -7146,7 +7053,6 @@
           <a:lstStyle/>
           <a:p>
             <a:pPr algn="ctr"/>
-            <a:endParaRPr/>
           </a:p>
         </p:txBody>
       </p:sp>
@@ -7190,7 +7096,6 @@
           <a:lstStyle/>
           <a:p>
             <a:pPr algn="ctr"/>
-            <a:endParaRPr/>
           </a:p>
         </p:txBody>
       </p:sp>
@@ -7222,6 +7127,7 @@
                 </a:solidFill>
                 <a:latin typeface="Arial"/>
                 <a:ea typeface="微软雅黑"/>
+                <a:latin typeface="Arial"/>
               </a:rPr>
               <a:t>02   WHAT IT IS</a:t>
             </a:r>
@@ -7256,6 +7162,7 @@
                 </a:solidFill>
                 <a:latin typeface="微软雅黑"/>
                 <a:ea typeface="微软雅黑"/>
+                <a:latin typeface="微软雅黑"/>
               </a:rPr>
               <a:t>结构件自动核价平台</a:t>
             </a:r>
@@ -7294,6 +7201,7 @@
                 </a:solidFill>
                 <a:latin typeface="微软雅黑"/>
                 <a:ea typeface="微软雅黑"/>
+                <a:latin typeface="微软雅黑"/>
               </a:rPr>
               <a:t>政策、BOM、工艺、变更纳入同一套规则。算出总成与采购对象价格，直接出协议；AI 解读动因。</a:t>
             </a:r>
@@ -7342,7 +7250,6 @@
           <a:lstStyle/>
           <a:p>
             <a:pPr algn="ctr"/>
-            <a:endParaRPr/>
           </a:p>
         </p:txBody>
       </p:sp>
@@ -7386,7 +7293,6 @@
           <a:lstStyle/>
           <a:p>
             <a:pPr algn="ctr"/>
-            <a:endParaRPr/>
           </a:p>
         </p:txBody>
       </p:sp>
@@ -7418,6 +7324,7 @@
                 </a:solidFill>
                 <a:latin typeface="Arial"/>
                 <a:ea typeface="微软雅黑"/>
+                <a:latin typeface="Arial"/>
               </a:rPr>
               <a:t>Policy</a:t>
             </a:r>
@@ -7452,6 +7359,7 @@
                 </a:solidFill>
                 <a:latin typeface="微软雅黑"/>
                 <a:ea typeface="微软雅黑"/>
+                <a:latin typeface="微软雅黑"/>
               </a:rPr>
               <a:t>钢价一事一议</a:t>
             </a:r>
@@ -7500,7 +7408,6 @@
           <a:lstStyle/>
           <a:p>
             <a:pPr algn="ctr"/>
-            <a:endParaRPr/>
           </a:p>
         </p:txBody>
       </p:sp>
@@ -7544,7 +7451,6 @@
           <a:lstStyle/>
           <a:p>
             <a:pPr algn="ctr"/>
-            <a:endParaRPr/>
           </a:p>
         </p:txBody>
       </p:sp>
@@ -7576,6 +7482,7 @@
                 </a:solidFill>
                 <a:latin typeface="Arial"/>
                 <a:ea typeface="微软雅黑"/>
+                <a:latin typeface="Arial"/>
               </a:rPr>
               <a:t>BOM</a:t>
             </a:r>
@@ -7610,6 +7517,7 @@
                 </a:solidFill>
                 <a:latin typeface="微软雅黑"/>
                 <a:ea typeface="微软雅黑"/>
+                <a:latin typeface="微软雅黑"/>
               </a:rPr>
               <a:t>结构与外购</a:t>
             </a:r>
@@ -7658,7 +7566,6 @@
           <a:lstStyle/>
           <a:p>
             <a:pPr algn="ctr"/>
-            <a:endParaRPr/>
           </a:p>
         </p:txBody>
       </p:sp>
@@ -7702,7 +7609,6 @@
           <a:lstStyle/>
           <a:p>
             <a:pPr algn="ctr"/>
-            <a:endParaRPr/>
           </a:p>
         </p:txBody>
       </p:sp>
@@ -7734,6 +7640,7 @@
                 </a:solidFill>
                 <a:latin typeface="Arial"/>
                 <a:ea typeface="微软雅黑"/>
+                <a:latin typeface="Arial"/>
               </a:rPr>
               <a:t>Process</a:t>
             </a:r>
@@ -7768,6 +7675,7 @@
                 </a:solidFill>
                 <a:latin typeface="微软雅黑"/>
                 <a:ea typeface="微软雅黑"/>
+                <a:latin typeface="微软雅黑"/>
               </a:rPr>
               <a:t>工艺与模具</a:t>
             </a:r>
@@ -7816,7 +7724,6 @@
           <a:lstStyle/>
           <a:p>
             <a:pPr algn="ctr"/>
-            <a:endParaRPr/>
           </a:p>
         </p:txBody>
       </p:sp>
@@ -7860,7 +7767,6 @@
           <a:lstStyle/>
           <a:p>
             <a:pPr algn="ctr"/>
-            <a:endParaRPr/>
           </a:p>
         </p:txBody>
       </p:sp>
@@ -7892,6 +7798,7 @@
                 </a:solidFill>
                 <a:latin typeface="Arial"/>
                 <a:ea typeface="微软雅黑"/>
+                <a:latin typeface="Arial"/>
               </a:rPr>
               <a:t>Change</a:t>
             </a:r>
@@ -7926,6 +7833,7 @@
                 </a:solidFill>
                 <a:latin typeface="微软雅黑"/>
                 <a:ea typeface="微软雅黑"/>
+                <a:latin typeface="微软雅黑"/>
               </a:rPr>
               <a:t>工程变更</a:t>
             </a:r>
@@ -7974,7 +7882,6 @@
           <a:lstStyle/>
           <a:p>
             <a:pPr algn="ctr"/>
-            <a:endParaRPr/>
           </a:p>
         </p:txBody>
       </p:sp>
@@ -8018,7 +7925,6 @@
           <a:lstStyle/>
           <a:p>
             <a:pPr algn="ctr"/>
-            <a:endParaRPr/>
           </a:p>
         </p:txBody>
       </p:sp>
@@ -8050,6 +7956,7 @@
                 </a:solidFill>
                 <a:latin typeface="Arial"/>
                 <a:ea typeface="微软雅黑"/>
+                <a:latin typeface="Arial"/>
               </a:rPr>
               <a:t>Costing</a:t>
             </a:r>
@@ -8084,6 +7991,7 @@
                 </a:solidFill>
                 <a:latin typeface="微软雅黑"/>
                 <a:ea typeface="微软雅黑"/>
+                <a:latin typeface="微软雅黑"/>
               </a:rPr>
               <a:t>件价与总成</a:t>
             </a:r>
@@ -8132,7 +8040,6 @@
           <a:lstStyle/>
           <a:p>
             <a:pPr algn="ctr"/>
-            <a:endParaRPr/>
           </a:p>
         </p:txBody>
       </p:sp>
@@ -8176,7 +8083,6 @@
           <a:lstStyle/>
           <a:p>
             <a:pPr algn="ctr"/>
-            <a:endParaRPr/>
           </a:p>
         </p:txBody>
       </p:sp>
@@ -8208,6 +8114,7 @@
                 </a:solidFill>
                 <a:latin typeface="Arial"/>
                 <a:ea typeface="微软雅黑"/>
+                <a:latin typeface="Arial"/>
               </a:rPr>
               <a:t>Contract</a:t>
             </a:r>
@@ -8242,6 +8149,7 @@
                 </a:solidFill>
                 <a:latin typeface="微软雅黑"/>
                 <a:ea typeface="微软雅黑"/>
+                <a:latin typeface="微软雅黑"/>
               </a:rPr>
               <a:t>采购协议</a:t>
             </a:r>
@@ -8311,6 +8219,7 @@
                 </a:solidFill>
                 <a:latin typeface="微软雅黑"/>
                 <a:ea typeface="微软雅黑"/>
+                <a:latin typeface="微软雅黑"/>
               </a:rPr>
               <a:t>普炳软件  ·  核价平台</a:t>
             </a:r>
@@ -8345,6 +8254,7 @@
                 </a:solidFill>
                 <a:latin typeface="Arial"/>
                 <a:ea typeface="微软雅黑"/>
+                <a:latin typeface="Arial"/>
               </a:rPr>
               <a:t>3 / 12</a:t>
             </a:r>
@@ -8360,7 +8270,7 @@
 </file>
 
 <file path=ppt/slides/slide4.xml><?xml version="1.0" encoding="utf-8"?>
-<p:sld xmlns:a="http://schemas.openxmlformats.org/drawingml/2006/main" xmlns:r="http://schemas.openxmlformats.org/officeDocument/2006/relationships" xmlns:p="http://schemas.openxmlformats.org/presentationml/2006/main">
+<p:sld xmlns:a="http://schemas.openxmlformats.org/drawingml/2006/main" xmlns:p="http://schemas.openxmlformats.org/presentationml/2006/main" xmlns:r="http://schemas.openxmlformats.org/officeDocument/2006/relationships">
   <p:cSld>
     <p:spTree>
       <p:nvGrpSpPr>
@@ -8368,14 +8278,7 @@
         <p:cNvGrpSpPr/>
         <p:nvPr/>
       </p:nvGrpSpPr>
-      <p:grpSpPr>
-        <a:xfrm>
-          <a:off x="0" y="0"/>
-          <a:ext cx="0" cy="0"/>
-          <a:chOff x="0" y="0"/>
-          <a:chExt cx="0" cy="0"/>
-        </a:xfrm>
-      </p:grpSpPr>
+      <p:grpSpPr/>
       <p:sp>
         <p:nvSpPr>
           <p:cNvPr id="2" name="Rectangle 1"/>
@@ -8416,7 +8319,6 @@
           <a:lstStyle/>
           <a:p>
             <a:pPr algn="ctr"/>
-            <a:endParaRPr/>
           </a:p>
         </p:txBody>
       </p:sp>
@@ -8460,7 +8362,6 @@
           <a:lstStyle/>
           <a:p>
             <a:pPr algn="ctr"/>
-            <a:endParaRPr/>
           </a:p>
         </p:txBody>
       </p:sp>
@@ -8504,7 +8405,6 @@
           <a:lstStyle/>
           <a:p>
             <a:pPr algn="ctr"/>
-            <a:endParaRPr/>
           </a:p>
         </p:txBody>
       </p:sp>
@@ -8536,6 +8436,7 @@
                 </a:solidFill>
                 <a:latin typeface="Arial"/>
                 <a:ea typeface="微软雅黑"/>
+                <a:latin typeface="Arial"/>
               </a:rPr>
               <a:t>03   SHIFT</a:t>
             </a:r>
@@ -8570,6 +8471,7 @@
                 </a:solidFill>
                 <a:latin typeface="微软雅黑"/>
                 <a:ea typeface="微软雅黑"/>
+                <a:latin typeface="微软雅黑"/>
               </a:rPr>
               <a:t>不是把 Excel 做得更复杂</a:t>
             </a:r>
@@ -8618,7 +8520,6 @@
           <a:lstStyle/>
           <a:p>
             <a:pPr algn="ctr"/>
-            <a:endParaRPr/>
           </a:p>
         </p:txBody>
       </p:sp>
@@ -8662,7 +8563,6 @@
           <a:lstStyle/>
           <a:p>
             <a:pPr algn="ctr"/>
-            <a:endParaRPr/>
           </a:p>
         </p:txBody>
       </p:sp>
@@ -8694,6 +8594,7 @@
                 </a:solidFill>
                 <a:latin typeface="微软雅黑"/>
                 <a:ea typeface="微软雅黑"/>
+                <a:latin typeface="微软雅黑"/>
               </a:rPr>
               <a:t>不是</a:t>
             </a:r>
@@ -8728,6 +8629,7 @@
                 </a:solidFill>
                 <a:latin typeface="微软雅黑"/>
                 <a:ea typeface="微软雅黑"/>
+                <a:latin typeface="微软雅黑"/>
               </a:rPr>
               <a:t>再做一张更大的表</a:t>
             </a:r>
@@ -8766,6 +8668,7 @@
                 </a:solidFill>
                 <a:latin typeface="微软雅黑"/>
                 <a:ea typeface="微软雅黑"/>
+                <a:latin typeface="微软雅黑"/>
               </a:rPr>
               <a:t>公式在私人文件夹。口径靠骨干记忆。对奇瑞、对二级商，各执一份表，只能扯皮。</a:t>
             </a:r>
@@ -8814,7 +8717,6 @@
           <a:lstStyle/>
           <a:p>
             <a:pPr algn="ctr"/>
-            <a:endParaRPr/>
           </a:p>
         </p:txBody>
       </p:sp>
@@ -8858,7 +8760,6 @@
           <a:lstStyle/>
           <a:p>
             <a:pPr algn="ctr"/>
-            <a:endParaRPr/>
           </a:p>
         </p:txBody>
       </p:sp>
@@ -8890,6 +8791,7 @@
                 </a:solidFill>
                 <a:latin typeface="微软雅黑"/>
                 <a:ea typeface="微软雅黑"/>
+                <a:latin typeface="微软雅黑"/>
               </a:rPr>
               <a:t>而是</a:t>
             </a:r>
@@ -8924,6 +8826,7 @@
                 </a:solidFill>
                 <a:latin typeface="微软雅黑"/>
                 <a:ea typeface="微软雅黑"/>
+                <a:latin typeface="微软雅黑"/>
               </a:rPr>
               <a:t>把核价变成公司能力</a:t>
             </a:r>
@@ -8962,6 +8865,7 @@
                 </a:solidFill>
                 <a:latin typeface="微软雅黑"/>
                 <a:ea typeface="微软雅黑"/>
+                <a:latin typeface="微软雅黑"/>
               </a:rPr>
               <a:t>规则、依据、结果留在平台。人可以交接。这是数字化建设真正落地的那一步。</a:t>
             </a:r>
@@ -9031,6 +8935,7 @@
                 </a:solidFill>
                 <a:latin typeface="微软雅黑"/>
                 <a:ea typeface="微软雅黑"/>
+                <a:latin typeface="微软雅黑"/>
               </a:rPr>
               <a:t>普炳软件  ·  核价平台</a:t>
             </a:r>
@@ -9065,6 +8970,7 @@
                 </a:solidFill>
                 <a:latin typeface="Arial"/>
                 <a:ea typeface="微软雅黑"/>
+                <a:latin typeface="Arial"/>
               </a:rPr>
               <a:t>4 / 12</a:t>
             </a:r>
@@ -9080,7 +8986,7 @@
 </file>
 
 <file path=ppt/slides/slide5.xml><?xml version="1.0" encoding="utf-8"?>
-<p:sld xmlns:a="http://schemas.openxmlformats.org/drawingml/2006/main" xmlns:r="http://schemas.openxmlformats.org/officeDocument/2006/relationships" xmlns:p="http://schemas.openxmlformats.org/presentationml/2006/main">
+<p:sld xmlns:a="http://schemas.openxmlformats.org/drawingml/2006/main" xmlns:p="http://schemas.openxmlformats.org/presentationml/2006/main" xmlns:r="http://schemas.openxmlformats.org/officeDocument/2006/relationships">
   <p:cSld>
     <p:spTree>
       <p:nvGrpSpPr>
@@ -9088,14 +8994,7 @@
         <p:cNvGrpSpPr/>
         <p:nvPr/>
       </p:nvGrpSpPr>
-      <p:grpSpPr>
-        <a:xfrm>
-          <a:off x="0" y="0"/>
-          <a:ext cx="0" cy="0"/>
-          <a:chOff x="0" y="0"/>
-          <a:chExt cx="0" cy="0"/>
-        </a:xfrm>
-      </p:grpSpPr>
+      <p:grpSpPr/>
       <p:sp>
         <p:nvSpPr>
           <p:cNvPr id="2" name="Rectangle 1"/>
@@ -9136,7 +9035,6 @@
           <a:lstStyle/>
           <a:p>
             <a:pPr algn="ctr"/>
-            <a:endParaRPr/>
           </a:p>
         </p:txBody>
       </p:sp>
@@ -9180,7 +9078,6 @@
           <a:lstStyle/>
           <a:p>
             <a:pPr algn="ctr"/>
-            <a:endParaRPr/>
           </a:p>
         </p:txBody>
       </p:sp>
@@ -9224,7 +9121,6 @@
           <a:lstStyle/>
           <a:p>
             <a:pPr algn="ctr"/>
-            <a:endParaRPr/>
           </a:p>
         </p:txBody>
       </p:sp>
@@ -9256,6 +9152,7 @@
                 </a:solidFill>
                 <a:latin typeface="Arial"/>
                 <a:ea typeface="微软雅黑"/>
+                <a:latin typeface="Arial"/>
               </a:rPr>
               <a:t>04   TWO BOOKS</a:t>
             </a:r>
@@ -9290,6 +9187,7 @@
                 </a:solidFill>
                 <a:latin typeface="微软雅黑"/>
                 <a:ea typeface="微软雅黑"/>
+                <a:latin typeface="微软雅黑"/>
               </a:rPr>
               <a:t>两本钱要对齐，设变不能再是糊涂账</a:t>
             </a:r>
@@ -9338,7 +9236,6 @@
           <a:lstStyle/>
           <a:p>
             <a:pPr algn="ctr"/>
-            <a:endParaRPr/>
           </a:p>
         </p:txBody>
       </p:sp>
@@ -9382,7 +9279,6 @@
           <a:lstStyle/>
           <a:p>
             <a:pPr algn="ctr"/>
-            <a:endParaRPr/>
           </a:p>
         </p:txBody>
       </p:sp>
@@ -9414,6 +9310,7 @@
                 </a:solidFill>
                 <a:latin typeface="微软雅黑"/>
                 <a:ea typeface="微软雅黑"/>
+                <a:latin typeface="微软雅黑"/>
               </a:rPr>
               <a:t>商务</a:t>
             </a:r>
@@ -9448,6 +9345,7 @@
                 </a:solidFill>
                 <a:latin typeface="微软雅黑"/>
                 <a:ea typeface="微软雅黑"/>
+                <a:latin typeface="微软雅黑"/>
               </a:rPr>
               <a:t>总成价</a:t>
             </a:r>
@@ -9486,6 +9384,7 @@
                 </a:solidFill>
                 <a:latin typeface="微软雅黑"/>
                 <a:ea typeface="微软雅黑"/>
+                <a:latin typeface="微软雅黑"/>
               </a:rPr>
               <a:t>开票给奇瑞的售价。谈价、开票、对账看这一本。</a:t>
             </a:r>
@@ -9534,7 +9433,6 @@
           <a:lstStyle/>
           <a:p>
             <a:pPr algn="ctr"/>
-            <a:endParaRPr/>
           </a:p>
         </p:txBody>
       </p:sp>
@@ -9578,7 +9476,6 @@
           <a:lstStyle/>
           <a:p>
             <a:pPr algn="ctr"/>
-            <a:endParaRPr/>
           </a:p>
         </p:txBody>
       </p:sp>
@@ -9610,6 +9507,7 @@
                 </a:solidFill>
                 <a:latin typeface="微软雅黑"/>
                 <a:ea typeface="微软雅黑"/>
+                <a:latin typeface="微软雅黑"/>
               </a:rPr>
               <a:t>采购</a:t>
             </a:r>
@@ -9644,6 +9542,7 @@
                 </a:solidFill>
                 <a:latin typeface="微软雅黑"/>
                 <a:ea typeface="微软雅黑"/>
+                <a:latin typeface="微软雅黑"/>
               </a:rPr>
               <a:t>采购对象</a:t>
             </a:r>
@@ -9682,6 +9581,7 @@
                 </a:solidFill>
                 <a:latin typeface="微软雅黑"/>
                 <a:ea typeface="微软雅黑"/>
+                <a:latin typeface="微软雅黑"/>
               </a:rPr>
               <a:t>向二级商采购的价。该付多少、协议怎么签看这一本。</a:t>
             </a:r>
@@ -9730,7 +9630,6 @@
           <a:lstStyle/>
           <a:p>
             <a:pPr algn="ctr"/>
-            <a:endParaRPr/>
           </a:p>
         </p:txBody>
       </p:sp>
@@ -9774,7 +9673,6 @@
           <a:lstStyle/>
           <a:p>
             <a:pPr algn="ctr"/>
-            <a:endParaRPr/>
           </a:p>
         </p:txBody>
       </p:sp>
@@ -9806,6 +9704,7 @@
                 </a:solidFill>
                 <a:latin typeface="微软雅黑"/>
                 <a:ea typeface="微软雅黑"/>
+                <a:latin typeface="微软雅黑"/>
               </a:rPr>
               <a:t>工程</a:t>
             </a:r>
@@ -9840,6 +9739,7 @@
                 </a:solidFill>
                 <a:latin typeface="微软雅黑"/>
                 <a:ea typeface="微软雅黑"/>
+                <a:latin typeface="微软雅黑"/>
               </a:rPr>
               <a:t>当期用当期</a:t>
             </a:r>
@@ -9878,6 +9778,7 @@
                 </a:solidFill>
                 <a:latin typeface="微软雅黑"/>
                 <a:ea typeface="微软雅黑"/>
+                <a:latin typeface="微软雅黑"/>
               </a:rPr>
               <a:t>Excel 里设变是糊涂账。变更进系统，开票和应付一起跟上。</a:t>
             </a:r>
@@ -9947,6 +9848,7 @@
                 </a:solidFill>
                 <a:latin typeface="微软雅黑"/>
                 <a:ea typeface="微软雅黑"/>
+                <a:latin typeface="微软雅黑"/>
               </a:rPr>
               <a:t>普炳软件  ·  核价平台</a:t>
             </a:r>
@@ -9981,6 +9883,7 @@
                 </a:solidFill>
                 <a:latin typeface="Arial"/>
                 <a:ea typeface="微软雅黑"/>
+                <a:latin typeface="Arial"/>
               </a:rPr>
               <a:t>5 / 12</a:t>
             </a:r>
@@ -9996,7 +9899,7 @@
 </file>
 
 <file path=ppt/slides/slide6.xml><?xml version="1.0" encoding="utf-8"?>
-<p:sld xmlns:a="http://schemas.openxmlformats.org/drawingml/2006/main" xmlns:r="http://schemas.openxmlformats.org/officeDocument/2006/relationships" xmlns:p="http://schemas.openxmlformats.org/presentationml/2006/main">
+<p:sld xmlns:a="http://schemas.openxmlformats.org/drawingml/2006/main" xmlns:p="http://schemas.openxmlformats.org/presentationml/2006/main" xmlns:r="http://schemas.openxmlformats.org/officeDocument/2006/relationships">
   <p:cSld>
     <p:spTree>
       <p:nvGrpSpPr>
@@ -10004,14 +9907,7 @@
         <p:cNvGrpSpPr/>
         <p:nvPr/>
       </p:nvGrpSpPr>
-      <p:grpSpPr>
-        <a:xfrm>
-          <a:off x="0" y="0"/>
-          <a:ext cx="0" cy="0"/>
-          <a:chOff x="0" y="0"/>
-          <a:chExt cx="0" cy="0"/>
-        </a:xfrm>
-      </p:grpSpPr>
+      <p:grpSpPr/>
       <p:sp>
         <p:nvSpPr>
           <p:cNvPr id="2" name="Rectangle 1"/>
@@ -10052,7 +9948,6 @@
           <a:lstStyle/>
           <a:p>
             <a:pPr algn="ctr"/>
-            <a:endParaRPr/>
           </a:p>
         </p:txBody>
       </p:sp>
@@ -10096,7 +9991,6 @@
           <a:lstStyle/>
           <a:p>
             <a:pPr algn="ctr"/>
-            <a:endParaRPr/>
           </a:p>
         </p:txBody>
       </p:sp>
@@ -10140,7 +10034,6 @@
           <a:lstStyle/>
           <a:p>
             <a:pPr algn="ctr"/>
-            <a:endParaRPr/>
           </a:p>
         </p:txBody>
       </p:sp>
@@ -10172,6 +10065,7 @@
                 </a:solidFill>
                 <a:latin typeface="Arial"/>
                 <a:ea typeface="微软雅黑"/>
+                <a:latin typeface="Arial"/>
               </a:rPr>
               <a:t>05   FIRST VALUE</a:t>
             </a:r>
@@ -10206,6 +10100,7 @@
                 </a:solidFill>
                 <a:latin typeface="微软雅黑"/>
                 <a:ea typeface="微软雅黑"/>
+                <a:latin typeface="微软雅黑"/>
               </a:rPr>
               <a:t>第一价值：降低对人的依赖</a:t>
             </a:r>
@@ -10254,7 +10149,6 @@
           <a:lstStyle/>
           <a:p>
             <a:pPr algn="ctr"/>
-            <a:endParaRPr/>
           </a:p>
         </p:txBody>
       </p:sp>
@@ -10298,7 +10192,6 @@
           <a:lstStyle/>
           <a:p>
             <a:pPr algn="ctr"/>
-            <a:endParaRPr/>
           </a:p>
         </p:txBody>
       </p:sp>
@@ -10330,6 +10223,7 @@
                 </a:solidFill>
                 <a:latin typeface="微软雅黑"/>
                 <a:ea typeface="微软雅黑"/>
+                <a:latin typeface="微软雅黑"/>
               </a:rPr>
               <a:t>以前</a:t>
             </a:r>
@@ -10368,6 +10262,7 @@
                 </a:solidFill>
                 <a:latin typeface="微软雅黑"/>
                 <a:ea typeface="微软雅黑"/>
+                <a:latin typeface="微软雅黑"/>
               </a:rPr>
               <a:t>熟练人员</a:t>
             </a:r>
@@ -10385,6 +10280,7 @@
                 </a:solidFill>
                 <a:latin typeface="微软雅黑"/>
                 <a:ea typeface="微软雅黑"/>
+                <a:latin typeface="微软雅黑"/>
               </a:rPr>
               <a:t>好几天</a:t>
             </a:r>
@@ -10423,6 +10319,7 @@
                 </a:solidFill>
                 <a:latin typeface="微软雅黑"/>
                 <a:ea typeface="微软雅黑"/>
+                <a:latin typeface="微软雅黑"/>
               </a:rPr>
               <a:t>一事一议、总成、采购对象靠骨干手感。</a:t>
             </a:r>
@@ -10440,6 +10337,7 @@
                 </a:solidFill>
                 <a:latin typeface="微软雅黑"/>
                 <a:ea typeface="微软雅黑"/>
+                <a:latin typeface="微软雅黑"/>
               </a:rPr>
               <a:t>人一走，账就停。</a:t>
             </a:r>
@@ -10488,7 +10386,6 @@
           <a:lstStyle/>
           <a:p>
             <a:pPr algn="ctr"/>
-            <a:endParaRPr/>
           </a:p>
         </p:txBody>
       </p:sp>
@@ -10532,7 +10429,6 @@
           <a:lstStyle/>
           <a:p>
             <a:pPr algn="ctr"/>
-            <a:endParaRPr/>
           </a:p>
         </p:txBody>
       </p:sp>
@@ -10564,6 +10460,7 @@
                 </a:solidFill>
                 <a:latin typeface="微软雅黑"/>
                 <a:ea typeface="微软雅黑"/>
+                <a:latin typeface="微软雅黑"/>
               </a:rPr>
               <a:t>现在</a:t>
             </a:r>
@@ -10602,6 +10499,7 @@
                 </a:solidFill>
                 <a:latin typeface="微软雅黑"/>
                 <a:ea typeface="微软雅黑"/>
+                <a:latin typeface="微软雅黑"/>
               </a:rPr>
               <a:t>上传依据</a:t>
             </a:r>
@@ -10619,6 +10517,7 @@
                 </a:solidFill>
                 <a:latin typeface="微软雅黑"/>
                 <a:ea typeface="微软雅黑"/>
+                <a:latin typeface="微软雅黑"/>
               </a:rPr>
               <a:t>约 20 秒</a:t>
             </a:r>
@@ -10657,6 +10556,7 @@
                 </a:solidFill>
                 <a:latin typeface="微软雅黑"/>
                 <a:ea typeface="微软雅黑"/>
+                <a:latin typeface="微软雅黑"/>
               </a:rPr>
               <a:t>规则在引擎里。人请假，总成账和采购账照样能出。</a:t>
             </a:r>
@@ -10674,6 +10574,7 @@
                 </a:solidFill>
                 <a:latin typeface="微软雅黑"/>
                 <a:ea typeface="微软雅黑"/>
+                <a:latin typeface="微软雅黑"/>
               </a:rPr>
               <a:t>能力属于公司。</a:t>
             </a:r>
@@ -10743,6 +10644,7 @@
                 </a:solidFill>
                 <a:latin typeface="微软雅黑"/>
                 <a:ea typeface="微软雅黑"/>
+                <a:latin typeface="微软雅黑"/>
               </a:rPr>
               <a:t>普炳软件  ·  核价平台</a:t>
             </a:r>
@@ -10777,6 +10679,7 @@
                 </a:solidFill>
                 <a:latin typeface="Arial"/>
                 <a:ea typeface="微软雅黑"/>
+                <a:latin typeface="Arial"/>
               </a:rPr>
               <a:t>6 / 12</a:t>
             </a:r>
@@ -10792,7 +10695,7 @@
 </file>
 
 <file path=ppt/slides/slide7.xml><?xml version="1.0" encoding="utf-8"?>
-<p:sld xmlns:a="http://schemas.openxmlformats.org/drawingml/2006/main" xmlns:r="http://schemas.openxmlformats.org/officeDocument/2006/relationships" xmlns:p="http://schemas.openxmlformats.org/presentationml/2006/main">
+<p:sld xmlns:a="http://schemas.openxmlformats.org/drawingml/2006/main" xmlns:p="http://schemas.openxmlformats.org/presentationml/2006/main" xmlns:r="http://schemas.openxmlformats.org/officeDocument/2006/relationships">
   <p:cSld>
     <p:spTree>
       <p:nvGrpSpPr>
@@ -10800,14 +10703,7 @@
         <p:cNvGrpSpPr/>
         <p:nvPr/>
       </p:nvGrpSpPr>
-      <p:grpSpPr>
-        <a:xfrm>
-          <a:off x="0" y="0"/>
-          <a:ext cx="0" cy="0"/>
-          <a:chOff x="0" y="0"/>
-          <a:chExt cx="0" cy="0"/>
-        </a:xfrm>
-      </p:grpSpPr>
+      <p:grpSpPr/>
       <p:sp>
         <p:nvSpPr>
           <p:cNvPr id="2" name="Rectangle 1"/>
@@ -10848,7 +10744,6 @@
           <a:lstStyle/>
           <a:p>
             <a:pPr algn="ctr"/>
-            <a:endParaRPr/>
           </a:p>
         </p:txBody>
       </p:sp>
@@ -10892,7 +10787,6 @@
           <a:lstStyle/>
           <a:p>
             <a:pPr algn="ctr"/>
-            <a:endParaRPr/>
           </a:p>
         </p:txBody>
       </p:sp>
@@ -10936,7 +10830,6 @@
           <a:lstStyle/>
           <a:p>
             <a:pPr algn="ctr"/>
-            <a:endParaRPr/>
           </a:p>
         </p:txBody>
       </p:sp>
@@ -10968,6 +10861,7 @@
                 </a:solidFill>
                 <a:latin typeface="Arial"/>
                 <a:ea typeface="微软雅黑"/>
+                <a:latin typeface="Arial"/>
               </a:rPr>
               <a:t>06   SECOND VALUE</a:t>
             </a:r>
@@ -11002,6 +10896,7 @@
                 </a:solidFill>
                 <a:latin typeface="微软雅黑"/>
                 <a:ea typeface="微软雅黑"/>
+                <a:latin typeface="微软雅黑"/>
               </a:rPr>
               <a:t>第二价值：溯源清楚，不必再扯皮</a:t>
             </a:r>
@@ -11050,7 +10945,6 @@
           <a:lstStyle/>
           <a:p>
             <a:pPr algn="ctr"/>
-            <a:endParaRPr/>
           </a:p>
         </p:txBody>
       </p:sp>
@@ -11094,7 +10988,6 @@
           <a:lstStyle/>
           <a:p>
             <a:pPr algn="ctr"/>
-            <a:endParaRPr/>
           </a:p>
         </p:txBody>
       </p:sp>
@@ -11126,6 +11019,7 @@
                 </a:solidFill>
                 <a:latin typeface="微软雅黑"/>
                 <a:ea typeface="微软雅黑"/>
+                <a:latin typeface="微软雅黑"/>
               </a:rPr>
               <a:t>哪份文件</a:t>
             </a:r>
@@ -11164,6 +11058,7 @@
                 </a:solidFill>
                 <a:latin typeface="微软雅黑"/>
                 <a:ea typeface="微软雅黑"/>
+                <a:latin typeface="微软雅黑"/>
               </a:rPr>
               <a:t>当时用的 Excel 能找回，不是私人拷贝。</a:t>
             </a:r>
@@ -11212,7 +11107,6 @@
           <a:lstStyle/>
           <a:p>
             <a:pPr algn="ctr"/>
-            <a:endParaRPr/>
           </a:p>
         </p:txBody>
       </p:sp>
@@ -11256,7 +11150,6 @@
           <a:lstStyle/>
           <a:p>
             <a:pPr algn="ctr"/>
-            <a:endParaRPr/>
           </a:p>
         </p:txBody>
       </p:sp>
@@ -11288,6 +11181,7 @@
                 </a:solidFill>
                 <a:latin typeface="微软雅黑"/>
                 <a:ea typeface="微软雅黑"/>
+                <a:latin typeface="微软雅黑"/>
               </a:rPr>
               <a:t>谁操作的</a:t>
             </a:r>
@@ -11326,6 +11220,7 @@
                 </a:solidFill>
                 <a:latin typeface="微软雅黑"/>
                 <a:ea typeface="微软雅黑"/>
+                <a:latin typeface="微软雅黑"/>
               </a:rPr>
               <a:t>上传、计算、变更有日志。对账问记录。</a:t>
             </a:r>
@@ -11374,7 +11269,6 @@
           <a:lstStyle/>
           <a:p>
             <a:pPr algn="ctr"/>
-            <a:endParaRPr/>
           </a:p>
         </p:txBody>
       </p:sp>
@@ -11418,7 +11312,6 @@
           <a:lstStyle/>
           <a:p>
             <a:pPr algn="ctr"/>
-            <a:endParaRPr/>
           </a:p>
         </p:txBody>
       </p:sp>
@@ -11450,6 +11343,7 @@
                 </a:solidFill>
                 <a:latin typeface="微软雅黑"/>
                 <a:ea typeface="微软雅黑"/>
+                <a:latin typeface="微软雅黑"/>
               </a:rPr>
               <a:t>当期哪版</a:t>
             </a:r>
@@ -11488,6 +11382,7 @@
                 </a:solidFill>
                 <a:latin typeface="微软雅黑"/>
                 <a:ea typeface="微软雅黑"/>
+                <a:latin typeface="微软雅黑"/>
               </a:rPr>
               <a:t>钢价、BOM、工艺、设变按月对齐。</a:t>
             </a:r>
@@ -11536,7 +11431,6 @@
           <a:lstStyle/>
           <a:p>
             <a:pPr algn="ctr"/>
-            <a:endParaRPr/>
           </a:p>
         </p:txBody>
       </p:sp>
@@ -11580,7 +11474,6 @@
           <a:lstStyle/>
           <a:p>
             <a:pPr algn="ctr"/>
-            <a:endParaRPr/>
           </a:p>
         </p:txBody>
       </p:sp>
@@ -11612,6 +11505,7 @@
                 </a:solidFill>
                 <a:latin typeface="微软雅黑"/>
                 <a:ea typeface="微软雅黑"/>
+                <a:latin typeface="微软雅黑"/>
               </a:rPr>
               <a:t>同一套规则</a:t>
             </a:r>
@@ -11650,6 +11544,7 @@
                 </a:solidFill>
                 <a:latin typeface="微软雅黑"/>
                 <a:ea typeface="微软雅黑"/>
+                <a:latin typeface="微软雅黑"/>
               </a:rPr>
               <a:t>开给奇瑞和付给二级商，同一引擎。</a:t>
             </a:r>
@@ -11719,6 +11614,7 @@
                 </a:solidFill>
                 <a:latin typeface="微软雅黑"/>
                 <a:ea typeface="微软雅黑"/>
+                <a:latin typeface="微软雅黑"/>
               </a:rPr>
               <a:t>普炳软件  ·  核价平台</a:t>
             </a:r>
@@ -11753,6 +11649,7 @@
                 </a:solidFill>
                 <a:latin typeface="Arial"/>
                 <a:ea typeface="微软雅黑"/>
+                <a:latin typeface="Arial"/>
               </a:rPr>
               <a:t>7 / 12</a:t>
             </a:r>
@@ -11768,7 +11665,7 @@
 </file>
 
 <file path=ppt/slides/slide8.xml><?xml version="1.0" encoding="utf-8"?>
-<p:sld xmlns:a="http://schemas.openxmlformats.org/drawingml/2006/main" xmlns:r="http://schemas.openxmlformats.org/officeDocument/2006/relationships" xmlns:p="http://schemas.openxmlformats.org/presentationml/2006/main">
+<p:sld xmlns:a="http://schemas.openxmlformats.org/drawingml/2006/main" xmlns:p="http://schemas.openxmlformats.org/presentationml/2006/main" xmlns:r="http://schemas.openxmlformats.org/officeDocument/2006/relationships">
   <p:cSld>
     <p:spTree>
       <p:nvGrpSpPr>
@@ -11776,14 +11673,7 @@
         <p:cNvGrpSpPr/>
         <p:nvPr/>
       </p:nvGrpSpPr>
-      <p:grpSpPr>
-        <a:xfrm>
-          <a:off x="0" y="0"/>
-          <a:ext cx="0" cy="0"/>
-          <a:chOff x="0" y="0"/>
-          <a:chExt cx="0" cy="0"/>
-        </a:xfrm>
-      </p:grpSpPr>
+      <p:grpSpPr/>
       <p:sp>
         <p:nvSpPr>
           <p:cNvPr id="2" name="Rectangle 1"/>
@@ -11824,7 +11714,6 @@
           <a:lstStyle/>
           <a:p>
             <a:pPr algn="ctr"/>
-            <a:endParaRPr/>
           </a:p>
         </p:txBody>
       </p:sp>
@@ -11868,7 +11757,6 @@
           <a:lstStyle/>
           <a:p>
             <a:pPr algn="ctr"/>
-            <a:endParaRPr/>
           </a:p>
         </p:txBody>
       </p:sp>
@@ -11912,7 +11800,6 @@
           <a:lstStyle/>
           <a:p>
             <a:pPr algn="ctr"/>
-            <a:endParaRPr/>
           </a:p>
         </p:txBody>
       </p:sp>
@@ -11944,6 +11831,7 @@
                 </a:solidFill>
                 <a:latin typeface="Arial"/>
                 <a:ea typeface="微软雅黑"/>
+                <a:latin typeface="Arial"/>
               </a:rPr>
               <a:t>07   VALUE</a:t>
             </a:r>
@@ -11978,6 +11866,7 @@
                 </a:solidFill>
                 <a:latin typeface="微软雅黑"/>
                 <a:ea typeface="微软雅黑"/>
+                <a:latin typeface="微软雅黑"/>
               </a:rPr>
               <a:t>四项价值，进的是公司而不是个人</a:t>
             </a:r>
@@ -12026,7 +11915,6 @@
           <a:lstStyle/>
           <a:p>
             <a:pPr algn="ctr"/>
-            <a:endParaRPr/>
           </a:p>
         </p:txBody>
       </p:sp>
@@ -12070,7 +11958,6 @@
           <a:lstStyle/>
           <a:p>
             <a:pPr algn="ctr"/>
-            <a:endParaRPr/>
           </a:p>
         </p:txBody>
       </p:sp>
@@ -12102,6 +11989,7 @@
                 </a:solidFill>
                 <a:latin typeface="Arial"/>
                 <a:ea typeface="微软雅黑"/>
+                <a:latin typeface="Arial"/>
               </a:rPr>
               <a:t>01</a:t>
             </a:r>
@@ -12136,6 +12024,7 @@
                 </a:solidFill>
                 <a:latin typeface="微软雅黑"/>
                 <a:ea typeface="微软雅黑"/>
+                <a:latin typeface="微软雅黑"/>
               </a:rPr>
               <a:t>少绑人</a:t>
             </a:r>
@@ -12174,6 +12063,7 @@
                 </a:solidFill>
                 <a:latin typeface="微软雅黑"/>
                 <a:ea typeface="微软雅黑"/>
+                <a:latin typeface="微软雅黑"/>
               </a:rPr>
               <a:t>核价能力属于公司。熟练骨干好几天，变成约 20 秒。</a:t>
             </a:r>
@@ -12222,7 +12112,6 @@
           <a:lstStyle/>
           <a:p>
             <a:pPr algn="ctr"/>
-            <a:endParaRPr/>
           </a:p>
         </p:txBody>
       </p:sp>
@@ -12266,7 +12155,6 @@
           <a:lstStyle/>
           <a:p>
             <a:pPr algn="ctr"/>
-            <a:endParaRPr/>
           </a:p>
         </p:txBody>
       </p:sp>
@@ -12298,6 +12186,7 @@
                 </a:solidFill>
                 <a:latin typeface="Arial"/>
                 <a:ea typeface="微软雅黑"/>
+                <a:latin typeface="Arial"/>
               </a:rPr>
               <a:t>02</a:t>
             </a:r>
@@ -12332,6 +12221,7 @@
                 </a:solidFill>
                 <a:latin typeface="微软雅黑"/>
                 <a:ea typeface="微软雅黑"/>
+                <a:latin typeface="微软雅黑"/>
               </a:rPr>
               <a:t>少扯皮</a:t>
             </a:r>
@@ -12370,6 +12260,7 @@
                 </a:solidFill>
                 <a:latin typeface="微软雅黑"/>
                 <a:ea typeface="微软雅黑"/>
+                <a:latin typeface="微软雅黑"/>
               </a:rPr>
               <a:t>文件、操作、当期依据可对。对奇瑞、对二级商、对财务同一本账。</a:t>
             </a:r>
@@ -12418,7 +12309,6 @@
           <a:lstStyle/>
           <a:p>
             <a:pPr algn="ctr"/>
-            <a:endParaRPr/>
           </a:p>
         </p:txBody>
       </p:sp>
@@ -12462,7 +12352,6 @@
           <a:lstStyle/>
           <a:p>
             <a:pPr algn="ctr"/>
-            <a:endParaRPr/>
           </a:p>
         </p:txBody>
       </p:sp>
@@ -12494,6 +12383,7 @@
                 </a:solidFill>
                 <a:latin typeface="Arial"/>
                 <a:ea typeface="微软雅黑"/>
+                <a:latin typeface="Arial"/>
               </a:rPr>
               <a:t>03</a:t>
             </a:r>
@@ -12528,6 +12418,7 @@
                 </a:solidFill>
                 <a:latin typeface="微软雅黑"/>
                 <a:ea typeface="微软雅黑"/>
+                <a:latin typeface="微软雅黑"/>
               </a:rPr>
               <a:t>算得一致</a:t>
             </a:r>
@@ -12566,6 +12457,7 @@
                 </a:solidFill>
                 <a:latin typeface="微软雅黑"/>
                 <a:ea typeface="微软雅黑"/>
+                <a:latin typeface="微软雅黑"/>
               </a:rPr>
               <a:t>同一套规则、同一套口径。</a:t>
             </a:r>
@@ -12583,6 +12475,7 @@
                 </a:solidFill>
                 <a:latin typeface="微软雅黑"/>
                 <a:ea typeface="微软雅黑"/>
+                <a:latin typeface="微软雅黑"/>
               </a:rPr>
               <a:t>总成售价和采购应付不再各算各的。</a:t>
             </a:r>
@@ -12631,7 +12524,6 @@
           <a:lstStyle/>
           <a:p>
             <a:pPr algn="ctr"/>
-            <a:endParaRPr/>
           </a:p>
         </p:txBody>
       </p:sp>
@@ -12675,7 +12567,6 @@
           <a:lstStyle/>
           <a:p>
             <a:pPr algn="ctr"/>
-            <a:endParaRPr/>
           </a:p>
         </p:txBody>
       </p:sp>
@@ -12707,6 +12598,7 @@
                 </a:solidFill>
                 <a:latin typeface="Arial"/>
                 <a:ea typeface="微软雅黑"/>
+                <a:latin typeface="Arial"/>
               </a:rPr>
               <a:t>04</a:t>
             </a:r>
@@ -12741,6 +12633,7 @@
                 </a:solidFill>
                 <a:latin typeface="微软雅黑"/>
                 <a:ea typeface="微软雅黑"/>
+                <a:latin typeface="微软雅黑"/>
               </a:rPr>
               <a:t>每月跟得上</a:t>
             </a:r>
@@ -12779,6 +12672,7 @@
                 </a:solidFill>
                 <a:latin typeface="微软雅黑"/>
                 <a:ea typeface="微软雅黑"/>
+                <a:latin typeface="微软雅黑"/>
               </a:rPr>
               <a:t>钢价、BOM、工艺、工程变更进入系统。</a:t>
             </a:r>
@@ -12796,6 +12690,7 @@
                 </a:solidFill>
                 <a:latin typeface="微软雅黑"/>
                 <a:ea typeface="微软雅黑"/>
+                <a:latin typeface="微软雅黑"/>
               </a:rPr>
               <a:t>当月依据，当月计算。</a:t>
             </a:r>
@@ -12865,6 +12760,7 @@
                 </a:solidFill>
                 <a:latin typeface="微软雅黑"/>
                 <a:ea typeface="微软雅黑"/>
+                <a:latin typeface="微软雅黑"/>
               </a:rPr>
               <a:t>普炳软件  ·  核价平台</a:t>
             </a:r>
@@ -12899,6 +12795,7 @@
                 </a:solidFill>
                 <a:latin typeface="Arial"/>
                 <a:ea typeface="微软雅黑"/>
+                <a:latin typeface="Arial"/>
               </a:rPr>
               <a:t>8 / 12</a:t>
             </a:r>
@@ -12914,7 +12811,7 @@
 </file>
 
 <file path=ppt/slides/slide9.xml><?xml version="1.0" encoding="utf-8"?>
-<p:sld xmlns:a="http://schemas.openxmlformats.org/drawingml/2006/main" xmlns:r="http://schemas.openxmlformats.org/officeDocument/2006/relationships" xmlns:p="http://schemas.openxmlformats.org/presentationml/2006/main">
+<p:sld xmlns:a="http://schemas.openxmlformats.org/drawingml/2006/main" xmlns:p="http://schemas.openxmlformats.org/presentationml/2006/main" xmlns:r="http://schemas.openxmlformats.org/officeDocument/2006/relationships">
   <p:cSld>
     <p:spTree>
       <p:nvGrpSpPr>
@@ -12922,14 +12819,7 @@
         <p:cNvGrpSpPr/>
         <p:nvPr/>
       </p:nvGrpSpPr>
-      <p:grpSpPr>
-        <a:xfrm>
-          <a:off x="0" y="0"/>
-          <a:ext cx="0" cy="0"/>
-          <a:chOff x="0" y="0"/>
-          <a:chExt cx="0" cy="0"/>
-        </a:xfrm>
-      </p:grpSpPr>
+      <p:grpSpPr/>
       <p:sp>
         <p:nvSpPr>
           <p:cNvPr id="2" name="Rectangle 1"/>
@@ -12970,7 +12860,6 @@
           <a:lstStyle/>
           <a:p>
             <a:pPr algn="ctr"/>
-            <a:endParaRPr/>
           </a:p>
         </p:txBody>
       </p:sp>
@@ -13014,7 +12903,6 @@
           <a:lstStyle/>
           <a:p>
             <a:pPr algn="ctr"/>
-            <a:endParaRPr/>
           </a:p>
         </p:txBody>
       </p:sp>
@@ -13058,7 +12946,6 @@
           <a:lstStyle/>
           <a:p>
             <a:pPr algn="ctr"/>
-            <a:endParaRPr/>
           </a:p>
         </p:txBody>
       </p:sp>
@@ -13090,6 +12977,7 @@
                 </a:solidFill>
                 <a:latin typeface="Arial"/>
                 <a:ea typeface="微软雅黑"/>
+                <a:latin typeface="Arial"/>
               </a:rPr>
               <a:t>08   AI</a:t>
             </a:r>
@@ -13124,6 +13012,7 @@
                 </a:solidFill>
                 <a:latin typeface="微软雅黑"/>
                 <a:ea typeface="微软雅黑"/>
+                <a:latin typeface="微软雅黑"/>
               </a:rPr>
               <a:t>引擎把账算准，AI 把账讲明白</a:t>
             </a:r>
@@ -13158,6 +13047,7 @@
                 </a:solidFill>
                 <a:latin typeface="微软雅黑"/>
                 <a:ea typeface="微软雅黑"/>
+                <a:latin typeface="微软雅黑"/>
               </a:rPr>
               <a:t>这才是 AI 落地：不是让模型编价格，是让管理人员直接问公司的账。</a:t>
             </a:r>
@@ -13206,7 +13096,6 @@
           <a:lstStyle/>
           <a:p>
             <a:pPr algn="ctr"/>
-            <a:endParaRPr/>
           </a:p>
         </p:txBody>
       </p:sp>
@@ -13250,7 +13139,6 @@
           <a:lstStyle/>
           <a:p>
             <a:pPr algn="ctr"/>
-            <a:endParaRPr/>
           </a:p>
         </p:txBody>
       </p:sp>
@@ -13282,6 +13170,7 @@
                 </a:solidFill>
                 <a:latin typeface="Arial"/>
                 <a:ea typeface="微软雅黑"/>
+                <a:latin typeface="Arial"/>
               </a:rPr>
               <a:t>Q1</a:t>
             </a:r>
@@ -13316,6 +13205,7 @@
                 </a:solidFill>
                 <a:latin typeface="微软雅黑"/>
                 <a:ea typeface="微软雅黑"/>
+                <a:latin typeface="微软雅黑"/>
               </a:rPr>
               <a:t>这个月总成开给奇瑞的价，为什么涨了？</a:t>
             </a:r>
@@ -13364,7 +13254,6 @@
           <a:lstStyle/>
           <a:p>
             <a:pPr algn="ctr"/>
-            <a:endParaRPr/>
           </a:p>
         </p:txBody>
       </p:sp>
@@ -13408,7 +13297,6 @@
           <a:lstStyle/>
           <a:p>
             <a:pPr algn="ctr"/>
-            <a:endParaRPr/>
           </a:p>
         </p:txBody>
       </p:sp>
@@ -13440,6 +13328,7 @@
                 </a:solidFill>
                 <a:latin typeface="Arial"/>
                 <a:ea typeface="微软雅黑"/>
+                <a:latin typeface="Arial"/>
               </a:rPr>
               <a:t>Q2</a:t>
             </a:r>
@@ -13474,6 +13363,7 @@
                 </a:solidFill>
                 <a:latin typeface="微软雅黑"/>
                 <a:ea typeface="微软雅黑"/>
+                <a:latin typeface="微软雅黑"/>
               </a:rPr>
               <a:t>向二级商采购的对象，哪些涨幅最大？</a:t>
             </a:r>
@@ -13522,7 +13412,6 @@
           <a:lstStyle/>
           <a:p>
             <a:pPr algn="ctr"/>
-            <a:endParaRPr/>
           </a:p>
         </p:txBody>
       </p:sp>
@@ -13566,7 +13455,6 @@
           <a:lstStyle/>
           <a:p>
             <a:pPr algn="ctr"/>
-            <a:endParaRPr/>
           </a:p>
         </p:txBody>
       </p:sp>
@@ -13598,6 +13486,7 @@
                 </a:solidFill>
                 <a:latin typeface="Arial"/>
                 <a:ea typeface="微软雅黑"/>
+                <a:latin typeface="Arial"/>
               </a:rPr>
               <a:t>Q3</a:t>
             </a:r>
@@ -13632,6 +13521,7 @@
                 </a:solidFill>
                 <a:latin typeface="微软雅黑"/>
                 <a:ea typeface="微软雅黑"/>
+                <a:latin typeface="微软雅黑"/>
               </a:rPr>
               <a:t>工程变更之后，开票价和采购价各动了多少？</a:t>
             </a:r>
@@ -13680,7 +13570,6 @@
           <a:lstStyle/>
           <a:p>
             <a:pPr algn="ctr"/>
-            <a:endParaRPr/>
           </a:p>
         </p:txBody>
       </p:sp>
@@ -13724,7 +13613,6 @@
           <a:lstStyle/>
           <a:p>
             <a:pPr algn="ctr"/>
-            <a:endParaRPr/>
           </a:p>
         </p:txBody>
       </p:sp>
@@ -13756,6 +13644,7 @@
                 </a:solidFill>
                 <a:latin typeface="Arial"/>
                 <a:ea typeface="微软雅黑"/>
+                <a:latin typeface="Arial"/>
               </a:rPr>
               <a:t>Q4</a:t>
             </a:r>
@@ -13790,6 +13679,7 @@
                 </a:solidFill>
                 <a:latin typeface="微软雅黑"/>
                 <a:ea typeface="微软雅黑"/>
+                <a:latin typeface="微软雅黑"/>
               </a:rPr>
               <a:t>这个总成和上个月差在哪里？</a:t>
             </a:r>
@@ -13838,7 +13728,6 @@
           <a:lstStyle/>
           <a:p>
             <a:pPr algn="ctr"/>
-            <a:endParaRPr/>
           </a:p>
         </p:txBody>
       </p:sp>
@@ -13882,7 +13771,6 @@
           <a:lstStyle/>
           <a:p>
             <a:pPr algn="ctr"/>
-            <a:endParaRPr/>
           </a:p>
         </p:txBody>
       </p:sp>
@@ -13914,6 +13802,7 @@
                 </a:solidFill>
                 <a:latin typeface="Arial"/>
                 <a:ea typeface="微软雅黑"/>
+                <a:latin typeface="Arial"/>
               </a:rPr>
               <a:t>Q5</a:t>
             </a:r>
@@ -13948,6 +13837,7 @@
                 </a:solidFill>
                 <a:latin typeface="微软雅黑"/>
                 <a:ea typeface="微软雅黑"/>
+                <a:latin typeface="微软雅黑"/>
               </a:rPr>
               <a:t>把本月成本变化整理一下。</a:t>
             </a:r>
@@ -14017,6 +13907,7 @@
                 </a:solidFill>
                 <a:latin typeface="微软雅黑"/>
                 <a:ea typeface="微软雅黑"/>
+                <a:latin typeface="微软雅黑"/>
               </a:rPr>
               <a:t>普炳软件  ·  核价平台</a:t>
             </a:r>
@@ -14051,6 +13942,7 @@
                 </a:solidFill>
                 <a:latin typeface="Arial"/>
                 <a:ea typeface="微软雅黑"/>
+                <a:latin typeface="Arial"/>
               </a:rPr>
               <a:t>9 / 12</a:t>
             </a:r>
